--- a/slides/pptx/第02回_今のChatGPTの使い方を作り直す.pptx
+++ b/slides/pptx/第02回_今のChatGPTの使い方を作り直す.pptx
@@ -12,9 +12,14 @@
     <p:sldId id="260" r:id="rId6"/>
     <p:sldId id="261" r:id="rId7"/>
     <p:sldId id="262" r:id="rId8"/>
+    <p:sldId id="263" r:id="rId9"/>
+    <p:sldId id="264" r:id="rId10"/>
+    <p:sldId id="265" r:id="rId11"/>
+    <p:sldId id="266" r:id="rId12"/>
+    <p:sldId id="267" r:id="rId13"/>
   </p:sldIdLst>
   <p:notesMasterIdLst>
-    <p:notesMasterId r:id="rId9"/>
+    <p:notesMasterId r:id="rId14"/>
   </p:notesMasterIdLst>
   <p:sldSz cx="12192000" cy="6858000"/>
   <p:notesSz cx="6858000" cy="12192000"/>
@@ -508,8 +513,7 @@
           <a:p>
             <a:r>
               <a:rPr lang="en-US" dirty="0"/>
-              <a:t>今日は新しいことを覚える回ではなく、いまの使い方を作り直す回です。
-【ゴール】同じ説明を毎回打たなくて済む状態にします。うまくいった結果が、次回も使える形で残ります。</a:t>
+              <a:t>前回の宿題（指示文をもう一度使ったか）を確認してから表紙に入る。使っていなければ責めず、この場で一緒にやる。使っていた場合は、そのときの手応えを必ず聞く。ここが今日の導入になる。</a:t>
             </a:r>
             <a:endParaRPr lang="en-US" dirty="0"/>
           </a:p>
@@ -533,6 +537,270 @@
             <a:fld id="{F7021451-1387-4CA6-816F-3879F97B5CBC}" type="slidenum">
               <a:rPr lang="en-US"/>
               <a:t>1</a:t>
+            </a:fld>
+            <a:endParaRPr lang="en-US"/>
+          </a:p>
+        </p:txBody>
+      </p:sp>
+    </p:spTree>
+    <p:extLst>
+      <p:ext uri="{BB962C8B-B14F-4D97-AF65-F5344CB8AC3E}">
+        <p14:creationId xmlns:p14="http://schemas.microsoft.com/office/powerpoint/2010/main" val="1024086991"/>
+      </p:ext>
+    </p:extLst>
+  </p:cSld>
+  <p:clrMapOvr>
+    <a:masterClrMapping/>
+  </p:clrMapOvr>
+</p:notes>
+</file>
+
+<file path=ppt/notesSlides/notesSlide10.xml><?xml version="1.0" encoding="utf-8"?>
+<p:notes xmlns:a="http://schemas.openxmlformats.org/drawingml/2006/main" xmlns:r="http://schemas.openxmlformats.org/officeDocument/2006/relationships" xmlns:p="http://schemas.openxmlformats.org/presentationml/2006/main">
+  <p:cSld>
+    <p:spTree>
+      <p:nvGrpSpPr>
+        <p:cNvPr id="1" name=""/>
+        <p:cNvGrpSpPr/>
+        <p:nvPr/>
+      </p:nvGrpSpPr>
+      <p:grpSpPr>
+        <a:xfrm>
+          <a:off x="0" y="0"/>
+          <a:ext cx="0" cy="0"/>
+          <a:chOff x="0" y="0"/>
+          <a:chExt cx="0" cy="0"/>
+        </a:xfrm>
+      </p:grpSpPr>
+      <p:sp>
+        <p:nvSpPr>
+          <p:cNvPr id="2" name="Slide Image Placeholder 1"/>
+          <p:cNvSpPr>
+            <a:spLocks noGrp="1" noRot="1" noChangeAspect="1"/>
+          </p:cNvSpPr>
+          <p:nvPr>
+            <p:ph type="sldImg"/>
+          </p:nvPr>
+        </p:nvSpPr>
+        <p:spPr/>
+      </p:sp>
+      <p:sp>
+        <p:nvSpPr>
+          <p:cNvPr id="3" name="Notes Placeholder 2"/>
+          <p:cNvSpPr>
+            <a:spLocks noGrp="1"/>
+          </p:cNvSpPr>
+          <p:nvPr>
+            <p:ph type="body" idx="1"/>
+          </p:nvPr>
+        </p:nvSpPr>
+        <p:spPr/>
+        <p:txBody>
+          <a:bodyPr/>
+          <a:lstStyle/>
+          <a:p>
+            <a:r>
+              <a:rPr lang="en-US" dirty="0"/>
+              <a:t>保存場所は必ず開いて見せてもらう。「デスクトップのどこか」では次回見つからない。フォルダ名まで決める。</a:t>
+            </a:r>
+            <a:endParaRPr lang="en-US" dirty="0"/>
+          </a:p>
+        </p:txBody>
+      </p:sp>
+      <p:sp>
+        <p:nvSpPr>
+          <p:cNvPr id="4" name="Slide Number Placeholder 3"/>
+          <p:cNvSpPr>
+            <a:spLocks noGrp="1"/>
+          </p:cNvSpPr>
+          <p:nvPr>
+            <p:ph type="sldNum" sz="quarter" idx="10"/>
+          </p:nvPr>
+        </p:nvSpPr>
+        <p:spPr/>
+        <p:txBody>
+          <a:bodyPr/>
+          <a:lstStyle/>
+          <a:p>
+            <a:fld id="{F7021451-1387-4CA6-816F-3879F97B5CBC}" type="slidenum">
+              <a:rPr lang="en-US"/>
+              <a:t>10</a:t>
+            </a:fld>
+            <a:endParaRPr lang="en-US"/>
+          </a:p>
+        </p:txBody>
+      </p:sp>
+    </p:spTree>
+    <p:extLst>
+      <p:ext uri="{BB962C8B-B14F-4D97-AF65-F5344CB8AC3E}">
+        <p14:creationId xmlns:p14="http://schemas.microsoft.com/office/powerpoint/2010/main" val="1024086991"/>
+      </p:ext>
+    </p:extLst>
+  </p:cSld>
+  <p:clrMapOvr>
+    <a:masterClrMapping/>
+  </p:clrMapOvr>
+</p:notes>
+</file>
+
+<file path=ppt/notesSlides/notesSlide11.xml><?xml version="1.0" encoding="utf-8"?>
+<p:notes xmlns:a="http://schemas.openxmlformats.org/drawingml/2006/main" xmlns:r="http://schemas.openxmlformats.org/officeDocument/2006/relationships" xmlns:p="http://schemas.openxmlformats.org/presentationml/2006/main">
+  <p:cSld>
+    <p:spTree>
+      <p:nvGrpSpPr>
+        <p:cNvPr id="1" name=""/>
+        <p:cNvGrpSpPr/>
+        <p:nvPr/>
+      </p:nvGrpSpPr>
+      <p:grpSpPr>
+        <a:xfrm>
+          <a:off x="0" y="0"/>
+          <a:ext cx="0" cy="0"/>
+          <a:chOff x="0" y="0"/>
+          <a:chExt cx="0" cy="0"/>
+        </a:xfrm>
+      </p:grpSpPr>
+      <p:sp>
+        <p:nvSpPr>
+          <p:cNvPr id="2" name="Slide Image Placeholder 1"/>
+          <p:cNvSpPr>
+            <a:spLocks noGrp="1" noRot="1" noChangeAspect="1"/>
+          </p:cNvSpPr>
+          <p:nvPr>
+            <p:ph type="sldImg"/>
+          </p:nvPr>
+        </p:nvSpPr>
+        <p:spPr/>
+      </p:sp>
+      <p:sp>
+        <p:nvSpPr>
+          <p:cNvPr id="3" name="Notes Placeholder 2"/>
+          <p:cNvSpPr>
+            <a:spLocks noGrp="1"/>
+          </p:cNvSpPr>
+          <p:nvPr>
+            <p:ph type="body" idx="1"/>
+          </p:nvPr>
+        </p:nvSpPr>
+        <p:spPr/>
+        <p:txBody>
+          <a:bodyPr/>
+          <a:lstStyle/>
+          <a:p>
+            <a:r>
+              <a:rPr lang="en-US" dirty="0"/>
+              <a:t>事例の3行は、実際に紙に書いて渡すくらいでよい。受講者のカスタム指示がそれに近い形になっていれば、この回は成功。</a:t>
+            </a:r>
+            <a:endParaRPr lang="en-US" dirty="0"/>
+          </a:p>
+        </p:txBody>
+      </p:sp>
+      <p:sp>
+        <p:nvSpPr>
+          <p:cNvPr id="4" name="Slide Number Placeholder 3"/>
+          <p:cNvSpPr>
+            <a:spLocks noGrp="1"/>
+          </p:cNvSpPr>
+          <p:nvPr>
+            <p:ph type="sldNum" sz="quarter" idx="10"/>
+          </p:nvPr>
+        </p:nvSpPr>
+        <p:spPr/>
+        <p:txBody>
+          <a:bodyPr/>
+          <a:lstStyle/>
+          <a:p>
+            <a:fld id="{F7021451-1387-4CA6-816F-3879F97B5CBC}" type="slidenum">
+              <a:rPr lang="en-US"/>
+              <a:t>11</a:t>
+            </a:fld>
+            <a:endParaRPr lang="en-US"/>
+          </a:p>
+        </p:txBody>
+      </p:sp>
+    </p:spTree>
+    <p:extLst>
+      <p:ext uri="{BB962C8B-B14F-4D97-AF65-F5344CB8AC3E}">
+        <p14:creationId xmlns:p14="http://schemas.microsoft.com/office/powerpoint/2010/main" val="1024086991"/>
+      </p:ext>
+    </p:extLst>
+  </p:cSld>
+  <p:clrMapOvr>
+    <a:masterClrMapping/>
+  </p:clrMapOvr>
+</p:notes>
+</file>
+
+<file path=ppt/notesSlides/notesSlide12.xml><?xml version="1.0" encoding="utf-8"?>
+<p:notes xmlns:a="http://schemas.openxmlformats.org/drawingml/2006/main" xmlns:r="http://schemas.openxmlformats.org/officeDocument/2006/relationships" xmlns:p="http://schemas.openxmlformats.org/presentationml/2006/main">
+  <p:cSld>
+    <p:spTree>
+      <p:nvGrpSpPr>
+        <p:cNvPr id="1" name=""/>
+        <p:cNvGrpSpPr/>
+        <p:nvPr/>
+      </p:nvGrpSpPr>
+      <p:grpSpPr>
+        <a:xfrm>
+          <a:off x="0" y="0"/>
+          <a:ext cx="0" cy="0"/>
+          <a:chOff x="0" y="0"/>
+          <a:chExt cx="0" cy="0"/>
+        </a:xfrm>
+      </p:grpSpPr>
+      <p:sp>
+        <p:nvSpPr>
+          <p:cNvPr id="2" name="Slide Image Placeholder 1"/>
+          <p:cNvSpPr>
+            <a:spLocks noGrp="1" noRot="1" noChangeAspect="1"/>
+          </p:cNvSpPr>
+          <p:nvPr>
+            <p:ph type="sldImg"/>
+          </p:nvPr>
+        </p:nvSpPr>
+        <p:spPr/>
+      </p:sp>
+      <p:sp>
+        <p:nvSpPr>
+          <p:cNvPr id="3" name="Notes Placeholder 2"/>
+          <p:cNvSpPr>
+            <a:spLocks noGrp="1"/>
+          </p:cNvSpPr>
+          <p:nvPr>
+            <p:ph type="body" idx="1"/>
+          </p:nvPr>
+        </p:nvSpPr>
+        <p:spPr/>
+        <p:txBody>
+          <a:bodyPr/>
+          <a:lstStyle/>
+          <a:p>
+            <a:r>
+              <a:rPr lang="en-US" dirty="0"/>
+              <a:t>「新しい会話を開かない」は制約に聞こえるが、実際にやると楽になることを伝える。1週間後に効果を聞くと、ほぼ全員が「探す時間が減った」と答える。</a:t>
+            </a:r>
+            <a:endParaRPr lang="en-US" dirty="0"/>
+          </a:p>
+        </p:txBody>
+      </p:sp>
+      <p:sp>
+        <p:nvSpPr>
+          <p:cNvPr id="4" name="Slide Number Placeholder 3"/>
+          <p:cNvSpPr>
+            <a:spLocks noGrp="1"/>
+          </p:cNvSpPr>
+          <p:nvPr>
+            <p:ph type="sldNum" sz="quarter" idx="10"/>
+          </p:nvPr>
+        </p:nvSpPr>
+        <p:spPr/>
+        <p:txBody>
+          <a:bodyPr/>
+          <a:lstStyle/>
+          <a:p>
+            <a:fld id="{F7021451-1387-4CA6-816F-3879F97B5CBC}" type="slidenum">
+              <a:rPr lang="en-US"/>
+              <a:t>12</a:t>
             </a:fld>
             <a:endParaRPr lang="en-US"/>
           </a:p>
@@ -597,7 +865,7 @@
           <a:p>
             <a:r>
               <a:rPr lang="en-US" dirty="0"/>
-              <a:t>ここは30秒で。今日の到達点だけ言って、すぐ本題へ。</a:t>
+              <a:t>3行とも、受講者本人に心当たりがある話。読み上げるより「思い当たりませんか」と聞いたほうが早い。2行目でうなずいたら、そこから本題に入ってよい。</a:t>
             </a:r>
             <a:endParaRPr lang="en-US" dirty="0"/>
           </a:p>
@@ -685,7 +953,7 @@
           <a:p>
             <a:r>
               <a:rPr lang="en-US" dirty="0"/>
-              <a:t>先に結論を言わず、受講者の実物を題材にしてこの型に当てはめて見せる。</a:t>
+              <a:t>「新しいことを覚える回ではない」と最初に言う。すでに使えている人ほど、入門扱いされると身構える。作り直す、という言い方を通す。</a:t>
             </a:r>
             <a:endParaRPr lang="en-US" dirty="0"/>
           </a:p>
@@ -773,7 +1041,7 @@
           <a:p>
             <a:r>
               <a:rPr lang="en-US" dirty="0"/>
-              <a:t>必ず左（失敗例）から。自分の失敗として話す。うまくいく例だけ見せると、受講者は自分の失敗を言わなくなる。</a:t>
+              <a:t>5要素を上から説明しない。受講者が普段打っている雑な指示を1つ出してもらい、目の前で5要素に分解して見せる。「役割が抜けていますね」と指摘するだけで、この表の意味が一瞬で伝わる。</a:t>
             </a:r>
             <a:endParaRPr lang="en-US" dirty="0"/>
           </a:p>
@@ -861,7 +1129,7 @@
           <a:p>
             <a:r>
               <a:rPr lang="en-US" dirty="0"/>
-              <a:t>ここから講師は口頭指示のみ。画面を操作するのは必ず受講者。歯がゆくても手を出さない。</a:t>
+              <a:t>実物を見せる時間。読み上げず、制約の行だけ指差して「ここが効きます」と言う。600字以内、という数字が入っているかどうかで結果が変わることを、次のデモで実証する。</a:t>
             </a:r>
             <a:endParaRPr lang="en-US" dirty="0"/>
           </a:p>
@@ -949,7 +1217,7 @@
           <a:p>
             <a:r>
               <a:rPr lang="en-US" dirty="0"/>
-              <a:t>ここは資料を読み上げない。自分の言葉と、匿名事例で話す。</a:t>
+              <a:t>必ず失敗例から。自分の失敗として話す。「私も最初はこう打っていました」と言えると、受講者は自分の失敗を話しやすくなる。出力を全部読み上げない。3秒眺めて「送れますか？」と聞くだけでよい。</a:t>
             </a:r>
             <a:endParaRPr lang="en-US" dirty="0"/>
           </a:p>
@@ -1037,7 +1305,7 @@
           <a:p>
             <a:r>
               <a:rPr lang="en-US" dirty="0"/>
-              <a:t>その場でカレンダーに入れてもらう。口頭の約束で終わらせない。</a:t>
+              <a:t>改善版を見せたあと、必ず受講者自身の手で再現させる。見ただけの人は翌週やらない。ここで1本できたら、それがプロンプト集の1本目になる。</a:t>
             </a:r>
             <a:endParaRPr lang="en-US" dirty="0"/>
           </a:p>
@@ -1061,6 +1329,182 @@
             <a:fld id="{F7021451-1387-4CA6-816F-3879F97B5CBC}" type="slidenum">
               <a:rPr lang="en-US"/>
               <a:t>7</a:t>
+            </a:fld>
+            <a:endParaRPr lang="en-US"/>
+          </a:p>
+        </p:txBody>
+      </p:sp>
+    </p:spTree>
+    <p:extLst>
+      <p:ext uri="{BB962C8B-B14F-4D97-AF65-F5344CB8AC3E}">
+        <p14:creationId xmlns:p14="http://schemas.microsoft.com/office/powerpoint/2010/main" val="1024086991"/>
+      </p:ext>
+    </p:extLst>
+  </p:cSld>
+  <p:clrMapOvr>
+    <a:masterClrMapping/>
+  </p:clrMapOvr>
+</p:notes>
+</file>
+
+<file path=ppt/notesSlides/notesSlide8.xml><?xml version="1.0" encoding="utf-8"?>
+<p:notes xmlns:a="http://schemas.openxmlformats.org/drawingml/2006/main" xmlns:r="http://schemas.openxmlformats.org/officeDocument/2006/relationships" xmlns:p="http://schemas.openxmlformats.org/presentationml/2006/main">
+  <p:cSld>
+    <p:spTree>
+      <p:nvGrpSpPr>
+        <p:cNvPr id="1" name=""/>
+        <p:cNvGrpSpPr/>
+        <p:nvPr/>
+      </p:nvGrpSpPr>
+      <p:grpSpPr>
+        <a:xfrm>
+          <a:off x="0" y="0"/>
+          <a:ext cx="0" cy="0"/>
+          <a:chOff x="0" y="0"/>
+          <a:chExt cx="0" cy="0"/>
+        </a:xfrm>
+      </p:grpSpPr>
+      <p:sp>
+        <p:nvSpPr>
+          <p:cNvPr id="2" name="Slide Image Placeholder 1"/>
+          <p:cNvSpPr>
+            <a:spLocks noGrp="1" noRot="1" noChangeAspect="1"/>
+          </p:cNvSpPr>
+          <p:nvPr>
+            <p:ph type="sldImg"/>
+          </p:nvPr>
+        </p:nvSpPr>
+        <p:spPr/>
+      </p:sp>
+      <p:sp>
+        <p:nvSpPr>
+          <p:cNvPr id="3" name="Notes Placeholder 2"/>
+          <p:cNvSpPr>
+            <a:spLocks noGrp="1"/>
+          </p:cNvSpPr>
+          <p:nvPr>
+            <p:ph type="body" idx="1"/>
+          </p:nvPr>
+        </p:nvSpPr>
+        <p:spPr/>
+        <p:txBody>
+          <a:bodyPr/>
+          <a:lstStyle/>
+          <a:p>
+            <a:r>
+              <a:rPr lang="en-US" dirty="0"/>
+              <a:t>2つ目（有料プラン）は特に注意。ここで契約を勧めると売り込みに見え、以後の信頼に響く。「無料のままでもこうすればできます」を先に示す。費用の話は第11回。</a:t>
+            </a:r>
+            <a:endParaRPr lang="en-US" dirty="0"/>
+          </a:p>
+        </p:txBody>
+      </p:sp>
+      <p:sp>
+        <p:nvSpPr>
+          <p:cNvPr id="4" name="Slide Number Placeholder 3"/>
+          <p:cNvSpPr>
+            <a:spLocks noGrp="1"/>
+          </p:cNvSpPr>
+          <p:nvPr>
+            <p:ph type="sldNum" sz="quarter" idx="10"/>
+          </p:nvPr>
+        </p:nvSpPr>
+        <p:spPr/>
+        <p:txBody>
+          <a:bodyPr/>
+          <a:lstStyle/>
+          <a:p>
+            <a:fld id="{F7021451-1387-4CA6-816F-3879F97B5CBC}" type="slidenum">
+              <a:rPr lang="en-US"/>
+              <a:t>8</a:t>
+            </a:fld>
+            <a:endParaRPr lang="en-US"/>
+          </a:p>
+        </p:txBody>
+      </p:sp>
+    </p:spTree>
+    <p:extLst>
+      <p:ext uri="{BB962C8B-B14F-4D97-AF65-F5344CB8AC3E}">
+        <p14:creationId xmlns:p14="http://schemas.microsoft.com/office/powerpoint/2010/main" val="1024086991"/>
+      </p:ext>
+    </p:extLst>
+  </p:cSld>
+  <p:clrMapOvr>
+    <a:masterClrMapping/>
+  </p:clrMapOvr>
+</p:notes>
+</file>
+
+<file path=ppt/notesSlides/notesSlide9.xml><?xml version="1.0" encoding="utf-8"?>
+<p:notes xmlns:a="http://schemas.openxmlformats.org/drawingml/2006/main" xmlns:r="http://schemas.openxmlformats.org/officeDocument/2006/relationships" xmlns:p="http://schemas.openxmlformats.org/presentationml/2006/main">
+  <p:cSld>
+    <p:spTree>
+      <p:nvGrpSpPr>
+        <p:cNvPr id="1" name=""/>
+        <p:cNvGrpSpPr/>
+        <p:nvPr/>
+      </p:nvGrpSpPr>
+      <p:grpSpPr>
+        <a:xfrm>
+          <a:off x="0" y="0"/>
+          <a:ext cx="0" cy="0"/>
+          <a:chOff x="0" y="0"/>
+          <a:chExt cx="0" cy="0"/>
+        </a:xfrm>
+      </p:grpSpPr>
+      <p:sp>
+        <p:nvSpPr>
+          <p:cNvPr id="2" name="Slide Image Placeholder 1"/>
+          <p:cNvSpPr>
+            <a:spLocks noGrp="1" noRot="1" noChangeAspect="1"/>
+          </p:cNvSpPr>
+          <p:nvPr>
+            <p:ph type="sldImg"/>
+          </p:nvPr>
+        </p:nvSpPr>
+        <p:spPr/>
+      </p:sp>
+      <p:sp>
+        <p:nvSpPr>
+          <p:cNvPr id="3" name="Notes Placeholder 2"/>
+          <p:cNvSpPr>
+            <a:spLocks noGrp="1"/>
+          </p:cNvSpPr>
+          <p:nvPr>
+            <p:ph type="body" idx="1"/>
+          </p:nvPr>
+        </p:nvSpPr>
+        <p:spPr/>
+        <p:txBody>
+          <a:bodyPr/>
+          <a:lstStyle/>
+          <a:p>
+            <a:r>
+              <a:rPr lang="en-US" dirty="0"/>
+              <a:t>3ステップのうち、時間が足りなければ3つ目を削る。カスタム指示までは必ず終わらせる。ここが今日の分かれ目で、これがあるだけで次回以降の演習速度が変わる。</a:t>
+            </a:r>
+            <a:endParaRPr lang="en-US" dirty="0"/>
+          </a:p>
+        </p:txBody>
+      </p:sp>
+      <p:sp>
+        <p:nvSpPr>
+          <p:cNvPr id="4" name="Slide Number Placeholder 3"/>
+          <p:cNvSpPr>
+            <a:spLocks noGrp="1"/>
+          </p:cNvSpPr>
+          <p:nvPr>
+            <p:ph type="sldNum" sz="quarter" idx="10"/>
+          </p:nvPr>
+        </p:nvSpPr>
+        <p:spPr/>
+        <p:txBody>
+          <a:bodyPr/>
+          <a:lstStyle/>
+          <a:p>
+            <a:fld id="{F7021451-1387-4CA6-816F-3879F97B5CBC}" type="slidenum">
+              <a:rPr lang="en-US"/>
+              <a:t>9</a:t>
             </a:fld>
             <a:endParaRPr lang="en-US"/>
           </a:p>
@@ -1680,6 +2124,1284 @@
 </p:sld>
 </file>
 
+<file path=ppt/slides/slide10.xml><?xml version="1.0" encoding="utf-8"?>
+<p:sld xmlns:a="http://schemas.openxmlformats.org/drawingml/2006/main" xmlns:r="http://schemas.openxmlformats.org/officeDocument/2006/relationships" xmlns:p="http://schemas.openxmlformats.org/presentationml/2006/main">
+  <p:cSld name="Slide 10">
+    <p:bg>
+      <p:bgPr>
+        <a:solidFill>
+          <a:srgbClr val="F6F2EA"/>
+        </a:solidFill>
+      </p:bgPr>
+    </p:bg>
+    <p:spTree>
+      <p:nvGrpSpPr>
+        <p:cNvPr id="1" name=""/>
+        <p:cNvGrpSpPr/>
+        <p:nvPr/>
+      </p:nvGrpSpPr>
+      <p:grpSpPr>
+        <a:xfrm>
+          <a:off x="0" y="0"/>
+          <a:ext cx="0" cy="0"/>
+          <a:chOff x="0" y="0"/>
+          <a:chExt cx="0" cy="0"/>
+        </a:xfrm>
+      </p:grpSpPr>
+      <p:sp>
+        <p:nvSpPr>
+          <p:cNvPr id="2" name="Text 0"/>
+          <p:cNvSpPr txBox="1"/>
+          <p:nvPr/>
+        </p:nvSpPr>
+        <p:spPr>
+          <a:xfrm>
+            <a:off x="777240" y="566928"/>
+            <a:ext cx="10607040" cy="274320"/>
+          </a:xfrm>
+          <a:prstGeom prst="rect">
+            <a:avLst/>
+          </a:prstGeom>
+          <a:noFill/>
+          <a:ln/>
+        </p:spPr>
+        <p:txBody>
+          <a:bodyPr wrap="square" lIns="0" tIns="0" rIns="0" bIns="0" rtlCol="0" anchor="ctr"/>
+          <a:lstStyle/>
+          <a:p>
+            <a:pPr indent="0" marL="0">
+              <a:buNone/>
+            </a:pPr>
+            <a:r>
+              <a:rPr lang="en-US" sz="1100" b="1" spc="250" kern="0" dirty="0">
+                <a:solidFill>
+                  <a:srgbClr val="3B6B4A"/>
+                </a:solidFill>
+                <a:latin typeface="Yu Gothic" pitchFamily="34" charset="0"/>
+                <a:ea typeface="Yu Gothic" pitchFamily="34" charset="-122"/>
+                <a:cs typeface="Yu Gothic" pitchFamily="34" charset="-120"/>
+              </a:rPr>
+              <a:t>業務への組み込み</a:t>
+            </a:r>
+            <a:endParaRPr lang="en-US" sz="1100" dirty="0"/>
+          </a:p>
+        </p:txBody>
+      </p:sp>
+      <p:sp>
+        <p:nvSpPr>
+          <p:cNvPr id="3" name="Text 1"/>
+          <p:cNvSpPr txBox="1"/>
+          <p:nvPr/>
+        </p:nvSpPr>
+        <p:spPr>
+          <a:xfrm>
+            <a:off x="777240" y="896112"/>
+            <a:ext cx="10607040" cy="640080"/>
+          </a:xfrm>
+          <a:prstGeom prst="rect">
+            <a:avLst/>
+          </a:prstGeom>
+          <a:noFill/>
+          <a:ln/>
+        </p:spPr>
+        <p:txBody>
+          <a:bodyPr wrap="square" lIns="0" tIns="0" rIns="0" bIns="0" rtlCol="0" anchor="ctr"/>
+          <a:lstStyle/>
+          <a:p>
+            <a:pPr indent="0" marL="0">
+              <a:buNone/>
+            </a:pPr>
+            <a:r>
+              <a:rPr lang="en-US" sz="2600" b="1" dirty="0">
+                <a:solidFill>
+                  <a:srgbClr val="23201D"/>
+                </a:solidFill>
+                <a:latin typeface="Yu Gothic" pitchFamily="34" charset="0"/>
+                <a:ea typeface="Yu Gothic" pitchFamily="34" charset="-122"/>
+                <a:cs typeface="Yu Gothic" pitchFamily="34" charset="-120"/>
+              </a:rPr>
+              <a:t>帰る前に決めること</a:t>
+            </a:r>
+            <a:endParaRPr lang="en-US" sz="2600" dirty="0"/>
+          </a:p>
+        </p:txBody>
+      </p:sp>
+      <p:sp>
+        <p:nvSpPr>
+          <p:cNvPr id="4" name="Text 2"/>
+          <p:cNvSpPr txBox="1"/>
+          <p:nvPr/>
+        </p:nvSpPr>
+        <p:spPr>
+          <a:xfrm>
+            <a:off x="777240" y="1572768"/>
+            <a:ext cx="10607040" cy="320040"/>
+          </a:xfrm>
+          <a:prstGeom prst="rect">
+            <a:avLst/>
+          </a:prstGeom>
+          <a:noFill/>
+          <a:ln/>
+        </p:spPr>
+        <p:txBody>
+          <a:bodyPr wrap="square" lIns="0" tIns="0" rIns="0" bIns="0" rtlCol="0" anchor="ctr"/>
+          <a:lstStyle/>
+          <a:p>
+            <a:pPr indent="0" marL="0">
+              <a:buNone/>
+            </a:pPr>
+            <a:r>
+              <a:rPr lang="en-US" sz="1250" b="1" dirty="0">
+                <a:solidFill>
+                  <a:srgbClr val="3B6B4A"/>
+                </a:solidFill>
+                <a:latin typeface="Yu Gothic" pitchFamily="34" charset="0"/>
+                <a:ea typeface="Yu Gothic" pitchFamily="34" charset="-122"/>
+                <a:cs typeface="Yu Gothic" pitchFamily="34" charset="-120"/>
+              </a:rPr>
+              <a:t>ここを決めないと、持ち帰っても使われません。紙に書きます。</a:t>
+            </a:r>
+            <a:endParaRPr lang="en-US" sz="1250" dirty="0"/>
+          </a:p>
+        </p:txBody>
+      </p:sp>
+      <p:sp>
+        <p:nvSpPr>
+          <p:cNvPr id="5" name="Shape 3"/>
+          <p:cNvSpPr/>
+          <p:nvPr/>
+        </p:nvSpPr>
+        <p:spPr>
+          <a:xfrm>
+            <a:off x="777240" y="2103120"/>
+            <a:ext cx="10607040" cy="914400"/>
+          </a:xfrm>
+          <a:prstGeom prst="rect">
+            <a:avLst/>
+          </a:prstGeom>
+          <a:solidFill>
+            <a:srgbClr val="FFFFFF"/>
+          </a:solidFill>
+          <a:ln w="12700">
+            <a:solidFill>
+              <a:srgbClr val="EDE7DB"/>
+            </a:solidFill>
+            <a:prstDash val="solid"/>
+          </a:ln>
+        </p:spPr>
+      </p:sp>
+      <p:sp>
+        <p:nvSpPr>
+          <p:cNvPr id="6" name="Shape 4"/>
+          <p:cNvSpPr/>
+          <p:nvPr/>
+        </p:nvSpPr>
+        <p:spPr>
+          <a:xfrm>
+            <a:off x="777240" y="2103120"/>
+            <a:ext cx="54864" cy="914400"/>
+          </a:xfrm>
+          <a:prstGeom prst="rect">
+            <a:avLst/>
+          </a:prstGeom>
+          <a:solidFill>
+            <a:srgbClr val="3B6B4A"/>
+          </a:solidFill>
+          <a:ln w="12700">
+            <a:solidFill>
+              <a:srgbClr val="333333"/>
+            </a:solidFill>
+            <a:prstDash val="solid"/>
+          </a:ln>
+        </p:spPr>
+      </p:sp>
+      <p:sp>
+        <p:nvSpPr>
+          <p:cNvPr id="7" name="Text 5"/>
+          <p:cNvSpPr txBox="1"/>
+          <p:nvPr/>
+        </p:nvSpPr>
+        <p:spPr>
+          <a:xfrm>
+            <a:off x="1143000" y="2176272"/>
+            <a:ext cx="2757830" cy="768096"/>
+          </a:xfrm>
+          <a:prstGeom prst="rect">
+            <a:avLst/>
+          </a:prstGeom>
+          <a:noFill/>
+          <a:ln/>
+        </p:spPr>
+        <p:txBody>
+          <a:bodyPr wrap="square" lIns="0" tIns="0" rIns="0" bIns="0" rtlCol="0" anchor="ctr"/>
+          <a:lstStyle/>
+          <a:p>
+            <a:pPr indent="0" marL="0">
+              <a:buNone/>
+            </a:pPr>
+            <a:r>
+              <a:rPr lang="en-US" sz="1400" b="1" dirty="0">
+                <a:solidFill>
+                  <a:srgbClr val="3B6B4A"/>
+                </a:solidFill>
+                <a:latin typeface="Yu Gothic" pitchFamily="34" charset="0"/>
+                <a:ea typeface="Yu Gothic" pitchFamily="34" charset="-122"/>
+                <a:cs typeface="Yu Gothic" pitchFamily="34" charset="-120"/>
+              </a:rPr>
+              <a:t>どこに保存するか</a:t>
+            </a:r>
+            <a:endParaRPr lang="en-US" sz="1400" dirty="0"/>
+          </a:p>
+        </p:txBody>
+      </p:sp>
+      <p:sp>
+        <p:nvSpPr>
+          <p:cNvPr id="8" name="Text 6"/>
+          <p:cNvSpPr txBox="1"/>
+          <p:nvPr/>
+        </p:nvSpPr>
+        <p:spPr>
+          <a:xfrm>
+            <a:off x="4006901" y="2176272"/>
+            <a:ext cx="7011619" cy="768096"/>
+          </a:xfrm>
+          <a:prstGeom prst="rect">
+            <a:avLst/>
+          </a:prstGeom>
+          <a:noFill/>
+          <a:ln/>
+        </p:spPr>
+        <p:txBody>
+          <a:bodyPr wrap="square" lIns="0" tIns="0" rIns="0" bIns="0" rtlCol="0" anchor="ctr"/>
+          <a:lstStyle/>
+          <a:p>
+            <a:pPr indent="0" marL="0">
+              <a:lnSpc>
+                <a:spcPct val="130000"/>
+              </a:lnSpc>
+              <a:buNone/>
+            </a:pPr>
+            <a:r>
+              <a:rPr lang="en-US" sz="1250" dirty="0">
+                <a:solidFill>
+                  <a:srgbClr val="3F3933"/>
+                </a:solidFill>
+                <a:latin typeface="Yu Gothic" pitchFamily="34" charset="0"/>
+                <a:ea typeface="Yu Gothic" pitchFamily="34" charset="-122"/>
+                <a:cs typeface="Yu Gothic" pitchFamily="34" charset="-120"/>
+              </a:rPr>
+              <a:t>デスクトップかクラウドか。次に開く場所が決まっていないと使われません</a:t>
+            </a:r>
+            <a:endParaRPr lang="en-US" sz="1250" dirty="0"/>
+          </a:p>
+        </p:txBody>
+      </p:sp>
+      <p:sp>
+        <p:nvSpPr>
+          <p:cNvPr id="9" name="Shape 7"/>
+          <p:cNvSpPr/>
+          <p:nvPr/>
+        </p:nvSpPr>
+        <p:spPr>
+          <a:xfrm>
+            <a:off x="777240" y="3154680"/>
+            <a:ext cx="10607040" cy="914400"/>
+          </a:xfrm>
+          <a:prstGeom prst="rect">
+            <a:avLst/>
+          </a:prstGeom>
+          <a:solidFill>
+            <a:srgbClr val="FFFFFF"/>
+          </a:solidFill>
+          <a:ln w="12700">
+            <a:solidFill>
+              <a:srgbClr val="EDE7DB"/>
+            </a:solidFill>
+            <a:prstDash val="solid"/>
+          </a:ln>
+        </p:spPr>
+      </p:sp>
+      <p:sp>
+        <p:nvSpPr>
+          <p:cNvPr id="10" name="Shape 8"/>
+          <p:cNvSpPr/>
+          <p:nvPr/>
+        </p:nvSpPr>
+        <p:spPr>
+          <a:xfrm>
+            <a:off x="777240" y="3154680"/>
+            <a:ext cx="54864" cy="914400"/>
+          </a:xfrm>
+          <a:prstGeom prst="rect">
+            <a:avLst/>
+          </a:prstGeom>
+          <a:solidFill>
+            <a:srgbClr val="3B6B4A"/>
+          </a:solidFill>
+          <a:ln w="12700">
+            <a:solidFill>
+              <a:srgbClr val="333333"/>
+            </a:solidFill>
+            <a:prstDash val="solid"/>
+          </a:ln>
+        </p:spPr>
+      </p:sp>
+      <p:sp>
+        <p:nvSpPr>
+          <p:cNvPr id="11" name="Text 9"/>
+          <p:cNvSpPr txBox="1"/>
+          <p:nvPr/>
+        </p:nvSpPr>
+        <p:spPr>
+          <a:xfrm>
+            <a:off x="1143000" y="3227832"/>
+            <a:ext cx="2757830" cy="768096"/>
+          </a:xfrm>
+          <a:prstGeom prst="rect">
+            <a:avLst/>
+          </a:prstGeom>
+          <a:noFill/>
+          <a:ln/>
+        </p:spPr>
+        <p:txBody>
+          <a:bodyPr wrap="square" lIns="0" tIns="0" rIns="0" bIns="0" rtlCol="0" anchor="ctr"/>
+          <a:lstStyle/>
+          <a:p>
+            <a:pPr indent="0" marL="0">
+              <a:buNone/>
+            </a:pPr>
+            <a:r>
+              <a:rPr lang="en-US" sz="1400" b="1" dirty="0">
+                <a:solidFill>
+                  <a:srgbClr val="3B6B4A"/>
+                </a:solidFill>
+                <a:latin typeface="Yu Gothic" pitchFamily="34" charset="0"/>
+                <a:ea typeface="Yu Gothic" pitchFamily="34" charset="-122"/>
+                <a:cs typeface="Yu Gothic" pitchFamily="34" charset="-120"/>
+              </a:rPr>
+              <a:t>いつ増やすか</a:t>
+            </a:r>
+            <a:endParaRPr lang="en-US" sz="1400" dirty="0"/>
+          </a:p>
+        </p:txBody>
+      </p:sp>
+      <p:sp>
+        <p:nvSpPr>
+          <p:cNvPr id="12" name="Text 10"/>
+          <p:cNvSpPr txBox="1"/>
+          <p:nvPr/>
+        </p:nvSpPr>
+        <p:spPr>
+          <a:xfrm>
+            <a:off x="4006901" y="3227832"/>
+            <a:ext cx="7011619" cy="768096"/>
+          </a:xfrm>
+          <a:prstGeom prst="rect">
+            <a:avLst/>
+          </a:prstGeom>
+          <a:noFill/>
+          <a:ln/>
+        </p:spPr>
+        <p:txBody>
+          <a:bodyPr wrap="square" lIns="0" tIns="0" rIns="0" bIns="0" rtlCol="0" anchor="ctr"/>
+          <a:lstStyle/>
+          <a:p>
+            <a:pPr indent="0" marL="0">
+              <a:lnSpc>
+                <a:spcPct val="130000"/>
+              </a:lnSpc>
+              <a:buNone/>
+            </a:pPr>
+            <a:r>
+              <a:rPr lang="en-US" sz="1250" dirty="0">
+                <a:solidFill>
+                  <a:srgbClr val="3F3933"/>
+                </a:solidFill>
+                <a:latin typeface="Yu Gothic" pitchFamily="34" charset="0"/>
+                <a:ea typeface="Yu Gothic" pitchFamily="34" charset="-122"/>
+                <a:cs typeface="Yu Gothic" pitchFamily="34" charset="-120"/>
+              </a:rPr>
+              <a:t>うまくいった指示が出たら、その場で追加する。週末にまとめて、は続きません</a:t>
+            </a:r>
+            <a:endParaRPr lang="en-US" sz="1250" dirty="0"/>
+          </a:p>
+        </p:txBody>
+      </p:sp>
+      <p:sp>
+        <p:nvSpPr>
+          <p:cNvPr id="13" name="Shape 11"/>
+          <p:cNvSpPr/>
+          <p:nvPr/>
+        </p:nvSpPr>
+        <p:spPr>
+          <a:xfrm>
+            <a:off x="777240" y="4206240"/>
+            <a:ext cx="10607040" cy="914400"/>
+          </a:xfrm>
+          <a:prstGeom prst="rect">
+            <a:avLst/>
+          </a:prstGeom>
+          <a:solidFill>
+            <a:srgbClr val="FFFFFF"/>
+          </a:solidFill>
+          <a:ln w="12700">
+            <a:solidFill>
+              <a:srgbClr val="EDE7DB"/>
+            </a:solidFill>
+            <a:prstDash val="solid"/>
+          </a:ln>
+        </p:spPr>
+      </p:sp>
+      <p:sp>
+        <p:nvSpPr>
+          <p:cNvPr id="14" name="Shape 12"/>
+          <p:cNvSpPr/>
+          <p:nvPr/>
+        </p:nvSpPr>
+        <p:spPr>
+          <a:xfrm>
+            <a:off x="777240" y="4206240"/>
+            <a:ext cx="54864" cy="914400"/>
+          </a:xfrm>
+          <a:prstGeom prst="rect">
+            <a:avLst/>
+          </a:prstGeom>
+          <a:solidFill>
+            <a:srgbClr val="3B6B4A"/>
+          </a:solidFill>
+          <a:ln w="12700">
+            <a:solidFill>
+              <a:srgbClr val="333333"/>
+            </a:solidFill>
+            <a:prstDash val="solid"/>
+          </a:ln>
+        </p:spPr>
+      </p:sp>
+      <p:sp>
+        <p:nvSpPr>
+          <p:cNvPr id="15" name="Text 13"/>
+          <p:cNvSpPr txBox="1"/>
+          <p:nvPr/>
+        </p:nvSpPr>
+        <p:spPr>
+          <a:xfrm>
+            <a:off x="1143000" y="4279392"/>
+            <a:ext cx="2757830" cy="768096"/>
+          </a:xfrm>
+          <a:prstGeom prst="rect">
+            <a:avLst/>
+          </a:prstGeom>
+          <a:noFill/>
+          <a:ln/>
+        </p:spPr>
+        <p:txBody>
+          <a:bodyPr wrap="square" lIns="0" tIns="0" rIns="0" bIns="0" rtlCol="0" anchor="ctr"/>
+          <a:lstStyle/>
+          <a:p>
+            <a:pPr indent="0" marL="0">
+              <a:buNone/>
+            </a:pPr>
+            <a:r>
+              <a:rPr lang="en-US" sz="1400" b="1" dirty="0">
+                <a:solidFill>
+                  <a:srgbClr val="3B6B4A"/>
+                </a:solidFill>
+                <a:latin typeface="Yu Gothic" pitchFamily="34" charset="0"/>
+                <a:ea typeface="Yu Gothic" pitchFamily="34" charset="-122"/>
+                <a:cs typeface="Yu Gothic" pitchFamily="34" charset="-120"/>
+              </a:rPr>
+              <a:t>誰に見せるか</a:t>
+            </a:r>
+            <a:endParaRPr lang="en-US" sz="1400" dirty="0"/>
+          </a:p>
+        </p:txBody>
+      </p:sp>
+      <p:sp>
+        <p:nvSpPr>
+          <p:cNvPr id="16" name="Text 14"/>
+          <p:cNvSpPr txBox="1"/>
+          <p:nvPr/>
+        </p:nvSpPr>
+        <p:spPr>
+          <a:xfrm>
+            <a:off x="4006901" y="4279392"/>
+            <a:ext cx="7011619" cy="768096"/>
+          </a:xfrm>
+          <a:prstGeom prst="rect">
+            <a:avLst/>
+          </a:prstGeom>
+          <a:noFill/>
+          <a:ln/>
+        </p:spPr>
+        <p:txBody>
+          <a:bodyPr wrap="square" lIns="0" tIns="0" rIns="0" bIns="0" rtlCol="0" anchor="ctr"/>
+          <a:lstStyle/>
+          <a:p>
+            <a:pPr indent="0" marL="0">
+              <a:lnSpc>
+                <a:spcPct val="130000"/>
+              </a:lnSpc>
+              <a:buNone/>
+            </a:pPr>
+            <a:r>
+              <a:rPr lang="en-US" sz="1250" dirty="0">
+                <a:solidFill>
+                  <a:srgbClr val="3F3933"/>
+                </a:solidFill>
+                <a:latin typeface="Yu Gothic" pitchFamily="34" charset="0"/>
+                <a:ea typeface="Yu Gothic" pitchFamily="34" charset="-122"/>
+                <a:cs typeface="Yu Gothic" pitchFamily="34" charset="-120"/>
+              </a:rPr>
+              <a:t>第3回で社員1名に渡します。今日その1名を決めておきます</a:t>
+            </a:r>
+            <a:endParaRPr lang="en-US" sz="1250" dirty="0"/>
+          </a:p>
+        </p:txBody>
+      </p:sp>
+      <p:sp>
+        <p:nvSpPr>
+          <p:cNvPr id="17" name="Text 15"/>
+          <p:cNvSpPr txBox="1"/>
+          <p:nvPr/>
+        </p:nvSpPr>
+        <p:spPr>
+          <a:xfrm>
+            <a:off x="777240" y="6382512"/>
+            <a:ext cx="7424928" cy="256032"/>
+          </a:xfrm>
+          <a:prstGeom prst="rect">
+            <a:avLst/>
+          </a:prstGeom>
+          <a:noFill/>
+          <a:ln/>
+        </p:spPr>
+        <p:txBody>
+          <a:bodyPr wrap="square" lIns="0" tIns="0" rIns="0" bIns="0" rtlCol="0" anchor="ctr"/>
+          <a:lstStyle/>
+          <a:p>
+            <a:pPr indent="0" marL="0">
+              <a:buNone/>
+            </a:pPr>
+            <a:r>
+              <a:rPr lang="en-US" sz="900" dirty="0">
+                <a:solidFill>
+                  <a:srgbClr val="8A8177"/>
+                </a:solidFill>
+                <a:latin typeface="Yu Gothic" pitchFamily="34" charset="0"/>
+                <a:ea typeface="Yu Gothic" pitchFamily="34" charset="-122"/>
+                <a:cs typeface="Yu Gothic" pitchFamily="34" charset="-120"/>
+              </a:rPr>
+              <a:t>第2回　今のChatGPTの使い方を作り直す</a:t>
+            </a:r>
+            <a:endParaRPr lang="en-US" sz="900" dirty="0"/>
+          </a:p>
+        </p:txBody>
+      </p:sp>
+      <p:sp>
+        <p:nvSpPr>
+          <p:cNvPr id="18" name="Text 16"/>
+          <p:cNvSpPr txBox="1"/>
+          <p:nvPr/>
+        </p:nvSpPr>
+        <p:spPr>
+          <a:xfrm>
+            <a:off x="8202168" y="6382512"/>
+            <a:ext cx="3182112" cy="256032"/>
+          </a:xfrm>
+          <a:prstGeom prst="rect">
+            <a:avLst/>
+          </a:prstGeom>
+          <a:noFill/>
+          <a:ln/>
+        </p:spPr>
+        <p:txBody>
+          <a:bodyPr wrap="square" lIns="0" tIns="0" rIns="0" bIns="0" rtlCol="0" anchor="ctr"/>
+          <a:lstStyle/>
+          <a:p>
+            <a:pPr algn="r" indent="0" marL="0">
+              <a:buNone/>
+            </a:pPr>
+            <a:r>
+              <a:rPr lang="en-US" sz="900" dirty="0">
+                <a:solidFill>
+                  <a:srgbClr val="8A8177"/>
+                </a:solidFill>
+                <a:latin typeface="Yu Gothic" pitchFamily="34" charset="0"/>
+                <a:ea typeface="Yu Gothic" pitchFamily="34" charset="-122"/>
+                <a:cs typeface="Yu Gothic" pitchFamily="34" charset="-120"/>
+              </a:rPr>
+              <a:t>組み込み</a:t>
+            </a:r>
+            <a:endParaRPr lang="en-US" sz="900" dirty="0"/>
+          </a:p>
+        </p:txBody>
+      </p:sp>
+    </p:spTree>
+  </p:cSld>
+  <p:clrMapOvr>
+    <a:masterClrMapping/>
+  </p:clrMapOvr>
+</p:sld>
+</file>
+
+<file path=ppt/slides/slide11.xml><?xml version="1.0" encoding="utf-8"?>
+<p:sld xmlns:a="http://schemas.openxmlformats.org/drawingml/2006/main" xmlns:r="http://schemas.openxmlformats.org/officeDocument/2006/relationships" xmlns:p="http://schemas.openxmlformats.org/presentationml/2006/main">
+  <p:cSld name="Slide 11">
+    <p:bg>
+      <p:bgPr>
+        <a:solidFill>
+          <a:srgbClr val="F6F2EA"/>
+        </a:solidFill>
+      </p:bgPr>
+    </p:bg>
+    <p:spTree>
+      <p:nvGrpSpPr>
+        <p:cNvPr id="1" name=""/>
+        <p:cNvGrpSpPr/>
+        <p:nvPr/>
+      </p:nvGrpSpPr>
+      <p:grpSpPr>
+        <a:xfrm>
+          <a:off x="0" y="0"/>
+          <a:ext cx="0" cy="0"/>
+          <a:chOff x="0" y="0"/>
+          <a:chExt cx="0" cy="0"/>
+        </a:xfrm>
+      </p:grpSpPr>
+      <p:sp>
+        <p:nvSpPr>
+          <p:cNvPr id="2" name="Text 0"/>
+          <p:cNvSpPr txBox="1"/>
+          <p:nvPr/>
+        </p:nvSpPr>
+        <p:spPr>
+          <a:xfrm>
+            <a:off x="777240" y="566928"/>
+            <a:ext cx="10607040" cy="274320"/>
+          </a:xfrm>
+          <a:prstGeom prst="rect">
+            <a:avLst/>
+          </a:prstGeom>
+          <a:noFill/>
+          <a:ln/>
+        </p:spPr>
+        <p:txBody>
+          <a:bodyPr wrap="square" lIns="0" tIns="0" rIns="0" bIns="0" rtlCol="0" anchor="ctr"/>
+          <a:lstStyle/>
+          <a:p>
+            <a:pPr indent="0" marL="0">
+              <a:buNone/>
+            </a:pPr>
+            <a:r>
+              <a:rPr lang="en-US" sz="1100" b="1" spc="250" kern="0" dirty="0">
+                <a:solidFill>
+                  <a:srgbClr val="B04A2F"/>
+                </a:solidFill>
+                <a:latin typeface="Yu Gothic" pitchFamily="34" charset="0"/>
+                <a:ea typeface="Yu Gothic" pitchFamily="34" charset="-122"/>
+                <a:cs typeface="Yu Gothic" pitchFamily="34" charset="-120"/>
+              </a:rPr>
+              <a:t>ここだけは</a:t>
+            </a:r>
+            <a:endParaRPr lang="en-US" sz="1100" dirty="0"/>
+          </a:p>
+        </p:txBody>
+      </p:sp>
+      <p:sp>
+        <p:nvSpPr>
+          <p:cNvPr id="3" name="Text 1"/>
+          <p:cNvSpPr txBox="1"/>
+          <p:nvPr/>
+        </p:nvSpPr>
+        <p:spPr>
+          <a:xfrm>
+            <a:off x="777240" y="1097280"/>
+            <a:ext cx="10607040" cy="640080"/>
+          </a:xfrm>
+          <a:prstGeom prst="rect">
+            <a:avLst/>
+          </a:prstGeom>
+          <a:noFill/>
+          <a:ln/>
+        </p:spPr>
+        <p:txBody>
+          <a:bodyPr wrap="square" lIns="0" tIns="0" rIns="0" bIns="0" rtlCol="0" anchor="ctr"/>
+          <a:lstStyle/>
+          <a:p>
+            <a:pPr indent="0" marL="0">
+              <a:buNone/>
+            </a:pPr>
+            <a:r>
+              <a:rPr lang="en-US" sz="2600" b="1" dirty="0">
+                <a:solidFill>
+                  <a:srgbClr val="23201D"/>
+                </a:solidFill>
+                <a:latin typeface="Yu Gothic" pitchFamily="34" charset="0"/>
+                <a:ea typeface="Yu Gothic" pitchFamily="34" charset="-122"/>
+                <a:cs typeface="Yu Gothic" pitchFamily="34" charset="-120"/>
+              </a:rPr>
+              <a:t>講師が代わりに入力しないこと</a:t>
+            </a:r>
+            <a:endParaRPr lang="en-US" sz="2600" dirty="0"/>
+          </a:p>
+        </p:txBody>
+      </p:sp>
+      <p:sp>
+        <p:nvSpPr>
+          <p:cNvPr id="4" name="Shape 2"/>
+          <p:cNvSpPr/>
+          <p:nvPr/>
+        </p:nvSpPr>
+        <p:spPr>
+          <a:xfrm>
+            <a:off x="777240" y="2148840"/>
+            <a:ext cx="64008" cy="2194560"/>
+          </a:xfrm>
+          <a:prstGeom prst="rect">
+            <a:avLst/>
+          </a:prstGeom>
+          <a:solidFill>
+            <a:srgbClr val="B04A2F"/>
+          </a:solidFill>
+          <a:ln w="12700">
+            <a:solidFill>
+              <a:srgbClr val="333333"/>
+            </a:solidFill>
+            <a:prstDash val="solid"/>
+          </a:ln>
+        </p:spPr>
+      </p:sp>
+      <p:sp>
+        <p:nvSpPr>
+          <p:cNvPr id="5" name="Text 3"/>
+          <p:cNvSpPr txBox="1"/>
+          <p:nvPr/>
+        </p:nvSpPr>
+        <p:spPr>
+          <a:xfrm>
+            <a:off x="1188720" y="2148840"/>
+            <a:ext cx="9966960" cy="2194560"/>
+          </a:xfrm>
+          <a:prstGeom prst="rect">
+            <a:avLst/>
+          </a:prstGeom>
+          <a:noFill/>
+          <a:ln/>
+        </p:spPr>
+        <p:txBody>
+          <a:bodyPr wrap="square" lIns="0" tIns="0" rIns="0" bIns="0" rtlCol="0" anchor="ctr"/>
+          <a:lstStyle/>
+          <a:p>
+            <a:pPr indent="0" marL="0">
+              <a:lnSpc>
+                <a:spcPct val="160000"/>
+              </a:lnSpc>
+              <a:buNone/>
+            </a:pPr>
+            <a:r>
+              <a:rPr lang="en-US" sz="1650" dirty="0">
+                <a:solidFill>
+                  <a:srgbClr val="3F3933"/>
+                </a:solidFill>
+                <a:latin typeface="Yu Gothic" pitchFamily="34" charset="0"/>
+                <a:ea typeface="Yu Gothic" pitchFamily="34" charset="-122"/>
+                <a:cs typeface="Yu Gothic" pitchFamily="34" charset="-120"/>
+              </a:rPr>
+              <a:t>1対1では「見ていて歯がゆい」場面が必ず来ます。そこで手を出すと、受講者は自分で書けるようになりません。待つのが仕事だと割り切ってください。操作を代わった瞬間、その技能は受講者に残りません。</a:t>
+            </a:r>
+            <a:endParaRPr lang="en-US" sz="1650" dirty="0"/>
+          </a:p>
+        </p:txBody>
+      </p:sp>
+      <p:sp>
+        <p:nvSpPr>
+          <p:cNvPr id="6" name="Shape 4"/>
+          <p:cNvSpPr/>
+          <p:nvPr/>
+        </p:nvSpPr>
+        <p:spPr>
+          <a:xfrm>
+            <a:off x="777240" y="4709160"/>
+            <a:ext cx="10607040" cy="960120"/>
+          </a:xfrm>
+          <a:prstGeom prst="rect">
+            <a:avLst/>
+          </a:prstGeom>
+          <a:solidFill>
+            <a:srgbClr val="EDE7DB"/>
+          </a:solidFill>
+          <a:ln w="12700">
+            <a:solidFill>
+              <a:srgbClr val="333333"/>
+            </a:solidFill>
+            <a:prstDash val="solid"/>
+          </a:ln>
+        </p:spPr>
+      </p:sp>
+      <p:sp>
+        <p:nvSpPr>
+          <p:cNvPr id="7" name="Text 5"/>
+          <p:cNvSpPr txBox="1"/>
+          <p:nvPr/>
+        </p:nvSpPr>
+        <p:spPr>
+          <a:xfrm>
+            <a:off x="1051560" y="4800600"/>
+            <a:ext cx="1463040" cy="256032"/>
+          </a:xfrm>
+          <a:prstGeom prst="rect">
+            <a:avLst/>
+          </a:prstGeom>
+          <a:noFill/>
+          <a:ln/>
+        </p:spPr>
+        <p:txBody>
+          <a:bodyPr wrap="square" lIns="0" tIns="0" rIns="0" bIns="0" rtlCol="0" anchor="ctr"/>
+          <a:lstStyle/>
+          <a:p>
+            <a:pPr indent="0" marL="0">
+              <a:buNone/>
+            </a:pPr>
+            <a:r>
+              <a:rPr lang="en-US" sz="900" b="1" spc="150" kern="0" dirty="0">
+                <a:solidFill>
+                  <a:srgbClr val="B04A2F"/>
+                </a:solidFill>
+                <a:latin typeface="Yu Gothic" pitchFamily="34" charset="0"/>
+                <a:ea typeface="Yu Gothic" pitchFamily="34" charset="-122"/>
+                <a:cs typeface="Yu Gothic" pitchFamily="34" charset="-120"/>
+              </a:rPr>
+              <a:t>他社では</a:t>
+            </a:r>
+            <a:endParaRPr lang="en-US" sz="900" dirty="0"/>
+          </a:p>
+        </p:txBody>
+      </p:sp>
+      <p:sp>
+        <p:nvSpPr>
+          <p:cNvPr id="8" name="Text 6"/>
+          <p:cNvSpPr txBox="1"/>
+          <p:nvPr/>
+        </p:nvSpPr>
+        <p:spPr>
+          <a:xfrm>
+            <a:off x="1051560" y="5029200"/>
+            <a:ext cx="10058400" cy="566928"/>
+          </a:xfrm>
+          <a:prstGeom prst="rect">
+            <a:avLst/>
+          </a:prstGeom>
+          <a:noFill/>
+          <a:ln/>
+        </p:spPr>
+        <p:txBody>
+          <a:bodyPr wrap="square" lIns="0" tIns="0" rIns="0" bIns="0" rtlCol="0" anchor="ctr"/>
+          <a:lstStyle/>
+          <a:p>
+            <a:pPr indent="0" marL="0">
+              <a:lnSpc>
+                <a:spcPct val="130000"/>
+              </a:lnSpc>
+              <a:buNone/>
+            </a:pPr>
+            <a:r>
+              <a:rPr lang="en-US" sz="1250" dirty="0">
+                <a:solidFill>
+                  <a:srgbClr val="3F3933"/>
+                </a:solidFill>
+                <a:latin typeface="Yu Gothic" pitchFamily="34" charset="0"/>
+                <a:ea typeface="Yu Gothic" pitchFamily="34" charset="-122"/>
+                <a:cs typeface="Yu Gothic" pitchFamily="34" charset="-120"/>
+              </a:rPr>
+              <a:t>ある会社では、社長のカスタム指示に「当社は◯◯を売っている／顧客は△△／敬語は硬めに」の3行を入れただけで、以後の全会話の手直しが半分になりました。</a:t>
+            </a:r>
+            <a:endParaRPr lang="en-US" sz="1250" dirty="0"/>
+          </a:p>
+        </p:txBody>
+      </p:sp>
+      <p:sp>
+        <p:nvSpPr>
+          <p:cNvPr id="9" name="Text 7"/>
+          <p:cNvSpPr txBox="1"/>
+          <p:nvPr/>
+        </p:nvSpPr>
+        <p:spPr>
+          <a:xfrm>
+            <a:off x="777240" y="6382512"/>
+            <a:ext cx="7424928" cy="256032"/>
+          </a:xfrm>
+          <a:prstGeom prst="rect">
+            <a:avLst/>
+          </a:prstGeom>
+          <a:noFill/>
+          <a:ln/>
+        </p:spPr>
+        <p:txBody>
+          <a:bodyPr wrap="square" lIns="0" tIns="0" rIns="0" bIns="0" rtlCol="0" anchor="ctr"/>
+          <a:lstStyle/>
+          <a:p>
+            <a:pPr indent="0" marL="0">
+              <a:buNone/>
+            </a:pPr>
+            <a:r>
+              <a:rPr lang="en-US" sz="900" dirty="0">
+                <a:solidFill>
+                  <a:srgbClr val="8A8177"/>
+                </a:solidFill>
+                <a:latin typeface="Yu Gothic" pitchFamily="34" charset="0"/>
+                <a:ea typeface="Yu Gothic" pitchFamily="34" charset="-122"/>
+                <a:cs typeface="Yu Gothic" pitchFamily="34" charset="-120"/>
+              </a:rPr>
+              <a:t>第2回　今のChatGPTの使い方を作り直す</a:t>
+            </a:r>
+            <a:endParaRPr lang="en-US" sz="900" dirty="0"/>
+          </a:p>
+        </p:txBody>
+      </p:sp>
+      <p:sp>
+        <p:nvSpPr>
+          <p:cNvPr id="10" name="Text 8"/>
+          <p:cNvSpPr txBox="1"/>
+          <p:nvPr/>
+        </p:nvSpPr>
+        <p:spPr>
+          <a:xfrm>
+            <a:off x="8202168" y="6382512"/>
+            <a:ext cx="3182112" cy="256032"/>
+          </a:xfrm>
+          <a:prstGeom prst="rect">
+            <a:avLst/>
+          </a:prstGeom>
+          <a:noFill/>
+          <a:ln/>
+        </p:spPr>
+        <p:txBody>
+          <a:bodyPr wrap="square" lIns="0" tIns="0" rIns="0" bIns="0" rtlCol="0" anchor="ctr"/>
+          <a:lstStyle/>
+          <a:p>
+            <a:pPr algn="r" indent="0" marL="0">
+              <a:buNone/>
+            </a:pPr>
+            <a:r>
+              <a:rPr lang="en-US" sz="900" dirty="0">
+                <a:solidFill>
+                  <a:srgbClr val="8A8177"/>
+                </a:solidFill>
+                <a:latin typeface="Yu Gothic" pitchFamily="34" charset="0"/>
+                <a:ea typeface="Yu Gothic" pitchFamily="34" charset="-122"/>
+                <a:cs typeface="Yu Gothic" pitchFamily="34" charset="-120"/>
+              </a:rPr>
+              <a:t>ここだけは</a:t>
+            </a:r>
+            <a:endParaRPr lang="en-US" sz="900" dirty="0"/>
+          </a:p>
+        </p:txBody>
+      </p:sp>
+    </p:spTree>
+  </p:cSld>
+  <p:clrMapOvr>
+    <a:masterClrMapping/>
+  </p:clrMapOvr>
+</p:sld>
+</file>
+
+<file path=ppt/slides/slide12.xml><?xml version="1.0" encoding="utf-8"?>
+<p:sld xmlns:a="http://schemas.openxmlformats.org/drawingml/2006/main" xmlns:r="http://schemas.openxmlformats.org/officeDocument/2006/relationships" xmlns:p="http://schemas.openxmlformats.org/presentationml/2006/main">
+  <p:cSld name="Slide 12">
+    <p:bg>
+      <p:bgPr>
+        <a:solidFill>
+          <a:srgbClr val="23201D"/>
+        </a:solidFill>
+      </p:bgPr>
+    </p:bg>
+    <p:spTree>
+      <p:nvGrpSpPr>
+        <p:cNvPr id="1" name=""/>
+        <p:cNvGrpSpPr/>
+        <p:nvPr/>
+      </p:nvGrpSpPr>
+      <p:grpSpPr>
+        <a:xfrm>
+          <a:off x="0" y="0"/>
+          <a:ext cx="0" cy="0"/>
+          <a:chOff x="0" y="0"/>
+          <a:chExt cx="0" cy="0"/>
+        </a:xfrm>
+      </p:grpSpPr>
+      <p:sp>
+        <p:nvSpPr>
+          <p:cNvPr id="2" name="Text 0"/>
+          <p:cNvSpPr txBox="1"/>
+          <p:nvPr/>
+        </p:nvSpPr>
+        <p:spPr>
+          <a:xfrm>
+            <a:off x="777240" y="1280160"/>
+            <a:ext cx="10607040" cy="365760"/>
+          </a:xfrm>
+          <a:prstGeom prst="rect">
+            <a:avLst/>
+          </a:prstGeom>
+          <a:noFill/>
+          <a:ln/>
+        </p:spPr>
+        <p:txBody>
+          <a:bodyPr wrap="square" lIns="0" tIns="0" rIns="0" bIns="0" rtlCol="0" anchor="ctr"/>
+          <a:lstStyle/>
+          <a:p>
+            <a:pPr indent="0" marL="0">
+              <a:buNone/>
+            </a:pPr>
+            <a:r>
+              <a:rPr lang="en-US" sz="1200" b="1" spc="300" kern="0" dirty="0">
+                <a:solidFill>
+                  <a:srgbClr val="B04A2F"/>
+                </a:solidFill>
+                <a:latin typeface="Yu Gothic" pitchFamily="34" charset="0"/>
+                <a:ea typeface="Yu Gothic" pitchFamily="34" charset="-122"/>
+                <a:cs typeface="Yu Gothic" pitchFamily="34" charset="-120"/>
+              </a:rPr>
+              <a:t>今日の宿題</a:t>
+            </a:r>
+            <a:endParaRPr lang="en-US" sz="1200" dirty="0"/>
+          </a:p>
+        </p:txBody>
+      </p:sp>
+      <p:sp>
+        <p:nvSpPr>
+          <p:cNvPr id="3" name="Text 1"/>
+          <p:cNvSpPr txBox="1"/>
+          <p:nvPr/>
+        </p:nvSpPr>
+        <p:spPr>
+          <a:xfrm>
+            <a:off x="777240" y="1691640"/>
+            <a:ext cx="10607040" cy="640080"/>
+          </a:xfrm>
+          <a:prstGeom prst="rect">
+            <a:avLst/>
+          </a:prstGeom>
+          <a:noFill/>
+          <a:ln/>
+        </p:spPr>
+        <p:txBody>
+          <a:bodyPr wrap="square" lIns="0" tIns="0" rIns="0" bIns="0" rtlCol="0" anchor="ctr"/>
+          <a:lstStyle/>
+          <a:p>
+            <a:pPr indent="0" marL="0">
+              <a:buNone/>
+            </a:pPr>
+            <a:r>
+              <a:rPr lang="en-US" sz="3200" b="1" dirty="0">
+                <a:solidFill>
+                  <a:srgbClr val="FFFFFF"/>
+                </a:solidFill>
+                <a:latin typeface="Yu Gothic" pitchFamily="34" charset="0"/>
+                <a:ea typeface="Yu Gothic" pitchFamily="34" charset="-122"/>
+                <a:cs typeface="Yu Gothic" pitchFamily="34" charset="-120"/>
+              </a:rPr>
+              <a:t>ひとつだけ</a:t>
+            </a:r>
+            <a:endParaRPr lang="en-US" sz="3200" dirty="0"/>
+          </a:p>
+        </p:txBody>
+      </p:sp>
+      <p:sp>
+        <p:nvSpPr>
+          <p:cNvPr id="4" name="Shape 2"/>
+          <p:cNvSpPr/>
+          <p:nvPr/>
+        </p:nvSpPr>
+        <p:spPr>
+          <a:xfrm>
+            <a:off x="777240" y="2651760"/>
+            <a:ext cx="10607040" cy="1371600"/>
+          </a:xfrm>
+          <a:prstGeom prst="rect">
+            <a:avLst/>
+          </a:prstGeom>
+          <a:solidFill>
+            <a:srgbClr val="2E2A26"/>
+          </a:solidFill>
+          <a:ln w="12700">
+            <a:solidFill>
+              <a:srgbClr val="B04A2F"/>
+            </a:solidFill>
+            <a:prstDash val="solid"/>
+          </a:ln>
+        </p:spPr>
+      </p:sp>
+      <p:sp>
+        <p:nvSpPr>
+          <p:cNvPr id="5" name="Text 3"/>
+          <p:cNvSpPr txBox="1"/>
+          <p:nvPr/>
+        </p:nvSpPr>
+        <p:spPr>
+          <a:xfrm>
+            <a:off x="1234440" y="2743200"/>
+            <a:ext cx="9692640" cy="1188720"/>
+          </a:xfrm>
+          <a:prstGeom prst="rect">
+            <a:avLst/>
+          </a:prstGeom>
+          <a:noFill/>
+          <a:ln/>
+        </p:spPr>
+        <p:txBody>
+          <a:bodyPr wrap="square" lIns="0" tIns="0" rIns="0" bIns="0" rtlCol="0" anchor="ctr"/>
+          <a:lstStyle/>
+          <a:p>
+            <a:pPr indent="0" marL="0">
+              <a:lnSpc>
+                <a:spcPct val="140000"/>
+              </a:lnSpc>
+              <a:buNone/>
+            </a:pPr>
+            <a:r>
+              <a:rPr lang="en-US" sz="1900" b="1" dirty="0">
+                <a:solidFill>
+                  <a:srgbClr val="FFFFFF"/>
+                </a:solidFill>
+                <a:latin typeface="Yu Gothic" pitchFamily="34" charset="0"/>
+                <a:ea typeface="Yu Gothic" pitchFamily="34" charset="-122"/>
+                <a:cs typeface="Yu Gothic" pitchFamily="34" charset="-120"/>
+              </a:rPr>
+              <a:t>明日から1週間、その業務は必ずこの箱の中でやる。新しい会話を開かない。</a:t>
+            </a:r>
+            <a:endParaRPr lang="en-US" sz="1900" dirty="0"/>
+          </a:p>
+        </p:txBody>
+      </p:sp>
+      <p:sp>
+        <p:nvSpPr>
+          <p:cNvPr id="6" name="Text 4"/>
+          <p:cNvSpPr txBox="1"/>
+          <p:nvPr/>
+        </p:nvSpPr>
+        <p:spPr>
+          <a:xfrm>
+            <a:off x="777240" y="4297680"/>
+            <a:ext cx="10607040" cy="274320"/>
+          </a:xfrm>
+          <a:prstGeom prst="rect">
+            <a:avLst/>
+          </a:prstGeom>
+          <a:noFill/>
+          <a:ln/>
+        </p:spPr>
+        <p:txBody>
+          <a:bodyPr wrap="square" lIns="0" tIns="0" rIns="0" bIns="0" rtlCol="0" anchor="ctr"/>
+          <a:lstStyle/>
+          <a:p>
+            <a:pPr indent="0" marL="0">
+              <a:buNone/>
+            </a:pPr>
+            <a:r>
+              <a:rPr lang="en-US" sz="1000" b="1" spc="200" kern="0" dirty="0">
+                <a:solidFill>
+                  <a:srgbClr val="B04A2F"/>
+                </a:solidFill>
+                <a:latin typeface="Yu Gothic" pitchFamily="34" charset="0"/>
+                <a:ea typeface="Yu Gothic" pitchFamily="34" charset="-122"/>
+                <a:cs typeface="Yu Gothic" pitchFamily="34" charset="-120"/>
+              </a:rPr>
+              <a:t>なぜこの宿題か</a:t>
+            </a:r>
+            <a:endParaRPr lang="en-US" sz="1000" dirty="0"/>
+          </a:p>
+        </p:txBody>
+      </p:sp>
+      <p:sp>
+        <p:nvSpPr>
+          <p:cNvPr id="7" name="Text 5"/>
+          <p:cNvSpPr txBox="1"/>
+          <p:nvPr/>
+        </p:nvSpPr>
+        <p:spPr>
+          <a:xfrm>
+            <a:off x="777240" y="4572000"/>
+            <a:ext cx="9546336" cy="914400"/>
+          </a:xfrm>
+          <a:prstGeom prst="rect">
+            <a:avLst/>
+          </a:prstGeom>
+          <a:noFill/>
+          <a:ln/>
+        </p:spPr>
+        <p:txBody>
+          <a:bodyPr wrap="square" lIns="0" tIns="0" rIns="0" bIns="0" rtlCol="0" anchor="ctr"/>
+          <a:lstStyle/>
+          <a:p>
+            <a:pPr indent="0" marL="0">
+              <a:lnSpc>
+                <a:spcPct val="145000"/>
+              </a:lnSpc>
+              <a:buNone/>
+            </a:pPr>
+            <a:r>
+              <a:rPr lang="en-US" sz="1350" dirty="0">
+                <a:solidFill>
+                  <a:srgbClr val="CFC6B8"/>
+                </a:solidFill>
+                <a:latin typeface="Yu Gothic" pitchFamily="34" charset="0"/>
+                <a:ea typeface="Yu Gothic" pitchFamily="34" charset="-122"/>
+                <a:cs typeface="Yu Gothic" pitchFamily="34" charset="-120"/>
+              </a:rPr>
+              <a:t>箱の中で作業する習慣がつくと、資料も履歴も自動でたまります。逆にここで新しい会話を開く癖が残ると、第5回で作る専用AIも使われずに終わります。1週間だけ、意識してみてください。</a:t>
+            </a:r>
+            <a:endParaRPr lang="en-US" sz="1350" dirty="0"/>
+          </a:p>
+        </p:txBody>
+      </p:sp>
+      <p:sp>
+        <p:nvSpPr>
+          <p:cNvPr id="8" name="Text 6"/>
+          <p:cNvSpPr txBox="1"/>
+          <p:nvPr/>
+        </p:nvSpPr>
+        <p:spPr>
+          <a:xfrm>
+            <a:off x="777240" y="6382512"/>
+            <a:ext cx="10607040" cy="256032"/>
+          </a:xfrm>
+          <a:prstGeom prst="rect">
+            <a:avLst/>
+          </a:prstGeom>
+          <a:noFill/>
+          <a:ln/>
+        </p:spPr>
+        <p:txBody>
+          <a:bodyPr wrap="square" lIns="0" tIns="0" rIns="0" bIns="0" rtlCol="0" anchor="ctr"/>
+          <a:lstStyle/>
+          <a:p>
+            <a:pPr indent="0" marL="0">
+              <a:buNone/>
+            </a:pPr>
+            <a:r>
+              <a:rPr lang="en-US" sz="900" dirty="0">
+                <a:solidFill>
+                  <a:srgbClr val="6E6558"/>
+                </a:solidFill>
+                <a:latin typeface="Yu Gothic" pitchFamily="34" charset="0"/>
+                <a:ea typeface="Yu Gothic" pitchFamily="34" charset="-122"/>
+                <a:cs typeface="Yu Gothic" pitchFamily="34" charset="-120"/>
+              </a:rPr>
+              <a:t>第2回　今のChatGPTの使い方を作り直す</a:t>
+            </a:r>
+            <a:endParaRPr lang="en-US" sz="900" dirty="0"/>
+          </a:p>
+        </p:txBody>
+      </p:sp>
+    </p:spTree>
+  </p:cSld>
+  <p:clrMapOvr>
+    <a:masterClrMapping/>
+  </p:clrMapOvr>
+</p:sld>
+</file>
+
 <file path=ppt/slides/slide2.xml><?xml version="1.0" encoding="utf-8"?>
 <p:sld xmlns:a="http://schemas.openxmlformats.org/drawingml/2006/main" xmlns:r="http://schemas.openxmlformats.org/officeDocument/2006/relationships" xmlns:p="http://schemas.openxmlformats.org/presentationml/2006/main">
   <p:cSld name="Slide 2">
@@ -1712,7 +3434,7 @@
         </p:nvSpPr>
         <p:spPr>
           <a:xfrm>
-            <a:off x="777240" y="777240"/>
+            <a:off x="777240" y="566928"/>
             <a:ext cx="10607040" cy="274320"/>
           </a:xfrm>
           <a:prstGeom prst="rect">
@@ -1737,7 +3459,7 @@
                 <a:ea typeface="Yu Gothic" pitchFamily="34" charset="-122"/>
                 <a:cs typeface="Yu Gothic" pitchFamily="34" charset="-120"/>
               </a:rPr>
-              <a:t>今日のゴール</a:t>
+              <a:t>今日の出発点</a:t>
             </a:r>
             <a:endParaRPr lang="en-US" sz="1100" dirty="0"/>
           </a:p>
@@ -1751,27 +3473,24 @@
         </p:nvSpPr>
         <p:spPr>
           <a:xfrm>
-            <a:off x="777240" y="1280160"/>
-            <a:ext cx="9758477" cy="1828800"/>
-          </a:xfrm>
-          <a:prstGeom prst="rect">
-            <a:avLst/>
-          </a:prstGeom>
-          <a:noFill/>
-          <a:ln/>
-        </p:spPr>
-        <p:txBody>
-          <a:bodyPr wrap="square" lIns="0" tIns="0" rIns="0" bIns="0" rtlCol="0" anchor="ctr"/>
-          <a:lstStyle/>
-          <a:p>
-            <a:pPr indent="0" marL="0">
-              <a:lnSpc>
-                <a:spcPct val="145000"/>
-              </a:lnSpc>
-              <a:buNone/>
-            </a:pPr>
-            <a:r>
-              <a:rPr lang="en-US" sz="2800" b="1" dirty="0">
+            <a:off x="777240" y="896112"/>
+            <a:ext cx="10607040" cy="640080"/>
+          </a:xfrm>
+          <a:prstGeom prst="rect">
+            <a:avLst/>
+          </a:prstGeom>
+          <a:noFill/>
+          <a:ln/>
+        </p:spPr>
+        <p:txBody>
+          <a:bodyPr wrap="square" lIns="0" tIns="0" rIns="0" bIns="0" rtlCol="0" anchor="ctr"/>
+          <a:lstStyle/>
+          <a:p>
+            <a:pPr indent="0" marL="0">
+              <a:buNone/>
+            </a:pPr>
+            <a:r>
+              <a:rPr lang="en-US" sz="2600" b="1" dirty="0">
                 <a:solidFill>
                   <a:srgbClr val="23201D"/>
                 </a:solidFill>
@@ -1779,9 +3498,9 @@
                 <a:ea typeface="Yu Gothic" pitchFamily="34" charset="-122"/>
                 <a:cs typeface="Yu Gothic" pitchFamily="34" charset="-120"/>
               </a:rPr>
-              <a:t>同じ説明を毎回打たなくて済む状態にします。うまくいった結果が、次回も使える形で残ります。</a:t>
-            </a:r>
-            <a:endParaRPr lang="en-US" sz="2800" dirty="0"/>
+              <a:t>うまくいった指示が、翌日にはもう見つからない。</a:t>
+            </a:r>
+            <a:endParaRPr lang="en-US" sz="2600" dirty="0"/>
           </a:p>
         </p:txBody>
       </p:sp>
@@ -1793,14 +3512,323 @@
         </p:nvSpPr>
         <p:spPr>
           <a:xfrm>
-            <a:off x="777240" y="3429000"/>
-            <a:ext cx="10607040" cy="18288"/>
+            <a:off x="777240" y="1783080"/>
+            <a:ext cx="10607040" cy="713232"/>
           </a:xfrm>
           <a:prstGeom prst="rect">
             <a:avLst/>
           </a:prstGeom>
           <a:solidFill>
-            <a:srgbClr val="EDE7DB"/>
+            <a:srgbClr val="FFFFFF"/>
+          </a:solidFill>
+          <a:ln w="12700">
+            <a:solidFill>
+              <a:srgbClr val="EDE7DB"/>
+            </a:solidFill>
+            <a:prstDash val="solid"/>
+          </a:ln>
+        </p:spPr>
+      </p:sp>
+      <p:sp>
+        <p:nvSpPr>
+          <p:cNvPr id="5" name="Text 3"/>
+          <p:cNvSpPr txBox="1"/>
+          <p:nvPr/>
+        </p:nvSpPr>
+        <p:spPr>
+          <a:xfrm>
+            <a:off x="1051560" y="1783080"/>
+            <a:ext cx="365760" cy="713232"/>
+          </a:xfrm>
+          <a:prstGeom prst="rect">
+            <a:avLst/>
+          </a:prstGeom>
+          <a:noFill/>
+          <a:ln/>
+        </p:spPr>
+        <p:txBody>
+          <a:bodyPr wrap="square" lIns="0" tIns="0" rIns="0" bIns="0" rtlCol="0" anchor="ctr"/>
+          <a:lstStyle/>
+          <a:p>
+            <a:pPr indent="0" marL="0">
+              <a:buNone/>
+            </a:pPr>
+            <a:r>
+              <a:rPr lang="en-US" sz="1400" dirty="0">
+                <a:solidFill>
+                  <a:srgbClr val="8A8177"/>
+                </a:solidFill>
+                <a:latin typeface="Yu Gothic" pitchFamily="34" charset="0"/>
+                <a:ea typeface="Yu Gothic" pitchFamily="34" charset="-122"/>
+                <a:cs typeface="Yu Gothic" pitchFamily="34" charset="-120"/>
+              </a:rPr>
+              <a:t>―</a:t>
+            </a:r>
+            <a:endParaRPr lang="en-US" sz="1400" dirty="0"/>
+          </a:p>
+        </p:txBody>
+      </p:sp>
+      <p:sp>
+        <p:nvSpPr>
+          <p:cNvPr id="6" name="Text 4"/>
+          <p:cNvSpPr txBox="1"/>
+          <p:nvPr/>
+        </p:nvSpPr>
+        <p:spPr>
+          <a:xfrm>
+            <a:off x="1508760" y="1783080"/>
+            <a:ext cx="9601200" cy="713232"/>
+          </a:xfrm>
+          <a:prstGeom prst="rect">
+            <a:avLst/>
+          </a:prstGeom>
+          <a:noFill/>
+          <a:ln/>
+        </p:spPr>
+        <p:txBody>
+          <a:bodyPr wrap="square" lIns="0" tIns="0" rIns="0" bIns="0" rtlCol="0" anchor="ctr"/>
+          <a:lstStyle/>
+          <a:p>
+            <a:pPr indent="0" marL="0">
+              <a:buNone/>
+            </a:pPr>
+            <a:r>
+              <a:rPr lang="en-US" sz="1500" dirty="0">
+                <a:solidFill>
+                  <a:srgbClr val="23201D"/>
+                </a:solidFill>
+                <a:latin typeface="Yu Gothic" pitchFamily="34" charset="0"/>
+                <a:ea typeface="Yu Gothic" pitchFamily="34" charset="-122"/>
+                <a:cs typeface="Yu Gothic" pitchFamily="34" charset="-120"/>
+              </a:rPr>
+              <a:t>毎回、同じ会社の説明を打ち直している</a:t>
+            </a:r>
+            <a:endParaRPr lang="en-US" sz="1500" dirty="0"/>
+          </a:p>
+        </p:txBody>
+      </p:sp>
+      <p:sp>
+        <p:nvSpPr>
+          <p:cNvPr id="7" name="Shape 5"/>
+          <p:cNvSpPr/>
+          <p:nvPr/>
+        </p:nvSpPr>
+        <p:spPr>
+          <a:xfrm>
+            <a:off x="777240" y="2624328"/>
+            <a:ext cx="10607040" cy="713232"/>
+          </a:xfrm>
+          <a:prstGeom prst="rect">
+            <a:avLst/>
+          </a:prstGeom>
+          <a:solidFill>
+            <a:srgbClr val="FFFFFF"/>
+          </a:solidFill>
+          <a:ln w="12700">
+            <a:solidFill>
+              <a:srgbClr val="EDE7DB"/>
+            </a:solidFill>
+            <a:prstDash val="solid"/>
+          </a:ln>
+        </p:spPr>
+      </p:sp>
+      <p:sp>
+        <p:nvSpPr>
+          <p:cNvPr id="8" name="Text 6"/>
+          <p:cNvSpPr txBox="1"/>
+          <p:nvPr/>
+        </p:nvSpPr>
+        <p:spPr>
+          <a:xfrm>
+            <a:off x="1051560" y="2624328"/>
+            <a:ext cx="365760" cy="713232"/>
+          </a:xfrm>
+          <a:prstGeom prst="rect">
+            <a:avLst/>
+          </a:prstGeom>
+          <a:noFill/>
+          <a:ln/>
+        </p:spPr>
+        <p:txBody>
+          <a:bodyPr wrap="square" lIns="0" tIns="0" rIns="0" bIns="0" rtlCol="0" anchor="ctr"/>
+          <a:lstStyle/>
+          <a:p>
+            <a:pPr indent="0" marL="0">
+              <a:buNone/>
+            </a:pPr>
+            <a:r>
+              <a:rPr lang="en-US" sz="1400" dirty="0">
+                <a:solidFill>
+                  <a:srgbClr val="8A8177"/>
+                </a:solidFill>
+                <a:latin typeface="Yu Gothic" pitchFamily="34" charset="0"/>
+                <a:ea typeface="Yu Gothic" pitchFamily="34" charset="-122"/>
+                <a:cs typeface="Yu Gothic" pitchFamily="34" charset="-120"/>
+              </a:rPr>
+              <a:t>―</a:t>
+            </a:r>
+            <a:endParaRPr lang="en-US" sz="1400" dirty="0"/>
+          </a:p>
+        </p:txBody>
+      </p:sp>
+      <p:sp>
+        <p:nvSpPr>
+          <p:cNvPr id="9" name="Text 7"/>
+          <p:cNvSpPr txBox="1"/>
+          <p:nvPr/>
+        </p:nvSpPr>
+        <p:spPr>
+          <a:xfrm>
+            <a:off x="1508760" y="2624328"/>
+            <a:ext cx="9601200" cy="713232"/>
+          </a:xfrm>
+          <a:prstGeom prst="rect">
+            <a:avLst/>
+          </a:prstGeom>
+          <a:noFill/>
+          <a:ln/>
+        </p:spPr>
+        <p:txBody>
+          <a:bodyPr wrap="square" lIns="0" tIns="0" rIns="0" bIns="0" rtlCol="0" anchor="ctr"/>
+          <a:lstStyle/>
+          <a:p>
+            <a:pPr indent="0" marL="0">
+              <a:buNone/>
+            </a:pPr>
+            <a:r>
+              <a:rPr lang="en-US" sz="1500" dirty="0">
+                <a:solidFill>
+                  <a:srgbClr val="23201D"/>
+                </a:solidFill>
+                <a:latin typeface="Yu Gothic" pitchFamily="34" charset="0"/>
+                <a:ea typeface="Yu Gothic" pitchFamily="34" charset="-122"/>
+                <a:cs typeface="Yu Gothic" pitchFamily="34" charset="-120"/>
+              </a:rPr>
+              <a:t>良い答えが出たのに、その指示文がどこにあるか分からない</a:t>
+            </a:r>
+            <a:endParaRPr lang="en-US" sz="1500" dirty="0"/>
+          </a:p>
+        </p:txBody>
+      </p:sp>
+      <p:sp>
+        <p:nvSpPr>
+          <p:cNvPr id="10" name="Shape 8"/>
+          <p:cNvSpPr/>
+          <p:nvPr/>
+        </p:nvSpPr>
+        <p:spPr>
+          <a:xfrm>
+            <a:off x="777240" y="3465576"/>
+            <a:ext cx="10607040" cy="713232"/>
+          </a:xfrm>
+          <a:prstGeom prst="rect">
+            <a:avLst/>
+          </a:prstGeom>
+          <a:solidFill>
+            <a:srgbClr val="FFFFFF"/>
+          </a:solidFill>
+          <a:ln w="12700">
+            <a:solidFill>
+              <a:srgbClr val="EDE7DB"/>
+            </a:solidFill>
+            <a:prstDash val="solid"/>
+          </a:ln>
+        </p:spPr>
+      </p:sp>
+      <p:sp>
+        <p:nvSpPr>
+          <p:cNvPr id="11" name="Text 9"/>
+          <p:cNvSpPr txBox="1"/>
+          <p:nvPr/>
+        </p:nvSpPr>
+        <p:spPr>
+          <a:xfrm>
+            <a:off x="1051560" y="3465576"/>
+            <a:ext cx="365760" cy="713232"/>
+          </a:xfrm>
+          <a:prstGeom prst="rect">
+            <a:avLst/>
+          </a:prstGeom>
+          <a:noFill/>
+          <a:ln/>
+        </p:spPr>
+        <p:txBody>
+          <a:bodyPr wrap="square" lIns="0" tIns="0" rIns="0" bIns="0" rtlCol="0" anchor="ctr"/>
+          <a:lstStyle/>
+          <a:p>
+            <a:pPr indent="0" marL="0">
+              <a:buNone/>
+            </a:pPr>
+            <a:r>
+              <a:rPr lang="en-US" sz="1400" dirty="0">
+                <a:solidFill>
+                  <a:srgbClr val="8A8177"/>
+                </a:solidFill>
+                <a:latin typeface="Yu Gothic" pitchFamily="34" charset="0"/>
+                <a:ea typeface="Yu Gothic" pitchFamily="34" charset="-122"/>
+                <a:cs typeface="Yu Gothic" pitchFamily="34" charset="-120"/>
+              </a:rPr>
+              <a:t>―</a:t>
+            </a:r>
+            <a:endParaRPr lang="en-US" sz="1400" dirty="0"/>
+          </a:p>
+        </p:txBody>
+      </p:sp>
+      <p:sp>
+        <p:nvSpPr>
+          <p:cNvPr id="12" name="Text 10"/>
+          <p:cNvSpPr txBox="1"/>
+          <p:nvPr/>
+        </p:nvSpPr>
+        <p:spPr>
+          <a:xfrm>
+            <a:off x="1508760" y="3465576"/>
+            <a:ext cx="9601200" cy="713232"/>
+          </a:xfrm>
+          <a:prstGeom prst="rect">
+            <a:avLst/>
+          </a:prstGeom>
+          <a:noFill/>
+          <a:ln/>
+        </p:spPr>
+        <p:txBody>
+          <a:bodyPr wrap="square" lIns="0" tIns="0" rIns="0" bIns="0" rtlCol="0" anchor="ctr"/>
+          <a:lstStyle/>
+          <a:p>
+            <a:pPr indent="0" marL="0">
+              <a:buNone/>
+            </a:pPr>
+            <a:r>
+              <a:rPr lang="en-US" sz="1500" dirty="0">
+                <a:solidFill>
+                  <a:srgbClr val="23201D"/>
+                </a:solidFill>
+                <a:latin typeface="Yu Gothic" pitchFamily="34" charset="0"/>
+                <a:ea typeface="Yu Gothic" pitchFamily="34" charset="-122"/>
+                <a:cs typeface="Yu Gothic" pitchFamily="34" charset="-120"/>
+              </a:rPr>
+              <a:t>だから、いつまで経っても自分の中にしか蓄積されない</a:t>
+            </a:r>
+            <a:endParaRPr lang="en-US" sz="1500" dirty="0"/>
+          </a:p>
+        </p:txBody>
+      </p:sp>
+      <p:sp>
+        <p:nvSpPr>
+          <p:cNvPr id="13" name="Shape 11"/>
+          <p:cNvSpPr/>
+          <p:nvPr/>
+        </p:nvSpPr>
+        <p:spPr>
+          <a:xfrm>
+            <a:off x="777240" y="4526280"/>
+            <a:ext cx="10607040" cy="914400"/>
+          </a:xfrm>
+          <a:prstGeom prst="rect">
+            <a:avLst/>
+          </a:prstGeom>
+          <a:solidFill>
+            <a:srgbClr val="B04A2F"/>
           </a:solidFill>
           <a:ln w="12700">
             <a:solidFill>
@@ -1812,14 +3840,14 @@
       </p:sp>
       <p:sp>
         <p:nvSpPr>
-          <p:cNvPr id="5" name="Text 3"/>
-          <p:cNvSpPr txBox="1"/>
-          <p:nvPr/>
-        </p:nvSpPr>
-        <p:spPr>
-          <a:xfrm>
-            <a:off x="777240" y="3657600"/>
-            <a:ext cx="9015984" cy="822960"/>
+          <p:cNvPr id="14" name="Text 12"/>
+          <p:cNvSpPr txBox="1"/>
+          <p:nvPr/>
+        </p:nvSpPr>
+        <p:spPr>
+          <a:xfrm>
+            <a:off x="1143000" y="4526280"/>
+            <a:ext cx="9875520" cy="914400"/>
           </a:xfrm>
           <a:prstGeom prst="rect">
             <a:avLst/>
@@ -1833,84 +3861,59 @@
           <a:p>
             <a:pPr indent="0" marL="0">
               <a:lnSpc>
-                <a:spcPct val="140000"/>
+                <a:spcPct val="130000"/>
               </a:lnSpc>
               <a:buNone/>
             </a:pPr>
             <a:r>
-              <a:rPr lang="en-US" sz="1500" dirty="0">
-                <a:solidFill>
-                  <a:srgbClr val="5A534A"/>
-                </a:solidFill>
-                <a:latin typeface="Yu Gothic" pitchFamily="34" charset="0"/>
-                <a:ea typeface="Yu Gothic" pitchFamily="34" charset="-122"/>
-                <a:cs typeface="Yu Gothic" pitchFamily="34" charset="-120"/>
-              </a:rPr>
-              <a:t>今日は新しいことを覚える回ではなく、いまの使い方を作り直す回です。</a:t>
-            </a:r>
-            <a:endParaRPr lang="en-US" sz="1500" dirty="0"/>
-          </a:p>
-        </p:txBody>
-      </p:sp>
-      <p:sp>
-        <p:nvSpPr>
-          <p:cNvPr id="6" name="Shape 4"/>
-          <p:cNvSpPr/>
-          <p:nvPr/>
-        </p:nvSpPr>
-        <p:spPr>
-          <a:xfrm>
-            <a:off x="777240" y="4846320"/>
-            <a:ext cx="10607040" cy="777240"/>
-          </a:xfrm>
-          <a:prstGeom prst="rect">
-            <a:avLst/>
-          </a:prstGeom>
-          <a:solidFill>
-            <a:srgbClr val="EDE7DB"/>
-          </a:solidFill>
-          <a:ln w="12700">
-            <a:solidFill>
-              <a:srgbClr val="333333"/>
-            </a:solidFill>
-            <a:prstDash val="solid"/>
-          </a:ln>
-        </p:spPr>
-      </p:sp>
-      <p:sp>
-        <p:nvSpPr>
-          <p:cNvPr id="7" name="Text 5"/>
-          <p:cNvSpPr txBox="1"/>
-          <p:nvPr/>
-        </p:nvSpPr>
-        <p:spPr>
-          <a:xfrm>
-            <a:off x="960120" y="4956048"/>
-            <a:ext cx="1956816" cy="237744"/>
-          </a:xfrm>
-          <a:prstGeom prst="rect">
-            <a:avLst/>
-          </a:prstGeom>
-          <a:noFill/>
-          <a:ln/>
-        </p:spPr>
-        <p:txBody>
-          <a:bodyPr wrap="square" lIns="0" tIns="0" rIns="0" bIns="0" rtlCol="0" anchor="ctr"/>
-          <a:lstStyle/>
-          <a:p>
-            <a:pPr indent="0" marL="0">
-              <a:buNone/>
-            </a:pPr>
-            <a:r>
-              <a:rPr lang="en-US" sz="900" b="1" dirty="0">
-                <a:solidFill>
-                  <a:srgbClr val="B04A2F"/>
-                </a:solidFill>
-                <a:latin typeface="Yu Gothic" pitchFamily="34" charset="0"/>
-                <a:ea typeface="Yu Gothic" pitchFamily="34" charset="-122"/>
-                <a:cs typeface="Yu Gothic" pitchFamily="34" charset="-120"/>
-              </a:rPr>
-              <a:t>0-15分</a:t>
+              <a:rPr lang="en-US" sz="1800" b="1" dirty="0">
+                <a:solidFill>
+                  <a:srgbClr val="FFFFFF"/>
+                </a:solidFill>
+                <a:latin typeface="Yu Gothic" pitchFamily="34" charset="0"/>
+                <a:ea typeface="Yu Gothic" pitchFamily="34" charset="-122"/>
+                <a:cs typeface="Yu Gothic" pitchFamily="34" charset="-120"/>
+              </a:rPr>
+              <a:t>問題は使い方の巧拙ではありません。会話が使い捨てになっていることです。</a:t>
+            </a:r>
+            <a:endParaRPr lang="en-US" sz="1800" dirty="0"/>
+          </a:p>
+        </p:txBody>
+      </p:sp>
+      <p:sp>
+        <p:nvSpPr>
+          <p:cNvPr id="15" name="Text 13"/>
+          <p:cNvSpPr txBox="1"/>
+          <p:nvPr/>
+        </p:nvSpPr>
+        <p:spPr>
+          <a:xfrm>
+            <a:off x="777240" y="6382512"/>
+            <a:ext cx="7424928" cy="256032"/>
+          </a:xfrm>
+          <a:prstGeom prst="rect">
+            <a:avLst/>
+          </a:prstGeom>
+          <a:noFill/>
+          <a:ln/>
+        </p:spPr>
+        <p:txBody>
+          <a:bodyPr wrap="square" lIns="0" tIns="0" rIns="0" bIns="0" rtlCol="0" anchor="ctr"/>
+          <a:lstStyle/>
+          <a:p>
+            <a:pPr indent="0" marL="0">
+              <a:buNone/>
+            </a:pPr>
+            <a:r>
+              <a:rPr lang="en-US" sz="900" dirty="0">
+                <a:solidFill>
+                  <a:srgbClr val="8A8177"/>
+                </a:solidFill>
+                <a:latin typeface="Yu Gothic" pitchFamily="34" charset="0"/>
+                <a:ea typeface="Yu Gothic" pitchFamily="34" charset="-122"/>
+                <a:cs typeface="Yu Gothic" pitchFamily="34" charset="-120"/>
+              </a:rPr>
+              <a:t>第2回　今のChatGPTの使い方を作り直す</a:t>
             </a:r>
             <a:endParaRPr lang="en-US" sz="900" dirty="0"/>
           </a:p>
@@ -1918,377 +3921,26 @@
       </p:sp>
       <p:sp>
         <p:nvSpPr>
-          <p:cNvPr id="8" name="Text 6"/>
-          <p:cNvSpPr txBox="1"/>
-          <p:nvPr/>
-        </p:nvSpPr>
-        <p:spPr>
-          <a:xfrm>
-            <a:off x="960120" y="5193792"/>
-            <a:ext cx="1956816" cy="365760"/>
-          </a:xfrm>
-          <a:prstGeom prst="rect">
-            <a:avLst/>
-          </a:prstGeom>
-          <a:noFill/>
-          <a:ln/>
-        </p:spPr>
-        <p:txBody>
-          <a:bodyPr wrap="square" lIns="0" tIns="0" rIns="0" bIns="0" rtlCol="0" anchor="ctr"/>
-          <a:lstStyle/>
-          <a:p>
-            <a:pPr indent="0" marL="0">
-              <a:buNone/>
-            </a:pPr>
-            <a:r>
-              <a:rPr lang="en-US" sz="1100" dirty="0">
-                <a:solidFill>
-                  <a:srgbClr val="23201D"/>
-                </a:solidFill>
-                <a:latin typeface="Yu Gothic" pitchFamily="34" charset="0"/>
-                <a:ea typeface="Yu Gothic" pitchFamily="34" charset="-122"/>
-                <a:cs typeface="Yu Gothic" pitchFamily="34" charset="-120"/>
-              </a:rPr>
-              <a:t>前回の宿題を実物で</a:t>
-            </a:r>
-            <a:endParaRPr lang="en-US" sz="1100" dirty="0"/>
-          </a:p>
-        </p:txBody>
-      </p:sp>
-      <p:sp>
-        <p:nvSpPr>
-          <p:cNvPr id="9" name="Text 7"/>
-          <p:cNvSpPr txBox="1"/>
-          <p:nvPr/>
-        </p:nvSpPr>
-        <p:spPr>
-          <a:xfrm>
-            <a:off x="3008376" y="4956048"/>
-            <a:ext cx="1956816" cy="237744"/>
-          </a:xfrm>
-          <a:prstGeom prst="rect">
-            <a:avLst/>
-          </a:prstGeom>
-          <a:noFill/>
-          <a:ln/>
-        </p:spPr>
-        <p:txBody>
-          <a:bodyPr wrap="square" lIns="0" tIns="0" rIns="0" bIns="0" rtlCol="0" anchor="ctr"/>
-          <a:lstStyle/>
-          <a:p>
-            <a:pPr indent="0" marL="0">
-              <a:buNone/>
-            </a:pPr>
-            <a:r>
-              <a:rPr lang="en-US" sz="900" b="1" dirty="0">
-                <a:solidFill>
-                  <a:srgbClr val="B04A2F"/>
-                </a:solidFill>
-                <a:latin typeface="Yu Gothic" pitchFamily="34" charset="0"/>
-                <a:ea typeface="Yu Gothic" pitchFamily="34" charset="-122"/>
-                <a:cs typeface="Yu Gothic" pitchFamily="34" charset="-120"/>
-              </a:rPr>
-              <a:t>15-35分</a:t>
-            </a:r>
-            <a:endParaRPr lang="en-US" sz="900" dirty="0"/>
-          </a:p>
-        </p:txBody>
-      </p:sp>
-      <p:sp>
-        <p:nvSpPr>
-          <p:cNvPr id="10" name="Text 8"/>
-          <p:cNvSpPr txBox="1"/>
-          <p:nvPr/>
-        </p:nvSpPr>
-        <p:spPr>
-          <a:xfrm>
-            <a:off x="3008376" y="5193792"/>
-            <a:ext cx="1956816" cy="365760"/>
-          </a:xfrm>
-          <a:prstGeom prst="rect">
-            <a:avLst/>
-          </a:prstGeom>
-          <a:noFill/>
-          <a:ln/>
-        </p:spPr>
-        <p:txBody>
-          <a:bodyPr wrap="square" lIns="0" tIns="0" rIns="0" bIns="0" rtlCol="0" anchor="ctr"/>
-          <a:lstStyle/>
-          <a:p>
-            <a:pPr indent="0" marL="0">
-              <a:buNone/>
-            </a:pPr>
-            <a:r>
-              <a:rPr lang="en-US" sz="1100" dirty="0">
-                <a:solidFill>
-                  <a:srgbClr val="23201D"/>
-                </a:solidFill>
-                <a:latin typeface="Yu Gothic" pitchFamily="34" charset="0"/>
-                <a:ea typeface="Yu Gothic" pitchFamily="34" charset="-122"/>
-                <a:cs typeface="Yu Gothic" pitchFamily="34" charset="-120"/>
-              </a:rPr>
-              <a:t>テーマとデモ</a:t>
-            </a:r>
-            <a:endParaRPr lang="en-US" sz="1100" dirty="0"/>
-          </a:p>
-        </p:txBody>
-      </p:sp>
-      <p:sp>
-        <p:nvSpPr>
-          <p:cNvPr id="11" name="Text 9"/>
-          <p:cNvSpPr txBox="1"/>
-          <p:nvPr/>
-        </p:nvSpPr>
-        <p:spPr>
-          <a:xfrm>
-            <a:off x="5056632" y="4956048"/>
-            <a:ext cx="1956816" cy="237744"/>
-          </a:xfrm>
-          <a:prstGeom prst="rect">
-            <a:avLst/>
-          </a:prstGeom>
-          <a:noFill/>
-          <a:ln/>
-        </p:spPr>
-        <p:txBody>
-          <a:bodyPr wrap="square" lIns="0" tIns="0" rIns="0" bIns="0" rtlCol="0" anchor="ctr"/>
-          <a:lstStyle/>
-          <a:p>
-            <a:pPr indent="0" marL="0">
-              <a:buNone/>
-            </a:pPr>
-            <a:r>
-              <a:rPr lang="en-US" sz="900" b="1" dirty="0">
-                <a:solidFill>
-                  <a:srgbClr val="B04A2F"/>
-                </a:solidFill>
-                <a:latin typeface="Yu Gothic" pitchFamily="34" charset="0"/>
-                <a:ea typeface="Yu Gothic" pitchFamily="34" charset="-122"/>
-                <a:cs typeface="Yu Gothic" pitchFamily="34" charset="-120"/>
-              </a:rPr>
-              <a:t>35-90分</a:t>
-            </a:r>
-            <a:endParaRPr lang="en-US" sz="900" dirty="0"/>
-          </a:p>
-        </p:txBody>
-      </p:sp>
-      <p:sp>
-        <p:nvSpPr>
-          <p:cNvPr id="12" name="Text 10"/>
-          <p:cNvSpPr txBox="1"/>
-          <p:nvPr/>
-        </p:nvSpPr>
-        <p:spPr>
-          <a:xfrm>
-            <a:off x="5056632" y="5193792"/>
-            <a:ext cx="1956816" cy="365760"/>
-          </a:xfrm>
-          <a:prstGeom prst="rect">
-            <a:avLst/>
-          </a:prstGeom>
-          <a:noFill/>
-          <a:ln/>
-        </p:spPr>
-        <p:txBody>
-          <a:bodyPr wrap="square" lIns="0" tIns="0" rIns="0" bIns="0" rtlCol="0" anchor="ctr"/>
-          <a:lstStyle/>
-          <a:p>
-            <a:pPr indent="0" marL="0">
-              <a:buNone/>
-            </a:pPr>
-            <a:r>
-              <a:rPr lang="en-US" sz="1100" dirty="0">
-                <a:solidFill>
-                  <a:srgbClr val="23201D"/>
-                </a:solidFill>
-                <a:latin typeface="Yu Gothic" pitchFamily="34" charset="0"/>
-                <a:ea typeface="Yu Gothic" pitchFamily="34" charset="-122"/>
-                <a:cs typeface="Yu Gothic" pitchFamily="34" charset="-120"/>
-              </a:rPr>
-              <a:t>一緒に手を動かす</a:t>
-            </a:r>
-            <a:endParaRPr lang="en-US" sz="1100" dirty="0"/>
-          </a:p>
-        </p:txBody>
-      </p:sp>
-      <p:sp>
-        <p:nvSpPr>
-          <p:cNvPr id="13" name="Text 11"/>
-          <p:cNvSpPr txBox="1"/>
-          <p:nvPr/>
-        </p:nvSpPr>
-        <p:spPr>
-          <a:xfrm>
-            <a:off x="7104888" y="4956048"/>
-            <a:ext cx="1956816" cy="237744"/>
-          </a:xfrm>
-          <a:prstGeom prst="rect">
-            <a:avLst/>
-          </a:prstGeom>
-          <a:noFill/>
-          <a:ln/>
-        </p:spPr>
-        <p:txBody>
-          <a:bodyPr wrap="square" lIns="0" tIns="0" rIns="0" bIns="0" rtlCol="0" anchor="ctr"/>
-          <a:lstStyle/>
-          <a:p>
-            <a:pPr indent="0" marL="0">
-              <a:buNone/>
-            </a:pPr>
-            <a:r>
-              <a:rPr lang="en-US" sz="900" b="1" dirty="0">
-                <a:solidFill>
-                  <a:srgbClr val="B04A2F"/>
-                </a:solidFill>
-                <a:latin typeface="Yu Gothic" pitchFamily="34" charset="0"/>
-                <a:ea typeface="Yu Gothic" pitchFamily="34" charset="-122"/>
-                <a:cs typeface="Yu Gothic" pitchFamily="34" charset="-120"/>
-              </a:rPr>
-              <a:t>90-105分</a:t>
-            </a:r>
-            <a:endParaRPr lang="en-US" sz="900" dirty="0"/>
-          </a:p>
-        </p:txBody>
-      </p:sp>
-      <p:sp>
-        <p:nvSpPr>
-          <p:cNvPr id="14" name="Text 12"/>
-          <p:cNvSpPr txBox="1"/>
-          <p:nvPr/>
-        </p:nvSpPr>
-        <p:spPr>
-          <a:xfrm>
-            <a:off x="7104888" y="5193792"/>
-            <a:ext cx="1956816" cy="365760"/>
-          </a:xfrm>
-          <a:prstGeom prst="rect">
-            <a:avLst/>
-          </a:prstGeom>
-          <a:noFill/>
-          <a:ln/>
-        </p:spPr>
-        <p:txBody>
-          <a:bodyPr wrap="square" lIns="0" tIns="0" rIns="0" bIns="0" rtlCol="0" anchor="ctr"/>
-          <a:lstStyle/>
-          <a:p>
-            <a:pPr indent="0" marL="0">
-              <a:buNone/>
-            </a:pPr>
-            <a:r>
-              <a:rPr lang="en-US" sz="1100" dirty="0">
-                <a:solidFill>
-                  <a:srgbClr val="23201D"/>
-                </a:solidFill>
-                <a:latin typeface="Yu Gothic" pitchFamily="34" charset="0"/>
-                <a:ea typeface="Yu Gothic" pitchFamily="34" charset="-122"/>
-                <a:cs typeface="Yu Gothic" pitchFamily="34" charset="-120"/>
-              </a:rPr>
-              <a:t>業務への組み込み</a:t>
-            </a:r>
-            <a:endParaRPr lang="en-US" sz="1100" dirty="0"/>
-          </a:p>
-        </p:txBody>
-      </p:sp>
-      <p:sp>
-        <p:nvSpPr>
-          <p:cNvPr id="15" name="Text 13"/>
-          <p:cNvSpPr txBox="1"/>
-          <p:nvPr/>
-        </p:nvSpPr>
-        <p:spPr>
-          <a:xfrm>
-            <a:off x="9153144" y="4956048"/>
-            <a:ext cx="1956816" cy="237744"/>
-          </a:xfrm>
-          <a:prstGeom prst="rect">
-            <a:avLst/>
-          </a:prstGeom>
-          <a:noFill/>
-          <a:ln/>
-        </p:spPr>
-        <p:txBody>
-          <a:bodyPr wrap="square" lIns="0" tIns="0" rIns="0" bIns="0" rtlCol="0" anchor="ctr"/>
-          <a:lstStyle/>
-          <a:p>
-            <a:pPr indent="0" marL="0">
-              <a:buNone/>
-            </a:pPr>
-            <a:r>
-              <a:rPr lang="en-US" sz="900" b="1" dirty="0">
-                <a:solidFill>
-                  <a:srgbClr val="B04A2F"/>
-                </a:solidFill>
-                <a:latin typeface="Yu Gothic" pitchFamily="34" charset="0"/>
-                <a:ea typeface="Yu Gothic" pitchFamily="34" charset="-122"/>
-                <a:cs typeface="Yu Gothic" pitchFamily="34" charset="-120"/>
-              </a:rPr>
-              <a:t>105-120分</a:t>
-            </a:r>
-            <a:endParaRPr lang="en-US" sz="900" dirty="0"/>
-          </a:p>
-        </p:txBody>
-      </p:sp>
-      <p:sp>
-        <p:nvSpPr>
           <p:cNvPr id="16" name="Text 14"/>
           <p:cNvSpPr txBox="1"/>
           <p:nvPr/>
         </p:nvSpPr>
         <p:spPr>
           <a:xfrm>
-            <a:off x="9153144" y="5193792"/>
-            <a:ext cx="1956816" cy="365760"/>
-          </a:xfrm>
-          <a:prstGeom prst="rect">
-            <a:avLst/>
-          </a:prstGeom>
-          <a:noFill/>
-          <a:ln/>
-        </p:spPr>
-        <p:txBody>
-          <a:bodyPr wrap="square" lIns="0" tIns="0" rIns="0" bIns="0" rtlCol="0" anchor="ctr"/>
-          <a:lstStyle/>
-          <a:p>
-            <a:pPr indent="0" marL="0">
-              <a:buNone/>
-            </a:pPr>
-            <a:r>
-              <a:rPr lang="en-US" sz="1100" dirty="0">
-                <a:solidFill>
-                  <a:srgbClr val="23201D"/>
-                </a:solidFill>
-                <a:latin typeface="Yu Gothic" pitchFamily="34" charset="0"/>
-                <a:ea typeface="Yu Gothic" pitchFamily="34" charset="-122"/>
-                <a:cs typeface="Yu Gothic" pitchFamily="34" charset="-120"/>
-              </a:rPr>
-              <a:t>宿題・記録</a:t>
-            </a:r>
-            <a:endParaRPr lang="en-US" sz="1100" dirty="0"/>
-          </a:p>
-        </p:txBody>
-      </p:sp>
-      <p:sp>
-        <p:nvSpPr>
-          <p:cNvPr id="17" name="Text 15"/>
-          <p:cNvSpPr txBox="1"/>
-          <p:nvPr/>
-        </p:nvSpPr>
-        <p:spPr>
-          <a:xfrm>
-            <a:off x="777240" y="6355080"/>
-            <a:ext cx="7424928" cy="274320"/>
-          </a:xfrm>
-          <a:prstGeom prst="rect">
-            <a:avLst/>
-          </a:prstGeom>
-          <a:noFill/>
-          <a:ln/>
-        </p:spPr>
-        <p:txBody>
-          <a:bodyPr wrap="square" lIns="0" tIns="0" rIns="0" bIns="0" rtlCol="0" anchor="ctr"/>
-          <a:lstStyle/>
-          <a:p>
-            <a:pPr indent="0" marL="0">
+            <a:off x="8202168" y="6382512"/>
+            <a:ext cx="3182112" cy="256032"/>
+          </a:xfrm>
+          <a:prstGeom prst="rect">
+            <a:avLst/>
+          </a:prstGeom>
+          <a:noFill/>
+          <a:ln/>
+        </p:spPr>
+        <p:txBody>
+          <a:bodyPr wrap="square" lIns="0" tIns="0" rIns="0" bIns="0" rtlCol="0" anchor="ctr"/>
+          <a:lstStyle/>
+          <a:p>
+            <a:pPr algn="r" indent="0" marL="0">
               <a:buNone/>
             </a:pPr>
             <a:r>
@@ -2300,46 +3952,7 @@
                 <a:ea typeface="Yu Gothic" pitchFamily="34" charset="-122"/>
                 <a:cs typeface="Yu Gothic" pitchFamily="34" charset="-120"/>
               </a:rPr>
-              <a:t>第2回　今のChatGPTの使い方を作り直す</a:t>
-            </a:r>
-            <a:endParaRPr lang="en-US" sz="900" dirty="0"/>
-          </a:p>
-        </p:txBody>
-      </p:sp>
-      <p:sp>
-        <p:nvSpPr>
-          <p:cNvPr id="18" name="Text 16"/>
-          <p:cNvSpPr txBox="1"/>
-          <p:nvPr/>
-        </p:nvSpPr>
-        <p:spPr>
-          <a:xfrm>
-            <a:off x="8202168" y="6355080"/>
-            <a:ext cx="3182112" cy="274320"/>
-          </a:xfrm>
-          <a:prstGeom prst="rect">
-            <a:avLst/>
-          </a:prstGeom>
-          <a:noFill/>
-          <a:ln/>
-        </p:spPr>
-        <p:txBody>
-          <a:bodyPr wrap="square" lIns="0" tIns="0" rIns="0" bIns="0" rtlCol="0" anchor="ctr"/>
-          <a:lstStyle/>
-          <a:p>
-            <a:pPr algn="r" indent="0" marL="0">
-              <a:buNone/>
-            </a:pPr>
-            <a:r>
-              <a:rPr lang="en-US" sz="900" dirty="0">
-                <a:solidFill>
-                  <a:srgbClr val="8A8177"/>
-                </a:solidFill>
-                <a:latin typeface="Yu Gothic" pitchFamily="34" charset="0"/>
-                <a:ea typeface="Yu Gothic" pitchFamily="34" charset="-122"/>
-                <a:cs typeface="Yu Gothic" pitchFamily="34" charset="-120"/>
-              </a:rPr>
-              <a:t>今日のゴール</a:t>
+              <a:t>出発点</a:t>
             </a:r>
             <a:endParaRPr lang="en-US" sz="900" dirty="0"/>
           </a:p>
@@ -2385,7 +3998,7 @@
         </p:nvSpPr>
         <p:spPr>
           <a:xfrm>
-            <a:off x="777240" y="640080"/>
+            <a:off x="777240" y="566928"/>
             <a:ext cx="10607040" cy="274320"/>
           </a:xfrm>
           <a:prstGeom prst="rect">
@@ -2410,7 +4023,7 @@
                 <a:ea typeface="Yu Gothic" pitchFamily="34" charset="-122"/>
                 <a:cs typeface="Yu Gothic" pitchFamily="34" charset="-120"/>
               </a:rPr>
-              <a:t>考え方</a:t>
+              <a:t>今日のゴール</a:t>
             </a:r>
             <a:endParaRPr lang="en-US" sz="1100" dirty="0"/>
           </a:p>
@@ -2424,24 +4037,27 @@
         </p:nvSpPr>
         <p:spPr>
           <a:xfrm>
-            <a:off x="777240" y="960120"/>
-            <a:ext cx="10607040" cy="640080"/>
-          </a:xfrm>
-          <a:prstGeom prst="rect">
-            <a:avLst/>
-          </a:prstGeom>
-          <a:noFill/>
-          <a:ln/>
-        </p:spPr>
-        <p:txBody>
-          <a:bodyPr wrap="square" lIns="0" tIns="0" rIns="0" bIns="0" rtlCol="0" anchor="ctr"/>
-          <a:lstStyle/>
-          <a:p>
-            <a:pPr indent="0" marL="0">
-              <a:buNone/>
-            </a:pPr>
-            <a:r>
-              <a:rPr lang="en-US" sz="2700" b="1" dirty="0">
+            <a:off x="777240" y="1143000"/>
+            <a:ext cx="9864547" cy="1645920"/>
+          </a:xfrm>
+          <a:prstGeom prst="rect">
+            <a:avLst/>
+          </a:prstGeom>
+          <a:noFill/>
+          <a:ln/>
+        </p:spPr>
+        <p:txBody>
+          <a:bodyPr wrap="square" lIns="0" tIns="0" rIns="0" bIns="0" rtlCol="0" anchor="ctr"/>
+          <a:lstStyle/>
+          <a:p>
+            <a:pPr indent="0" marL="0">
+              <a:lnSpc>
+                <a:spcPct val="145000"/>
+              </a:lnSpc>
+              <a:buNone/>
+            </a:pPr>
+            <a:r>
+              <a:rPr lang="en-US" sz="2600" b="1" dirty="0">
                 <a:solidFill>
                   <a:srgbClr val="23201D"/>
                 </a:solidFill>
@@ -2449,9 +4065,9 @@
                 <a:ea typeface="Yu Gothic" pitchFamily="34" charset="-122"/>
                 <a:cs typeface="Yu Gothic" pitchFamily="34" charset="-120"/>
               </a:rPr>
-              <a:t>指示の型 — 5つの要素</a:t>
-            </a:r>
-            <a:endParaRPr lang="en-US" sz="2700" dirty="0"/>
+              <a:t>同じ説明を毎回打たなくて済む状態にします。うまくいった結果が、次回も使える形で残ります。</a:t>
+            </a:r>
+            <a:endParaRPr lang="en-US" sz="2600" dirty="0"/>
           </a:p>
         </p:txBody>
       </p:sp>
@@ -2463,18 +4079,18 @@
         </p:nvSpPr>
         <p:spPr>
           <a:xfrm>
-            <a:off x="777240" y="1783080"/>
-            <a:ext cx="10607040" cy="641909"/>
+            <a:off x="777240" y="3063240"/>
+            <a:ext cx="10607040" cy="18288"/>
           </a:xfrm>
           <a:prstGeom prst="rect">
             <a:avLst/>
           </a:prstGeom>
           <a:solidFill>
-            <a:srgbClr val="FFFFFF"/>
+            <a:srgbClr val="EDE7DB"/>
           </a:solidFill>
           <a:ln w="12700">
             <a:solidFill>
-              <a:srgbClr val="EDE7DB"/>
+              <a:srgbClr val="333333"/>
             </a:solidFill>
             <a:prstDash val="solid"/>
           </a:ln>
@@ -2482,24 +4098,66 @@
       </p:sp>
       <p:sp>
         <p:nvSpPr>
-          <p:cNvPr id="5" name="Shape 3"/>
+          <p:cNvPr id="5" name="Text 3"/>
+          <p:cNvSpPr txBox="1"/>
+          <p:nvPr/>
+        </p:nvSpPr>
+        <p:spPr>
+          <a:xfrm>
+            <a:off x="777240" y="3291840"/>
+            <a:ext cx="9334195" cy="1005840"/>
+          </a:xfrm>
+          <a:prstGeom prst="rect">
+            <a:avLst/>
+          </a:prstGeom>
+          <a:noFill/>
+          <a:ln/>
+        </p:spPr>
+        <p:txBody>
+          <a:bodyPr wrap="square" lIns="0" tIns="0" rIns="0" bIns="0" rtlCol="0" anchor="ctr"/>
+          <a:lstStyle/>
+          <a:p>
+            <a:pPr indent="0" marL="0">
+              <a:lnSpc>
+                <a:spcPct val="140000"/>
+              </a:lnSpc>
+              <a:buNone/>
+            </a:pPr>
+            <a:r>
+              <a:rPr lang="en-US" sz="1450" dirty="0">
+                <a:solidFill>
+                  <a:srgbClr val="5A534A"/>
+                </a:solidFill>
+                <a:latin typeface="Yu Gothic" pitchFamily="34" charset="0"/>
+                <a:ea typeface="Yu Gothic" pitchFamily="34" charset="-122"/>
+                <a:cs typeface="Yu Gothic" pitchFamily="34" charset="-120"/>
+              </a:rPr>
+              <a:t>今日は新しいことを覚える回ではありません。すでにできている使い方を、資産が残る形に組み替えます。</a:t>
+            </a:r>
+            <a:endParaRPr lang="en-US" sz="1450" dirty="0"/>
+          </a:p>
+        </p:txBody>
+      </p:sp>
+      <p:sp>
+        <p:nvSpPr>
+          <p:cNvPr id="6" name="Shape 4"/>
           <p:cNvSpPr/>
           <p:nvPr/>
         </p:nvSpPr>
         <p:spPr>
           <a:xfrm>
-            <a:off x="1033272" y="1912010"/>
-            <a:ext cx="384048" cy="384048"/>
-          </a:xfrm>
-          <a:prstGeom prst="ellipse">
+            <a:off x="777240" y="4754880"/>
+            <a:ext cx="10607040" cy="822960"/>
+          </a:xfrm>
+          <a:prstGeom prst="rect">
             <a:avLst/>
           </a:prstGeom>
           <a:solidFill>
-            <a:srgbClr val="B04A2F"/>
+            <a:srgbClr val="EDE7DB"/>
           </a:solidFill>
           <a:ln w="12700">
             <a:solidFill>
-              <a:srgbClr val="B04A2F"/>
+              <a:srgbClr val="333333"/>
             </a:solidFill>
             <a:prstDash val="solid"/>
           </a:ln>
@@ -2507,69 +4165,69 @@
       </p:sp>
       <p:sp>
         <p:nvSpPr>
-          <p:cNvPr id="6" name="Text 4"/>
-          <p:cNvSpPr txBox="1"/>
-          <p:nvPr/>
-        </p:nvSpPr>
-        <p:spPr>
-          <a:xfrm>
-            <a:off x="1033272" y="1912010"/>
-            <a:ext cx="384048" cy="384048"/>
-          </a:xfrm>
-          <a:prstGeom prst="rect">
-            <a:avLst/>
-          </a:prstGeom>
-          <a:noFill/>
-          <a:ln/>
-        </p:spPr>
-        <p:txBody>
-          <a:bodyPr wrap="square" lIns="0" tIns="0" rIns="0" bIns="0" rtlCol="0" anchor="ctr"/>
-          <a:lstStyle/>
-          <a:p>
-            <a:pPr algn="ctr" indent="0" marL="0">
-              <a:buNone/>
-            </a:pPr>
-            <a:r>
-              <a:rPr lang="en-US" sz="1400" b="1" dirty="0">
-                <a:solidFill>
-                  <a:srgbClr val="FFFFFF"/>
-                </a:solidFill>
-                <a:latin typeface="Yu Gothic" pitchFamily="34" charset="0"/>
-                <a:ea typeface="Yu Gothic" pitchFamily="34" charset="-122"/>
-                <a:cs typeface="Yu Gothic" pitchFamily="34" charset="-120"/>
-              </a:rPr>
-              <a:t>1</a:t>
-            </a:r>
-            <a:endParaRPr lang="en-US" sz="1400" dirty="0"/>
-          </a:p>
-        </p:txBody>
-      </p:sp>
-      <p:sp>
-        <p:nvSpPr>
           <p:cNvPr id="7" name="Text 5"/>
           <p:cNvSpPr txBox="1"/>
           <p:nvPr/>
         </p:nvSpPr>
         <p:spPr>
           <a:xfrm>
-            <a:off x="1645920" y="1874520"/>
-            <a:ext cx="3394253" cy="459029"/>
-          </a:xfrm>
-          <a:prstGeom prst="rect">
-            <a:avLst/>
-          </a:prstGeom>
-          <a:noFill/>
-          <a:ln/>
-        </p:spPr>
-        <p:txBody>
-          <a:bodyPr wrap="square" lIns="0" tIns="0" rIns="0" bIns="0" rtlCol="0" anchor="ctr"/>
-          <a:lstStyle/>
-          <a:p>
-            <a:pPr indent="0" marL="0">
-              <a:buNone/>
-            </a:pPr>
-            <a:r>
-              <a:rPr lang="en-US" sz="1500" b="1" dirty="0">
+            <a:off x="960120" y="4873752"/>
+            <a:ext cx="1956816" cy="237744"/>
+          </a:xfrm>
+          <a:prstGeom prst="rect">
+            <a:avLst/>
+          </a:prstGeom>
+          <a:noFill/>
+          <a:ln/>
+        </p:spPr>
+        <p:txBody>
+          <a:bodyPr wrap="square" lIns="0" tIns="0" rIns="0" bIns="0" rtlCol="0" anchor="ctr"/>
+          <a:lstStyle/>
+          <a:p>
+            <a:pPr indent="0" marL="0">
+              <a:buNone/>
+            </a:pPr>
+            <a:r>
+              <a:rPr lang="en-US" sz="900" b="1" dirty="0">
+                <a:solidFill>
+                  <a:srgbClr val="B04A2F"/>
+                </a:solidFill>
+                <a:latin typeface="Yu Gothic" pitchFamily="34" charset="0"/>
+                <a:ea typeface="Yu Gothic" pitchFamily="34" charset="-122"/>
+                <a:cs typeface="Yu Gothic" pitchFamily="34" charset="-120"/>
+              </a:rPr>
+              <a:t>0-15分</a:t>
+            </a:r>
+            <a:endParaRPr lang="en-US" sz="900" dirty="0"/>
+          </a:p>
+        </p:txBody>
+      </p:sp>
+      <p:sp>
+        <p:nvSpPr>
+          <p:cNvPr id="8" name="Text 6"/>
+          <p:cNvSpPr txBox="1"/>
+          <p:nvPr/>
+        </p:nvSpPr>
+        <p:spPr>
+          <a:xfrm>
+            <a:off x="960120" y="5111496"/>
+            <a:ext cx="1956816" cy="384048"/>
+          </a:xfrm>
+          <a:prstGeom prst="rect">
+            <a:avLst/>
+          </a:prstGeom>
+          <a:noFill/>
+          <a:ln/>
+        </p:spPr>
+        <p:txBody>
+          <a:bodyPr wrap="square" lIns="0" tIns="0" rIns="0" bIns="0" rtlCol="0" anchor="ctr"/>
+          <a:lstStyle/>
+          <a:p>
+            <a:pPr indent="0" marL="0">
+              <a:buNone/>
+            </a:pPr>
+            <a:r>
+              <a:rPr lang="en-US" sz="1100" dirty="0">
                 <a:solidFill>
                   <a:srgbClr val="23201D"/>
                 </a:solidFill>
@@ -2577,103 +4235,89 @@
                 <a:ea typeface="Yu Gothic" pitchFamily="34" charset="-122"/>
                 <a:cs typeface="Yu Gothic" pitchFamily="34" charset="-120"/>
               </a:rPr>
-              <a:t>役割</a:t>
-            </a:r>
-            <a:endParaRPr lang="en-US" sz="1500" dirty="0"/>
-          </a:p>
-        </p:txBody>
-      </p:sp>
-      <p:sp>
-        <p:nvSpPr>
-          <p:cNvPr id="8" name="Text 6"/>
-          <p:cNvSpPr txBox="1"/>
-          <p:nvPr/>
-        </p:nvSpPr>
-        <p:spPr>
-          <a:xfrm>
-            <a:off x="5146243" y="1874520"/>
-            <a:ext cx="5963717" cy="459029"/>
-          </a:xfrm>
-          <a:prstGeom prst="rect">
-            <a:avLst/>
-          </a:prstGeom>
-          <a:noFill/>
-          <a:ln/>
-        </p:spPr>
-        <p:txBody>
-          <a:bodyPr wrap="square" lIns="0" tIns="0" rIns="0" bIns="0" rtlCol="0" anchor="ctr"/>
-          <a:lstStyle/>
-          <a:p>
-            <a:pPr indent="0" marL="0">
-              <a:lnSpc>
-                <a:spcPct val="130000"/>
-              </a:lnSpc>
-              <a:buNone/>
-            </a:pPr>
-            <a:r>
-              <a:rPr lang="en-US" sz="1250" dirty="0">
-                <a:solidFill>
-                  <a:srgbClr val="5A534A"/>
-                </a:solidFill>
-                <a:latin typeface="Yu Gothic" pitchFamily="34" charset="0"/>
-                <a:ea typeface="Yu Gothic" pitchFamily="34" charset="-122"/>
-                <a:cs typeface="Yu Gothic" pitchFamily="34" charset="-120"/>
-              </a:rPr>
-              <a:t>誰として答えるか。抜けると一般論しか出ません</a:t>
-            </a:r>
-            <a:endParaRPr lang="en-US" sz="1250" dirty="0"/>
-          </a:p>
-        </p:txBody>
-      </p:sp>
-      <p:sp>
-        <p:nvSpPr>
-          <p:cNvPr id="9" name="Shape 7"/>
-          <p:cNvSpPr/>
-          <p:nvPr/>
-        </p:nvSpPr>
-        <p:spPr>
-          <a:xfrm>
-            <a:off x="777240" y="2571293"/>
-            <a:ext cx="10607040" cy="641909"/>
-          </a:xfrm>
-          <a:prstGeom prst="rect">
-            <a:avLst/>
-          </a:prstGeom>
-          <a:solidFill>
-            <a:srgbClr val="FFFFFF"/>
-          </a:solidFill>
-          <a:ln w="12700">
-            <a:solidFill>
-              <a:srgbClr val="EDE7DB"/>
-            </a:solidFill>
-            <a:prstDash val="solid"/>
-          </a:ln>
-        </p:spPr>
-      </p:sp>
-      <p:sp>
-        <p:nvSpPr>
-          <p:cNvPr id="10" name="Shape 8"/>
-          <p:cNvSpPr/>
-          <p:nvPr/>
-        </p:nvSpPr>
-        <p:spPr>
-          <a:xfrm>
-            <a:off x="1033272" y="2700223"/>
-            <a:ext cx="384048" cy="384048"/>
-          </a:xfrm>
-          <a:prstGeom prst="ellipse">
-            <a:avLst/>
-          </a:prstGeom>
-          <a:solidFill>
-            <a:srgbClr val="B04A2F"/>
-          </a:solidFill>
-          <a:ln w="12700">
-            <a:solidFill>
-              <a:srgbClr val="B04A2F"/>
-            </a:solidFill>
-            <a:prstDash val="solid"/>
-          </a:ln>
-        </p:spPr>
+              <a:t>前回の宿題を実物で</a:t>
+            </a:r>
+            <a:endParaRPr lang="en-US" sz="1100" dirty="0"/>
+          </a:p>
+        </p:txBody>
+      </p:sp>
+      <p:sp>
+        <p:nvSpPr>
+          <p:cNvPr id="9" name="Text 7"/>
+          <p:cNvSpPr txBox="1"/>
+          <p:nvPr/>
+        </p:nvSpPr>
+        <p:spPr>
+          <a:xfrm>
+            <a:off x="3008376" y="4873752"/>
+            <a:ext cx="1956816" cy="237744"/>
+          </a:xfrm>
+          <a:prstGeom prst="rect">
+            <a:avLst/>
+          </a:prstGeom>
+          <a:noFill/>
+          <a:ln/>
+        </p:spPr>
+        <p:txBody>
+          <a:bodyPr wrap="square" lIns="0" tIns="0" rIns="0" bIns="0" rtlCol="0" anchor="ctr"/>
+          <a:lstStyle/>
+          <a:p>
+            <a:pPr indent="0" marL="0">
+              <a:buNone/>
+            </a:pPr>
+            <a:r>
+              <a:rPr lang="en-US" sz="900" b="1" dirty="0">
+                <a:solidFill>
+                  <a:srgbClr val="B04A2F"/>
+                </a:solidFill>
+                <a:latin typeface="Yu Gothic" pitchFamily="34" charset="0"/>
+                <a:ea typeface="Yu Gothic" pitchFamily="34" charset="-122"/>
+                <a:cs typeface="Yu Gothic" pitchFamily="34" charset="-120"/>
+              </a:rPr>
+              <a:t>15-35分</a:t>
+            </a:r>
+            <a:endParaRPr lang="en-US" sz="900" dirty="0"/>
+          </a:p>
+        </p:txBody>
+      </p:sp>
+      <p:sp>
+        <p:nvSpPr>
+          <p:cNvPr id="10" name="Text 8"/>
+          <p:cNvSpPr txBox="1"/>
+          <p:nvPr/>
+        </p:nvSpPr>
+        <p:spPr>
+          <a:xfrm>
+            <a:off x="3008376" y="5111496"/>
+            <a:ext cx="1956816" cy="384048"/>
+          </a:xfrm>
+          <a:prstGeom prst="rect">
+            <a:avLst/>
+          </a:prstGeom>
+          <a:noFill/>
+          <a:ln/>
+        </p:spPr>
+        <p:txBody>
+          <a:bodyPr wrap="square" lIns="0" tIns="0" rIns="0" bIns="0" rtlCol="0" anchor="ctr"/>
+          <a:lstStyle/>
+          <a:p>
+            <a:pPr indent="0" marL="0">
+              <a:buNone/>
+            </a:pPr>
+            <a:r>
+              <a:rPr lang="en-US" sz="1100" dirty="0">
+                <a:solidFill>
+                  <a:srgbClr val="23201D"/>
+                </a:solidFill>
+                <a:latin typeface="Yu Gothic" pitchFamily="34" charset="0"/>
+                <a:ea typeface="Yu Gothic" pitchFamily="34" charset="-122"/>
+                <a:cs typeface="Yu Gothic" pitchFamily="34" charset="-120"/>
+              </a:rPr>
+              <a:t>テーマとデモ</a:t>
+            </a:r>
+            <a:endParaRPr lang="en-US" sz="1100" dirty="0"/>
+          </a:p>
+        </p:txBody>
       </p:sp>
       <p:sp>
         <p:nvSpPr>
@@ -2683,34 +4327,34 @@
         </p:nvSpPr>
         <p:spPr>
           <a:xfrm>
-            <a:off x="1033272" y="2700223"/>
-            <a:ext cx="384048" cy="384048"/>
-          </a:xfrm>
-          <a:prstGeom prst="rect">
-            <a:avLst/>
-          </a:prstGeom>
-          <a:noFill/>
-          <a:ln/>
-        </p:spPr>
-        <p:txBody>
-          <a:bodyPr wrap="square" lIns="0" tIns="0" rIns="0" bIns="0" rtlCol="0" anchor="ctr"/>
-          <a:lstStyle/>
-          <a:p>
-            <a:pPr algn="ctr" indent="0" marL="0">
-              <a:buNone/>
-            </a:pPr>
-            <a:r>
-              <a:rPr lang="en-US" sz="1400" b="1" dirty="0">
-                <a:solidFill>
-                  <a:srgbClr val="FFFFFF"/>
-                </a:solidFill>
-                <a:latin typeface="Yu Gothic" pitchFamily="34" charset="0"/>
-                <a:ea typeface="Yu Gothic" pitchFamily="34" charset="-122"/>
-                <a:cs typeface="Yu Gothic" pitchFamily="34" charset="-120"/>
-              </a:rPr>
-              <a:t>2</a:t>
-            </a:r>
-            <a:endParaRPr lang="en-US" sz="1400" dirty="0"/>
+            <a:off x="5056632" y="4873752"/>
+            <a:ext cx="1956816" cy="237744"/>
+          </a:xfrm>
+          <a:prstGeom prst="rect">
+            <a:avLst/>
+          </a:prstGeom>
+          <a:noFill/>
+          <a:ln/>
+        </p:spPr>
+        <p:txBody>
+          <a:bodyPr wrap="square" lIns="0" tIns="0" rIns="0" bIns="0" rtlCol="0" anchor="ctr"/>
+          <a:lstStyle/>
+          <a:p>
+            <a:pPr indent="0" marL="0">
+              <a:buNone/>
+            </a:pPr>
+            <a:r>
+              <a:rPr lang="en-US" sz="900" b="1" dirty="0">
+                <a:solidFill>
+                  <a:srgbClr val="B04A2F"/>
+                </a:solidFill>
+                <a:latin typeface="Yu Gothic" pitchFamily="34" charset="0"/>
+                <a:ea typeface="Yu Gothic" pitchFamily="34" charset="-122"/>
+                <a:cs typeface="Yu Gothic" pitchFamily="34" charset="-120"/>
+              </a:rPr>
+              <a:t>35-90分</a:t>
+            </a:r>
+            <a:endParaRPr lang="en-US" sz="900" dirty="0"/>
           </a:p>
         </p:txBody>
       </p:sp>
@@ -2722,24 +4366,24 @@
         </p:nvSpPr>
         <p:spPr>
           <a:xfrm>
-            <a:off x="1645920" y="2662733"/>
-            <a:ext cx="3394253" cy="459029"/>
-          </a:xfrm>
-          <a:prstGeom prst="rect">
-            <a:avLst/>
-          </a:prstGeom>
-          <a:noFill/>
-          <a:ln/>
-        </p:spPr>
-        <p:txBody>
-          <a:bodyPr wrap="square" lIns="0" tIns="0" rIns="0" bIns="0" rtlCol="0" anchor="ctr"/>
-          <a:lstStyle/>
-          <a:p>
-            <a:pPr indent="0" marL="0">
-              <a:buNone/>
-            </a:pPr>
-            <a:r>
-              <a:rPr lang="en-US" sz="1500" b="1" dirty="0">
+            <a:off x="5056632" y="5111496"/>
+            <a:ext cx="1956816" cy="384048"/>
+          </a:xfrm>
+          <a:prstGeom prst="rect">
+            <a:avLst/>
+          </a:prstGeom>
+          <a:noFill/>
+          <a:ln/>
+        </p:spPr>
+        <p:txBody>
+          <a:bodyPr wrap="square" lIns="0" tIns="0" rIns="0" bIns="0" rtlCol="0" anchor="ctr"/>
+          <a:lstStyle/>
+          <a:p>
+            <a:pPr indent="0" marL="0">
+              <a:buNone/>
+            </a:pPr>
+            <a:r>
+              <a:rPr lang="en-US" sz="1100" dirty="0">
                 <a:solidFill>
                   <a:srgbClr val="23201D"/>
                 </a:solidFill>
@@ -2747,9 +4391,9 @@
                 <a:ea typeface="Yu Gothic" pitchFamily="34" charset="-122"/>
                 <a:cs typeface="Yu Gothic" pitchFamily="34" charset="-120"/>
               </a:rPr>
-              <a:t>前提</a:t>
-            </a:r>
-            <a:endParaRPr lang="en-US" sz="1500" dirty="0"/>
+              <a:t>一緒に手を動かす</a:t>
+            </a:r>
+            <a:endParaRPr lang="en-US" sz="1100" dirty="0"/>
           </a:p>
         </p:txBody>
       </p:sp>
@@ -2761,89 +4405,114 @@
         </p:nvSpPr>
         <p:spPr>
           <a:xfrm>
-            <a:off x="5146243" y="2662733"/>
-            <a:ext cx="5963717" cy="459029"/>
-          </a:xfrm>
-          <a:prstGeom prst="rect">
-            <a:avLst/>
-          </a:prstGeom>
-          <a:noFill/>
-          <a:ln/>
-        </p:spPr>
-        <p:txBody>
-          <a:bodyPr wrap="square" lIns="0" tIns="0" rIns="0" bIns="0" rtlCol="0" anchor="ctr"/>
-          <a:lstStyle/>
-          <a:p>
-            <a:pPr indent="0" marL="0">
-              <a:lnSpc>
-                <a:spcPct val="130000"/>
-              </a:lnSpc>
-              <a:buNone/>
-            </a:pPr>
-            <a:r>
-              <a:rPr lang="en-US" sz="1250" dirty="0">
-                <a:solidFill>
-                  <a:srgbClr val="5A534A"/>
-                </a:solidFill>
-                <a:latin typeface="Yu Gothic" pitchFamily="34" charset="0"/>
-                <a:ea typeface="Yu Gothic" pitchFamily="34" charset="-122"/>
-                <a:cs typeface="Yu Gothic" pitchFamily="34" charset="-120"/>
-              </a:rPr>
-              <a:t>自社・相手・状況。抜けると毎回説明し直すことになります</a:t>
-            </a:r>
-            <a:endParaRPr lang="en-US" sz="1250" dirty="0"/>
-          </a:p>
-        </p:txBody>
-      </p:sp>
-      <p:sp>
-        <p:nvSpPr>
-          <p:cNvPr id="14" name="Shape 12"/>
-          <p:cNvSpPr/>
-          <p:nvPr/>
-        </p:nvSpPr>
-        <p:spPr>
-          <a:xfrm>
-            <a:off x="777240" y="3359506"/>
-            <a:ext cx="10607040" cy="641909"/>
-          </a:xfrm>
-          <a:prstGeom prst="rect">
-            <a:avLst/>
-          </a:prstGeom>
-          <a:solidFill>
-            <a:srgbClr val="FFFFFF"/>
-          </a:solidFill>
-          <a:ln w="12700">
-            <a:solidFill>
-              <a:srgbClr val="EDE7DB"/>
-            </a:solidFill>
-            <a:prstDash val="solid"/>
-          </a:ln>
-        </p:spPr>
-      </p:sp>
-      <p:sp>
-        <p:nvSpPr>
-          <p:cNvPr id="15" name="Shape 13"/>
-          <p:cNvSpPr/>
-          <p:nvPr/>
-        </p:nvSpPr>
-        <p:spPr>
-          <a:xfrm>
-            <a:off x="1033272" y="3488436"/>
-            <a:ext cx="384048" cy="384048"/>
-          </a:xfrm>
-          <a:prstGeom prst="ellipse">
-            <a:avLst/>
-          </a:prstGeom>
-          <a:solidFill>
-            <a:srgbClr val="B04A2F"/>
-          </a:solidFill>
-          <a:ln w="12700">
-            <a:solidFill>
-              <a:srgbClr val="B04A2F"/>
-            </a:solidFill>
-            <a:prstDash val="solid"/>
-          </a:ln>
-        </p:spPr>
+            <a:off x="7104888" y="4873752"/>
+            <a:ext cx="1956816" cy="237744"/>
+          </a:xfrm>
+          <a:prstGeom prst="rect">
+            <a:avLst/>
+          </a:prstGeom>
+          <a:noFill/>
+          <a:ln/>
+        </p:spPr>
+        <p:txBody>
+          <a:bodyPr wrap="square" lIns="0" tIns="0" rIns="0" bIns="0" rtlCol="0" anchor="ctr"/>
+          <a:lstStyle/>
+          <a:p>
+            <a:pPr indent="0" marL="0">
+              <a:buNone/>
+            </a:pPr>
+            <a:r>
+              <a:rPr lang="en-US" sz="900" b="1" dirty="0">
+                <a:solidFill>
+                  <a:srgbClr val="B04A2F"/>
+                </a:solidFill>
+                <a:latin typeface="Yu Gothic" pitchFamily="34" charset="0"/>
+                <a:ea typeface="Yu Gothic" pitchFamily="34" charset="-122"/>
+                <a:cs typeface="Yu Gothic" pitchFamily="34" charset="-120"/>
+              </a:rPr>
+              <a:t>90-105分</a:t>
+            </a:r>
+            <a:endParaRPr lang="en-US" sz="900" dirty="0"/>
+          </a:p>
+        </p:txBody>
+      </p:sp>
+      <p:sp>
+        <p:nvSpPr>
+          <p:cNvPr id="14" name="Text 12"/>
+          <p:cNvSpPr txBox="1"/>
+          <p:nvPr/>
+        </p:nvSpPr>
+        <p:spPr>
+          <a:xfrm>
+            <a:off x="7104888" y="5111496"/>
+            <a:ext cx="1956816" cy="384048"/>
+          </a:xfrm>
+          <a:prstGeom prst="rect">
+            <a:avLst/>
+          </a:prstGeom>
+          <a:noFill/>
+          <a:ln/>
+        </p:spPr>
+        <p:txBody>
+          <a:bodyPr wrap="square" lIns="0" tIns="0" rIns="0" bIns="0" rtlCol="0" anchor="ctr"/>
+          <a:lstStyle/>
+          <a:p>
+            <a:pPr indent="0" marL="0">
+              <a:buNone/>
+            </a:pPr>
+            <a:r>
+              <a:rPr lang="en-US" sz="1100" dirty="0">
+                <a:solidFill>
+                  <a:srgbClr val="23201D"/>
+                </a:solidFill>
+                <a:latin typeface="Yu Gothic" pitchFamily="34" charset="0"/>
+                <a:ea typeface="Yu Gothic" pitchFamily="34" charset="-122"/>
+                <a:cs typeface="Yu Gothic" pitchFamily="34" charset="-120"/>
+              </a:rPr>
+              <a:t>業務への組み込み</a:t>
+            </a:r>
+            <a:endParaRPr lang="en-US" sz="1100" dirty="0"/>
+          </a:p>
+        </p:txBody>
+      </p:sp>
+      <p:sp>
+        <p:nvSpPr>
+          <p:cNvPr id="15" name="Text 13"/>
+          <p:cNvSpPr txBox="1"/>
+          <p:nvPr/>
+        </p:nvSpPr>
+        <p:spPr>
+          <a:xfrm>
+            <a:off x="9153144" y="4873752"/>
+            <a:ext cx="1956816" cy="237744"/>
+          </a:xfrm>
+          <a:prstGeom prst="rect">
+            <a:avLst/>
+          </a:prstGeom>
+          <a:noFill/>
+          <a:ln/>
+        </p:spPr>
+        <p:txBody>
+          <a:bodyPr wrap="square" lIns="0" tIns="0" rIns="0" bIns="0" rtlCol="0" anchor="ctr"/>
+          <a:lstStyle/>
+          <a:p>
+            <a:pPr indent="0" marL="0">
+              <a:buNone/>
+            </a:pPr>
+            <a:r>
+              <a:rPr lang="en-US" sz="900" b="1" dirty="0">
+                <a:solidFill>
+                  <a:srgbClr val="B04A2F"/>
+                </a:solidFill>
+                <a:latin typeface="Yu Gothic" pitchFamily="34" charset="0"/>
+                <a:ea typeface="Yu Gothic" pitchFamily="34" charset="-122"/>
+                <a:cs typeface="Yu Gothic" pitchFamily="34" charset="-120"/>
+              </a:rPr>
+              <a:t>105-120分</a:t>
+            </a:r>
+            <a:endParaRPr lang="en-US" sz="900" dirty="0"/>
+          </a:p>
+        </p:txBody>
       </p:sp>
       <p:sp>
         <p:nvSpPr>
@@ -2853,34 +4522,34 @@
         </p:nvSpPr>
         <p:spPr>
           <a:xfrm>
-            <a:off x="1033272" y="3488436"/>
-            <a:ext cx="384048" cy="384048"/>
-          </a:xfrm>
-          <a:prstGeom prst="rect">
-            <a:avLst/>
-          </a:prstGeom>
-          <a:noFill/>
-          <a:ln/>
-        </p:spPr>
-        <p:txBody>
-          <a:bodyPr wrap="square" lIns="0" tIns="0" rIns="0" bIns="0" rtlCol="0" anchor="ctr"/>
-          <a:lstStyle/>
-          <a:p>
-            <a:pPr algn="ctr" indent="0" marL="0">
-              <a:buNone/>
-            </a:pPr>
-            <a:r>
-              <a:rPr lang="en-US" sz="1400" b="1" dirty="0">
-                <a:solidFill>
-                  <a:srgbClr val="FFFFFF"/>
-                </a:solidFill>
-                <a:latin typeface="Yu Gothic" pitchFamily="34" charset="0"/>
-                <a:ea typeface="Yu Gothic" pitchFamily="34" charset="-122"/>
-                <a:cs typeface="Yu Gothic" pitchFamily="34" charset="-120"/>
-              </a:rPr>
-              <a:t>3</a:t>
-            </a:r>
-            <a:endParaRPr lang="en-US" sz="1400" dirty="0"/>
+            <a:off x="9153144" y="5111496"/>
+            <a:ext cx="1956816" cy="384048"/>
+          </a:xfrm>
+          <a:prstGeom prst="rect">
+            <a:avLst/>
+          </a:prstGeom>
+          <a:noFill/>
+          <a:ln/>
+        </p:spPr>
+        <p:txBody>
+          <a:bodyPr wrap="square" lIns="0" tIns="0" rIns="0" bIns="0" rtlCol="0" anchor="ctr"/>
+          <a:lstStyle/>
+          <a:p>
+            <a:pPr indent="0" marL="0">
+              <a:buNone/>
+            </a:pPr>
+            <a:r>
+              <a:rPr lang="en-US" sz="1100" dirty="0">
+                <a:solidFill>
+                  <a:srgbClr val="23201D"/>
+                </a:solidFill>
+                <a:latin typeface="Yu Gothic" pitchFamily="34" charset="0"/>
+                <a:ea typeface="Yu Gothic" pitchFamily="34" charset="-122"/>
+                <a:cs typeface="Yu Gothic" pitchFamily="34" charset="-120"/>
+              </a:rPr>
+              <a:t>宿題・記録</a:t>
+            </a:r>
+            <a:endParaRPr lang="en-US" sz="1100" dirty="0"/>
           </a:p>
         </p:txBody>
       </p:sp>
@@ -2892,34 +4561,34 @@
         </p:nvSpPr>
         <p:spPr>
           <a:xfrm>
-            <a:off x="1645920" y="3450946"/>
-            <a:ext cx="3394253" cy="459029"/>
-          </a:xfrm>
-          <a:prstGeom prst="rect">
-            <a:avLst/>
-          </a:prstGeom>
-          <a:noFill/>
-          <a:ln/>
-        </p:spPr>
-        <p:txBody>
-          <a:bodyPr wrap="square" lIns="0" tIns="0" rIns="0" bIns="0" rtlCol="0" anchor="ctr"/>
-          <a:lstStyle/>
-          <a:p>
-            <a:pPr indent="0" marL="0">
-              <a:buNone/>
-            </a:pPr>
-            <a:r>
-              <a:rPr lang="en-US" sz="1500" b="1" dirty="0">
-                <a:solidFill>
-                  <a:srgbClr val="23201D"/>
-                </a:solidFill>
-                <a:latin typeface="Yu Gothic" pitchFamily="34" charset="0"/>
-                <a:ea typeface="Yu Gothic" pitchFamily="34" charset="-122"/>
-                <a:cs typeface="Yu Gothic" pitchFamily="34" charset="-120"/>
-              </a:rPr>
-              <a:t>依頼</a:t>
-            </a:r>
-            <a:endParaRPr lang="en-US" sz="1500" dirty="0"/>
+            <a:off x="777240" y="6382512"/>
+            <a:ext cx="7424928" cy="256032"/>
+          </a:xfrm>
+          <a:prstGeom prst="rect">
+            <a:avLst/>
+          </a:prstGeom>
+          <a:noFill/>
+          <a:ln/>
+        </p:spPr>
+        <p:txBody>
+          <a:bodyPr wrap="square" lIns="0" tIns="0" rIns="0" bIns="0" rtlCol="0" anchor="ctr"/>
+          <a:lstStyle/>
+          <a:p>
+            <a:pPr indent="0" marL="0">
+              <a:buNone/>
+            </a:pPr>
+            <a:r>
+              <a:rPr lang="en-US" sz="900" dirty="0">
+                <a:solidFill>
+                  <a:srgbClr val="8A8177"/>
+                </a:solidFill>
+                <a:latin typeface="Yu Gothic" pitchFamily="34" charset="0"/>
+                <a:ea typeface="Yu Gothic" pitchFamily="34" charset="-122"/>
+                <a:cs typeface="Yu Gothic" pitchFamily="34" charset="-120"/>
+              </a:rPr>
+              <a:t>第2回　今のChatGPTの使い方を作り直す</a:t>
+            </a:r>
+            <a:endParaRPr lang="en-US" sz="900" dirty="0"/>
           </a:p>
         </p:txBody>
       </p:sp>
@@ -2931,441 +4600,20 @@
         </p:nvSpPr>
         <p:spPr>
           <a:xfrm>
-            <a:off x="5146243" y="3450946"/>
-            <a:ext cx="5963717" cy="459029"/>
-          </a:xfrm>
-          <a:prstGeom prst="rect">
-            <a:avLst/>
-          </a:prstGeom>
-          <a:noFill/>
-          <a:ln/>
-        </p:spPr>
-        <p:txBody>
-          <a:bodyPr wrap="square" lIns="0" tIns="0" rIns="0" bIns="0" rtlCol="0" anchor="ctr"/>
-          <a:lstStyle/>
-          <a:p>
-            <a:pPr indent="0" marL="0">
-              <a:lnSpc>
-                <a:spcPct val="130000"/>
-              </a:lnSpc>
-              <a:buNone/>
-            </a:pPr>
-            <a:r>
-              <a:rPr lang="en-US" sz="1250" dirty="0">
-                <a:solidFill>
-                  <a:srgbClr val="5A534A"/>
-                </a:solidFill>
-                <a:latin typeface="Yu Gothic" pitchFamily="34" charset="0"/>
-                <a:ea typeface="Yu Gothic" pitchFamily="34" charset="-122"/>
-                <a:cs typeface="Yu Gothic" pitchFamily="34" charset="-120"/>
-              </a:rPr>
-              <a:t>してほしいこと。動詞を1つに絞ります</a:t>
-            </a:r>
-            <a:endParaRPr lang="en-US" sz="1250" dirty="0"/>
-          </a:p>
-        </p:txBody>
-      </p:sp>
-      <p:sp>
-        <p:nvSpPr>
-          <p:cNvPr id="19" name="Shape 17"/>
-          <p:cNvSpPr/>
-          <p:nvPr/>
-        </p:nvSpPr>
-        <p:spPr>
-          <a:xfrm>
-            <a:off x="777240" y="4147718"/>
-            <a:ext cx="10607040" cy="641909"/>
-          </a:xfrm>
-          <a:prstGeom prst="rect">
-            <a:avLst/>
-          </a:prstGeom>
-          <a:solidFill>
-            <a:srgbClr val="FFFFFF"/>
-          </a:solidFill>
-          <a:ln w="12700">
-            <a:solidFill>
-              <a:srgbClr val="EDE7DB"/>
-            </a:solidFill>
-            <a:prstDash val="solid"/>
-          </a:ln>
-        </p:spPr>
-      </p:sp>
-      <p:sp>
-        <p:nvSpPr>
-          <p:cNvPr id="20" name="Shape 18"/>
-          <p:cNvSpPr/>
-          <p:nvPr/>
-        </p:nvSpPr>
-        <p:spPr>
-          <a:xfrm>
-            <a:off x="1033272" y="4276649"/>
-            <a:ext cx="384048" cy="384048"/>
-          </a:xfrm>
-          <a:prstGeom prst="ellipse">
-            <a:avLst/>
-          </a:prstGeom>
-          <a:solidFill>
-            <a:srgbClr val="B04A2F"/>
-          </a:solidFill>
-          <a:ln w="12700">
-            <a:solidFill>
-              <a:srgbClr val="B04A2F"/>
-            </a:solidFill>
-            <a:prstDash val="solid"/>
-          </a:ln>
-        </p:spPr>
-      </p:sp>
-      <p:sp>
-        <p:nvSpPr>
-          <p:cNvPr id="21" name="Text 19"/>
-          <p:cNvSpPr txBox="1"/>
-          <p:nvPr/>
-        </p:nvSpPr>
-        <p:spPr>
-          <a:xfrm>
-            <a:off x="1033272" y="4276649"/>
-            <a:ext cx="384048" cy="384048"/>
-          </a:xfrm>
-          <a:prstGeom prst="rect">
-            <a:avLst/>
-          </a:prstGeom>
-          <a:noFill/>
-          <a:ln/>
-        </p:spPr>
-        <p:txBody>
-          <a:bodyPr wrap="square" lIns="0" tIns="0" rIns="0" bIns="0" rtlCol="0" anchor="ctr"/>
-          <a:lstStyle/>
-          <a:p>
-            <a:pPr algn="ctr" indent="0" marL="0">
-              <a:buNone/>
-            </a:pPr>
-            <a:r>
-              <a:rPr lang="en-US" sz="1400" b="1" dirty="0">
-                <a:solidFill>
-                  <a:srgbClr val="FFFFFF"/>
-                </a:solidFill>
-                <a:latin typeface="Yu Gothic" pitchFamily="34" charset="0"/>
-                <a:ea typeface="Yu Gothic" pitchFamily="34" charset="-122"/>
-                <a:cs typeface="Yu Gothic" pitchFamily="34" charset="-120"/>
-              </a:rPr>
-              <a:t>4</a:t>
-            </a:r>
-            <a:endParaRPr lang="en-US" sz="1400" dirty="0"/>
-          </a:p>
-        </p:txBody>
-      </p:sp>
-      <p:sp>
-        <p:nvSpPr>
-          <p:cNvPr id="22" name="Text 20"/>
-          <p:cNvSpPr txBox="1"/>
-          <p:nvPr/>
-        </p:nvSpPr>
-        <p:spPr>
-          <a:xfrm>
-            <a:off x="1645920" y="4239158"/>
-            <a:ext cx="3394253" cy="459029"/>
-          </a:xfrm>
-          <a:prstGeom prst="rect">
-            <a:avLst/>
-          </a:prstGeom>
-          <a:noFill/>
-          <a:ln/>
-        </p:spPr>
-        <p:txBody>
-          <a:bodyPr wrap="square" lIns="0" tIns="0" rIns="0" bIns="0" rtlCol="0" anchor="ctr"/>
-          <a:lstStyle/>
-          <a:p>
-            <a:pPr indent="0" marL="0">
-              <a:buNone/>
-            </a:pPr>
-            <a:r>
-              <a:rPr lang="en-US" sz="1500" b="1" dirty="0">
-                <a:solidFill>
-                  <a:srgbClr val="23201D"/>
-                </a:solidFill>
-                <a:latin typeface="Yu Gothic" pitchFamily="34" charset="0"/>
-                <a:ea typeface="Yu Gothic" pitchFamily="34" charset="-122"/>
-                <a:cs typeface="Yu Gothic" pitchFamily="34" charset="-120"/>
-              </a:rPr>
-              <a:t>制約</a:t>
-            </a:r>
-            <a:endParaRPr lang="en-US" sz="1500" dirty="0"/>
-          </a:p>
-        </p:txBody>
-      </p:sp>
-      <p:sp>
-        <p:nvSpPr>
-          <p:cNvPr id="23" name="Text 21"/>
-          <p:cNvSpPr txBox="1"/>
-          <p:nvPr/>
-        </p:nvSpPr>
-        <p:spPr>
-          <a:xfrm>
-            <a:off x="5146243" y="4239158"/>
-            <a:ext cx="5963717" cy="459029"/>
-          </a:xfrm>
-          <a:prstGeom prst="rect">
-            <a:avLst/>
-          </a:prstGeom>
-          <a:noFill/>
-          <a:ln/>
-        </p:spPr>
-        <p:txBody>
-          <a:bodyPr wrap="square" lIns="0" tIns="0" rIns="0" bIns="0" rtlCol="0" anchor="ctr"/>
-          <a:lstStyle/>
-          <a:p>
-            <a:pPr indent="0" marL="0">
-              <a:lnSpc>
-                <a:spcPct val="130000"/>
-              </a:lnSpc>
-              <a:buNone/>
-            </a:pPr>
-            <a:r>
-              <a:rPr lang="en-US" sz="1250" dirty="0">
-                <a:solidFill>
-                  <a:srgbClr val="5A534A"/>
-                </a:solidFill>
-                <a:latin typeface="Yu Gothic" pitchFamily="34" charset="0"/>
-                <a:ea typeface="Yu Gothic" pitchFamily="34" charset="-122"/>
-                <a:cs typeface="Yu Gothic" pitchFamily="34" charset="-120"/>
-              </a:rPr>
-              <a:t>文字数・トーン・使ってはいけない表現。抜けると手直しが増えます</a:t>
-            </a:r>
-            <a:endParaRPr lang="en-US" sz="1250" dirty="0"/>
-          </a:p>
-        </p:txBody>
-      </p:sp>
-      <p:sp>
-        <p:nvSpPr>
-          <p:cNvPr id="24" name="Shape 22"/>
-          <p:cNvSpPr/>
-          <p:nvPr/>
-        </p:nvSpPr>
-        <p:spPr>
-          <a:xfrm>
-            <a:off x="777240" y="4935931"/>
-            <a:ext cx="10607040" cy="641909"/>
-          </a:xfrm>
-          <a:prstGeom prst="rect">
-            <a:avLst/>
-          </a:prstGeom>
-          <a:solidFill>
-            <a:srgbClr val="FFFFFF"/>
-          </a:solidFill>
-          <a:ln w="12700">
-            <a:solidFill>
-              <a:srgbClr val="EDE7DB"/>
-            </a:solidFill>
-            <a:prstDash val="solid"/>
-          </a:ln>
-        </p:spPr>
-      </p:sp>
-      <p:sp>
-        <p:nvSpPr>
-          <p:cNvPr id="25" name="Shape 23"/>
-          <p:cNvSpPr/>
-          <p:nvPr/>
-        </p:nvSpPr>
-        <p:spPr>
-          <a:xfrm>
-            <a:off x="1033272" y="5064862"/>
-            <a:ext cx="384048" cy="384048"/>
-          </a:xfrm>
-          <a:prstGeom prst="ellipse">
-            <a:avLst/>
-          </a:prstGeom>
-          <a:solidFill>
-            <a:srgbClr val="B04A2F"/>
-          </a:solidFill>
-          <a:ln w="12700">
-            <a:solidFill>
-              <a:srgbClr val="B04A2F"/>
-            </a:solidFill>
-            <a:prstDash val="solid"/>
-          </a:ln>
-        </p:spPr>
-      </p:sp>
-      <p:sp>
-        <p:nvSpPr>
-          <p:cNvPr id="26" name="Text 24"/>
-          <p:cNvSpPr txBox="1"/>
-          <p:nvPr/>
-        </p:nvSpPr>
-        <p:spPr>
-          <a:xfrm>
-            <a:off x="1033272" y="5064862"/>
-            <a:ext cx="384048" cy="384048"/>
-          </a:xfrm>
-          <a:prstGeom prst="rect">
-            <a:avLst/>
-          </a:prstGeom>
-          <a:noFill/>
-          <a:ln/>
-        </p:spPr>
-        <p:txBody>
-          <a:bodyPr wrap="square" lIns="0" tIns="0" rIns="0" bIns="0" rtlCol="0" anchor="ctr"/>
-          <a:lstStyle/>
-          <a:p>
-            <a:pPr algn="ctr" indent="0" marL="0">
-              <a:buNone/>
-            </a:pPr>
-            <a:r>
-              <a:rPr lang="en-US" sz="1400" b="1" dirty="0">
-                <a:solidFill>
-                  <a:srgbClr val="FFFFFF"/>
-                </a:solidFill>
-                <a:latin typeface="Yu Gothic" pitchFamily="34" charset="0"/>
-                <a:ea typeface="Yu Gothic" pitchFamily="34" charset="-122"/>
-                <a:cs typeface="Yu Gothic" pitchFamily="34" charset="-120"/>
-              </a:rPr>
-              <a:t>5</a:t>
-            </a:r>
-            <a:endParaRPr lang="en-US" sz="1400" dirty="0"/>
-          </a:p>
-        </p:txBody>
-      </p:sp>
-      <p:sp>
-        <p:nvSpPr>
-          <p:cNvPr id="27" name="Text 25"/>
-          <p:cNvSpPr txBox="1"/>
-          <p:nvPr/>
-        </p:nvSpPr>
-        <p:spPr>
-          <a:xfrm>
-            <a:off x="1645920" y="5027371"/>
-            <a:ext cx="3394253" cy="459029"/>
-          </a:xfrm>
-          <a:prstGeom prst="rect">
-            <a:avLst/>
-          </a:prstGeom>
-          <a:noFill/>
-          <a:ln/>
-        </p:spPr>
-        <p:txBody>
-          <a:bodyPr wrap="square" lIns="0" tIns="0" rIns="0" bIns="0" rtlCol="0" anchor="ctr"/>
-          <a:lstStyle/>
-          <a:p>
-            <a:pPr indent="0" marL="0">
-              <a:buNone/>
-            </a:pPr>
-            <a:r>
-              <a:rPr lang="en-US" sz="1500" b="1" dirty="0">
-                <a:solidFill>
-                  <a:srgbClr val="23201D"/>
-                </a:solidFill>
-                <a:latin typeface="Yu Gothic" pitchFamily="34" charset="0"/>
-                <a:ea typeface="Yu Gothic" pitchFamily="34" charset="-122"/>
-                <a:cs typeface="Yu Gothic" pitchFamily="34" charset="-120"/>
-              </a:rPr>
-              <a:t>出力形式</a:t>
-            </a:r>
-            <a:endParaRPr lang="en-US" sz="1500" dirty="0"/>
-          </a:p>
-        </p:txBody>
-      </p:sp>
-      <p:sp>
-        <p:nvSpPr>
-          <p:cNvPr id="28" name="Text 26"/>
-          <p:cNvSpPr txBox="1"/>
-          <p:nvPr/>
-        </p:nvSpPr>
-        <p:spPr>
-          <a:xfrm>
-            <a:off x="5146243" y="5027371"/>
-            <a:ext cx="5963717" cy="459029"/>
-          </a:xfrm>
-          <a:prstGeom prst="rect">
-            <a:avLst/>
-          </a:prstGeom>
-          <a:noFill/>
-          <a:ln/>
-        </p:spPr>
-        <p:txBody>
-          <a:bodyPr wrap="square" lIns="0" tIns="0" rIns="0" bIns="0" rtlCol="0" anchor="ctr"/>
-          <a:lstStyle/>
-          <a:p>
-            <a:pPr indent="0" marL="0">
-              <a:lnSpc>
-                <a:spcPct val="130000"/>
-              </a:lnSpc>
-              <a:buNone/>
-            </a:pPr>
-            <a:r>
-              <a:rPr lang="en-US" sz="1250" dirty="0">
-                <a:solidFill>
-                  <a:srgbClr val="5A534A"/>
-                </a:solidFill>
-                <a:latin typeface="Yu Gothic" pitchFamily="34" charset="0"/>
-                <a:ea typeface="Yu Gothic" pitchFamily="34" charset="-122"/>
-                <a:cs typeface="Yu Gothic" pitchFamily="34" charset="-120"/>
-              </a:rPr>
-              <a:t>箇条書きか、表か、メール本文そのままか。抜けると貼り付けられません</a:t>
-            </a:r>
-            <a:endParaRPr lang="en-US" sz="1250" dirty="0"/>
-          </a:p>
-        </p:txBody>
-      </p:sp>
-      <p:sp>
-        <p:nvSpPr>
-          <p:cNvPr id="29" name="Text 27"/>
-          <p:cNvSpPr txBox="1"/>
-          <p:nvPr/>
-        </p:nvSpPr>
-        <p:spPr>
-          <a:xfrm>
-            <a:off x="777240" y="5715000"/>
-            <a:ext cx="10607040" cy="457200"/>
-          </a:xfrm>
-          <a:prstGeom prst="rect">
-            <a:avLst/>
-          </a:prstGeom>
-          <a:noFill/>
-          <a:ln/>
-        </p:spPr>
-        <p:txBody>
-          <a:bodyPr wrap="square" lIns="0" tIns="0" rIns="0" bIns="0" rtlCol="0" anchor="ctr"/>
-          <a:lstStyle/>
-          <a:p>
-            <a:pPr indent="0" marL="0">
-              <a:buNone/>
-            </a:pPr>
-            <a:r>
-              <a:rPr lang="en-US" sz="1200" b="1" dirty="0">
-                <a:solidFill>
-                  <a:srgbClr val="B04A2F"/>
-                </a:solidFill>
-                <a:latin typeface="Yu Gothic" pitchFamily="34" charset="0"/>
-                <a:ea typeface="Yu Gothic" pitchFamily="34" charset="-122"/>
-                <a:cs typeface="Yu Gothic" pitchFamily="34" charset="-120"/>
-              </a:rPr>
-              <a:t>抜けている要素が、そのまま不満の正体です。</a:t>
-            </a:r>
-            <a:endParaRPr lang="en-US" sz="1200" dirty="0"/>
-          </a:p>
-        </p:txBody>
-      </p:sp>
-      <p:sp>
-        <p:nvSpPr>
-          <p:cNvPr id="30" name="Text 28"/>
-          <p:cNvSpPr txBox="1"/>
-          <p:nvPr/>
-        </p:nvSpPr>
-        <p:spPr>
-          <a:xfrm>
-            <a:off x="777240" y="6355080"/>
-            <a:ext cx="7424928" cy="274320"/>
-          </a:xfrm>
-          <a:prstGeom prst="rect">
-            <a:avLst/>
-          </a:prstGeom>
-          <a:noFill/>
-          <a:ln/>
-        </p:spPr>
-        <p:txBody>
-          <a:bodyPr wrap="square" lIns="0" tIns="0" rIns="0" bIns="0" rtlCol="0" anchor="ctr"/>
-          <a:lstStyle/>
-          <a:p>
-            <a:pPr indent="0" marL="0">
+            <a:off x="8202168" y="6382512"/>
+            <a:ext cx="3182112" cy="256032"/>
+          </a:xfrm>
+          <a:prstGeom prst="rect">
+            <a:avLst/>
+          </a:prstGeom>
+          <a:noFill/>
+          <a:ln/>
+        </p:spPr>
+        <p:txBody>
+          <a:bodyPr wrap="square" lIns="0" tIns="0" rIns="0" bIns="0" rtlCol="0" anchor="ctr"/>
+          <a:lstStyle/>
+          <a:p>
+            <a:pPr algn="r" indent="0" marL="0">
               <a:buNone/>
             </a:pPr>
             <a:r>
@@ -3377,46 +4625,7 @@
                 <a:ea typeface="Yu Gothic" pitchFamily="34" charset="-122"/>
                 <a:cs typeface="Yu Gothic" pitchFamily="34" charset="-120"/>
               </a:rPr>
-              <a:t>第2回　今のChatGPTの使い方を作り直す</a:t>
-            </a:r>
-            <a:endParaRPr lang="en-US" sz="900" dirty="0"/>
-          </a:p>
-        </p:txBody>
-      </p:sp>
-      <p:sp>
-        <p:nvSpPr>
-          <p:cNvPr id="31" name="Text 29"/>
-          <p:cNvSpPr txBox="1"/>
-          <p:nvPr/>
-        </p:nvSpPr>
-        <p:spPr>
-          <a:xfrm>
-            <a:off x="8202168" y="6355080"/>
-            <a:ext cx="3182112" cy="274320"/>
-          </a:xfrm>
-          <a:prstGeom prst="rect">
-            <a:avLst/>
-          </a:prstGeom>
-          <a:noFill/>
-          <a:ln/>
-        </p:spPr>
-        <p:txBody>
-          <a:bodyPr wrap="square" lIns="0" tIns="0" rIns="0" bIns="0" rtlCol="0" anchor="ctr"/>
-          <a:lstStyle/>
-          <a:p>
-            <a:pPr algn="r" indent="0" marL="0">
-              <a:buNone/>
-            </a:pPr>
-            <a:r>
-              <a:rPr lang="en-US" sz="900" dirty="0">
-                <a:solidFill>
-                  <a:srgbClr val="8A8177"/>
-                </a:solidFill>
-                <a:latin typeface="Yu Gothic" pitchFamily="34" charset="0"/>
-                <a:ea typeface="Yu Gothic" pitchFamily="34" charset="-122"/>
-                <a:cs typeface="Yu Gothic" pitchFamily="34" charset="-120"/>
-              </a:rPr>
-              <a:t>考え方</a:t>
+              <a:t>ゴール</a:t>
             </a:r>
             <a:endParaRPr lang="en-US" sz="900" dirty="0"/>
           </a:p>
@@ -3462,7 +4671,7 @@
         </p:nvSpPr>
         <p:spPr>
           <a:xfrm>
-            <a:off x="777240" y="640080"/>
+            <a:off x="777240" y="566928"/>
             <a:ext cx="10607040" cy="274320"/>
           </a:xfrm>
           <a:prstGeom prst="rect">
@@ -3487,7 +4696,7 @@
                 <a:ea typeface="Yu Gothic" pitchFamily="34" charset="-122"/>
                 <a:cs typeface="Yu Gothic" pitchFamily="34" charset="-120"/>
               </a:rPr>
-              <a:t>実演</a:t>
+              <a:t>考え方</a:t>
             </a:r>
             <a:endParaRPr lang="en-US" sz="1100" dirty="0"/>
           </a:p>
@@ -3501,7 +4710,7 @@
         </p:nvSpPr>
         <p:spPr>
           <a:xfrm>
-            <a:off x="777240" y="960120"/>
+            <a:off x="777240" y="896112"/>
             <a:ext cx="10607040" cy="640080"/>
           </a:xfrm>
           <a:prstGeom prst="rect">
@@ -3518,7 +4727,7 @@
               <a:buNone/>
             </a:pPr>
             <a:r>
-              <a:rPr lang="en-US" sz="2700" b="1" dirty="0">
+              <a:rPr lang="en-US" sz="2600" b="1" dirty="0">
                 <a:solidFill>
                   <a:srgbClr val="23201D"/>
                 </a:solidFill>
@@ -3526,9 +4735,9 @@
                 <a:ea typeface="Yu Gothic" pitchFamily="34" charset="-122"/>
                 <a:cs typeface="Yu Gothic" pitchFamily="34" charset="-120"/>
               </a:rPr>
-              <a:t>同じ依頼を、2通りで</a:t>
-            </a:r>
-            <a:endParaRPr lang="en-US" sz="2700" dirty="0"/>
+              <a:t>指示の型 — 5つの要素</a:t>
+            </a:r>
+            <a:endParaRPr lang="en-US" sz="2600" dirty="0"/>
           </a:p>
         </p:txBody>
       </p:sp>
@@ -3540,18 +4749,18 @@
         </p:nvSpPr>
         <p:spPr>
           <a:xfrm>
-            <a:off x="777240" y="1828800"/>
-            <a:ext cx="4983480" cy="3566160"/>
+            <a:off x="777240" y="1691640"/>
+            <a:ext cx="10607040" cy="665683"/>
           </a:xfrm>
           <a:prstGeom prst="rect">
             <a:avLst/>
           </a:prstGeom>
           <a:solidFill>
-            <a:srgbClr val="EDE7DB"/>
+            <a:srgbClr val="FFFFFF"/>
           </a:solidFill>
-          <a:ln w="15875">
+          <a:ln w="12700">
             <a:solidFill>
-              <a:srgbClr val="8A8177"/>
+              <a:srgbClr val="EDE7DB"/>
             </a:solidFill>
             <a:prstDash val="solid"/>
           </a:ln>
@@ -3565,497 +4774,8 @@
         </p:nvSpPr>
         <p:spPr>
           <a:xfrm>
-            <a:off x="777240" y="1828800"/>
-            <a:ext cx="4983480" cy="566928"/>
-          </a:xfrm>
-          <a:prstGeom prst="rect">
-            <a:avLst/>
-          </a:prstGeom>
-          <a:solidFill>
-            <a:srgbClr val="8A8177"/>
-          </a:solidFill>
-          <a:ln w="12700">
-            <a:solidFill>
-              <a:srgbClr val="333333"/>
-            </a:solidFill>
-            <a:prstDash val="solid"/>
-          </a:ln>
-        </p:spPr>
-      </p:sp>
-      <p:sp>
-        <p:nvSpPr>
-          <p:cNvPr id="6" name="Text 4"/>
-          <p:cNvSpPr txBox="1"/>
-          <p:nvPr/>
-        </p:nvSpPr>
-        <p:spPr>
-          <a:xfrm>
-            <a:off x="1005840" y="1883664"/>
-            <a:ext cx="4526280" cy="457200"/>
-          </a:xfrm>
-          <a:prstGeom prst="rect">
-            <a:avLst/>
-          </a:prstGeom>
-          <a:noFill/>
-          <a:ln/>
-        </p:spPr>
-        <p:txBody>
-          <a:bodyPr wrap="square" lIns="0" tIns="0" rIns="0" bIns="0" rtlCol="0" anchor="ctr"/>
-          <a:lstStyle/>
-          <a:p>
-            <a:pPr indent="0" marL="0">
-              <a:buNone/>
-            </a:pPr>
-            <a:r>
-              <a:rPr lang="en-US" sz="1400" b="1" dirty="0">
-                <a:solidFill>
-                  <a:srgbClr val="FFFFFF"/>
-                </a:solidFill>
-                <a:latin typeface="Yu Gothic" pitchFamily="34" charset="0"/>
-                <a:ea typeface="Yu Gothic" pitchFamily="34" charset="-122"/>
-                <a:cs typeface="Yu Gothic" pitchFamily="34" charset="-120"/>
-              </a:rPr>
-              <a:t>よくある指示</a:t>
-            </a:r>
-            <a:endParaRPr lang="en-US" sz="1400" dirty="0"/>
-          </a:p>
-        </p:txBody>
-      </p:sp>
-      <p:sp>
-        <p:nvSpPr>
-          <p:cNvPr id="7" name="Text 5"/>
-          <p:cNvSpPr txBox="1"/>
-          <p:nvPr/>
-        </p:nvSpPr>
-        <p:spPr>
-          <a:xfrm>
-            <a:off x="1097280" y="2606040"/>
-            <a:ext cx="4343400" cy="548640"/>
-          </a:xfrm>
-          <a:prstGeom prst="rect">
-            <a:avLst/>
-          </a:prstGeom>
-          <a:noFill/>
-          <a:ln/>
-        </p:spPr>
-        <p:txBody>
-          <a:bodyPr wrap="square" lIns="0" tIns="0" rIns="0" bIns="0" rtlCol="0" anchor="ctr"/>
-          <a:lstStyle/>
-          <a:p>
-            <a:pPr indent="0" marL="0">
-              <a:lnSpc>
-                <a:spcPct val="125000"/>
-              </a:lnSpc>
-              <a:buNone/>
-            </a:pPr>
-            <a:r>
-              <a:rPr lang="en-US" sz="1300" dirty="0">
-                <a:solidFill>
-                  <a:srgbClr val="23201D"/>
-                </a:solidFill>
-                <a:latin typeface="Yu Gothic" pitchFamily="34" charset="0"/>
-                <a:ea typeface="Yu Gothic" pitchFamily="34" charset="-122"/>
-                <a:cs typeface="Yu Gothic" pitchFamily="34" charset="-120"/>
-              </a:rPr>
-              <a:t>「見積書の送付メールを書いて」</a:t>
-            </a:r>
-            <a:endParaRPr lang="en-US" sz="1300" dirty="0"/>
-          </a:p>
-        </p:txBody>
-      </p:sp>
-      <p:sp>
-        <p:nvSpPr>
-          <p:cNvPr id="8" name="Text 6"/>
-          <p:cNvSpPr txBox="1"/>
-          <p:nvPr/>
-        </p:nvSpPr>
-        <p:spPr>
-          <a:xfrm>
-            <a:off x="1097280" y="3172968"/>
-            <a:ext cx="4343400" cy="548640"/>
-          </a:xfrm>
-          <a:prstGeom prst="rect">
-            <a:avLst/>
-          </a:prstGeom>
-          <a:noFill/>
-          <a:ln/>
-        </p:spPr>
-        <p:txBody>
-          <a:bodyPr wrap="square" lIns="0" tIns="0" rIns="0" bIns="0" rtlCol="0" anchor="ctr"/>
-          <a:lstStyle/>
-          <a:p>
-            <a:pPr indent="0" marL="0">
-              <a:lnSpc>
-                <a:spcPct val="125000"/>
-              </a:lnSpc>
-              <a:buNone/>
-            </a:pPr>
-            <a:r>
-              <a:rPr lang="en-US" sz="1300" dirty="0">
-                <a:solidFill>
-                  <a:srgbClr val="23201D"/>
-                </a:solidFill>
-                <a:latin typeface="Yu Gothic" pitchFamily="34" charset="0"/>
-                <a:ea typeface="Yu Gothic" pitchFamily="34" charset="-122"/>
-                <a:cs typeface="Yu Gothic" pitchFamily="34" charset="-120"/>
-              </a:rPr>
-              <a:t>→ 当たり障りのない文面が出る</a:t>
-            </a:r>
-            <a:endParaRPr lang="en-US" sz="1300" dirty="0"/>
-          </a:p>
-        </p:txBody>
-      </p:sp>
-      <p:sp>
-        <p:nvSpPr>
-          <p:cNvPr id="9" name="Text 7"/>
-          <p:cNvSpPr txBox="1"/>
-          <p:nvPr/>
-        </p:nvSpPr>
-        <p:spPr>
-          <a:xfrm>
-            <a:off x="1097280" y="3739896"/>
-            <a:ext cx="4343400" cy="548640"/>
-          </a:xfrm>
-          <a:prstGeom prst="rect">
-            <a:avLst/>
-          </a:prstGeom>
-          <a:noFill/>
-          <a:ln/>
-        </p:spPr>
-        <p:txBody>
-          <a:bodyPr wrap="square" lIns="0" tIns="0" rIns="0" bIns="0" rtlCol="0" anchor="ctr"/>
-          <a:lstStyle/>
-          <a:p>
-            <a:pPr indent="0" marL="0">
-              <a:lnSpc>
-                <a:spcPct val="125000"/>
-              </a:lnSpc>
-              <a:buNone/>
-            </a:pPr>
-            <a:r>
-              <a:rPr lang="en-US" sz="1300" dirty="0">
-                <a:solidFill>
-                  <a:srgbClr val="23201D"/>
-                </a:solidFill>
-                <a:latin typeface="Yu Gothic" pitchFamily="34" charset="0"/>
-                <a:ea typeface="Yu Gothic" pitchFamily="34" charset="-122"/>
-                <a:cs typeface="Yu Gothic" pitchFamily="34" charset="-120"/>
-              </a:rPr>
-              <a:t>→ 結局、自分で書き直す</a:t>
-            </a:r>
-            <a:endParaRPr lang="en-US" sz="1300" dirty="0"/>
-          </a:p>
-        </p:txBody>
-      </p:sp>
-      <p:sp>
-        <p:nvSpPr>
-          <p:cNvPr id="10" name="Text 8"/>
-          <p:cNvSpPr txBox="1"/>
-          <p:nvPr/>
-        </p:nvSpPr>
-        <p:spPr>
-          <a:xfrm>
-            <a:off x="1097280" y="4306824"/>
-            <a:ext cx="4343400" cy="548640"/>
-          </a:xfrm>
-          <a:prstGeom prst="rect">
-            <a:avLst/>
-          </a:prstGeom>
-          <a:noFill/>
-          <a:ln/>
-        </p:spPr>
-        <p:txBody>
-          <a:bodyPr wrap="square" lIns="0" tIns="0" rIns="0" bIns="0" rtlCol="0" anchor="ctr"/>
-          <a:lstStyle/>
-          <a:p>
-            <a:pPr indent="0" marL="0">
-              <a:lnSpc>
-                <a:spcPct val="125000"/>
-              </a:lnSpc>
-              <a:buNone/>
-            </a:pPr>
-            <a:r>
-              <a:rPr lang="en-US" sz="1300" dirty="0">
-                <a:solidFill>
-                  <a:srgbClr val="23201D"/>
-                </a:solidFill>
-                <a:latin typeface="Yu Gothic" pitchFamily="34" charset="0"/>
-                <a:ea typeface="Yu Gothic" pitchFamily="34" charset="-122"/>
-                <a:cs typeface="Yu Gothic" pitchFamily="34" charset="-120"/>
-              </a:rPr>
-              <a:t>→ 明日もまた同じことを打つ</a:t>
-            </a:r>
-            <a:endParaRPr lang="en-US" sz="1300" dirty="0"/>
-          </a:p>
-        </p:txBody>
-      </p:sp>
-      <p:sp>
-        <p:nvSpPr>
-          <p:cNvPr id="11" name="Shape 9"/>
-          <p:cNvSpPr/>
-          <p:nvPr/>
-        </p:nvSpPr>
-        <p:spPr>
-          <a:xfrm>
-            <a:off x="6400800" y="1828800"/>
-            <a:ext cx="4983480" cy="3566160"/>
-          </a:xfrm>
-          <a:prstGeom prst="rect">
-            <a:avLst/>
-          </a:prstGeom>
-          <a:solidFill>
-            <a:srgbClr val="FFFFFF"/>
-          </a:solidFill>
-          <a:ln w="15875">
-            <a:solidFill>
-              <a:srgbClr val="3B6B4A"/>
-            </a:solidFill>
-            <a:prstDash val="solid"/>
-          </a:ln>
-        </p:spPr>
-      </p:sp>
-      <p:sp>
-        <p:nvSpPr>
-          <p:cNvPr id="12" name="Shape 10"/>
-          <p:cNvSpPr/>
-          <p:nvPr/>
-        </p:nvSpPr>
-        <p:spPr>
-          <a:xfrm>
-            <a:off x="6400800" y="1828800"/>
-            <a:ext cx="4983480" cy="566928"/>
-          </a:xfrm>
-          <a:prstGeom prst="rect">
-            <a:avLst/>
-          </a:prstGeom>
-          <a:solidFill>
-            <a:srgbClr val="3B6B4A"/>
-          </a:solidFill>
-          <a:ln w="12700">
-            <a:solidFill>
-              <a:srgbClr val="333333"/>
-            </a:solidFill>
-            <a:prstDash val="solid"/>
-          </a:ln>
-        </p:spPr>
-      </p:sp>
-      <p:sp>
-        <p:nvSpPr>
-          <p:cNvPr id="13" name="Text 11"/>
-          <p:cNvSpPr txBox="1"/>
-          <p:nvPr/>
-        </p:nvSpPr>
-        <p:spPr>
-          <a:xfrm>
-            <a:off x="6629400" y="1883664"/>
-            <a:ext cx="4526280" cy="457200"/>
-          </a:xfrm>
-          <a:prstGeom prst="rect">
-            <a:avLst/>
-          </a:prstGeom>
-          <a:noFill/>
-          <a:ln/>
-        </p:spPr>
-        <p:txBody>
-          <a:bodyPr wrap="square" lIns="0" tIns="0" rIns="0" bIns="0" rtlCol="0" anchor="ctr"/>
-          <a:lstStyle/>
-          <a:p>
-            <a:pPr indent="0" marL="0">
-              <a:buNone/>
-            </a:pPr>
-            <a:r>
-              <a:rPr lang="en-US" sz="1400" b="1" dirty="0">
-                <a:solidFill>
-                  <a:srgbClr val="FFFFFF"/>
-                </a:solidFill>
-                <a:latin typeface="Yu Gothic" pitchFamily="34" charset="0"/>
-                <a:ea typeface="Yu Gothic" pitchFamily="34" charset="-122"/>
-                <a:cs typeface="Yu Gothic" pitchFamily="34" charset="-120"/>
-              </a:rPr>
-              <a:t>5要素を入れた指示</a:t>
-            </a:r>
-            <a:endParaRPr lang="en-US" sz="1400" dirty="0"/>
-          </a:p>
-        </p:txBody>
-      </p:sp>
-      <p:sp>
-        <p:nvSpPr>
-          <p:cNvPr id="14" name="Text 12"/>
-          <p:cNvSpPr txBox="1"/>
-          <p:nvPr/>
-        </p:nvSpPr>
-        <p:spPr>
-          <a:xfrm>
-            <a:off x="6720840" y="2606040"/>
-            <a:ext cx="4343400" cy="548640"/>
-          </a:xfrm>
-          <a:prstGeom prst="rect">
-            <a:avLst/>
-          </a:prstGeom>
-          <a:noFill/>
-          <a:ln/>
-        </p:spPr>
-        <p:txBody>
-          <a:bodyPr wrap="square" lIns="0" tIns="0" rIns="0" bIns="0" rtlCol="0" anchor="ctr"/>
-          <a:lstStyle/>
-          <a:p>
-            <a:pPr indent="0" marL="0">
-              <a:lnSpc>
-                <a:spcPct val="125000"/>
-              </a:lnSpc>
-              <a:buNone/>
-            </a:pPr>
-            <a:r>
-              <a:rPr lang="en-US" sz="1300" dirty="0">
-                <a:solidFill>
-                  <a:srgbClr val="23201D"/>
-                </a:solidFill>
-                <a:latin typeface="Yu Gothic" pitchFamily="34" charset="0"/>
-                <a:ea typeface="Yu Gothic" pitchFamily="34" charset="-122"/>
-                <a:cs typeface="Yu Gothic" pitchFamily="34" charset="-120"/>
-              </a:rPr>
-              <a:t>役割・前提・依頼・制約・出力形式</a:t>
-            </a:r>
-            <a:endParaRPr lang="en-US" sz="1300" dirty="0"/>
-          </a:p>
-        </p:txBody>
-      </p:sp>
-      <p:sp>
-        <p:nvSpPr>
-          <p:cNvPr id="15" name="Text 13"/>
-          <p:cNvSpPr txBox="1"/>
-          <p:nvPr/>
-        </p:nvSpPr>
-        <p:spPr>
-          <a:xfrm>
-            <a:off x="6720840" y="3172968"/>
-            <a:ext cx="4343400" cy="548640"/>
-          </a:xfrm>
-          <a:prstGeom prst="rect">
-            <a:avLst/>
-          </a:prstGeom>
-          <a:noFill/>
-          <a:ln/>
-        </p:spPr>
-        <p:txBody>
-          <a:bodyPr wrap="square" lIns="0" tIns="0" rIns="0" bIns="0" rtlCol="0" anchor="ctr"/>
-          <a:lstStyle/>
-          <a:p>
-            <a:pPr indent="0" marL="0">
-              <a:lnSpc>
-                <a:spcPct val="125000"/>
-              </a:lnSpc>
-              <a:buNone/>
-            </a:pPr>
-            <a:r>
-              <a:rPr lang="en-US" sz="1300" dirty="0">
-                <a:solidFill>
-                  <a:srgbClr val="23201D"/>
-                </a:solidFill>
-                <a:latin typeface="Yu Gothic" pitchFamily="34" charset="0"/>
-                <a:ea typeface="Yu Gothic" pitchFamily="34" charset="-122"/>
-                <a:cs typeface="Yu Gothic" pitchFamily="34" charset="-120"/>
-              </a:rPr>
-              <a:t>→ そのまま送れる文面が出る</a:t>
-            </a:r>
-            <a:endParaRPr lang="en-US" sz="1300" dirty="0"/>
-          </a:p>
-        </p:txBody>
-      </p:sp>
-      <p:sp>
-        <p:nvSpPr>
-          <p:cNvPr id="16" name="Text 14"/>
-          <p:cNvSpPr txBox="1"/>
-          <p:nvPr/>
-        </p:nvSpPr>
-        <p:spPr>
-          <a:xfrm>
-            <a:off x="6720840" y="3739896"/>
-            <a:ext cx="4343400" cy="548640"/>
-          </a:xfrm>
-          <a:prstGeom prst="rect">
-            <a:avLst/>
-          </a:prstGeom>
-          <a:noFill/>
-          <a:ln/>
-        </p:spPr>
-        <p:txBody>
-          <a:bodyPr wrap="square" lIns="0" tIns="0" rIns="0" bIns="0" rtlCol="0" anchor="ctr"/>
-          <a:lstStyle/>
-          <a:p>
-            <a:pPr indent="0" marL="0">
-              <a:lnSpc>
-                <a:spcPct val="125000"/>
-              </a:lnSpc>
-              <a:buNone/>
-            </a:pPr>
-            <a:r>
-              <a:rPr lang="en-US" sz="1300" dirty="0">
-                <a:solidFill>
-                  <a:srgbClr val="23201D"/>
-                </a:solidFill>
-                <a:latin typeface="Yu Gothic" pitchFamily="34" charset="0"/>
-                <a:ea typeface="Yu Gothic" pitchFamily="34" charset="-122"/>
-                <a:cs typeface="Yu Gothic" pitchFamily="34" charset="-120"/>
-              </a:rPr>
-              <a:t>→ 直すのは固有名詞だけ</a:t>
-            </a:r>
-            <a:endParaRPr lang="en-US" sz="1300" dirty="0"/>
-          </a:p>
-        </p:txBody>
-      </p:sp>
-      <p:sp>
-        <p:nvSpPr>
-          <p:cNvPr id="17" name="Text 15"/>
-          <p:cNvSpPr txBox="1"/>
-          <p:nvPr/>
-        </p:nvSpPr>
-        <p:spPr>
-          <a:xfrm>
-            <a:off x="6720840" y="4306824"/>
-            <a:ext cx="4343400" cy="548640"/>
-          </a:xfrm>
-          <a:prstGeom prst="rect">
-            <a:avLst/>
-          </a:prstGeom>
-          <a:noFill/>
-          <a:ln/>
-        </p:spPr>
-        <p:txBody>
-          <a:bodyPr wrap="square" lIns="0" tIns="0" rIns="0" bIns="0" rtlCol="0" anchor="ctr"/>
-          <a:lstStyle/>
-          <a:p>
-            <a:pPr indent="0" marL="0">
-              <a:lnSpc>
-                <a:spcPct val="125000"/>
-              </a:lnSpc>
-              <a:buNone/>
-            </a:pPr>
-            <a:r>
-              <a:rPr lang="en-US" sz="1300" dirty="0">
-                <a:solidFill>
-                  <a:srgbClr val="23201D"/>
-                </a:solidFill>
-                <a:latin typeface="Yu Gothic" pitchFamily="34" charset="0"/>
-                <a:ea typeface="Yu Gothic" pitchFamily="34" charset="-122"/>
-                <a:cs typeface="Yu Gothic" pitchFamily="34" charset="-120"/>
-              </a:rPr>
-              <a:t>→ この指示文を保存して再利用する</a:t>
-            </a:r>
-            <a:endParaRPr lang="en-US" sz="1300" dirty="0"/>
-          </a:p>
-        </p:txBody>
-      </p:sp>
-      <p:sp>
-        <p:nvSpPr>
-          <p:cNvPr id="18" name="Shape 16"/>
-          <p:cNvSpPr/>
-          <p:nvPr/>
-        </p:nvSpPr>
-        <p:spPr>
-          <a:xfrm>
-            <a:off x="5815584" y="3337560"/>
-            <a:ext cx="512064" cy="512064"/>
+            <a:off x="1014984" y="1841602"/>
+            <a:ext cx="365760" cy="365760"/>
           </a:xfrm>
           <a:prstGeom prst="ellipse">
             <a:avLst/>
@@ -4073,14 +4793,14 @@
       </p:sp>
       <p:sp>
         <p:nvSpPr>
-          <p:cNvPr id="19" name="Text 17"/>
-          <p:cNvSpPr txBox="1"/>
-          <p:nvPr/>
-        </p:nvSpPr>
-        <p:spPr>
-          <a:xfrm>
-            <a:off x="5815584" y="3337560"/>
-            <a:ext cx="512064" cy="512064"/>
+          <p:cNvPr id="6" name="Text 4"/>
+          <p:cNvSpPr txBox="1"/>
+          <p:nvPr/>
+        </p:nvSpPr>
+        <p:spPr>
+          <a:xfrm>
+            <a:off x="1014984" y="1841602"/>
+            <a:ext cx="365760" cy="365760"/>
           </a:xfrm>
           <a:prstGeom prst="rect">
             <a:avLst/>
@@ -4096,7 +4816,7 @@
               <a:buNone/>
             </a:pPr>
             <a:r>
-              <a:rPr lang="en-US" sz="1800" b="1" dirty="0">
+              <a:rPr lang="en-US" sz="1300" b="1" dirty="0">
                 <a:solidFill>
                   <a:srgbClr val="FFFFFF"/>
                 </a:solidFill>
@@ -4104,22 +4824,822 @@
                 <a:ea typeface="Yu Gothic" pitchFamily="34" charset="-122"/>
                 <a:cs typeface="Yu Gothic" pitchFamily="34" charset="-120"/>
               </a:rPr>
-              <a:t>→</a:t>
-            </a:r>
-            <a:endParaRPr lang="en-US" sz="1800" dirty="0"/>
-          </a:p>
-        </p:txBody>
-      </p:sp>
-      <p:sp>
-        <p:nvSpPr>
-          <p:cNvPr id="20" name="Text 18"/>
-          <p:cNvSpPr txBox="1"/>
-          <p:nvPr/>
-        </p:nvSpPr>
-        <p:spPr>
-          <a:xfrm>
-            <a:off x="777240" y="6355080"/>
-            <a:ext cx="7424928" cy="274320"/>
+              <a:t>1</a:t>
+            </a:r>
+            <a:endParaRPr lang="en-US" sz="1300" dirty="0"/>
+          </a:p>
+        </p:txBody>
+      </p:sp>
+      <p:sp>
+        <p:nvSpPr>
+          <p:cNvPr id="7" name="Text 5"/>
+          <p:cNvSpPr txBox="1"/>
+          <p:nvPr/>
+        </p:nvSpPr>
+        <p:spPr>
+          <a:xfrm>
+            <a:off x="1600200" y="1764792"/>
+            <a:ext cx="3182112" cy="519379"/>
+          </a:xfrm>
+          <a:prstGeom prst="rect">
+            <a:avLst/>
+          </a:prstGeom>
+          <a:noFill/>
+          <a:ln/>
+        </p:spPr>
+        <p:txBody>
+          <a:bodyPr wrap="square" lIns="0" tIns="0" rIns="0" bIns="0" rtlCol="0" anchor="ctr"/>
+          <a:lstStyle/>
+          <a:p>
+            <a:pPr indent="0" marL="0">
+              <a:buNone/>
+            </a:pPr>
+            <a:r>
+              <a:rPr lang="en-US" sz="1450" b="1" dirty="0">
+                <a:solidFill>
+                  <a:srgbClr val="23201D"/>
+                </a:solidFill>
+                <a:latin typeface="Yu Gothic" pitchFamily="34" charset="0"/>
+                <a:ea typeface="Yu Gothic" pitchFamily="34" charset="-122"/>
+                <a:cs typeface="Yu Gothic" pitchFamily="34" charset="-120"/>
+              </a:rPr>
+              <a:t>役割</a:t>
+            </a:r>
+            <a:endParaRPr lang="en-US" sz="1450" dirty="0"/>
+          </a:p>
+        </p:txBody>
+      </p:sp>
+      <p:sp>
+        <p:nvSpPr>
+          <p:cNvPr id="8" name="Text 6"/>
+          <p:cNvSpPr txBox="1"/>
+          <p:nvPr/>
+        </p:nvSpPr>
+        <p:spPr>
+          <a:xfrm>
+            <a:off x="4888382" y="1764792"/>
+            <a:ext cx="6267298" cy="519379"/>
+          </a:xfrm>
+          <a:prstGeom prst="rect">
+            <a:avLst/>
+          </a:prstGeom>
+          <a:noFill/>
+          <a:ln/>
+        </p:spPr>
+        <p:txBody>
+          <a:bodyPr wrap="square" lIns="0" tIns="0" rIns="0" bIns="0" rtlCol="0" anchor="ctr"/>
+          <a:lstStyle/>
+          <a:p>
+            <a:pPr indent="0" marL="0">
+              <a:lnSpc>
+                <a:spcPct val="130000"/>
+              </a:lnSpc>
+              <a:buNone/>
+            </a:pPr>
+            <a:r>
+              <a:rPr lang="en-US" sz="1200" dirty="0">
+                <a:solidFill>
+                  <a:srgbClr val="5A534A"/>
+                </a:solidFill>
+                <a:latin typeface="Yu Gothic" pitchFamily="34" charset="0"/>
+                <a:ea typeface="Yu Gothic" pitchFamily="34" charset="-122"/>
+                <a:cs typeface="Yu Gothic" pitchFamily="34" charset="-120"/>
+              </a:rPr>
+              <a:t>誰として答えるか。抜けると一般論しか出ません</a:t>
+            </a:r>
+            <a:endParaRPr lang="en-US" sz="1200" dirty="0"/>
+          </a:p>
+        </p:txBody>
+      </p:sp>
+      <p:sp>
+        <p:nvSpPr>
+          <p:cNvPr id="9" name="Shape 7"/>
+          <p:cNvSpPr/>
+          <p:nvPr/>
+        </p:nvSpPr>
+        <p:spPr>
+          <a:xfrm>
+            <a:off x="777240" y="2485339"/>
+            <a:ext cx="10607040" cy="665683"/>
+          </a:xfrm>
+          <a:prstGeom prst="rect">
+            <a:avLst/>
+          </a:prstGeom>
+          <a:solidFill>
+            <a:srgbClr val="FFFFFF"/>
+          </a:solidFill>
+          <a:ln w="12700">
+            <a:solidFill>
+              <a:srgbClr val="EDE7DB"/>
+            </a:solidFill>
+            <a:prstDash val="solid"/>
+          </a:ln>
+        </p:spPr>
+      </p:sp>
+      <p:sp>
+        <p:nvSpPr>
+          <p:cNvPr id="10" name="Shape 8"/>
+          <p:cNvSpPr/>
+          <p:nvPr/>
+        </p:nvSpPr>
+        <p:spPr>
+          <a:xfrm>
+            <a:off x="1014984" y="2635301"/>
+            <a:ext cx="365760" cy="365760"/>
+          </a:xfrm>
+          <a:prstGeom prst="ellipse">
+            <a:avLst/>
+          </a:prstGeom>
+          <a:solidFill>
+            <a:srgbClr val="B04A2F"/>
+          </a:solidFill>
+          <a:ln w="12700">
+            <a:solidFill>
+              <a:srgbClr val="333333"/>
+            </a:solidFill>
+            <a:prstDash val="solid"/>
+          </a:ln>
+        </p:spPr>
+      </p:sp>
+      <p:sp>
+        <p:nvSpPr>
+          <p:cNvPr id="11" name="Text 9"/>
+          <p:cNvSpPr txBox="1"/>
+          <p:nvPr/>
+        </p:nvSpPr>
+        <p:spPr>
+          <a:xfrm>
+            <a:off x="1014984" y="2635301"/>
+            <a:ext cx="365760" cy="365760"/>
+          </a:xfrm>
+          <a:prstGeom prst="rect">
+            <a:avLst/>
+          </a:prstGeom>
+          <a:noFill/>
+          <a:ln/>
+        </p:spPr>
+        <p:txBody>
+          <a:bodyPr wrap="square" lIns="0" tIns="0" rIns="0" bIns="0" rtlCol="0" anchor="ctr"/>
+          <a:lstStyle/>
+          <a:p>
+            <a:pPr algn="ctr" indent="0" marL="0">
+              <a:buNone/>
+            </a:pPr>
+            <a:r>
+              <a:rPr lang="en-US" sz="1300" b="1" dirty="0">
+                <a:solidFill>
+                  <a:srgbClr val="FFFFFF"/>
+                </a:solidFill>
+                <a:latin typeface="Yu Gothic" pitchFamily="34" charset="0"/>
+                <a:ea typeface="Yu Gothic" pitchFamily="34" charset="-122"/>
+                <a:cs typeface="Yu Gothic" pitchFamily="34" charset="-120"/>
+              </a:rPr>
+              <a:t>2</a:t>
+            </a:r>
+            <a:endParaRPr lang="en-US" sz="1300" dirty="0"/>
+          </a:p>
+        </p:txBody>
+      </p:sp>
+      <p:sp>
+        <p:nvSpPr>
+          <p:cNvPr id="12" name="Text 10"/>
+          <p:cNvSpPr txBox="1"/>
+          <p:nvPr/>
+        </p:nvSpPr>
+        <p:spPr>
+          <a:xfrm>
+            <a:off x="1600200" y="2558491"/>
+            <a:ext cx="3182112" cy="519379"/>
+          </a:xfrm>
+          <a:prstGeom prst="rect">
+            <a:avLst/>
+          </a:prstGeom>
+          <a:noFill/>
+          <a:ln/>
+        </p:spPr>
+        <p:txBody>
+          <a:bodyPr wrap="square" lIns="0" tIns="0" rIns="0" bIns="0" rtlCol="0" anchor="ctr"/>
+          <a:lstStyle/>
+          <a:p>
+            <a:pPr indent="0" marL="0">
+              <a:buNone/>
+            </a:pPr>
+            <a:r>
+              <a:rPr lang="en-US" sz="1450" b="1" dirty="0">
+                <a:solidFill>
+                  <a:srgbClr val="23201D"/>
+                </a:solidFill>
+                <a:latin typeface="Yu Gothic" pitchFamily="34" charset="0"/>
+                <a:ea typeface="Yu Gothic" pitchFamily="34" charset="-122"/>
+                <a:cs typeface="Yu Gothic" pitchFamily="34" charset="-120"/>
+              </a:rPr>
+              <a:t>前提</a:t>
+            </a:r>
+            <a:endParaRPr lang="en-US" sz="1450" dirty="0"/>
+          </a:p>
+        </p:txBody>
+      </p:sp>
+      <p:sp>
+        <p:nvSpPr>
+          <p:cNvPr id="13" name="Text 11"/>
+          <p:cNvSpPr txBox="1"/>
+          <p:nvPr/>
+        </p:nvSpPr>
+        <p:spPr>
+          <a:xfrm>
+            <a:off x="4888382" y="2558491"/>
+            <a:ext cx="6267298" cy="519379"/>
+          </a:xfrm>
+          <a:prstGeom prst="rect">
+            <a:avLst/>
+          </a:prstGeom>
+          <a:noFill/>
+          <a:ln/>
+        </p:spPr>
+        <p:txBody>
+          <a:bodyPr wrap="square" lIns="0" tIns="0" rIns="0" bIns="0" rtlCol="0" anchor="ctr"/>
+          <a:lstStyle/>
+          <a:p>
+            <a:pPr indent="0" marL="0">
+              <a:lnSpc>
+                <a:spcPct val="130000"/>
+              </a:lnSpc>
+              <a:buNone/>
+            </a:pPr>
+            <a:r>
+              <a:rPr lang="en-US" sz="1200" dirty="0">
+                <a:solidFill>
+                  <a:srgbClr val="5A534A"/>
+                </a:solidFill>
+                <a:latin typeface="Yu Gothic" pitchFamily="34" charset="0"/>
+                <a:ea typeface="Yu Gothic" pitchFamily="34" charset="-122"/>
+                <a:cs typeface="Yu Gothic" pitchFamily="34" charset="-120"/>
+              </a:rPr>
+              <a:t>自社・相手・状況。抜けると毎回説明し直すことになります</a:t>
+            </a:r>
+            <a:endParaRPr lang="en-US" sz="1200" dirty="0"/>
+          </a:p>
+        </p:txBody>
+      </p:sp>
+      <p:sp>
+        <p:nvSpPr>
+          <p:cNvPr id="14" name="Shape 12"/>
+          <p:cNvSpPr/>
+          <p:nvPr/>
+        </p:nvSpPr>
+        <p:spPr>
+          <a:xfrm>
+            <a:off x="777240" y="3279038"/>
+            <a:ext cx="10607040" cy="665683"/>
+          </a:xfrm>
+          <a:prstGeom prst="rect">
+            <a:avLst/>
+          </a:prstGeom>
+          <a:solidFill>
+            <a:srgbClr val="FFFFFF"/>
+          </a:solidFill>
+          <a:ln w="12700">
+            <a:solidFill>
+              <a:srgbClr val="EDE7DB"/>
+            </a:solidFill>
+            <a:prstDash val="solid"/>
+          </a:ln>
+        </p:spPr>
+      </p:sp>
+      <p:sp>
+        <p:nvSpPr>
+          <p:cNvPr id="15" name="Shape 13"/>
+          <p:cNvSpPr/>
+          <p:nvPr/>
+        </p:nvSpPr>
+        <p:spPr>
+          <a:xfrm>
+            <a:off x="1014984" y="3429000"/>
+            <a:ext cx="365760" cy="365760"/>
+          </a:xfrm>
+          <a:prstGeom prst="ellipse">
+            <a:avLst/>
+          </a:prstGeom>
+          <a:solidFill>
+            <a:srgbClr val="B04A2F"/>
+          </a:solidFill>
+          <a:ln w="12700">
+            <a:solidFill>
+              <a:srgbClr val="333333"/>
+            </a:solidFill>
+            <a:prstDash val="solid"/>
+          </a:ln>
+        </p:spPr>
+      </p:sp>
+      <p:sp>
+        <p:nvSpPr>
+          <p:cNvPr id="16" name="Text 14"/>
+          <p:cNvSpPr txBox="1"/>
+          <p:nvPr/>
+        </p:nvSpPr>
+        <p:spPr>
+          <a:xfrm>
+            <a:off x="1014984" y="3429000"/>
+            <a:ext cx="365760" cy="365760"/>
+          </a:xfrm>
+          <a:prstGeom prst="rect">
+            <a:avLst/>
+          </a:prstGeom>
+          <a:noFill/>
+          <a:ln/>
+        </p:spPr>
+        <p:txBody>
+          <a:bodyPr wrap="square" lIns="0" tIns="0" rIns="0" bIns="0" rtlCol="0" anchor="ctr"/>
+          <a:lstStyle/>
+          <a:p>
+            <a:pPr algn="ctr" indent="0" marL="0">
+              <a:buNone/>
+            </a:pPr>
+            <a:r>
+              <a:rPr lang="en-US" sz="1300" b="1" dirty="0">
+                <a:solidFill>
+                  <a:srgbClr val="FFFFFF"/>
+                </a:solidFill>
+                <a:latin typeface="Yu Gothic" pitchFamily="34" charset="0"/>
+                <a:ea typeface="Yu Gothic" pitchFamily="34" charset="-122"/>
+                <a:cs typeface="Yu Gothic" pitchFamily="34" charset="-120"/>
+              </a:rPr>
+              <a:t>3</a:t>
+            </a:r>
+            <a:endParaRPr lang="en-US" sz="1300" dirty="0"/>
+          </a:p>
+        </p:txBody>
+      </p:sp>
+      <p:sp>
+        <p:nvSpPr>
+          <p:cNvPr id="17" name="Text 15"/>
+          <p:cNvSpPr txBox="1"/>
+          <p:nvPr/>
+        </p:nvSpPr>
+        <p:spPr>
+          <a:xfrm>
+            <a:off x="1600200" y="3352190"/>
+            <a:ext cx="3182112" cy="519379"/>
+          </a:xfrm>
+          <a:prstGeom prst="rect">
+            <a:avLst/>
+          </a:prstGeom>
+          <a:noFill/>
+          <a:ln/>
+        </p:spPr>
+        <p:txBody>
+          <a:bodyPr wrap="square" lIns="0" tIns="0" rIns="0" bIns="0" rtlCol="0" anchor="ctr"/>
+          <a:lstStyle/>
+          <a:p>
+            <a:pPr indent="0" marL="0">
+              <a:buNone/>
+            </a:pPr>
+            <a:r>
+              <a:rPr lang="en-US" sz="1450" b="1" dirty="0">
+                <a:solidFill>
+                  <a:srgbClr val="23201D"/>
+                </a:solidFill>
+                <a:latin typeface="Yu Gothic" pitchFamily="34" charset="0"/>
+                <a:ea typeface="Yu Gothic" pitchFamily="34" charset="-122"/>
+                <a:cs typeface="Yu Gothic" pitchFamily="34" charset="-120"/>
+              </a:rPr>
+              <a:t>依頼</a:t>
+            </a:r>
+            <a:endParaRPr lang="en-US" sz="1450" dirty="0"/>
+          </a:p>
+        </p:txBody>
+      </p:sp>
+      <p:sp>
+        <p:nvSpPr>
+          <p:cNvPr id="18" name="Text 16"/>
+          <p:cNvSpPr txBox="1"/>
+          <p:nvPr/>
+        </p:nvSpPr>
+        <p:spPr>
+          <a:xfrm>
+            <a:off x="4888382" y="3352190"/>
+            <a:ext cx="6267298" cy="519379"/>
+          </a:xfrm>
+          <a:prstGeom prst="rect">
+            <a:avLst/>
+          </a:prstGeom>
+          <a:noFill/>
+          <a:ln/>
+        </p:spPr>
+        <p:txBody>
+          <a:bodyPr wrap="square" lIns="0" tIns="0" rIns="0" bIns="0" rtlCol="0" anchor="ctr"/>
+          <a:lstStyle/>
+          <a:p>
+            <a:pPr indent="0" marL="0">
+              <a:lnSpc>
+                <a:spcPct val="130000"/>
+              </a:lnSpc>
+              <a:buNone/>
+            </a:pPr>
+            <a:r>
+              <a:rPr lang="en-US" sz="1200" dirty="0">
+                <a:solidFill>
+                  <a:srgbClr val="5A534A"/>
+                </a:solidFill>
+                <a:latin typeface="Yu Gothic" pitchFamily="34" charset="0"/>
+                <a:ea typeface="Yu Gothic" pitchFamily="34" charset="-122"/>
+                <a:cs typeface="Yu Gothic" pitchFamily="34" charset="-120"/>
+              </a:rPr>
+              <a:t>してほしいこと。動詞を1つに絞ります</a:t>
+            </a:r>
+            <a:endParaRPr lang="en-US" sz="1200" dirty="0"/>
+          </a:p>
+        </p:txBody>
+      </p:sp>
+      <p:sp>
+        <p:nvSpPr>
+          <p:cNvPr id="19" name="Shape 17"/>
+          <p:cNvSpPr/>
+          <p:nvPr/>
+        </p:nvSpPr>
+        <p:spPr>
+          <a:xfrm>
+            <a:off x="777240" y="4072738"/>
+            <a:ext cx="10607040" cy="665683"/>
+          </a:xfrm>
+          <a:prstGeom prst="rect">
+            <a:avLst/>
+          </a:prstGeom>
+          <a:solidFill>
+            <a:srgbClr val="FFFFFF"/>
+          </a:solidFill>
+          <a:ln w="12700">
+            <a:solidFill>
+              <a:srgbClr val="EDE7DB"/>
+            </a:solidFill>
+            <a:prstDash val="solid"/>
+          </a:ln>
+        </p:spPr>
+      </p:sp>
+      <p:sp>
+        <p:nvSpPr>
+          <p:cNvPr id="20" name="Shape 18"/>
+          <p:cNvSpPr/>
+          <p:nvPr/>
+        </p:nvSpPr>
+        <p:spPr>
+          <a:xfrm>
+            <a:off x="1014984" y="4222699"/>
+            <a:ext cx="365760" cy="365760"/>
+          </a:xfrm>
+          <a:prstGeom prst="ellipse">
+            <a:avLst/>
+          </a:prstGeom>
+          <a:solidFill>
+            <a:srgbClr val="B04A2F"/>
+          </a:solidFill>
+          <a:ln w="12700">
+            <a:solidFill>
+              <a:srgbClr val="333333"/>
+            </a:solidFill>
+            <a:prstDash val="solid"/>
+          </a:ln>
+        </p:spPr>
+      </p:sp>
+      <p:sp>
+        <p:nvSpPr>
+          <p:cNvPr id="21" name="Text 19"/>
+          <p:cNvSpPr txBox="1"/>
+          <p:nvPr/>
+        </p:nvSpPr>
+        <p:spPr>
+          <a:xfrm>
+            <a:off x="1014984" y="4222699"/>
+            <a:ext cx="365760" cy="365760"/>
+          </a:xfrm>
+          <a:prstGeom prst="rect">
+            <a:avLst/>
+          </a:prstGeom>
+          <a:noFill/>
+          <a:ln/>
+        </p:spPr>
+        <p:txBody>
+          <a:bodyPr wrap="square" lIns="0" tIns="0" rIns="0" bIns="0" rtlCol="0" anchor="ctr"/>
+          <a:lstStyle/>
+          <a:p>
+            <a:pPr algn="ctr" indent="0" marL="0">
+              <a:buNone/>
+            </a:pPr>
+            <a:r>
+              <a:rPr lang="en-US" sz="1300" b="1" dirty="0">
+                <a:solidFill>
+                  <a:srgbClr val="FFFFFF"/>
+                </a:solidFill>
+                <a:latin typeface="Yu Gothic" pitchFamily="34" charset="0"/>
+                <a:ea typeface="Yu Gothic" pitchFamily="34" charset="-122"/>
+                <a:cs typeface="Yu Gothic" pitchFamily="34" charset="-120"/>
+              </a:rPr>
+              <a:t>4</a:t>
+            </a:r>
+            <a:endParaRPr lang="en-US" sz="1300" dirty="0"/>
+          </a:p>
+        </p:txBody>
+      </p:sp>
+      <p:sp>
+        <p:nvSpPr>
+          <p:cNvPr id="22" name="Text 20"/>
+          <p:cNvSpPr txBox="1"/>
+          <p:nvPr/>
+        </p:nvSpPr>
+        <p:spPr>
+          <a:xfrm>
+            <a:off x="1600200" y="4145890"/>
+            <a:ext cx="3182112" cy="519379"/>
+          </a:xfrm>
+          <a:prstGeom prst="rect">
+            <a:avLst/>
+          </a:prstGeom>
+          <a:noFill/>
+          <a:ln/>
+        </p:spPr>
+        <p:txBody>
+          <a:bodyPr wrap="square" lIns="0" tIns="0" rIns="0" bIns="0" rtlCol="0" anchor="ctr"/>
+          <a:lstStyle/>
+          <a:p>
+            <a:pPr indent="0" marL="0">
+              <a:buNone/>
+            </a:pPr>
+            <a:r>
+              <a:rPr lang="en-US" sz="1450" b="1" dirty="0">
+                <a:solidFill>
+                  <a:srgbClr val="23201D"/>
+                </a:solidFill>
+                <a:latin typeface="Yu Gothic" pitchFamily="34" charset="0"/>
+                <a:ea typeface="Yu Gothic" pitchFamily="34" charset="-122"/>
+                <a:cs typeface="Yu Gothic" pitchFamily="34" charset="-120"/>
+              </a:rPr>
+              <a:t>制約</a:t>
+            </a:r>
+            <a:endParaRPr lang="en-US" sz="1450" dirty="0"/>
+          </a:p>
+        </p:txBody>
+      </p:sp>
+      <p:sp>
+        <p:nvSpPr>
+          <p:cNvPr id="23" name="Text 21"/>
+          <p:cNvSpPr txBox="1"/>
+          <p:nvPr/>
+        </p:nvSpPr>
+        <p:spPr>
+          <a:xfrm>
+            <a:off x="4888382" y="4145890"/>
+            <a:ext cx="6267298" cy="519379"/>
+          </a:xfrm>
+          <a:prstGeom prst="rect">
+            <a:avLst/>
+          </a:prstGeom>
+          <a:noFill/>
+          <a:ln/>
+        </p:spPr>
+        <p:txBody>
+          <a:bodyPr wrap="square" lIns="0" tIns="0" rIns="0" bIns="0" rtlCol="0" anchor="ctr"/>
+          <a:lstStyle/>
+          <a:p>
+            <a:pPr indent="0" marL="0">
+              <a:lnSpc>
+                <a:spcPct val="130000"/>
+              </a:lnSpc>
+              <a:buNone/>
+            </a:pPr>
+            <a:r>
+              <a:rPr lang="en-US" sz="1200" dirty="0">
+                <a:solidFill>
+                  <a:srgbClr val="5A534A"/>
+                </a:solidFill>
+                <a:latin typeface="Yu Gothic" pitchFamily="34" charset="0"/>
+                <a:ea typeface="Yu Gothic" pitchFamily="34" charset="-122"/>
+                <a:cs typeface="Yu Gothic" pitchFamily="34" charset="-120"/>
+              </a:rPr>
+              <a:t>文字数・トーン・使ってはいけない表現。抜けると手直しが増えます</a:t>
+            </a:r>
+            <a:endParaRPr lang="en-US" sz="1200" dirty="0"/>
+          </a:p>
+        </p:txBody>
+      </p:sp>
+      <p:sp>
+        <p:nvSpPr>
+          <p:cNvPr id="24" name="Shape 22"/>
+          <p:cNvSpPr/>
+          <p:nvPr/>
+        </p:nvSpPr>
+        <p:spPr>
+          <a:xfrm>
+            <a:off x="777240" y="4866437"/>
+            <a:ext cx="10607040" cy="665683"/>
+          </a:xfrm>
+          <a:prstGeom prst="rect">
+            <a:avLst/>
+          </a:prstGeom>
+          <a:solidFill>
+            <a:srgbClr val="FFFFFF"/>
+          </a:solidFill>
+          <a:ln w="12700">
+            <a:solidFill>
+              <a:srgbClr val="EDE7DB"/>
+            </a:solidFill>
+            <a:prstDash val="solid"/>
+          </a:ln>
+        </p:spPr>
+      </p:sp>
+      <p:sp>
+        <p:nvSpPr>
+          <p:cNvPr id="25" name="Shape 23"/>
+          <p:cNvSpPr/>
+          <p:nvPr/>
+        </p:nvSpPr>
+        <p:spPr>
+          <a:xfrm>
+            <a:off x="1014984" y="5016398"/>
+            <a:ext cx="365760" cy="365760"/>
+          </a:xfrm>
+          <a:prstGeom prst="ellipse">
+            <a:avLst/>
+          </a:prstGeom>
+          <a:solidFill>
+            <a:srgbClr val="B04A2F"/>
+          </a:solidFill>
+          <a:ln w="12700">
+            <a:solidFill>
+              <a:srgbClr val="333333"/>
+            </a:solidFill>
+            <a:prstDash val="solid"/>
+          </a:ln>
+        </p:spPr>
+      </p:sp>
+      <p:sp>
+        <p:nvSpPr>
+          <p:cNvPr id="26" name="Text 24"/>
+          <p:cNvSpPr txBox="1"/>
+          <p:nvPr/>
+        </p:nvSpPr>
+        <p:spPr>
+          <a:xfrm>
+            <a:off x="1014984" y="5016398"/>
+            <a:ext cx="365760" cy="365760"/>
+          </a:xfrm>
+          <a:prstGeom prst="rect">
+            <a:avLst/>
+          </a:prstGeom>
+          <a:noFill/>
+          <a:ln/>
+        </p:spPr>
+        <p:txBody>
+          <a:bodyPr wrap="square" lIns="0" tIns="0" rIns="0" bIns="0" rtlCol="0" anchor="ctr"/>
+          <a:lstStyle/>
+          <a:p>
+            <a:pPr algn="ctr" indent="0" marL="0">
+              <a:buNone/>
+            </a:pPr>
+            <a:r>
+              <a:rPr lang="en-US" sz="1300" b="1" dirty="0">
+                <a:solidFill>
+                  <a:srgbClr val="FFFFFF"/>
+                </a:solidFill>
+                <a:latin typeface="Yu Gothic" pitchFamily="34" charset="0"/>
+                <a:ea typeface="Yu Gothic" pitchFamily="34" charset="-122"/>
+                <a:cs typeface="Yu Gothic" pitchFamily="34" charset="-120"/>
+              </a:rPr>
+              <a:t>5</a:t>
+            </a:r>
+            <a:endParaRPr lang="en-US" sz="1300" dirty="0"/>
+          </a:p>
+        </p:txBody>
+      </p:sp>
+      <p:sp>
+        <p:nvSpPr>
+          <p:cNvPr id="27" name="Text 25"/>
+          <p:cNvSpPr txBox="1"/>
+          <p:nvPr/>
+        </p:nvSpPr>
+        <p:spPr>
+          <a:xfrm>
+            <a:off x="1600200" y="4939589"/>
+            <a:ext cx="3182112" cy="519379"/>
+          </a:xfrm>
+          <a:prstGeom prst="rect">
+            <a:avLst/>
+          </a:prstGeom>
+          <a:noFill/>
+          <a:ln/>
+        </p:spPr>
+        <p:txBody>
+          <a:bodyPr wrap="square" lIns="0" tIns="0" rIns="0" bIns="0" rtlCol="0" anchor="ctr"/>
+          <a:lstStyle/>
+          <a:p>
+            <a:pPr indent="0" marL="0">
+              <a:buNone/>
+            </a:pPr>
+            <a:r>
+              <a:rPr lang="en-US" sz="1450" b="1" dirty="0">
+                <a:solidFill>
+                  <a:srgbClr val="23201D"/>
+                </a:solidFill>
+                <a:latin typeface="Yu Gothic" pitchFamily="34" charset="0"/>
+                <a:ea typeface="Yu Gothic" pitchFamily="34" charset="-122"/>
+                <a:cs typeface="Yu Gothic" pitchFamily="34" charset="-120"/>
+              </a:rPr>
+              <a:t>出力形式</a:t>
+            </a:r>
+            <a:endParaRPr lang="en-US" sz="1450" dirty="0"/>
+          </a:p>
+        </p:txBody>
+      </p:sp>
+      <p:sp>
+        <p:nvSpPr>
+          <p:cNvPr id="28" name="Text 26"/>
+          <p:cNvSpPr txBox="1"/>
+          <p:nvPr/>
+        </p:nvSpPr>
+        <p:spPr>
+          <a:xfrm>
+            <a:off x="4888382" y="4939589"/>
+            <a:ext cx="6267298" cy="519379"/>
+          </a:xfrm>
+          <a:prstGeom prst="rect">
+            <a:avLst/>
+          </a:prstGeom>
+          <a:noFill/>
+          <a:ln/>
+        </p:spPr>
+        <p:txBody>
+          <a:bodyPr wrap="square" lIns="0" tIns="0" rIns="0" bIns="0" rtlCol="0" anchor="ctr"/>
+          <a:lstStyle/>
+          <a:p>
+            <a:pPr indent="0" marL="0">
+              <a:lnSpc>
+                <a:spcPct val="130000"/>
+              </a:lnSpc>
+              <a:buNone/>
+            </a:pPr>
+            <a:r>
+              <a:rPr lang="en-US" sz="1200" dirty="0">
+                <a:solidFill>
+                  <a:srgbClr val="5A534A"/>
+                </a:solidFill>
+                <a:latin typeface="Yu Gothic" pitchFamily="34" charset="0"/>
+                <a:ea typeface="Yu Gothic" pitchFamily="34" charset="-122"/>
+                <a:cs typeface="Yu Gothic" pitchFamily="34" charset="-120"/>
+              </a:rPr>
+              <a:t>箇条書きか、表か、メール本文そのままか。抜けると貼り付けられません</a:t>
+            </a:r>
+            <a:endParaRPr lang="en-US" sz="1200" dirty="0"/>
+          </a:p>
+        </p:txBody>
+      </p:sp>
+      <p:sp>
+        <p:nvSpPr>
+          <p:cNvPr id="29" name="Text 27"/>
+          <p:cNvSpPr txBox="1"/>
+          <p:nvPr/>
+        </p:nvSpPr>
+        <p:spPr>
+          <a:xfrm>
+            <a:off x="777240" y="5669280"/>
+            <a:ext cx="10607040" cy="411480"/>
+          </a:xfrm>
+          <a:prstGeom prst="rect">
+            <a:avLst/>
+          </a:prstGeom>
+          <a:noFill/>
+          <a:ln/>
+        </p:spPr>
+        <p:txBody>
+          <a:bodyPr wrap="square" lIns="0" tIns="0" rIns="0" bIns="0" rtlCol="0" anchor="ctr"/>
+          <a:lstStyle/>
+          <a:p>
+            <a:pPr indent="0" marL="0">
+              <a:buNone/>
+            </a:pPr>
+            <a:r>
+              <a:rPr lang="en-US" sz="1200" b="1" dirty="0">
+                <a:solidFill>
+                  <a:srgbClr val="B04A2F"/>
+                </a:solidFill>
+                <a:latin typeface="Yu Gothic" pitchFamily="34" charset="0"/>
+                <a:ea typeface="Yu Gothic" pitchFamily="34" charset="-122"/>
+                <a:cs typeface="Yu Gothic" pitchFamily="34" charset="-120"/>
+              </a:rPr>
+              <a:t>抜けている要素が、そのまま不満の正体です。「なんとなく違う」は、たいてい前提か出力形式の欠落です。</a:t>
+            </a:r>
+            <a:endParaRPr lang="en-US" sz="1200" dirty="0"/>
+          </a:p>
+        </p:txBody>
+      </p:sp>
+      <p:sp>
+        <p:nvSpPr>
+          <p:cNvPr id="30" name="Text 28"/>
+          <p:cNvSpPr txBox="1"/>
+          <p:nvPr/>
+        </p:nvSpPr>
+        <p:spPr>
+          <a:xfrm>
+            <a:off x="777240" y="6382512"/>
+            <a:ext cx="7424928" cy="256032"/>
           </a:xfrm>
           <a:prstGeom prst="rect">
             <a:avLst/>
@@ -4151,14 +5671,14 @@
       </p:sp>
       <p:sp>
         <p:nvSpPr>
-          <p:cNvPr id="21" name="Text 19"/>
-          <p:cNvSpPr txBox="1"/>
-          <p:nvPr/>
-        </p:nvSpPr>
-        <p:spPr>
-          <a:xfrm>
-            <a:off x="8202168" y="6355080"/>
-            <a:ext cx="3182112" cy="274320"/>
+          <p:cNvPr id="31" name="Text 29"/>
+          <p:cNvSpPr txBox="1"/>
+          <p:nvPr/>
+        </p:nvSpPr>
+        <p:spPr>
+          <a:xfrm>
+            <a:off x="8202168" y="6382512"/>
+            <a:ext cx="3182112" cy="256032"/>
           </a:xfrm>
           <a:prstGeom prst="rect">
             <a:avLst/>
@@ -4182,7 +5702,7 @@
                 <a:ea typeface="Yu Gothic" pitchFamily="34" charset="-122"/>
                 <a:cs typeface="Yu Gothic" pitchFamily="34" charset="-120"/>
               </a:rPr>
-              <a:t>実演</a:t>
+              <a:t>考え方</a:t>
             </a:r>
             <a:endParaRPr lang="en-US" sz="900" dirty="0"/>
           </a:p>
@@ -4228,7 +5748,7 @@
         </p:nvSpPr>
         <p:spPr>
           <a:xfrm>
-            <a:off x="777240" y="640080"/>
+            <a:off x="777240" y="566928"/>
             <a:ext cx="10607040" cy="274320"/>
           </a:xfrm>
           <a:prstGeom prst="rect">
@@ -4253,7 +5773,7 @@
                 <a:ea typeface="Yu Gothic" pitchFamily="34" charset="-122"/>
                 <a:cs typeface="Yu Gothic" pitchFamily="34" charset="-120"/>
               </a:rPr>
-              <a:t>演習</a:t>
+              <a:t>あてはめ</a:t>
             </a:r>
             <a:endParaRPr lang="en-US" sz="1100" dirty="0"/>
           </a:p>
@@ -4267,7 +5787,7 @@
         </p:nvSpPr>
         <p:spPr>
           <a:xfrm>
-            <a:off x="777240" y="960120"/>
+            <a:off x="777240" y="896112"/>
             <a:ext cx="10607040" cy="640080"/>
           </a:xfrm>
           <a:prstGeom prst="rect">
@@ -4284,7 +5804,7 @@
               <a:buNone/>
             </a:pPr>
             <a:r>
-              <a:rPr lang="en-US" sz="2700" b="1" dirty="0">
+              <a:rPr lang="en-US" sz="2600" b="1" dirty="0">
                 <a:solidFill>
                   <a:srgbClr val="23201D"/>
                 </a:solidFill>
@@ -4292,61 +5812,22 @@
                 <a:ea typeface="Yu Gothic" pitchFamily="34" charset="-122"/>
                 <a:cs typeface="Yu Gothic" pitchFamily="34" charset="-120"/>
               </a:rPr>
-              <a:t>今日、一緒にやること</a:t>
-            </a:r>
-            <a:endParaRPr lang="en-US" sz="2700" dirty="0"/>
-          </a:p>
-        </p:txBody>
-      </p:sp>
-      <p:sp>
-        <p:nvSpPr>
-          <p:cNvPr id="4" name="Text 2"/>
-          <p:cNvSpPr txBox="1"/>
-          <p:nvPr/>
-        </p:nvSpPr>
-        <p:spPr>
-          <a:xfrm>
-            <a:off x="777240" y="1627632"/>
-            <a:ext cx="10607040" cy="320040"/>
-          </a:xfrm>
-          <a:prstGeom prst="rect">
-            <a:avLst/>
-          </a:prstGeom>
-          <a:noFill/>
-          <a:ln/>
-        </p:spPr>
-        <p:txBody>
-          <a:bodyPr wrap="square" lIns="0" tIns="0" rIns="0" bIns="0" rtlCol="0" anchor="ctr"/>
-          <a:lstStyle/>
-          <a:p>
-            <a:pPr indent="0" marL="0">
-              <a:buNone/>
-            </a:pPr>
-            <a:r>
-              <a:rPr lang="en-US" sz="1250" b="1" dirty="0">
-                <a:solidFill>
-                  <a:srgbClr val="2F4F6B"/>
-                </a:solidFill>
-                <a:latin typeface="Yu Gothic" pitchFamily="34" charset="0"/>
-                <a:ea typeface="Yu Gothic" pitchFamily="34" charset="-122"/>
-                <a:cs typeface="Yu Gothic" pitchFamily="34" charset="-120"/>
-              </a:rPr>
-              <a:t>55分。操作するのはご自身です。</a:t>
-            </a:r>
-            <a:endParaRPr lang="en-US" sz="1250" dirty="0"/>
-          </a:p>
-        </p:txBody>
-      </p:sp>
-      <p:sp>
-        <p:nvSpPr>
-          <p:cNvPr id="5" name="Shape 3"/>
+              <a:t>5要素を、実物で見ます</a:t>
+            </a:r>
+            <a:endParaRPr lang="en-US" sz="2600" dirty="0"/>
+          </a:p>
+        </p:txBody>
+      </p:sp>
+      <p:sp>
+        <p:nvSpPr>
+          <p:cNvPr id="4" name="Shape 2"/>
           <p:cNvSpPr/>
           <p:nvPr/>
         </p:nvSpPr>
         <p:spPr>
           <a:xfrm>
-            <a:off x="777240" y="2240280"/>
-            <a:ext cx="3383280" cy="2697480"/>
+            <a:off x="777240" y="1691640"/>
+            <a:ext cx="10607040" cy="3401568"/>
           </a:xfrm>
           <a:prstGeom prst="rect">
             <a:avLst/>
@@ -4354,9 +5835,9 @@
           <a:solidFill>
             <a:srgbClr val="FFFFFF"/>
           </a:solidFill>
-          <a:ln w="12700">
+          <a:ln w="15875">
             <a:solidFill>
-              <a:srgbClr val="EDE7DB"/>
+              <a:srgbClr val="2F4F6B"/>
             </a:solidFill>
             <a:prstDash val="solid"/>
           </a:ln>
@@ -4364,16 +5845,16 @@
       </p:sp>
       <p:sp>
         <p:nvSpPr>
-          <p:cNvPr id="6" name="Shape 4"/>
+          <p:cNvPr id="5" name="Shape 3"/>
           <p:cNvSpPr/>
           <p:nvPr/>
         </p:nvSpPr>
         <p:spPr>
           <a:xfrm>
-            <a:off x="1051560" y="2487168"/>
-            <a:ext cx="438912" cy="438912"/>
-          </a:xfrm>
-          <a:prstGeom prst="ellipse">
+            <a:off x="777240" y="1691640"/>
+            <a:ext cx="10607040" cy="457200"/>
+          </a:xfrm>
+          <a:prstGeom prst="rect">
             <a:avLst/>
           </a:prstGeom>
           <a:solidFill>
@@ -4381,7 +5862,7 @@
           </a:solidFill>
           <a:ln w="12700">
             <a:solidFill>
-              <a:srgbClr val="2F4F6B"/>
+              <a:srgbClr val="333333"/>
             </a:solidFill>
             <a:prstDash val="solid"/>
           </a:ln>
@@ -4389,40 +5870,82 @@
       </p:sp>
       <p:sp>
         <p:nvSpPr>
+          <p:cNvPr id="6" name="Text 4"/>
+          <p:cNvSpPr txBox="1"/>
+          <p:nvPr/>
+        </p:nvSpPr>
+        <p:spPr>
+          <a:xfrm>
+            <a:off x="1051560" y="1709928"/>
+            <a:ext cx="10058400" cy="420624"/>
+          </a:xfrm>
+          <a:prstGeom prst="rect">
+            <a:avLst/>
+          </a:prstGeom>
+          <a:noFill/>
+          <a:ln/>
+        </p:spPr>
+        <p:txBody>
+          <a:bodyPr wrap="square" lIns="0" tIns="0" rIns="0" bIns="0" rtlCol="0" anchor="ctr"/>
+          <a:lstStyle/>
+          <a:p>
+            <a:pPr indent="0" marL="0">
+              <a:buNone/>
+            </a:pPr>
+            <a:r>
+              <a:rPr lang="en-US" sz="1200" b="1" dirty="0">
+                <a:solidFill>
+                  <a:srgbClr val="FFFFFF"/>
+                </a:solidFill>
+                <a:latin typeface="Yu Gothic" pitchFamily="34" charset="0"/>
+                <a:ea typeface="Yu Gothic" pitchFamily="34" charset="-122"/>
+                <a:cs typeface="Yu Gothic" pitchFamily="34" charset="-120"/>
+              </a:rPr>
+              <a:t>プロンプト No.07　値上げのお願い文（製造業・記入例）</a:t>
+            </a:r>
+            <a:endParaRPr lang="en-US" sz="1200" dirty="0"/>
+          </a:p>
+        </p:txBody>
+      </p:sp>
+      <p:sp>
+        <p:nvSpPr>
           <p:cNvPr id="7" name="Text 5"/>
           <p:cNvSpPr txBox="1"/>
           <p:nvPr/>
         </p:nvSpPr>
         <p:spPr>
           <a:xfrm>
-            <a:off x="1051560" y="2487168"/>
-            <a:ext cx="438912" cy="438912"/>
-          </a:xfrm>
-          <a:prstGeom prst="rect">
-            <a:avLst/>
-          </a:prstGeom>
-          <a:noFill/>
-          <a:ln/>
-        </p:spPr>
-        <p:txBody>
-          <a:bodyPr wrap="square" lIns="0" tIns="0" rIns="0" bIns="0" rtlCol="0" anchor="ctr"/>
-          <a:lstStyle/>
-          <a:p>
-            <a:pPr algn="ctr" indent="0" marL="0">
-              <a:buNone/>
-            </a:pPr>
-            <a:r>
-              <a:rPr lang="en-US" sz="1400" b="1" dirty="0">
-                <a:solidFill>
-                  <a:srgbClr val="FFFFFF"/>
-                </a:solidFill>
-                <a:latin typeface="Yu Gothic" pitchFamily="34" charset="0"/>
-                <a:ea typeface="Yu Gothic" pitchFamily="34" charset="-122"/>
-                <a:cs typeface="Yu Gothic" pitchFamily="34" charset="-120"/>
-              </a:rPr>
-              <a:t>1</a:t>
-            </a:r>
-            <a:endParaRPr lang="en-US" sz="1400" dirty="0"/>
+            <a:off x="1097280" y="2331720"/>
+            <a:ext cx="2057400" cy="530352"/>
+          </a:xfrm>
+          <a:prstGeom prst="rect">
+            <a:avLst/>
+          </a:prstGeom>
+          <a:noFill/>
+          <a:ln/>
+        </p:spPr>
+        <p:txBody>
+          <a:bodyPr wrap="square" lIns="0" tIns="0" rIns="0" bIns="0" rtlCol="0" anchor="ctr"/>
+          <a:lstStyle/>
+          <a:p>
+            <a:pPr indent="0" marL="0">
+              <a:lnSpc>
+                <a:spcPct val="110000"/>
+              </a:lnSpc>
+              <a:buNone/>
+            </a:pPr>
+            <a:r>
+              <a:rPr lang="en-US" sz="1100" b="1" dirty="0">
+                <a:solidFill>
+                  <a:srgbClr val="2F4F6B"/>
+                </a:solidFill>
+                <a:latin typeface="Yu Gothic" pitchFamily="34" charset="0"/>
+                <a:ea typeface="Yu Gothic" pitchFamily="34" charset="-122"/>
+                <a:cs typeface="Yu Gothic" pitchFamily="34" charset="-120"/>
+              </a:rPr>
+              <a:t>役割</a:t>
+            </a:r>
+            <a:endParaRPr lang="en-US" sz="1100" dirty="0"/>
           </a:p>
         </p:txBody>
       </p:sp>
@@ -4434,8 +5957,8 @@
         </p:nvSpPr>
         <p:spPr>
           <a:xfrm>
-            <a:off x="1051560" y="3035808"/>
-            <a:ext cx="2834640" cy="777240"/>
+            <a:off x="3291840" y="2331720"/>
+            <a:ext cx="7772400" cy="530352"/>
           </a:xfrm>
           <a:prstGeom prst="rect">
             <a:avLst/>
@@ -4449,22 +5972,22 @@
           <a:p>
             <a:pPr indent="0" marL="0">
               <a:lnSpc>
-                <a:spcPct val="125000"/>
+                <a:spcPct val="115000"/>
               </a:lnSpc>
               <a:buNone/>
             </a:pPr>
             <a:r>
-              <a:rPr lang="en-US" sz="1500" b="1" dirty="0">
+              <a:rPr lang="en-US" sz="1150" dirty="0">
                 <a:solidFill>
                   <a:srgbClr val="23201D"/>
                 </a:solidFill>
-                <a:latin typeface="Yu Gothic" pitchFamily="34" charset="0"/>
-                <a:ea typeface="Yu Gothic" pitchFamily="34" charset="-122"/>
-                <a:cs typeface="Yu Gothic" pitchFamily="34" charset="-120"/>
-              </a:rPr>
-              <a:t>5要素で1本書く</a:t>
-            </a:r>
-            <a:endParaRPr lang="en-US" sz="1500" dirty="0"/>
+                <a:latin typeface="Consolas" pitchFamily="34" charset="0"/>
+                <a:ea typeface="Consolas" pitchFamily="34" charset="-122"/>
+                <a:cs typeface="Consolas" pitchFamily="34" charset="-120"/>
+              </a:rPr>
+              <a:t>あなたは金属加工業の営業担当です。</a:t>
+            </a:r>
+            <a:endParaRPr lang="en-US" sz="1150" dirty="0"/>
           </a:p>
         </p:txBody>
       </p:sp>
@@ -4476,8 +5999,8 @@
         </p:nvSpPr>
         <p:spPr>
           <a:xfrm>
-            <a:off x="1051560" y="3822192"/>
-            <a:ext cx="2834640" cy="960120"/>
+            <a:off x="1097280" y="2862072"/>
+            <a:ext cx="2057400" cy="530352"/>
           </a:xfrm>
           <a:prstGeom prst="rect">
             <a:avLst/>
@@ -4491,12 +6014,348 @@
           <a:p>
             <a:pPr indent="0" marL="0">
               <a:lnSpc>
-                <a:spcPct val="130000"/>
+                <a:spcPct val="110000"/>
               </a:lnSpc>
               <a:buNone/>
             </a:pPr>
             <a:r>
-              <a:rPr lang="en-US" sz="1200" dirty="0">
+              <a:rPr lang="en-US" sz="1100" b="1" dirty="0">
+                <a:solidFill>
+                  <a:srgbClr val="2F4F6B"/>
+                </a:solidFill>
+                <a:latin typeface="Yu Gothic" pitchFamily="34" charset="0"/>
+                <a:ea typeface="Yu Gothic" pitchFamily="34" charset="-122"/>
+                <a:cs typeface="Yu Gothic" pitchFamily="34" charset="-120"/>
+              </a:rPr>
+              <a:t>前提</a:t>
+            </a:r>
+            <a:endParaRPr lang="en-US" sz="1100" dirty="0"/>
+          </a:p>
+        </p:txBody>
+      </p:sp>
+      <p:sp>
+        <p:nvSpPr>
+          <p:cNvPr id="10" name="Text 8"/>
+          <p:cNvSpPr txBox="1"/>
+          <p:nvPr/>
+        </p:nvSpPr>
+        <p:spPr>
+          <a:xfrm>
+            <a:off x="3291840" y="2862072"/>
+            <a:ext cx="7772400" cy="530352"/>
+          </a:xfrm>
+          <a:prstGeom prst="rect">
+            <a:avLst/>
+          </a:prstGeom>
+          <a:noFill/>
+          <a:ln/>
+        </p:spPr>
+        <p:txBody>
+          <a:bodyPr wrap="square" lIns="0" tIns="0" rIns="0" bIns="0" rtlCol="0" anchor="ctr"/>
+          <a:lstStyle/>
+          <a:p>
+            <a:pPr indent="0" marL="0">
+              <a:lnSpc>
+                <a:spcPct val="115000"/>
+              </a:lnSpc>
+              <a:buNone/>
+            </a:pPr>
+            <a:r>
+              <a:rPr lang="en-US" sz="1150" dirty="0">
+                <a:solidFill>
+                  <a:srgbClr val="23201D"/>
+                </a:solidFill>
+                <a:latin typeface="Consolas" pitchFamily="34" charset="0"/>
+                <a:ea typeface="Consolas" pitchFamily="34" charset="-122"/>
+                <a:cs typeface="Consolas" pitchFamily="34" charset="-120"/>
+              </a:rPr>
+              <a:t>取引15年の建設会社が相手。材料費が前年比18%上昇。値上げ幅は8%。</a:t>
+            </a:r>
+            <a:endParaRPr lang="en-US" sz="1150" dirty="0"/>
+          </a:p>
+        </p:txBody>
+      </p:sp>
+      <p:sp>
+        <p:nvSpPr>
+          <p:cNvPr id="11" name="Text 9"/>
+          <p:cNvSpPr txBox="1"/>
+          <p:nvPr/>
+        </p:nvSpPr>
+        <p:spPr>
+          <a:xfrm>
+            <a:off x="1097280" y="3392424"/>
+            <a:ext cx="2057400" cy="530352"/>
+          </a:xfrm>
+          <a:prstGeom prst="rect">
+            <a:avLst/>
+          </a:prstGeom>
+          <a:noFill/>
+          <a:ln/>
+        </p:spPr>
+        <p:txBody>
+          <a:bodyPr wrap="square" lIns="0" tIns="0" rIns="0" bIns="0" rtlCol="0" anchor="ctr"/>
+          <a:lstStyle/>
+          <a:p>
+            <a:pPr indent="0" marL="0">
+              <a:lnSpc>
+                <a:spcPct val="110000"/>
+              </a:lnSpc>
+              <a:buNone/>
+            </a:pPr>
+            <a:r>
+              <a:rPr lang="en-US" sz="1100" b="1" dirty="0">
+                <a:solidFill>
+                  <a:srgbClr val="2F4F6B"/>
+                </a:solidFill>
+                <a:latin typeface="Yu Gothic" pitchFamily="34" charset="0"/>
+                <a:ea typeface="Yu Gothic" pitchFamily="34" charset="-122"/>
+                <a:cs typeface="Yu Gothic" pitchFamily="34" charset="-120"/>
+              </a:rPr>
+              <a:t>依頼</a:t>
+            </a:r>
+            <a:endParaRPr lang="en-US" sz="1100" dirty="0"/>
+          </a:p>
+        </p:txBody>
+      </p:sp>
+      <p:sp>
+        <p:nvSpPr>
+          <p:cNvPr id="12" name="Text 10"/>
+          <p:cNvSpPr txBox="1"/>
+          <p:nvPr/>
+        </p:nvSpPr>
+        <p:spPr>
+          <a:xfrm>
+            <a:off x="3291840" y="3392424"/>
+            <a:ext cx="7772400" cy="530352"/>
+          </a:xfrm>
+          <a:prstGeom prst="rect">
+            <a:avLst/>
+          </a:prstGeom>
+          <a:noFill/>
+          <a:ln/>
+        </p:spPr>
+        <p:txBody>
+          <a:bodyPr wrap="square" lIns="0" tIns="0" rIns="0" bIns="0" rtlCol="0" anchor="ctr"/>
+          <a:lstStyle/>
+          <a:p>
+            <a:pPr indent="0" marL="0">
+              <a:lnSpc>
+                <a:spcPct val="115000"/>
+              </a:lnSpc>
+              <a:buNone/>
+            </a:pPr>
+            <a:r>
+              <a:rPr lang="en-US" sz="1150" dirty="0">
+                <a:solidFill>
+                  <a:srgbClr val="23201D"/>
+                </a:solidFill>
+                <a:latin typeface="Consolas" pitchFamily="34" charset="0"/>
+                <a:ea typeface="Consolas" pitchFamily="34" charset="-122"/>
+                <a:cs typeface="Consolas" pitchFamily="34" charset="-120"/>
+              </a:rPr>
+              <a:t>値上げのお願い文を作ってください。</a:t>
+            </a:r>
+            <a:endParaRPr lang="en-US" sz="1150" dirty="0"/>
+          </a:p>
+        </p:txBody>
+      </p:sp>
+      <p:sp>
+        <p:nvSpPr>
+          <p:cNvPr id="13" name="Text 11"/>
+          <p:cNvSpPr txBox="1"/>
+          <p:nvPr/>
+        </p:nvSpPr>
+        <p:spPr>
+          <a:xfrm>
+            <a:off x="1097280" y="3922776"/>
+            <a:ext cx="2057400" cy="530352"/>
+          </a:xfrm>
+          <a:prstGeom prst="rect">
+            <a:avLst/>
+          </a:prstGeom>
+          <a:noFill/>
+          <a:ln/>
+        </p:spPr>
+        <p:txBody>
+          <a:bodyPr wrap="square" lIns="0" tIns="0" rIns="0" bIns="0" rtlCol="0" anchor="ctr"/>
+          <a:lstStyle/>
+          <a:p>
+            <a:pPr indent="0" marL="0">
+              <a:lnSpc>
+                <a:spcPct val="110000"/>
+              </a:lnSpc>
+              <a:buNone/>
+            </a:pPr>
+            <a:r>
+              <a:rPr lang="en-US" sz="1100" b="1" dirty="0">
+                <a:solidFill>
+                  <a:srgbClr val="2F4F6B"/>
+                </a:solidFill>
+                <a:latin typeface="Yu Gothic" pitchFamily="34" charset="0"/>
+                <a:ea typeface="Yu Gothic" pitchFamily="34" charset="-122"/>
+                <a:cs typeface="Yu Gothic" pitchFamily="34" charset="-120"/>
+              </a:rPr>
+              <a:t>制約</a:t>
+            </a:r>
+            <a:endParaRPr lang="en-US" sz="1100" dirty="0"/>
+          </a:p>
+        </p:txBody>
+      </p:sp>
+      <p:sp>
+        <p:nvSpPr>
+          <p:cNvPr id="14" name="Text 12"/>
+          <p:cNvSpPr txBox="1"/>
+          <p:nvPr/>
+        </p:nvSpPr>
+        <p:spPr>
+          <a:xfrm>
+            <a:off x="3291840" y="3922776"/>
+            <a:ext cx="7772400" cy="530352"/>
+          </a:xfrm>
+          <a:prstGeom prst="rect">
+            <a:avLst/>
+          </a:prstGeom>
+          <a:noFill/>
+          <a:ln/>
+        </p:spPr>
+        <p:txBody>
+          <a:bodyPr wrap="square" lIns="0" tIns="0" rIns="0" bIns="0" rtlCol="0" anchor="ctr"/>
+          <a:lstStyle/>
+          <a:p>
+            <a:pPr indent="0" marL="0">
+              <a:lnSpc>
+                <a:spcPct val="115000"/>
+              </a:lnSpc>
+              <a:buNone/>
+            </a:pPr>
+            <a:r>
+              <a:rPr lang="en-US" sz="1150" dirty="0">
+                <a:solidFill>
+                  <a:srgbClr val="23201D"/>
+                </a:solidFill>
+                <a:latin typeface="Consolas" pitchFamily="34" charset="0"/>
+                <a:ea typeface="Consolas" pitchFamily="34" charset="-122"/>
+                <a:cs typeface="Consolas" pitchFamily="34" charset="-120"/>
+              </a:rPr>
+              <a:t>関係を壊さない／根拠の数字を入れる／600字以内</a:t>
+            </a:r>
+            <a:endParaRPr lang="en-US" sz="1150" dirty="0"/>
+          </a:p>
+        </p:txBody>
+      </p:sp>
+      <p:sp>
+        <p:nvSpPr>
+          <p:cNvPr id="15" name="Text 13"/>
+          <p:cNvSpPr txBox="1"/>
+          <p:nvPr/>
+        </p:nvSpPr>
+        <p:spPr>
+          <a:xfrm>
+            <a:off x="1097280" y="4453128"/>
+            <a:ext cx="2057400" cy="530352"/>
+          </a:xfrm>
+          <a:prstGeom prst="rect">
+            <a:avLst/>
+          </a:prstGeom>
+          <a:noFill/>
+          <a:ln/>
+        </p:spPr>
+        <p:txBody>
+          <a:bodyPr wrap="square" lIns="0" tIns="0" rIns="0" bIns="0" rtlCol="0" anchor="ctr"/>
+          <a:lstStyle/>
+          <a:p>
+            <a:pPr indent="0" marL="0">
+              <a:lnSpc>
+                <a:spcPct val="110000"/>
+              </a:lnSpc>
+              <a:buNone/>
+            </a:pPr>
+            <a:r>
+              <a:rPr lang="en-US" sz="1100" b="1" dirty="0">
+                <a:solidFill>
+                  <a:srgbClr val="2F4F6B"/>
+                </a:solidFill>
+                <a:latin typeface="Yu Gothic" pitchFamily="34" charset="0"/>
+                <a:ea typeface="Yu Gothic" pitchFamily="34" charset="-122"/>
+                <a:cs typeface="Yu Gothic" pitchFamily="34" charset="-120"/>
+              </a:rPr>
+              <a:t>出力形式</a:t>
+            </a:r>
+            <a:endParaRPr lang="en-US" sz="1100" dirty="0"/>
+          </a:p>
+        </p:txBody>
+      </p:sp>
+      <p:sp>
+        <p:nvSpPr>
+          <p:cNvPr id="16" name="Text 14"/>
+          <p:cNvSpPr txBox="1"/>
+          <p:nvPr/>
+        </p:nvSpPr>
+        <p:spPr>
+          <a:xfrm>
+            <a:off x="3291840" y="4453128"/>
+            <a:ext cx="7772400" cy="530352"/>
+          </a:xfrm>
+          <a:prstGeom prst="rect">
+            <a:avLst/>
+          </a:prstGeom>
+          <a:noFill/>
+          <a:ln/>
+        </p:spPr>
+        <p:txBody>
+          <a:bodyPr wrap="square" lIns="0" tIns="0" rIns="0" bIns="0" rtlCol="0" anchor="ctr"/>
+          <a:lstStyle/>
+          <a:p>
+            <a:pPr indent="0" marL="0">
+              <a:lnSpc>
+                <a:spcPct val="115000"/>
+              </a:lnSpc>
+              <a:buNone/>
+            </a:pPr>
+            <a:r>
+              <a:rPr lang="en-US" sz="1150" dirty="0">
+                <a:solidFill>
+                  <a:srgbClr val="23201D"/>
+                </a:solidFill>
+                <a:latin typeface="Consolas" pitchFamily="34" charset="0"/>
+                <a:ea typeface="Consolas" pitchFamily="34" charset="-122"/>
+                <a:cs typeface="Consolas" pitchFamily="34" charset="-120"/>
+              </a:rPr>
+              <a:t>件名＋本文。丁寧語。押しつけがましくしない。</a:t>
+            </a:r>
+            <a:endParaRPr lang="en-US" sz="1150" dirty="0"/>
+          </a:p>
+        </p:txBody>
+      </p:sp>
+      <p:sp>
+        <p:nvSpPr>
+          <p:cNvPr id="17" name="Text 15"/>
+          <p:cNvSpPr txBox="1"/>
+          <p:nvPr/>
+        </p:nvSpPr>
+        <p:spPr>
+          <a:xfrm>
+            <a:off x="777240" y="5239512"/>
+            <a:ext cx="10607040" cy="548640"/>
+          </a:xfrm>
+          <a:prstGeom prst="rect">
+            <a:avLst/>
+          </a:prstGeom>
+          <a:noFill/>
+          <a:ln/>
+        </p:spPr>
+        <p:txBody>
+          <a:bodyPr wrap="square" lIns="0" tIns="0" rIns="0" bIns="0" rtlCol="0" anchor="ctr"/>
+          <a:lstStyle/>
+          <a:p>
+            <a:pPr indent="0" marL="0">
+              <a:lnSpc>
+                <a:spcPct val="135000"/>
+              </a:lnSpc>
+              <a:buNone/>
+            </a:pPr>
+            <a:r>
+              <a:rPr lang="en-US" sz="1250" dirty="0">
                 <a:solidFill>
                   <a:srgbClr val="5A534A"/>
                 </a:solidFill>
@@ -4504,271 +6363,9 @@
                 <a:ea typeface="Yu Gothic" pitchFamily="34" charset="-122"/>
                 <a:cs typeface="Yu Gothic" pitchFamily="34" charset="-120"/>
               </a:rPr>
-              <a:t>ご自身の実案件を題材にします</a:t>
-            </a:r>
-            <a:endParaRPr lang="en-US" sz="1200" dirty="0"/>
-          </a:p>
-        </p:txBody>
-      </p:sp>
-      <p:sp>
-        <p:nvSpPr>
-          <p:cNvPr id="10" name="Shape 8"/>
-          <p:cNvSpPr/>
-          <p:nvPr/>
-        </p:nvSpPr>
-        <p:spPr>
-          <a:xfrm>
-            <a:off x="4389120" y="2240280"/>
-            <a:ext cx="3383280" cy="2697480"/>
-          </a:xfrm>
-          <a:prstGeom prst="rect">
-            <a:avLst/>
-          </a:prstGeom>
-          <a:solidFill>
-            <a:srgbClr val="FFFFFF"/>
-          </a:solidFill>
-          <a:ln w="12700">
-            <a:solidFill>
-              <a:srgbClr val="EDE7DB"/>
-            </a:solidFill>
-            <a:prstDash val="solid"/>
-          </a:ln>
-        </p:spPr>
-      </p:sp>
-      <p:sp>
-        <p:nvSpPr>
-          <p:cNvPr id="11" name="Shape 9"/>
-          <p:cNvSpPr/>
-          <p:nvPr/>
-        </p:nvSpPr>
-        <p:spPr>
-          <a:xfrm>
-            <a:off x="4663440" y="2487168"/>
-            <a:ext cx="438912" cy="438912"/>
-          </a:xfrm>
-          <a:prstGeom prst="ellipse">
-            <a:avLst/>
-          </a:prstGeom>
-          <a:solidFill>
-            <a:srgbClr val="2F4F6B"/>
-          </a:solidFill>
-          <a:ln w="12700">
-            <a:solidFill>
-              <a:srgbClr val="2F4F6B"/>
-            </a:solidFill>
-            <a:prstDash val="solid"/>
-          </a:ln>
-        </p:spPr>
-      </p:sp>
-      <p:sp>
-        <p:nvSpPr>
-          <p:cNvPr id="12" name="Text 10"/>
-          <p:cNvSpPr txBox="1"/>
-          <p:nvPr/>
-        </p:nvSpPr>
-        <p:spPr>
-          <a:xfrm>
-            <a:off x="4663440" y="2487168"/>
-            <a:ext cx="438912" cy="438912"/>
-          </a:xfrm>
-          <a:prstGeom prst="rect">
-            <a:avLst/>
-          </a:prstGeom>
-          <a:noFill/>
-          <a:ln/>
-        </p:spPr>
-        <p:txBody>
-          <a:bodyPr wrap="square" lIns="0" tIns="0" rIns="0" bIns="0" rtlCol="0" anchor="ctr"/>
-          <a:lstStyle/>
-          <a:p>
-            <a:pPr algn="ctr" indent="0" marL="0">
-              <a:buNone/>
-            </a:pPr>
-            <a:r>
-              <a:rPr lang="en-US" sz="1400" b="1" dirty="0">
-                <a:solidFill>
-                  <a:srgbClr val="FFFFFF"/>
-                </a:solidFill>
-                <a:latin typeface="Yu Gothic" pitchFamily="34" charset="0"/>
-                <a:ea typeface="Yu Gothic" pitchFamily="34" charset="-122"/>
-                <a:cs typeface="Yu Gothic" pitchFamily="34" charset="-120"/>
-              </a:rPr>
-              <a:t>2</a:t>
-            </a:r>
-            <a:endParaRPr lang="en-US" sz="1400" dirty="0"/>
-          </a:p>
-        </p:txBody>
-      </p:sp>
-      <p:sp>
-        <p:nvSpPr>
-          <p:cNvPr id="13" name="Text 11"/>
-          <p:cNvSpPr txBox="1"/>
-          <p:nvPr/>
-        </p:nvSpPr>
-        <p:spPr>
-          <a:xfrm>
-            <a:off x="4663440" y="3035808"/>
-            <a:ext cx="2834640" cy="777240"/>
-          </a:xfrm>
-          <a:prstGeom prst="rect">
-            <a:avLst/>
-          </a:prstGeom>
-          <a:noFill/>
-          <a:ln/>
-        </p:spPr>
-        <p:txBody>
-          <a:bodyPr wrap="square" lIns="0" tIns="0" rIns="0" bIns="0" rtlCol="0" anchor="ctr"/>
-          <a:lstStyle/>
-          <a:p>
-            <a:pPr indent="0" marL="0">
-              <a:lnSpc>
-                <a:spcPct val="125000"/>
-              </a:lnSpc>
-              <a:buNone/>
-            </a:pPr>
-            <a:r>
-              <a:rPr lang="en-US" sz="1500" b="1" dirty="0">
-                <a:solidFill>
-                  <a:srgbClr val="23201D"/>
-                </a:solidFill>
-                <a:latin typeface="Yu Gothic" pitchFamily="34" charset="0"/>
-                <a:ea typeface="Yu Gothic" pitchFamily="34" charset="-122"/>
-                <a:cs typeface="Yu Gothic" pitchFamily="34" charset="-120"/>
-              </a:rPr>
-              <a:t>前提を、設定に移す</a:t>
-            </a:r>
-            <a:endParaRPr lang="en-US" sz="1500" dirty="0"/>
-          </a:p>
-        </p:txBody>
-      </p:sp>
-      <p:sp>
-        <p:nvSpPr>
-          <p:cNvPr id="14" name="Text 12"/>
-          <p:cNvSpPr txBox="1"/>
-          <p:nvPr/>
-        </p:nvSpPr>
-        <p:spPr>
-          <a:xfrm>
-            <a:off x="4663440" y="3822192"/>
-            <a:ext cx="2834640" cy="960120"/>
-          </a:xfrm>
-          <a:prstGeom prst="rect">
-            <a:avLst/>
-          </a:prstGeom>
-          <a:noFill/>
-          <a:ln/>
-        </p:spPr>
-        <p:txBody>
-          <a:bodyPr wrap="square" lIns="0" tIns="0" rIns="0" bIns="0" rtlCol="0" anchor="ctr"/>
-          <a:lstStyle/>
-          <a:p>
-            <a:pPr indent="0" marL="0">
-              <a:lnSpc>
-                <a:spcPct val="130000"/>
-              </a:lnSpc>
-              <a:buNone/>
-            </a:pPr>
-            <a:r>
-              <a:rPr lang="en-US" sz="1200" dirty="0">
-                <a:solidFill>
-                  <a:srgbClr val="5A534A"/>
-                </a:solidFill>
-                <a:latin typeface="Yu Gothic" pitchFamily="34" charset="0"/>
-                <a:ea typeface="Yu Gothic" pitchFamily="34" charset="-122"/>
-                <a:cs typeface="Yu Gothic" pitchFamily="34" charset="-120"/>
-              </a:rPr>
-              <a:t>毎回書いている会社の説明を、自動で効く場所に入れます</a:t>
-            </a:r>
-            <a:endParaRPr lang="en-US" sz="1200" dirty="0"/>
-          </a:p>
-        </p:txBody>
-      </p:sp>
-      <p:sp>
-        <p:nvSpPr>
-          <p:cNvPr id="15" name="Shape 13"/>
-          <p:cNvSpPr/>
-          <p:nvPr/>
-        </p:nvSpPr>
-        <p:spPr>
-          <a:xfrm>
-            <a:off x="8001000" y="2240280"/>
-            <a:ext cx="3383280" cy="2697480"/>
-          </a:xfrm>
-          <a:prstGeom prst="rect">
-            <a:avLst/>
-          </a:prstGeom>
-          <a:solidFill>
-            <a:srgbClr val="FFFFFF"/>
-          </a:solidFill>
-          <a:ln w="12700">
-            <a:solidFill>
-              <a:srgbClr val="EDE7DB"/>
-            </a:solidFill>
-            <a:prstDash val="solid"/>
-          </a:ln>
-        </p:spPr>
-      </p:sp>
-      <p:sp>
-        <p:nvSpPr>
-          <p:cNvPr id="16" name="Shape 14"/>
-          <p:cNvSpPr/>
-          <p:nvPr/>
-        </p:nvSpPr>
-        <p:spPr>
-          <a:xfrm>
-            <a:off x="8275320" y="2487168"/>
-            <a:ext cx="438912" cy="438912"/>
-          </a:xfrm>
-          <a:prstGeom prst="ellipse">
-            <a:avLst/>
-          </a:prstGeom>
-          <a:solidFill>
-            <a:srgbClr val="2F4F6B"/>
-          </a:solidFill>
-          <a:ln w="12700">
-            <a:solidFill>
-              <a:srgbClr val="2F4F6B"/>
-            </a:solidFill>
-            <a:prstDash val="solid"/>
-          </a:ln>
-        </p:spPr>
-      </p:sp>
-      <p:sp>
-        <p:nvSpPr>
-          <p:cNvPr id="17" name="Text 15"/>
-          <p:cNvSpPr txBox="1"/>
-          <p:nvPr/>
-        </p:nvSpPr>
-        <p:spPr>
-          <a:xfrm>
-            <a:off x="8275320" y="2487168"/>
-            <a:ext cx="438912" cy="438912"/>
-          </a:xfrm>
-          <a:prstGeom prst="rect">
-            <a:avLst/>
-          </a:prstGeom>
-          <a:noFill/>
-          <a:ln/>
-        </p:spPr>
-        <p:txBody>
-          <a:bodyPr wrap="square" lIns="0" tIns="0" rIns="0" bIns="0" rtlCol="0" anchor="ctr"/>
-          <a:lstStyle/>
-          <a:p>
-            <a:pPr algn="ctr" indent="0" marL="0">
-              <a:buNone/>
-            </a:pPr>
-            <a:r>
-              <a:rPr lang="en-US" sz="1400" b="1" dirty="0">
-                <a:solidFill>
-                  <a:srgbClr val="FFFFFF"/>
-                </a:solidFill>
-                <a:latin typeface="Yu Gothic" pitchFamily="34" charset="0"/>
-                <a:ea typeface="Yu Gothic" pitchFamily="34" charset="-122"/>
-                <a:cs typeface="Yu Gothic" pitchFamily="34" charset="-120"/>
-              </a:rPr>
-              <a:t>3</a:t>
-            </a:r>
-            <a:endParaRPr lang="en-US" sz="1400" dirty="0"/>
+              <a:t>この5行を一度書けば、次からは前提の数字だけ差し替えて使えます。今日つくるのは、こういうものを5本です。</a:t>
+            </a:r>
+            <a:endParaRPr lang="en-US" sz="1250" dirty="0"/>
           </a:p>
         </p:txBody>
       </p:sp>
@@ -4780,37 +6377,34 @@
         </p:nvSpPr>
         <p:spPr>
           <a:xfrm>
-            <a:off x="8275320" y="3035808"/>
-            <a:ext cx="2834640" cy="777240"/>
-          </a:xfrm>
-          <a:prstGeom prst="rect">
-            <a:avLst/>
-          </a:prstGeom>
-          <a:noFill/>
-          <a:ln/>
-        </p:spPr>
-        <p:txBody>
-          <a:bodyPr wrap="square" lIns="0" tIns="0" rIns="0" bIns="0" rtlCol="0" anchor="ctr"/>
-          <a:lstStyle/>
-          <a:p>
-            <a:pPr indent="0" marL="0">
-              <a:lnSpc>
-                <a:spcPct val="125000"/>
-              </a:lnSpc>
-              <a:buNone/>
-            </a:pPr>
-            <a:r>
-              <a:rPr lang="en-US" sz="1500" b="1" dirty="0">
-                <a:solidFill>
-                  <a:srgbClr val="23201D"/>
-                </a:solidFill>
-                <a:latin typeface="Yu Gothic" pitchFamily="34" charset="0"/>
-                <a:ea typeface="Yu Gothic" pitchFamily="34" charset="-122"/>
-                <a:cs typeface="Yu Gothic" pitchFamily="34" charset="-120"/>
-              </a:rPr>
-              <a:t>箱をつくって、5本ためる</a:t>
-            </a:r>
-            <a:endParaRPr lang="en-US" sz="1500" dirty="0"/>
+            <a:off x="777240" y="6382512"/>
+            <a:ext cx="7424928" cy="256032"/>
+          </a:xfrm>
+          <a:prstGeom prst="rect">
+            <a:avLst/>
+          </a:prstGeom>
+          <a:noFill/>
+          <a:ln/>
+        </p:spPr>
+        <p:txBody>
+          <a:bodyPr wrap="square" lIns="0" tIns="0" rIns="0" bIns="0" rtlCol="0" anchor="ctr"/>
+          <a:lstStyle/>
+          <a:p>
+            <a:pPr indent="0" marL="0">
+              <a:buNone/>
+            </a:pPr>
+            <a:r>
+              <a:rPr lang="en-US" sz="900" dirty="0">
+                <a:solidFill>
+                  <a:srgbClr val="8A8177"/>
+                </a:solidFill>
+                <a:latin typeface="Yu Gothic" pitchFamily="34" charset="0"/>
+                <a:ea typeface="Yu Gothic" pitchFamily="34" charset="-122"/>
+                <a:cs typeface="Yu Gothic" pitchFamily="34" charset="-120"/>
+              </a:rPr>
+              <a:t>第2回　今のChatGPTの使い方を作り直す</a:t>
+            </a:r>
+            <a:endParaRPr lang="en-US" sz="900" dirty="0"/>
           </a:p>
         </p:txBody>
       </p:sp>
@@ -4822,62 +6416,20 @@
         </p:nvSpPr>
         <p:spPr>
           <a:xfrm>
-            <a:off x="8275320" y="3822192"/>
-            <a:ext cx="2834640" cy="960120"/>
-          </a:xfrm>
-          <a:prstGeom prst="rect">
-            <a:avLst/>
-          </a:prstGeom>
-          <a:noFill/>
-          <a:ln/>
-        </p:spPr>
-        <p:txBody>
-          <a:bodyPr wrap="square" lIns="0" tIns="0" rIns="0" bIns="0" rtlCol="0" anchor="ctr"/>
-          <a:lstStyle/>
-          <a:p>
-            <a:pPr indent="0" marL="0">
-              <a:lnSpc>
-                <a:spcPct val="130000"/>
-              </a:lnSpc>
-              <a:buNone/>
-            </a:pPr>
-            <a:r>
-              <a:rPr lang="en-US" sz="1200" dirty="0">
-                <a:solidFill>
-                  <a:srgbClr val="5A534A"/>
-                </a:solidFill>
-                <a:latin typeface="Yu Gothic" pitchFamily="34" charset="0"/>
-                <a:ea typeface="Yu Gothic" pitchFamily="34" charset="-122"/>
-                <a:cs typeface="Yu Gothic" pitchFamily="34" charset="-120"/>
-              </a:rPr>
-              <a:t>業務ごとの箱に資料と会話をまとめ、保存場所を決めます</a:t>
-            </a:r>
-            <a:endParaRPr lang="en-US" sz="1200" dirty="0"/>
-          </a:p>
-        </p:txBody>
-      </p:sp>
-      <p:sp>
-        <p:nvSpPr>
-          <p:cNvPr id="20" name="Text 18"/>
-          <p:cNvSpPr txBox="1"/>
-          <p:nvPr/>
-        </p:nvSpPr>
-        <p:spPr>
-          <a:xfrm>
-            <a:off x="777240" y="6355080"/>
-            <a:ext cx="7424928" cy="274320"/>
-          </a:xfrm>
-          <a:prstGeom prst="rect">
-            <a:avLst/>
-          </a:prstGeom>
-          <a:noFill/>
-          <a:ln/>
-        </p:spPr>
-        <p:txBody>
-          <a:bodyPr wrap="square" lIns="0" tIns="0" rIns="0" bIns="0" rtlCol="0" anchor="ctr"/>
-          <a:lstStyle/>
-          <a:p>
-            <a:pPr indent="0" marL="0">
+            <a:off x="8202168" y="6382512"/>
+            <a:ext cx="3182112" cy="256032"/>
+          </a:xfrm>
+          <a:prstGeom prst="rect">
+            <a:avLst/>
+          </a:prstGeom>
+          <a:noFill/>
+          <a:ln/>
+        </p:spPr>
+        <p:txBody>
+          <a:bodyPr wrap="square" lIns="0" tIns="0" rIns="0" bIns="0" rtlCol="0" anchor="ctr"/>
+          <a:lstStyle/>
+          <a:p>
+            <a:pPr algn="r" indent="0" marL="0">
               <a:buNone/>
             </a:pPr>
             <a:r>
@@ -4889,46 +6441,7 @@
                 <a:ea typeface="Yu Gothic" pitchFamily="34" charset="-122"/>
                 <a:cs typeface="Yu Gothic" pitchFamily="34" charset="-120"/>
               </a:rPr>
-              <a:t>第2回　今のChatGPTの使い方を作り直す</a:t>
-            </a:r>
-            <a:endParaRPr lang="en-US" sz="900" dirty="0"/>
-          </a:p>
-        </p:txBody>
-      </p:sp>
-      <p:sp>
-        <p:nvSpPr>
-          <p:cNvPr id="21" name="Text 19"/>
-          <p:cNvSpPr txBox="1"/>
-          <p:nvPr/>
-        </p:nvSpPr>
-        <p:spPr>
-          <a:xfrm>
-            <a:off x="8202168" y="6355080"/>
-            <a:ext cx="3182112" cy="274320"/>
-          </a:xfrm>
-          <a:prstGeom prst="rect">
-            <a:avLst/>
-          </a:prstGeom>
-          <a:noFill/>
-          <a:ln/>
-        </p:spPr>
-        <p:txBody>
-          <a:bodyPr wrap="square" lIns="0" tIns="0" rIns="0" bIns="0" rtlCol="0" anchor="ctr"/>
-          <a:lstStyle/>
-          <a:p>
-            <a:pPr algn="r" indent="0" marL="0">
-              <a:buNone/>
-            </a:pPr>
-            <a:r>
-              <a:rPr lang="en-US" sz="900" dirty="0">
-                <a:solidFill>
-                  <a:srgbClr val="8A8177"/>
-                </a:solidFill>
-                <a:latin typeface="Yu Gothic" pitchFamily="34" charset="0"/>
-                <a:ea typeface="Yu Gothic" pitchFamily="34" charset="-122"/>
-                <a:cs typeface="Yu Gothic" pitchFamily="34" charset="-120"/>
-              </a:rPr>
-              <a:t>演習</a:t>
+              <a:t>あてはめ</a:t>
             </a:r>
             <a:endParaRPr lang="en-US" sz="900" dirty="0"/>
           </a:p>
@@ -4974,7 +6487,7 @@
         </p:nvSpPr>
         <p:spPr>
           <a:xfrm>
-            <a:off x="777240" y="822960"/>
+            <a:off x="777240" y="566928"/>
             <a:ext cx="10607040" cy="274320"/>
           </a:xfrm>
           <a:prstGeom prst="rect">
@@ -4993,13 +6506,13 @@
             <a:r>
               <a:rPr lang="en-US" sz="1100" b="1" spc="250" kern="0" dirty="0">
                 <a:solidFill>
-                  <a:srgbClr val="B04A2F"/>
-                </a:solidFill>
-                <a:latin typeface="Yu Gothic" pitchFamily="34" charset="0"/>
-                <a:ea typeface="Yu Gothic" pitchFamily="34" charset="-122"/>
-                <a:cs typeface="Yu Gothic" pitchFamily="34" charset="-120"/>
-              </a:rPr>
-              <a:t>ここだけは</a:t>
+                  <a:srgbClr val="8A8177"/>
+                </a:solidFill>
+                <a:latin typeface="Yu Gothic" pitchFamily="34" charset="0"/>
+                <a:ea typeface="Yu Gothic" pitchFamily="34" charset="-122"/>
+                <a:cs typeface="Yu Gothic" pitchFamily="34" charset="-120"/>
+              </a:rPr>
+              <a:t>実演 ①</a:t>
             </a:r>
             <a:endParaRPr lang="en-US" sz="1100" dirty="0"/>
           </a:p>
@@ -5013,24 +6526,24 @@
         </p:nvSpPr>
         <p:spPr>
           <a:xfrm>
-            <a:off x="777240" y="1188720"/>
-            <a:ext cx="9546336" cy="822960"/>
-          </a:xfrm>
-          <a:prstGeom prst="rect">
-            <a:avLst/>
-          </a:prstGeom>
-          <a:noFill/>
-          <a:ln/>
-        </p:spPr>
-        <p:txBody>
-          <a:bodyPr wrap="square" lIns="0" tIns="0" rIns="0" bIns="0" rtlCol="0" anchor="ctr"/>
-          <a:lstStyle/>
-          <a:p>
-            <a:pPr indent="0" marL="0">
-              <a:buNone/>
-            </a:pPr>
-            <a:r>
-              <a:rPr lang="en-US" sz="3000" b="1" dirty="0">
+            <a:off x="777240" y="896112"/>
+            <a:ext cx="10607040" cy="640080"/>
+          </a:xfrm>
+          <a:prstGeom prst="rect">
+            <a:avLst/>
+          </a:prstGeom>
+          <a:noFill/>
+          <a:ln/>
+        </p:spPr>
+        <p:txBody>
+          <a:bodyPr wrap="square" lIns="0" tIns="0" rIns="0" bIns="0" rtlCol="0" anchor="ctr"/>
+          <a:lstStyle/>
+          <a:p>
+            <a:pPr indent="0" marL="0">
+              <a:buNone/>
+            </a:pPr>
+            <a:r>
+              <a:rPr lang="en-US" sz="2600" b="1" dirty="0">
                 <a:solidFill>
                   <a:srgbClr val="23201D"/>
                 </a:solidFill>
@@ -5038,9 +6551,9 @@
                 <a:ea typeface="Yu Gothic" pitchFamily="34" charset="-122"/>
                 <a:cs typeface="Yu Gothic" pitchFamily="34" charset="-120"/>
               </a:rPr>
-              <a:t>面倒でかまいません</a:t>
-            </a:r>
-            <a:endParaRPr lang="en-US" sz="3000" dirty="0"/>
+              <a:t>よくある指示</a:t>
+            </a:r>
+            <a:endParaRPr lang="en-US" sz="2600" dirty="0"/>
           </a:p>
         </p:txBody>
       </p:sp>
@@ -5052,14 +6565,352 @@
         </p:nvSpPr>
         <p:spPr>
           <a:xfrm>
-            <a:off x="777240" y="2331720"/>
-            <a:ext cx="64008" cy="2011680"/>
+            <a:off x="777240" y="1691640"/>
+            <a:ext cx="4879238" cy="1371600"/>
           </a:xfrm>
           <a:prstGeom prst="rect">
             <a:avLst/>
           </a:prstGeom>
           <a:solidFill>
-            <a:srgbClr val="B04A2F"/>
+            <a:srgbClr val="EDE7DB"/>
+          </a:solidFill>
+          <a:ln w="15875">
+            <a:solidFill>
+              <a:srgbClr val="8A8177"/>
+            </a:solidFill>
+            <a:prstDash val="solid"/>
+          </a:ln>
+        </p:spPr>
+      </p:sp>
+      <p:sp>
+        <p:nvSpPr>
+          <p:cNvPr id="5" name="Text 3"/>
+          <p:cNvSpPr txBox="1"/>
+          <p:nvPr/>
+        </p:nvSpPr>
+        <p:spPr>
+          <a:xfrm>
+            <a:off x="1005840" y="1783080"/>
+            <a:ext cx="1828800" cy="274320"/>
+          </a:xfrm>
+          <a:prstGeom prst="rect">
+            <a:avLst/>
+          </a:prstGeom>
+          <a:noFill/>
+          <a:ln/>
+        </p:spPr>
+        <p:txBody>
+          <a:bodyPr wrap="square" lIns="0" tIns="0" rIns="0" bIns="0" rtlCol="0" anchor="ctr"/>
+          <a:lstStyle/>
+          <a:p>
+            <a:pPr indent="0" marL="0">
+              <a:buNone/>
+            </a:pPr>
+            <a:r>
+              <a:rPr lang="en-US" sz="1000" b="1" spc="200" kern="0" dirty="0">
+                <a:solidFill>
+                  <a:srgbClr val="8A8177"/>
+                </a:solidFill>
+                <a:latin typeface="Yu Gothic" pitchFamily="34" charset="0"/>
+                <a:ea typeface="Yu Gothic" pitchFamily="34" charset="-122"/>
+                <a:cs typeface="Yu Gothic" pitchFamily="34" charset="-120"/>
+              </a:rPr>
+              <a:t>入力</a:t>
+            </a:r>
+            <a:endParaRPr lang="en-US" sz="1000" dirty="0"/>
+          </a:p>
+        </p:txBody>
+      </p:sp>
+      <p:sp>
+        <p:nvSpPr>
+          <p:cNvPr id="6" name="Text 4"/>
+          <p:cNvSpPr txBox="1"/>
+          <p:nvPr/>
+        </p:nvSpPr>
+        <p:spPr>
+          <a:xfrm>
+            <a:off x="1005840" y="2084832"/>
+            <a:ext cx="4422038" cy="868680"/>
+          </a:xfrm>
+          <a:prstGeom prst="rect">
+            <a:avLst/>
+          </a:prstGeom>
+          <a:noFill/>
+          <a:ln/>
+        </p:spPr>
+        <p:txBody>
+          <a:bodyPr wrap="square" lIns="0" tIns="0" rIns="0" bIns="0" rtlCol="0" anchor="ctr"/>
+          <a:lstStyle/>
+          <a:p>
+            <a:pPr indent="0" marL="0">
+              <a:lnSpc>
+                <a:spcPct val="125000"/>
+              </a:lnSpc>
+              <a:buNone/>
+            </a:pPr>
+            <a:r>
+              <a:rPr lang="en-US" sz="1200" dirty="0">
+                <a:solidFill>
+                  <a:srgbClr val="23201D"/>
+                </a:solidFill>
+                <a:latin typeface="Consolas" pitchFamily="34" charset="0"/>
+                <a:ea typeface="Consolas" pitchFamily="34" charset="-122"/>
+                <a:cs typeface="Consolas" pitchFamily="34" charset="-120"/>
+              </a:rPr>
+              <a:t>「見積書の送付メールを書いて」</a:t>
+            </a:r>
+            <a:endParaRPr lang="en-US" sz="1200" dirty="0"/>
+          </a:p>
+        </p:txBody>
+      </p:sp>
+      <p:sp>
+        <p:nvSpPr>
+          <p:cNvPr id="7" name="Shape 5"/>
+          <p:cNvSpPr/>
+          <p:nvPr/>
+        </p:nvSpPr>
+        <p:spPr>
+          <a:xfrm>
+            <a:off x="6080760" y="1691640"/>
+            <a:ext cx="5303520" cy="3017520"/>
+          </a:xfrm>
+          <a:prstGeom prst="rect">
+            <a:avLst/>
+          </a:prstGeom>
+          <a:solidFill>
+            <a:srgbClr val="FFFFFF"/>
+          </a:solidFill>
+          <a:ln w="12700">
+            <a:solidFill>
+              <a:srgbClr val="EDE7DB"/>
+            </a:solidFill>
+            <a:prstDash val="solid"/>
+          </a:ln>
+        </p:spPr>
+      </p:sp>
+      <p:sp>
+        <p:nvSpPr>
+          <p:cNvPr id="8" name="Text 6"/>
+          <p:cNvSpPr txBox="1"/>
+          <p:nvPr/>
+        </p:nvSpPr>
+        <p:spPr>
+          <a:xfrm>
+            <a:off x="6309360" y="1783080"/>
+            <a:ext cx="2743200" cy="274320"/>
+          </a:xfrm>
+          <a:prstGeom prst="rect">
+            <a:avLst/>
+          </a:prstGeom>
+          <a:noFill/>
+          <a:ln/>
+        </p:spPr>
+        <p:txBody>
+          <a:bodyPr wrap="square" lIns="0" tIns="0" rIns="0" bIns="0" rtlCol="0" anchor="ctr"/>
+          <a:lstStyle/>
+          <a:p>
+            <a:pPr indent="0" marL="0">
+              <a:buNone/>
+            </a:pPr>
+            <a:r>
+              <a:rPr lang="en-US" sz="1000" b="1" spc="200" kern="0" dirty="0">
+                <a:solidFill>
+                  <a:srgbClr val="8A8177"/>
+                </a:solidFill>
+                <a:latin typeface="Yu Gothic" pitchFamily="34" charset="0"/>
+                <a:ea typeface="Yu Gothic" pitchFamily="34" charset="-122"/>
+                <a:cs typeface="Yu Gothic" pitchFamily="34" charset="-120"/>
+              </a:rPr>
+              <a:t>出てくるもの</a:t>
+            </a:r>
+            <a:endParaRPr lang="en-US" sz="1000" dirty="0"/>
+          </a:p>
+        </p:txBody>
+      </p:sp>
+      <p:sp>
+        <p:nvSpPr>
+          <p:cNvPr id="9" name="Text 7"/>
+          <p:cNvSpPr txBox="1"/>
+          <p:nvPr/>
+        </p:nvSpPr>
+        <p:spPr>
+          <a:xfrm>
+            <a:off x="6309360" y="2148840"/>
+            <a:ext cx="4846320" cy="566928"/>
+          </a:xfrm>
+          <a:prstGeom prst="rect">
+            <a:avLst/>
+          </a:prstGeom>
+          <a:noFill/>
+          <a:ln/>
+        </p:spPr>
+        <p:txBody>
+          <a:bodyPr wrap="square" lIns="0" tIns="0" rIns="0" bIns="0" rtlCol="0" anchor="ctr"/>
+          <a:lstStyle/>
+          <a:p>
+            <a:pPr indent="0" marL="0">
+              <a:lnSpc>
+                <a:spcPct val="125000"/>
+              </a:lnSpc>
+              <a:buNone/>
+            </a:pPr>
+            <a:r>
+              <a:rPr lang="en-US" sz="1250" dirty="0">
+                <a:solidFill>
+                  <a:srgbClr val="23201D"/>
+                </a:solidFill>
+                <a:latin typeface="Yu Gothic" pitchFamily="34" charset="0"/>
+                <a:ea typeface="Yu Gothic" pitchFamily="34" charset="-122"/>
+                <a:cs typeface="Yu Gothic" pitchFamily="34" charset="-120"/>
+              </a:rPr>
+              <a:t>・当たり障りのない、一般的な文面が出る</a:t>
+            </a:r>
+            <a:endParaRPr lang="en-US" sz="1250" dirty="0"/>
+          </a:p>
+        </p:txBody>
+      </p:sp>
+      <p:sp>
+        <p:nvSpPr>
+          <p:cNvPr id="10" name="Text 8"/>
+          <p:cNvSpPr txBox="1"/>
+          <p:nvPr/>
+        </p:nvSpPr>
+        <p:spPr>
+          <a:xfrm>
+            <a:off x="6309360" y="2752344"/>
+            <a:ext cx="4846320" cy="566928"/>
+          </a:xfrm>
+          <a:prstGeom prst="rect">
+            <a:avLst/>
+          </a:prstGeom>
+          <a:noFill/>
+          <a:ln/>
+        </p:spPr>
+        <p:txBody>
+          <a:bodyPr wrap="square" lIns="0" tIns="0" rIns="0" bIns="0" rtlCol="0" anchor="ctr"/>
+          <a:lstStyle/>
+          <a:p>
+            <a:pPr indent="0" marL="0">
+              <a:lnSpc>
+                <a:spcPct val="125000"/>
+              </a:lnSpc>
+              <a:buNone/>
+            </a:pPr>
+            <a:r>
+              <a:rPr lang="en-US" sz="1250" dirty="0">
+                <a:solidFill>
+                  <a:srgbClr val="23201D"/>
+                </a:solidFill>
+                <a:latin typeface="Yu Gothic" pitchFamily="34" charset="0"/>
+                <a:ea typeface="Yu Gothic" pitchFamily="34" charset="-122"/>
+                <a:cs typeface="Yu Gothic" pitchFamily="34" charset="-120"/>
+              </a:rPr>
+              <a:t>・会社名も取引経緯も入っていない</a:t>
+            </a:r>
+            <a:endParaRPr lang="en-US" sz="1250" dirty="0"/>
+          </a:p>
+        </p:txBody>
+      </p:sp>
+      <p:sp>
+        <p:nvSpPr>
+          <p:cNvPr id="11" name="Text 9"/>
+          <p:cNvSpPr txBox="1"/>
+          <p:nvPr/>
+        </p:nvSpPr>
+        <p:spPr>
+          <a:xfrm>
+            <a:off x="6309360" y="3355848"/>
+            <a:ext cx="4846320" cy="566928"/>
+          </a:xfrm>
+          <a:prstGeom prst="rect">
+            <a:avLst/>
+          </a:prstGeom>
+          <a:noFill/>
+          <a:ln/>
+        </p:spPr>
+        <p:txBody>
+          <a:bodyPr wrap="square" lIns="0" tIns="0" rIns="0" bIns="0" rtlCol="0" anchor="ctr"/>
+          <a:lstStyle/>
+          <a:p>
+            <a:pPr indent="0" marL="0">
+              <a:lnSpc>
+                <a:spcPct val="125000"/>
+              </a:lnSpc>
+              <a:buNone/>
+            </a:pPr>
+            <a:r>
+              <a:rPr lang="en-US" sz="1250" dirty="0">
+                <a:solidFill>
+                  <a:srgbClr val="23201D"/>
+                </a:solidFill>
+                <a:latin typeface="Yu Gothic" pitchFamily="34" charset="0"/>
+                <a:ea typeface="Yu Gothic" pitchFamily="34" charset="-122"/>
+                <a:cs typeface="Yu Gothic" pitchFamily="34" charset="-120"/>
+              </a:rPr>
+              <a:t>・結局、自分で7割書き直す</a:t>
+            </a:r>
+            <a:endParaRPr lang="en-US" sz="1250" dirty="0"/>
+          </a:p>
+        </p:txBody>
+      </p:sp>
+      <p:sp>
+        <p:nvSpPr>
+          <p:cNvPr id="12" name="Text 10"/>
+          <p:cNvSpPr txBox="1"/>
+          <p:nvPr/>
+        </p:nvSpPr>
+        <p:spPr>
+          <a:xfrm>
+            <a:off x="6309360" y="3959352"/>
+            <a:ext cx="4846320" cy="566928"/>
+          </a:xfrm>
+          <a:prstGeom prst="rect">
+            <a:avLst/>
+          </a:prstGeom>
+          <a:noFill/>
+          <a:ln/>
+        </p:spPr>
+        <p:txBody>
+          <a:bodyPr wrap="square" lIns="0" tIns="0" rIns="0" bIns="0" rtlCol="0" anchor="ctr"/>
+          <a:lstStyle/>
+          <a:p>
+            <a:pPr indent="0" marL="0">
+              <a:lnSpc>
+                <a:spcPct val="125000"/>
+              </a:lnSpc>
+              <a:buNone/>
+            </a:pPr>
+            <a:r>
+              <a:rPr lang="en-US" sz="1250" dirty="0">
+                <a:solidFill>
+                  <a:srgbClr val="23201D"/>
+                </a:solidFill>
+                <a:latin typeface="Yu Gothic" pitchFamily="34" charset="0"/>
+                <a:ea typeface="Yu Gothic" pitchFamily="34" charset="-122"/>
+                <a:cs typeface="Yu Gothic" pitchFamily="34" charset="-120"/>
+              </a:rPr>
+              <a:t>・明日もまた、同じことを打つ</a:t>
+            </a:r>
+            <a:endParaRPr lang="en-US" sz="1250" dirty="0"/>
+          </a:p>
+        </p:txBody>
+      </p:sp>
+      <p:sp>
+        <p:nvSpPr>
+          <p:cNvPr id="13" name="Shape 11"/>
+          <p:cNvSpPr/>
+          <p:nvPr/>
+        </p:nvSpPr>
+        <p:spPr>
+          <a:xfrm>
+            <a:off x="777240" y="3291840"/>
+            <a:ext cx="4879238" cy="1417320"/>
+          </a:xfrm>
+          <a:prstGeom prst="rect">
+            <a:avLst/>
+          </a:prstGeom>
+          <a:solidFill>
+            <a:srgbClr val="E4DFD5"/>
           </a:solidFill>
           <a:ln w="12700">
             <a:solidFill>
@@ -5071,14 +6922,14 @@
       </p:sp>
       <p:sp>
         <p:nvSpPr>
-          <p:cNvPr id="5" name="Text 3"/>
-          <p:cNvSpPr txBox="1"/>
-          <p:nvPr/>
-        </p:nvSpPr>
-        <p:spPr>
-          <a:xfrm>
-            <a:off x="1188720" y="2331720"/>
-            <a:ext cx="9966960" cy="2011680"/>
+          <p:cNvPr id="14" name="Text 12"/>
+          <p:cNvSpPr txBox="1"/>
+          <p:nvPr/>
+        </p:nvSpPr>
+        <p:spPr>
+          <a:xfrm>
+            <a:off x="1005840" y="3383280"/>
+            <a:ext cx="4422038" cy="1234440"/>
           </a:xfrm>
           <a:prstGeom prst="rect">
             <a:avLst/>
@@ -5092,12 +6943,12 @@
           <a:p>
             <a:pPr indent="0" marL="0">
               <a:lnSpc>
-                <a:spcPct val="160000"/>
+                <a:spcPct val="135000"/>
               </a:lnSpc>
               <a:buNone/>
             </a:pPr>
             <a:r>
-              <a:rPr lang="en-US" sz="1700" dirty="0">
+              <a:rPr lang="en-US" sz="1250" dirty="0">
                 <a:solidFill>
                   <a:srgbClr val="3F3933"/>
                 </a:solidFill>
@@ -5105,22 +6956,86 @@
                 <a:ea typeface="Yu Gothic" pitchFamily="34" charset="-122"/>
                 <a:cs typeface="Yu Gothic" pitchFamily="34" charset="-120"/>
               </a:rPr>
-              <a:t>5要素を毎回書く必要はありません。5本だけ作れば、あとはコピーして直すだけになります。今日つくるのは、その5本です。</a:t>
-            </a:r>
-            <a:endParaRPr lang="en-US" sz="1700" dirty="0"/>
-          </a:p>
-        </p:txBody>
-      </p:sp>
-      <p:sp>
-        <p:nvSpPr>
-          <p:cNvPr id="6" name="Text 4"/>
-          <p:cNvSpPr txBox="1"/>
-          <p:nvPr/>
-        </p:nvSpPr>
-        <p:spPr>
-          <a:xfrm>
-            <a:off x="777240" y="6355080"/>
-            <a:ext cx="7424928" cy="274320"/>
+              <a:t>出てきた文面が悪いのではありません。判断材料を渡していないので、AIは無難な方に寄せるしかありません。</a:t>
+            </a:r>
+            <a:endParaRPr lang="en-US" sz="1250" dirty="0"/>
+          </a:p>
+        </p:txBody>
+      </p:sp>
+      <p:sp>
+        <p:nvSpPr>
+          <p:cNvPr id="15" name="Shape 13"/>
+          <p:cNvSpPr/>
+          <p:nvPr/>
+        </p:nvSpPr>
+        <p:spPr>
+          <a:xfrm>
+            <a:off x="777240" y="4983480"/>
+            <a:ext cx="10607040" cy="685800"/>
+          </a:xfrm>
+          <a:prstGeom prst="rect">
+            <a:avLst/>
+          </a:prstGeom>
+          <a:solidFill>
+            <a:srgbClr val="8A8177"/>
+          </a:solidFill>
+          <a:ln w="12700">
+            <a:solidFill>
+              <a:srgbClr val="333333"/>
+            </a:solidFill>
+            <a:prstDash val="solid"/>
+          </a:ln>
+        </p:spPr>
+      </p:sp>
+      <p:sp>
+        <p:nvSpPr>
+          <p:cNvPr id="16" name="Text 14"/>
+          <p:cNvSpPr txBox="1"/>
+          <p:nvPr/>
+        </p:nvSpPr>
+        <p:spPr>
+          <a:xfrm>
+            <a:off x="1097280" y="4983480"/>
+            <a:ext cx="9966960" cy="685800"/>
+          </a:xfrm>
+          <a:prstGeom prst="rect">
+            <a:avLst/>
+          </a:prstGeom>
+          <a:noFill/>
+          <a:ln/>
+        </p:spPr>
+        <p:txBody>
+          <a:bodyPr wrap="square" lIns="0" tIns="0" rIns="0" bIns="0" rtlCol="0" anchor="ctr"/>
+          <a:lstStyle/>
+          <a:p>
+            <a:pPr indent="0" marL="0">
+              <a:buNone/>
+            </a:pPr>
+            <a:r>
+              <a:rPr lang="en-US" sz="1450" b="1" dirty="0">
+                <a:solidFill>
+                  <a:srgbClr val="FFFFFF"/>
+                </a:solidFill>
+                <a:latin typeface="Yu Gothic" pitchFamily="34" charset="0"/>
+                <a:ea typeface="Yu Gothic" pitchFamily="34" charset="-122"/>
+                <a:cs typeface="Yu Gothic" pitchFamily="34" charset="-120"/>
+              </a:rPr>
+              <a:t>情報を渡していない指示に、良い答えは返りません</a:t>
+            </a:r>
+            <a:endParaRPr lang="en-US" sz="1450" dirty="0"/>
+          </a:p>
+        </p:txBody>
+      </p:sp>
+      <p:sp>
+        <p:nvSpPr>
+          <p:cNvPr id="17" name="Text 15"/>
+          <p:cNvSpPr txBox="1"/>
+          <p:nvPr/>
+        </p:nvSpPr>
+        <p:spPr>
+          <a:xfrm>
+            <a:off x="777240" y="6382512"/>
+            <a:ext cx="7424928" cy="256032"/>
           </a:xfrm>
           <a:prstGeom prst="rect">
             <a:avLst/>
@@ -5152,14 +7067,14 @@
       </p:sp>
       <p:sp>
         <p:nvSpPr>
-          <p:cNvPr id="7" name="Text 5"/>
-          <p:cNvSpPr txBox="1"/>
-          <p:nvPr/>
-        </p:nvSpPr>
-        <p:spPr>
-          <a:xfrm>
-            <a:off x="8202168" y="6355080"/>
-            <a:ext cx="3182112" cy="274320"/>
+          <p:cNvPr id="18" name="Text 16"/>
+          <p:cNvSpPr txBox="1"/>
+          <p:nvPr/>
+        </p:nvSpPr>
+        <p:spPr>
+          <a:xfrm>
+            <a:off x="8202168" y="6382512"/>
+            <a:ext cx="3182112" cy="256032"/>
           </a:xfrm>
           <a:prstGeom prst="rect">
             <a:avLst/>
@@ -5183,7 +7098,7 @@
                 <a:ea typeface="Yu Gothic" pitchFamily="34" charset="-122"/>
                 <a:cs typeface="Yu Gothic" pitchFamily="34" charset="-120"/>
               </a:rPr>
-              <a:t>ここだけは</a:t>
+              <a:t>実演 ①</a:t>
             </a:r>
             <a:endParaRPr lang="en-US" sz="900" dirty="0"/>
           </a:p>
@@ -5203,7 +7118,7 @@
     <p:bg>
       <p:bgPr>
         <a:solidFill>
-          <a:srgbClr val="23201D"/>
+          <a:srgbClr val="F6F2EA"/>
         </a:solidFill>
       </p:bgPr>
     </p:bg>
@@ -5229,34 +7144,34 @@
         </p:nvSpPr>
         <p:spPr>
           <a:xfrm>
-            <a:off x="777240" y="1371600"/>
-            <a:ext cx="10607040" cy="365760"/>
-          </a:xfrm>
-          <a:prstGeom prst="rect">
-            <a:avLst/>
-          </a:prstGeom>
-          <a:noFill/>
-          <a:ln/>
-        </p:spPr>
-        <p:txBody>
-          <a:bodyPr wrap="square" lIns="0" tIns="0" rIns="0" bIns="0" rtlCol="0" anchor="ctr"/>
-          <a:lstStyle/>
-          <a:p>
-            <a:pPr indent="0" marL="0">
-              <a:buNone/>
-            </a:pPr>
-            <a:r>
-              <a:rPr lang="en-US" sz="1200" b="1" spc="300" kern="0" dirty="0">
-                <a:solidFill>
-                  <a:srgbClr val="B04A2F"/>
-                </a:solidFill>
-                <a:latin typeface="Yu Gothic" pitchFamily="34" charset="0"/>
-                <a:ea typeface="Yu Gothic" pitchFamily="34" charset="-122"/>
-                <a:cs typeface="Yu Gothic" pitchFamily="34" charset="-120"/>
-              </a:rPr>
-              <a:t>今日の宿題</a:t>
-            </a:r>
-            <a:endParaRPr lang="en-US" sz="1200" dirty="0"/>
+            <a:off x="777240" y="566928"/>
+            <a:ext cx="10607040" cy="274320"/>
+          </a:xfrm>
+          <a:prstGeom prst="rect">
+            <a:avLst/>
+          </a:prstGeom>
+          <a:noFill/>
+          <a:ln/>
+        </p:spPr>
+        <p:txBody>
+          <a:bodyPr wrap="square" lIns="0" tIns="0" rIns="0" bIns="0" rtlCol="0" anchor="ctr"/>
+          <a:lstStyle/>
+          <a:p>
+            <a:pPr indent="0" marL="0">
+              <a:buNone/>
+            </a:pPr>
+            <a:r>
+              <a:rPr lang="en-US" sz="1100" b="1" spc="250" kern="0" dirty="0">
+                <a:solidFill>
+                  <a:srgbClr val="3B6B4A"/>
+                </a:solidFill>
+                <a:latin typeface="Yu Gothic" pitchFamily="34" charset="0"/>
+                <a:ea typeface="Yu Gothic" pitchFamily="34" charset="-122"/>
+                <a:cs typeface="Yu Gothic" pitchFamily="34" charset="-120"/>
+              </a:rPr>
+              <a:t>実演 ②</a:t>
+            </a:r>
+            <a:endParaRPr lang="en-US" sz="1100" dirty="0"/>
           </a:p>
         </p:txBody>
       </p:sp>
@@ -5268,7 +7183,7 @@
         </p:nvSpPr>
         <p:spPr>
           <a:xfrm>
-            <a:off x="777240" y="1783080"/>
+            <a:off x="777240" y="896112"/>
             <a:ext cx="10607040" cy="640080"/>
           </a:xfrm>
           <a:prstGeom prst="rect">
@@ -5285,17 +7200,17 @@
               <a:buNone/>
             </a:pPr>
             <a:r>
-              <a:rPr lang="en-US" sz="3200" b="1" dirty="0">
-                <a:solidFill>
-                  <a:srgbClr val="FFFFFF"/>
-                </a:solidFill>
-                <a:latin typeface="Yu Gothic" pitchFamily="34" charset="0"/>
-                <a:ea typeface="Yu Gothic" pitchFamily="34" charset="-122"/>
-                <a:cs typeface="Yu Gothic" pitchFamily="34" charset="-120"/>
-              </a:rPr>
-              <a:t>ひとつだけ</a:t>
-            </a:r>
-            <a:endParaRPr lang="en-US" sz="3200" dirty="0"/>
+              <a:rPr lang="en-US" sz="2600" b="1" dirty="0">
+                <a:solidFill>
+                  <a:srgbClr val="23201D"/>
+                </a:solidFill>
+                <a:latin typeface="Yu Gothic" pitchFamily="34" charset="0"/>
+                <a:ea typeface="Yu Gothic" pitchFamily="34" charset="-122"/>
+                <a:cs typeface="Yu Gothic" pitchFamily="34" charset="-120"/>
+              </a:rPr>
+              <a:t>5要素を入れた指示</a:t>
+            </a:r>
+            <a:endParaRPr lang="en-US" sz="2600" dirty="0"/>
           </a:p>
         </p:txBody>
       </p:sp>
@@ -5307,18 +7222,124 @@
         </p:nvSpPr>
         <p:spPr>
           <a:xfrm>
-            <a:off x="777240" y="2743200"/>
-            <a:ext cx="10607040" cy="1463040"/>
+            <a:off x="777240" y="1691640"/>
+            <a:ext cx="4879238" cy="1371600"/>
           </a:xfrm>
           <a:prstGeom prst="rect">
             <a:avLst/>
           </a:prstGeom>
           <a:solidFill>
-            <a:srgbClr val="2E2A26"/>
+            <a:srgbClr val="FFFFFF"/>
+          </a:solidFill>
+          <a:ln w="15875">
+            <a:solidFill>
+              <a:srgbClr val="3B6B4A"/>
+            </a:solidFill>
+            <a:prstDash val="solid"/>
+          </a:ln>
+        </p:spPr>
+      </p:sp>
+      <p:sp>
+        <p:nvSpPr>
+          <p:cNvPr id="5" name="Text 3"/>
+          <p:cNvSpPr txBox="1"/>
+          <p:nvPr/>
+        </p:nvSpPr>
+        <p:spPr>
+          <a:xfrm>
+            <a:off x="1005840" y="1783080"/>
+            <a:ext cx="1828800" cy="274320"/>
+          </a:xfrm>
+          <a:prstGeom prst="rect">
+            <a:avLst/>
+          </a:prstGeom>
+          <a:noFill/>
+          <a:ln/>
+        </p:spPr>
+        <p:txBody>
+          <a:bodyPr wrap="square" lIns="0" tIns="0" rIns="0" bIns="0" rtlCol="0" anchor="ctr"/>
+          <a:lstStyle/>
+          <a:p>
+            <a:pPr indent="0" marL="0">
+              <a:buNone/>
+            </a:pPr>
+            <a:r>
+              <a:rPr lang="en-US" sz="1000" b="1" spc="200" kern="0" dirty="0">
+                <a:solidFill>
+                  <a:srgbClr val="3B6B4A"/>
+                </a:solidFill>
+                <a:latin typeface="Yu Gothic" pitchFamily="34" charset="0"/>
+                <a:ea typeface="Yu Gothic" pitchFamily="34" charset="-122"/>
+                <a:cs typeface="Yu Gothic" pitchFamily="34" charset="-120"/>
+              </a:rPr>
+              <a:t>入力</a:t>
+            </a:r>
+            <a:endParaRPr lang="en-US" sz="1000" dirty="0"/>
+          </a:p>
+        </p:txBody>
+      </p:sp>
+      <p:sp>
+        <p:nvSpPr>
+          <p:cNvPr id="6" name="Text 4"/>
+          <p:cNvSpPr txBox="1"/>
+          <p:nvPr/>
+        </p:nvSpPr>
+        <p:spPr>
+          <a:xfrm>
+            <a:off x="1005840" y="2084832"/>
+            <a:ext cx="4422038" cy="868680"/>
+          </a:xfrm>
+          <a:prstGeom prst="rect">
+            <a:avLst/>
+          </a:prstGeom>
+          <a:noFill/>
+          <a:ln/>
+        </p:spPr>
+        <p:txBody>
+          <a:bodyPr wrap="square" lIns="0" tIns="0" rIns="0" bIns="0" rtlCol="0" anchor="ctr"/>
+          <a:lstStyle/>
+          <a:p>
+            <a:pPr indent="0" marL="0">
+              <a:lnSpc>
+                <a:spcPct val="125000"/>
+              </a:lnSpc>
+              <a:buNone/>
+            </a:pPr>
+            <a:r>
+              <a:rPr lang="en-US" sz="1200" dirty="0">
+                <a:solidFill>
+                  <a:srgbClr val="23201D"/>
+                </a:solidFill>
+                <a:latin typeface="Consolas" pitchFamily="34" charset="0"/>
+                <a:ea typeface="Consolas" pitchFamily="34" charset="-122"/>
+                <a:cs typeface="Consolas" pitchFamily="34" charset="-120"/>
+              </a:rPr>
+              <a:t>役割・前提・依頼・制約・出力形式を入れた5行</a:t>
+            </a:r>
+            <a:endParaRPr lang="en-US" sz="1200" dirty="0"/>
+          </a:p>
+        </p:txBody>
+      </p:sp>
+      <p:sp>
+        <p:nvSpPr>
+          <p:cNvPr id="7" name="Shape 5"/>
+          <p:cNvSpPr/>
+          <p:nvPr/>
+        </p:nvSpPr>
+        <p:spPr>
+          <a:xfrm>
+            <a:off x="6080760" y="1691640"/>
+            <a:ext cx="5303520" cy="3017520"/>
+          </a:xfrm>
+          <a:prstGeom prst="rect">
+            <a:avLst/>
+          </a:prstGeom>
+          <a:solidFill>
+            <a:srgbClr val="FFFFFF"/>
           </a:solidFill>
           <a:ln w="12700">
             <a:solidFill>
-              <a:srgbClr val="B04A2F"/>
+              <a:srgbClr val="EDE7DB"/>
             </a:solidFill>
             <a:prstDash val="solid"/>
           </a:ln>
@@ -5326,14 +7347,604 @@
       </p:sp>
       <p:sp>
         <p:nvSpPr>
+          <p:cNvPr id="8" name="Text 6"/>
+          <p:cNvSpPr txBox="1"/>
+          <p:nvPr/>
+        </p:nvSpPr>
+        <p:spPr>
+          <a:xfrm>
+            <a:off x="6309360" y="1783080"/>
+            <a:ext cx="2743200" cy="274320"/>
+          </a:xfrm>
+          <a:prstGeom prst="rect">
+            <a:avLst/>
+          </a:prstGeom>
+          <a:noFill/>
+          <a:ln/>
+        </p:spPr>
+        <p:txBody>
+          <a:bodyPr wrap="square" lIns="0" tIns="0" rIns="0" bIns="0" rtlCol="0" anchor="ctr"/>
+          <a:lstStyle/>
+          <a:p>
+            <a:pPr indent="0" marL="0">
+              <a:buNone/>
+            </a:pPr>
+            <a:r>
+              <a:rPr lang="en-US" sz="1000" b="1" spc="200" kern="0" dirty="0">
+                <a:solidFill>
+                  <a:srgbClr val="8A8177"/>
+                </a:solidFill>
+                <a:latin typeface="Yu Gothic" pitchFamily="34" charset="0"/>
+                <a:ea typeface="Yu Gothic" pitchFamily="34" charset="-122"/>
+                <a:cs typeface="Yu Gothic" pitchFamily="34" charset="-120"/>
+              </a:rPr>
+              <a:t>出てくるもの</a:t>
+            </a:r>
+            <a:endParaRPr lang="en-US" sz="1000" dirty="0"/>
+          </a:p>
+        </p:txBody>
+      </p:sp>
+      <p:sp>
+        <p:nvSpPr>
+          <p:cNvPr id="9" name="Text 7"/>
+          <p:cNvSpPr txBox="1"/>
+          <p:nvPr/>
+        </p:nvSpPr>
+        <p:spPr>
+          <a:xfrm>
+            <a:off x="6309360" y="2148840"/>
+            <a:ext cx="4846320" cy="566928"/>
+          </a:xfrm>
+          <a:prstGeom prst="rect">
+            <a:avLst/>
+          </a:prstGeom>
+          <a:noFill/>
+          <a:ln/>
+        </p:spPr>
+        <p:txBody>
+          <a:bodyPr wrap="square" lIns="0" tIns="0" rIns="0" bIns="0" rtlCol="0" anchor="ctr"/>
+          <a:lstStyle/>
+          <a:p>
+            <a:pPr indent="0" marL="0">
+              <a:lnSpc>
+                <a:spcPct val="125000"/>
+              </a:lnSpc>
+              <a:buNone/>
+            </a:pPr>
+            <a:r>
+              <a:rPr lang="en-US" sz="1250" dirty="0">
+                <a:solidFill>
+                  <a:srgbClr val="23201D"/>
+                </a:solidFill>
+                <a:latin typeface="Yu Gothic" pitchFamily="34" charset="0"/>
+                <a:ea typeface="Yu Gothic" pitchFamily="34" charset="-122"/>
+                <a:cs typeface="Yu Gothic" pitchFamily="34" charset="-120"/>
+              </a:rPr>
+              <a:t>・そのまま送れる文面が出る</a:t>
+            </a:r>
+            <a:endParaRPr lang="en-US" sz="1250" dirty="0"/>
+          </a:p>
+        </p:txBody>
+      </p:sp>
+      <p:sp>
+        <p:nvSpPr>
+          <p:cNvPr id="10" name="Text 8"/>
+          <p:cNvSpPr txBox="1"/>
+          <p:nvPr/>
+        </p:nvSpPr>
+        <p:spPr>
+          <a:xfrm>
+            <a:off x="6309360" y="2752344"/>
+            <a:ext cx="4846320" cy="566928"/>
+          </a:xfrm>
+          <a:prstGeom prst="rect">
+            <a:avLst/>
+          </a:prstGeom>
+          <a:noFill/>
+          <a:ln/>
+        </p:spPr>
+        <p:txBody>
+          <a:bodyPr wrap="square" lIns="0" tIns="0" rIns="0" bIns="0" rtlCol="0" anchor="ctr"/>
+          <a:lstStyle/>
+          <a:p>
+            <a:pPr indent="0" marL="0">
+              <a:lnSpc>
+                <a:spcPct val="125000"/>
+              </a:lnSpc>
+              <a:buNone/>
+            </a:pPr>
+            <a:r>
+              <a:rPr lang="en-US" sz="1250" dirty="0">
+                <a:solidFill>
+                  <a:srgbClr val="23201D"/>
+                </a:solidFill>
+                <a:latin typeface="Yu Gothic" pitchFamily="34" charset="0"/>
+                <a:ea typeface="Yu Gothic" pitchFamily="34" charset="-122"/>
+                <a:cs typeface="Yu Gothic" pitchFamily="34" charset="-120"/>
+              </a:rPr>
+              <a:t>・直すのは固有名詞と金額だけ</a:t>
+            </a:r>
+            <a:endParaRPr lang="en-US" sz="1250" dirty="0"/>
+          </a:p>
+        </p:txBody>
+      </p:sp>
+      <p:sp>
+        <p:nvSpPr>
+          <p:cNvPr id="11" name="Text 9"/>
+          <p:cNvSpPr txBox="1"/>
+          <p:nvPr/>
+        </p:nvSpPr>
+        <p:spPr>
+          <a:xfrm>
+            <a:off x="6309360" y="3355848"/>
+            <a:ext cx="4846320" cy="566928"/>
+          </a:xfrm>
+          <a:prstGeom prst="rect">
+            <a:avLst/>
+          </a:prstGeom>
+          <a:noFill/>
+          <a:ln/>
+        </p:spPr>
+        <p:txBody>
+          <a:bodyPr wrap="square" lIns="0" tIns="0" rIns="0" bIns="0" rtlCol="0" anchor="ctr"/>
+          <a:lstStyle/>
+          <a:p>
+            <a:pPr indent="0" marL="0">
+              <a:lnSpc>
+                <a:spcPct val="125000"/>
+              </a:lnSpc>
+              <a:buNone/>
+            </a:pPr>
+            <a:r>
+              <a:rPr lang="en-US" sz="1250" dirty="0">
+                <a:solidFill>
+                  <a:srgbClr val="23201D"/>
+                </a:solidFill>
+                <a:latin typeface="Yu Gothic" pitchFamily="34" charset="0"/>
+                <a:ea typeface="Yu Gothic" pitchFamily="34" charset="-122"/>
+                <a:cs typeface="Yu Gothic" pitchFamily="34" charset="-120"/>
+              </a:rPr>
+              <a:t>・この指示文を保存して、次回は前提だけ差し替える</a:t>
+            </a:r>
+            <a:endParaRPr lang="en-US" sz="1250" dirty="0"/>
+          </a:p>
+        </p:txBody>
+      </p:sp>
+      <p:sp>
+        <p:nvSpPr>
+          <p:cNvPr id="12" name="Text 10"/>
+          <p:cNvSpPr txBox="1"/>
+          <p:nvPr/>
+        </p:nvSpPr>
+        <p:spPr>
+          <a:xfrm>
+            <a:off x="6309360" y="3959352"/>
+            <a:ext cx="4846320" cy="566928"/>
+          </a:xfrm>
+          <a:prstGeom prst="rect">
+            <a:avLst/>
+          </a:prstGeom>
+          <a:noFill/>
+          <a:ln/>
+        </p:spPr>
+        <p:txBody>
+          <a:bodyPr wrap="square" lIns="0" tIns="0" rIns="0" bIns="0" rtlCol="0" anchor="ctr"/>
+          <a:lstStyle/>
+          <a:p>
+            <a:pPr indent="0" marL="0">
+              <a:lnSpc>
+                <a:spcPct val="125000"/>
+              </a:lnSpc>
+              <a:buNone/>
+            </a:pPr>
+            <a:r>
+              <a:rPr lang="en-US" sz="1250" dirty="0">
+                <a:solidFill>
+                  <a:srgbClr val="23201D"/>
+                </a:solidFill>
+                <a:latin typeface="Yu Gothic" pitchFamily="34" charset="0"/>
+                <a:ea typeface="Yu Gothic" pitchFamily="34" charset="-122"/>
+                <a:cs typeface="Yu Gothic" pitchFamily="34" charset="-120"/>
+              </a:rPr>
+              <a:t>・3回目には、書く時間が10分の1になる</a:t>
+            </a:r>
+            <a:endParaRPr lang="en-US" sz="1250" dirty="0"/>
+          </a:p>
+        </p:txBody>
+      </p:sp>
+      <p:sp>
+        <p:nvSpPr>
+          <p:cNvPr id="13" name="Shape 11"/>
+          <p:cNvSpPr/>
+          <p:nvPr/>
+        </p:nvSpPr>
+        <p:spPr>
+          <a:xfrm>
+            <a:off x="777240" y="3291840"/>
+            <a:ext cx="4879238" cy="1417320"/>
+          </a:xfrm>
+          <a:prstGeom prst="rect">
+            <a:avLst/>
+          </a:prstGeom>
+          <a:solidFill>
+            <a:srgbClr val="E7F0E9"/>
+          </a:solidFill>
+          <a:ln w="12700">
+            <a:solidFill>
+              <a:srgbClr val="333333"/>
+            </a:solidFill>
+            <a:prstDash val="solid"/>
+          </a:ln>
+        </p:spPr>
+      </p:sp>
+      <p:sp>
+        <p:nvSpPr>
+          <p:cNvPr id="14" name="Text 12"/>
+          <p:cNvSpPr txBox="1"/>
+          <p:nvPr/>
+        </p:nvSpPr>
+        <p:spPr>
+          <a:xfrm>
+            <a:off x="1005840" y="3383280"/>
+            <a:ext cx="4422038" cy="1234440"/>
+          </a:xfrm>
+          <a:prstGeom prst="rect">
+            <a:avLst/>
+          </a:prstGeom>
+          <a:noFill/>
+          <a:ln/>
+        </p:spPr>
+        <p:txBody>
+          <a:bodyPr wrap="square" lIns="0" tIns="0" rIns="0" bIns="0" rtlCol="0" anchor="ctr"/>
+          <a:lstStyle/>
+          <a:p>
+            <a:pPr indent="0" marL="0">
+              <a:lnSpc>
+                <a:spcPct val="135000"/>
+              </a:lnSpc>
+              <a:buNone/>
+            </a:pPr>
+            <a:r>
+              <a:rPr lang="en-US" sz="1250" dirty="0">
+                <a:solidFill>
+                  <a:srgbClr val="3F3933"/>
+                </a:solidFill>
+                <a:latin typeface="Yu Gothic" pitchFamily="34" charset="0"/>
+                <a:ea typeface="Yu Gothic" pitchFamily="34" charset="-122"/>
+                <a:cs typeface="Yu Gothic" pitchFamily="34" charset="-120"/>
+              </a:rPr>
+              <a:t>1本目は書くのに5分かかります。2本目からは1分です。5本作れば、日常の文書業務のほとんどが埋まります。</a:t>
+            </a:r>
+            <a:endParaRPr lang="en-US" sz="1250" dirty="0"/>
+          </a:p>
+        </p:txBody>
+      </p:sp>
+      <p:sp>
+        <p:nvSpPr>
+          <p:cNvPr id="15" name="Shape 13"/>
+          <p:cNvSpPr/>
+          <p:nvPr/>
+        </p:nvSpPr>
+        <p:spPr>
+          <a:xfrm>
+            <a:off x="777240" y="4983480"/>
+            <a:ext cx="10607040" cy="685800"/>
+          </a:xfrm>
+          <a:prstGeom prst="rect">
+            <a:avLst/>
+          </a:prstGeom>
+          <a:solidFill>
+            <a:srgbClr val="3B6B4A"/>
+          </a:solidFill>
+          <a:ln w="12700">
+            <a:solidFill>
+              <a:srgbClr val="333333"/>
+            </a:solidFill>
+            <a:prstDash val="solid"/>
+          </a:ln>
+        </p:spPr>
+      </p:sp>
+      <p:sp>
+        <p:nvSpPr>
+          <p:cNvPr id="16" name="Text 14"/>
+          <p:cNvSpPr txBox="1"/>
+          <p:nvPr/>
+        </p:nvSpPr>
+        <p:spPr>
+          <a:xfrm>
+            <a:off x="1097280" y="4983480"/>
+            <a:ext cx="9966960" cy="685800"/>
+          </a:xfrm>
+          <a:prstGeom prst="rect">
+            <a:avLst/>
+          </a:prstGeom>
+          <a:noFill/>
+          <a:ln/>
+        </p:spPr>
+        <p:txBody>
+          <a:bodyPr wrap="square" lIns="0" tIns="0" rIns="0" bIns="0" rtlCol="0" anchor="ctr"/>
+          <a:lstStyle/>
+          <a:p>
+            <a:pPr indent="0" marL="0">
+              <a:buNone/>
+            </a:pPr>
+            <a:r>
+              <a:rPr lang="en-US" sz="1450" b="1" dirty="0">
+                <a:solidFill>
+                  <a:srgbClr val="FFFFFF"/>
+                </a:solidFill>
+                <a:latin typeface="Yu Gothic" pitchFamily="34" charset="0"/>
+                <a:ea typeface="Yu Gothic" pitchFamily="34" charset="-122"/>
+                <a:cs typeface="Yu Gothic" pitchFamily="34" charset="-120"/>
+              </a:rPr>
+              <a:t>面倒なのは最初の1本だけ。あとはコピーして直すだけ</a:t>
+            </a:r>
+            <a:endParaRPr lang="en-US" sz="1450" dirty="0"/>
+          </a:p>
+        </p:txBody>
+      </p:sp>
+      <p:sp>
+        <p:nvSpPr>
+          <p:cNvPr id="17" name="Text 15"/>
+          <p:cNvSpPr txBox="1"/>
+          <p:nvPr/>
+        </p:nvSpPr>
+        <p:spPr>
+          <a:xfrm>
+            <a:off x="777240" y="6382512"/>
+            <a:ext cx="7424928" cy="256032"/>
+          </a:xfrm>
+          <a:prstGeom prst="rect">
+            <a:avLst/>
+          </a:prstGeom>
+          <a:noFill/>
+          <a:ln/>
+        </p:spPr>
+        <p:txBody>
+          <a:bodyPr wrap="square" lIns="0" tIns="0" rIns="0" bIns="0" rtlCol="0" anchor="ctr"/>
+          <a:lstStyle/>
+          <a:p>
+            <a:pPr indent="0" marL="0">
+              <a:buNone/>
+            </a:pPr>
+            <a:r>
+              <a:rPr lang="en-US" sz="900" dirty="0">
+                <a:solidFill>
+                  <a:srgbClr val="8A8177"/>
+                </a:solidFill>
+                <a:latin typeface="Yu Gothic" pitchFamily="34" charset="0"/>
+                <a:ea typeface="Yu Gothic" pitchFamily="34" charset="-122"/>
+                <a:cs typeface="Yu Gothic" pitchFamily="34" charset="-120"/>
+              </a:rPr>
+              <a:t>第2回　今のChatGPTの使い方を作り直す</a:t>
+            </a:r>
+            <a:endParaRPr lang="en-US" sz="900" dirty="0"/>
+          </a:p>
+        </p:txBody>
+      </p:sp>
+      <p:sp>
+        <p:nvSpPr>
+          <p:cNvPr id="18" name="Text 16"/>
+          <p:cNvSpPr txBox="1"/>
+          <p:nvPr/>
+        </p:nvSpPr>
+        <p:spPr>
+          <a:xfrm>
+            <a:off x="8202168" y="6382512"/>
+            <a:ext cx="3182112" cy="256032"/>
+          </a:xfrm>
+          <a:prstGeom prst="rect">
+            <a:avLst/>
+          </a:prstGeom>
+          <a:noFill/>
+          <a:ln/>
+        </p:spPr>
+        <p:txBody>
+          <a:bodyPr wrap="square" lIns="0" tIns="0" rIns="0" bIns="0" rtlCol="0" anchor="ctr"/>
+          <a:lstStyle/>
+          <a:p>
+            <a:pPr algn="r" indent="0" marL="0">
+              <a:buNone/>
+            </a:pPr>
+            <a:r>
+              <a:rPr lang="en-US" sz="900" dirty="0">
+                <a:solidFill>
+                  <a:srgbClr val="8A8177"/>
+                </a:solidFill>
+                <a:latin typeface="Yu Gothic" pitchFamily="34" charset="0"/>
+                <a:ea typeface="Yu Gothic" pitchFamily="34" charset="-122"/>
+                <a:cs typeface="Yu Gothic" pitchFamily="34" charset="-120"/>
+              </a:rPr>
+              <a:t>実演 ②</a:t>
+            </a:r>
+            <a:endParaRPr lang="en-US" sz="900" dirty="0"/>
+          </a:p>
+        </p:txBody>
+      </p:sp>
+    </p:spTree>
+  </p:cSld>
+  <p:clrMapOvr>
+    <a:masterClrMapping/>
+  </p:clrMapOvr>
+</p:sld>
+</file>
+
+<file path=ppt/slides/slide8.xml><?xml version="1.0" encoding="utf-8"?>
+<p:sld xmlns:a="http://schemas.openxmlformats.org/drawingml/2006/main" xmlns:r="http://schemas.openxmlformats.org/officeDocument/2006/relationships" xmlns:p="http://schemas.openxmlformats.org/presentationml/2006/main">
+  <p:cSld name="Slide 8">
+    <p:bg>
+      <p:bgPr>
+        <a:solidFill>
+          <a:srgbClr val="F6F2EA"/>
+        </a:solidFill>
+      </p:bgPr>
+    </p:bg>
+    <p:spTree>
+      <p:nvGrpSpPr>
+        <p:cNvPr id="1" name=""/>
+        <p:cNvGrpSpPr/>
+        <p:nvPr/>
+      </p:nvGrpSpPr>
+      <p:grpSpPr>
+        <a:xfrm>
+          <a:off x="0" y="0"/>
+          <a:ext cx="0" cy="0"/>
+          <a:chOff x="0" y="0"/>
+          <a:chExt cx="0" cy="0"/>
+        </a:xfrm>
+      </p:grpSpPr>
+      <p:sp>
+        <p:nvSpPr>
+          <p:cNvPr id="2" name="Text 0"/>
+          <p:cNvSpPr txBox="1"/>
+          <p:nvPr/>
+        </p:nvSpPr>
+        <p:spPr>
+          <a:xfrm>
+            <a:off x="777240" y="566928"/>
+            <a:ext cx="10607040" cy="274320"/>
+          </a:xfrm>
+          <a:prstGeom prst="rect">
+            <a:avLst/>
+          </a:prstGeom>
+          <a:noFill/>
+          <a:ln/>
+        </p:spPr>
+        <p:txBody>
+          <a:bodyPr wrap="square" lIns="0" tIns="0" rIns="0" bIns="0" rtlCol="0" anchor="ctr"/>
+          <a:lstStyle/>
+          <a:p>
+            <a:pPr indent="0" marL="0">
+              <a:buNone/>
+            </a:pPr>
+            <a:r>
+              <a:rPr lang="en-US" sz="1100" b="1" spc="250" kern="0" dirty="0">
+                <a:solidFill>
+                  <a:srgbClr val="B04A2F"/>
+                </a:solidFill>
+                <a:latin typeface="Yu Gothic" pitchFamily="34" charset="0"/>
+                <a:ea typeface="Yu Gothic" pitchFamily="34" charset="-122"/>
+                <a:cs typeface="Yu Gothic" pitchFamily="34" charset="-120"/>
+              </a:rPr>
+              <a:t>つまずきやすいところ</a:t>
+            </a:r>
+            <a:endParaRPr lang="en-US" sz="1100" dirty="0"/>
+          </a:p>
+        </p:txBody>
+      </p:sp>
+      <p:sp>
+        <p:nvSpPr>
+          <p:cNvPr id="3" name="Text 1"/>
+          <p:cNvSpPr txBox="1"/>
+          <p:nvPr/>
+        </p:nvSpPr>
+        <p:spPr>
+          <a:xfrm>
+            <a:off x="777240" y="896112"/>
+            <a:ext cx="10607040" cy="640080"/>
+          </a:xfrm>
+          <a:prstGeom prst="rect">
+            <a:avLst/>
+          </a:prstGeom>
+          <a:noFill/>
+          <a:ln/>
+        </p:spPr>
+        <p:txBody>
+          <a:bodyPr wrap="square" lIns="0" tIns="0" rIns="0" bIns="0" rtlCol="0" anchor="ctr"/>
+          <a:lstStyle/>
+          <a:p>
+            <a:pPr indent="0" marL="0">
+              <a:buNone/>
+            </a:pPr>
+            <a:r>
+              <a:rPr lang="en-US" sz="2600" b="1" dirty="0">
+                <a:solidFill>
+                  <a:srgbClr val="23201D"/>
+                </a:solidFill>
+                <a:latin typeface="Yu Gothic" pitchFamily="34" charset="0"/>
+                <a:ea typeface="Yu Gothic" pitchFamily="34" charset="-122"/>
+                <a:cs typeface="Yu Gothic" pitchFamily="34" charset="-120"/>
+              </a:rPr>
+              <a:t>この回で、よく起きること</a:t>
+            </a:r>
+            <a:endParaRPr lang="en-US" sz="2600" dirty="0"/>
+          </a:p>
+        </p:txBody>
+      </p:sp>
+      <p:sp>
+        <p:nvSpPr>
+          <p:cNvPr id="4" name="Shape 2"/>
+          <p:cNvSpPr/>
+          <p:nvPr/>
+        </p:nvSpPr>
+        <p:spPr>
+          <a:xfrm>
+            <a:off x="777240" y="1737360"/>
+            <a:ext cx="10607040" cy="1078992"/>
+          </a:xfrm>
+          <a:prstGeom prst="rect">
+            <a:avLst/>
+          </a:prstGeom>
+          <a:solidFill>
+            <a:srgbClr val="FFFFFF"/>
+          </a:solidFill>
+          <a:ln w="12700">
+            <a:solidFill>
+              <a:srgbClr val="EDE7DB"/>
+            </a:solidFill>
+            <a:prstDash val="solid"/>
+          </a:ln>
+        </p:spPr>
+      </p:sp>
+      <p:sp>
+        <p:nvSpPr>
           <p:cNvPr id="5" name="Text 3"/>
           <p:cNvSpPr txBox="1"/>
           <p:nvPr/>
         </p:nvSpPr>
         <p:spPr>
           <a:xfrm>
-            <a:off x="1234440" y="2880360"/>
-            <a:ext cx="9692640" cy="1188720"/>
+            <a:off x="1051560" y="1856232"/>
+            <a:ext cx="1463040" cy="256032"/>
+          </a:xfrm>
+          <a:prstGeom prst="rect">
+            <a:avLst/>
+          </a:prstGeom>
+          <a:noFill/>
+          <a:ln/>
+        </p:spPr>
+        <p:txBody>
+          <a:bodyPr wrap="square" lIns="0" tIns="0" rIns="0" bIns="0" rtlCol="0" anchor="ctr"/>
+          <a:lstStyle/>
+          <a:p>
+            <a:pPr indent="0" marL="0">
+              <a:buNone/>
+            </a:pPr>
+            <a:r>
+              <a:rPr lang="en-US" sz="900" b="1" spc="150" kern="0" dirty="0">
+                <a:solidFill>
+                  <a:srgbClr val="8A8177"/>
+                </a:solidFill>
+                <a:latin typeface="Yu Gothic" pitchFamily="34" charset="0"/>
+                <a:ea typeface="Yu Gothic" pitchFamily="34" charset="-122"/>
+                <a:cs typeface="Yu Gothic" pitchFamily="34" charset="-120"/>
+              </a:rPr>
+              <a:t>こうなったら</a:t>
+            </a:r>
+            <a:endParaRPr lang="en-US" sz="900" dirty="0"/>
+          </a:p>
+        </p:txBody>
+      </p:sp>
+      <p:sp>
+        <p:nvSpPr>
+          <p:cNvPr id="6" name="Text 4"/>
+          <p:cNvSpPr txBox="1"/>
+          <p:nvPr/>
+        </p:nvSpPr>
+        <p:spPr>
+          <a:xfrm>
+            <a:off x="1051560" y="2121408"/>
+            <a:ext cx="4454957" cy="566928"/>
           </a:xfrm>
           <a:prstGeom prst="rect">
             <a:avLst/>
@@ -5347,12 +7958,858 @@
           <a:p>
             <a:pPr indent="0" marL="0">
               <a:lnSpc>
-                <a:spcPct val="140000"/>
+                <a:spcPct val="120000"/>
               </a:lnSpc>
               <a:buNone/>
             </a:pPr>
             <a:r>
-              <a:rPr lang="en-US" sz="1900" b="1" dirty="0">
+              <a:rPr lang="en-US" sz="1350" b="1" dirty="0">
+                <a:solidFill>
+                  <a:srgbClr val="23201D"/>
+                </a:solidFill>
+                <a:latin typeface="Yu Gothic" pitchFamily="34" charset="0"/>
+                <a:ea typeface="Yu Gothic" pitchFamily="34" charset="-122"/>
+                <a:cs typeface="Yu Gothic" pitchFamily="34" charset="-120"/>
+              </a:rPr>
+              <a:t>カスタム指示に何を書けばいいか分からない</a:t>
+            </a:r>
+            <a:endParaRPr lang="en-US" sz="1350" dirty="0"/>
+          </a:p>
+        </p:txBody>
+      </p:sp>
+      <p:sp>
+        <p:nvSpPr>
+          <p:cNvPr id="7" name="Shape 5"/>
+          <p:cNvSpPr/>
+          <p:nvPr/>
+        </p:nvSpPr>
+        <p:spPr>
+          <a:xfrm>
+            <a:off x="5762549" y="1847088"/>
+            <a:ext cx="18288" cy="859536"/>
+          </a:xfrm>
+          <a:prstGeom prst="rect">
+            <a:avLst/>
+          </a:prstGeom>
+          <a:solidFill>
+            <a:srgbClr val="EDE7DB"/>
+          </a:solidFill>
+          <a:ln w="12700">
+            <a:solidFill>
+              <a:srgbClr val="333333"/>
+            </a:solidFill>
+            <a:prstDash val="solid"/>
+          </a:ln>
+        </p:spPr>
+      </p:sp>
+      <p:sp>
+        <p:nvSpPr>
+          <p:cNvPr id="8" name="Text 6"/>
+          <p:cNvSpPr txBox="1"/>
+          <p:nvPr/>
+        </p:nvSpPr>
+        <p:spPr>
+          <a:xfrm>
+            <a:off x="6080760" y="1856232"/>
+            <a:ext cx="1463040" cy="256032"/>
+          </a:xfrm>
+          <a:prstGeom prst="rect">
+            <a:avLst/>
+          </a:prstGeom>
+          <a:noFill/>
+          <a:ln/>
+        </p:spPr>
+        <p:txBody>
+          <a:bodyPr wrap="square" lIns="0" tIns="0" rIns="0" bIns="0" rtlCol="0" anchor="ctr"/>
+          <a:lstStyle/>
+          <a:p>
+            <a:pPr indent="0" marL="0">
+              <a:buNone/>
+            </a:pPr>
+            <a:r>
+              <a:rPr lang="en-US" sz="900" b="1" spc="150" kern="0" dirty="0">
+                <a:solidFill>
+                  <a:srgbClr val="B04A2F"/>
+                </a:solidFill>
+                <a:latin typeface="Yu Gothic" pitchFamily="34" charset="0"/>
+                <a:ea typeface="Yu Gothic" pitchFamily="34" charset="-122"/>
+                <a:cs typeface="Yu Gothic" pitchFamily="34" charset="-120"/>
+              </a:rPr>
+              <a:t>こうする</a:t>
+            </a:r>
+            <a:endParaRPr lang="en-US" sz="900" dirty="0"/>
+          </a:p>
+        </p:txBody>
+      </p:sp>
+      <p:sp>
+        <p:nvSpPr>
+          <p:cNvPr id="9" name="Text 7"/>
+          <p:cNvSpPr txBox="1"/>
+          <p:nvPr/>
+        </p:nvSpPr>
+        <p:spPr>
+          <a:xfrm>
+            <a:off x="6080760" y="2121408"/>
+            <a:ext cx="5091379" cy="566928"/>
+          </a:xfrm>
+          <a:prstGeom prst="rect">
+            <a:avLst/>
+          </a:prstGeom>
+          <a:noFill/>
+          <a:ln/>
+        </p:spPr>
+        <p:txBody>
+          <a:bodyPr wrap="square" lIns="0" tIns="0" rIns="0" bIns="0" rtlCol="0" anchor="ctr"/>
+          <a:lstStyle/>
+          <a:p>
+            <a:pPr indent="0" marL="0">
+              <a:lnSpc>
+                <a:spcPct val="125000"/>
+              </a:lnSpc>
+              <a:buNone/>
+            </a:pPr>
+            <a:r>
+              <a:rPr lang="en-US" sz="1250" dirty="0">
+                <a:solidFill>
+                  <a:srgbClr val="3F3933"/>
+                </a:solidFill>
+                <a:latin typeface="Yu Gothic" pitchFamily="34" charset="0"/>
+                <a:ea typeface="Yu Gothic" pitchFamily="34" charset="-122"/>
+                <a:cs typeface="Yu Gothic" pitchFamily="34" charset="-120"/>
+              </a:rPr>
+              <a:t>「会社案内を読んだ人が知っていること」を書けばよい、と言い換えます。会社概要をそのまま貼っても構いません</a:t>
+            </a:r>
+            <a:endParaRPr lang="en-US" sz="1250" dirty="0"/>
+          </a:p>
+        </p:txBody>
+      </p:sp>
+      <p:sp>
+        <p:nvSpPr>
+          <p:cNvPr id="10" name="Shape 8"/>
+          <p:cNvSpPr/>
+          <p:nvPr/>
+        </p:nvSpPr>
+        <p:spPr>
+          <a:xfrm>
+            <a:off x="777240" y="2944368"/>
+            <a:ext cx="10607040" cy="1078992"/>
+          </a:xfrm>
+          <a:prstGeom prst="rect">
+            <a:avLst/>
+          </a:prstGeom>
+          <a:solidFill>
+            <a:srgbClr val="FFFFFF"/>
+          </a:solidFill>
+          <a:ln w="12700">
+            <a:solidFill>
+              <a:srgbClr val="EDE7DB"/>
+            </a:solidFill>
+            <a:prstDash val="solid"/>
+          </a:ln>
+        </p:spPr>
+      </p:sp>
+      <p:sp>
+        <p:nvSpPr>
+          <p:cNvPr id="11" name="Text 9"/>
+          <p:cNvSpPr txBox="1"/>
+          <p:nvPr/>
+        </p:nvSpPr>
+        <p:spPr>
+          <a:xfrm>
+            <a:off x="1051560" y="3063240"/>
+            <a:ext cx="1463040" cy="256032"/>
+          </a:xfrm>
+          <a:prstGeom prst="rect">
+            <a:avLst/>
+          </a:prstGeom>
+          <a:noFill/>
+          <a:ln/>
+        </p:spPr>
+        <p:txBody>
+          <a:bodyPr wrap="square" lIns="0" tIns="0" rIns="0" bIns="0" rtlCol="0" anchor="ctr"/>
+          <a:lstStyle/>
+          <a:p>
+            <a:pPr indent="0" marL="0">
+              <a:buNone/>
+            </a:pPr>
+            <a:r>
+              <a:rPr lang="en-US" sz="900" b="1" spc="150" kern="0" dirty="0">
+                <a:solidFill>
+                  <a:srgbClr val="8A8177"/>
+                </a:solidFill>
+                <a:latin typeface="Yu Gothic" pitchFamily="34" charset="0"/>
+                <a:ea typeface="Yu Gothic" pitchFamily="34" charset="-122"/>
+                <a:cs typeface="Yu Gothic" pitchFamily="34" charset="-120"/>
+              </a:rPr>
+              <a:t>こうなったら</a:t>
+            </a:r>
+            <a:endParaRPr lang="en-US" sz="900" dirty="0"/>
+          </a:p>
+        </p:txBody>
+      </p:sp>
+      <p:sp>
+        <p:nvSpPr>
+          <p:cNvPr id="12" name="Text 10"/>
+          <p:cNvSpPr txBox="1"/>
+          <p:nvPr/>
+        </p:nvSpPr>
+        <p:spPr>
+          <a:xfrm>
+            <a:off x="1051560" y="3328416"/>
+            <a:ext cx="4454957" cy="566928"/>
+          </a:xfrm>
+          <a:prstGeom prst="rect">
+            <a:avLst/>
+          </a:prstGeom>
+          <a:noFill/>
+          <a:ln/>
+        </p:spPr>
+        <p:txBody>
+          <a:bodyPr wrap="square" lIns="0" tIns="0" rIns="0" bIns="0" rtlCol="0" anchor="ctr"/>
+          <a:lstStyle/>
+          <a:p>
+            <a:pPr indent="0" marL="0">
+              <a:lnSpc>
+                <a:spcPct val="120000"/>
+              </a:lnSpc>
+              <a:buNone/>
+            </a:pPr>
+            <a:r>
+              <a:rPr lang="en-US" sz="1350" b="1" dirty="0">
+                <a:solidFill>
+                  <a:srgbClr val="23201D"/>
+                </a:solidFill>
+                <a:latin typeface="Yu Gothic" pitchFamily="34" charset="0"/>
+                <a:ea typeface="Yu Gothic" pitchFamily="34" charset="-122"/>
+                <a:cs typeface="Yu Gothic" pitchFamily="34" charset="-120"/>
+              </a:rPr>
+              <a:t>無料プランでプロジェクト機能が使えない</a:t>
+            </a:r>
+            <a:endParaRPr lang="en-US" sz="1350" dirty="0"/>
+          </a:p>
+        </p:txBody>
+      </p:sp>
+      <p:sp>
+        <p:nvSpPr>
+          <p:cNvPr id="13" name="Shape 11"/>
+          <p:cNvSpPr/>
+          <p:nvPr/>
+        </p:nvSpPr>
+        <p:spPr>
+          <a:xfrm>
+            <a:off x="5762549" y="3054096"/>
+            <a:ext cx="18288" cy="859536"/>
+          </a:xfrm>
+          <a:prstGeom prst="rect">
+            <a:avLst/>
+          </a:prstGeom>
+          <a:solidFill>
+            <a:srgbClr val="EDE7DB"/>
+          </a:solidFill>
+          <a:ln w="12700">
+            <a:solidFill>
+              <a:srgbClr val="333333"/>
+            </a:solidFill>
+            <a:prstDash val="solid"/>
+          </a:ln>
+        </p:spPr>
+      </p:sp>
+      <p:sp>
+        <p:nvSpPr>
+          <p:cNvPr id="14" name="Text 12"/>
+          <p:cNvSpPr txBox="1"/>
+          <p:nvPr/>
+        </p:nvSpPr>
+        <p:spPr>
+          <a:xfrm>
+            <a:off x="6080760" y="3063240"/>
+            <a:ext cx="1463040" cy="256032"/>
+          </a:xfrm>
+          <a:prstGeom prst="rect">
+            <a:avLst/>
+          </a:prstGeom>
+          <a:noFill/>
+          <a:ln/>
+        </p:spPr>
+        <p:txBody>
+          <a:bodyPr wrap="square" lIns="0" tIns="0" rIns="0" bIns="0" rtlCol="0" anchor="ctr"/>
+          <a:lstStyle/>
+          <a:p>
+            <a:pPr indent="0" marL="0">
+              <a:buNone/>
+            </a:pPr>
+            <a:r>
+              <a:rPr lang="en-US" sz="900" b="1" spc="150" kern="0" dirty="0">
+                <a:solidFill>
+                  <a:srgbClr val="B04A2F"/>
+                </a:solidFill>
+                <a:latin typeface="Yu Gothic" pitchFamily="34" charset="0"/>
+                <a:ea typeface="Yu Gothic" pitchFamily="34" charset="-122"/>
+                <a:cs typeface="Yu Gothic" pitchFamily="34" charset="-120"/>
+              </a:rPr>
+              <a:t>こうする</a:t>
+            </a:r>
+            <a:endParaRPr lang="en-US" sz="900" dirty="0"/>
+          </a:p>
+        </p:txBody>
+      </p:sp>
+      <p:sp>
+        <p:nvSpPr>
+          <p:cNvPr id="15" name="Text 13"/>
+          <p:cNvSpPr txBox="1"/>
+          <p:nvPr/>
+        </p:nvSpPr>
+        <p:spPr>
+          <a:xfrm>
+            <a:off x="6080760" y="3328416"/>
+            <a:ext cx="5091379" cy="566928"/>
+          </a:xfrm>
+          <a:prstGeom prst="rect">
+            <a:avLst/>
+          </a:prstGeom>
+          <a:noFill/>
+          <a:ln/>
+        </p:spPr>
+        <p:txBody>
+          <a:bodyPr wrap="square" lIns="0" tIns="0" rIns="0" bIns="0" rtlCol="0" anchor="ctr"/>
+          <a:lstStyle/>
+          <a:p>
+            <a:pPr indent="0" marL="0">
+              <a:lnSpc>
+                <a:spcPct val="125000"/>
+              </a:lnSpc>
+              <a:buNone/>
+            </a:pPr>
+            <a:r>
+              <a:rPr lang="en-US" sz="1250" dirty="0">
+                <a:solidFill>
+                  <a:srgbClr val="3F3933"/>
+                </a:solidFill>
+                <a:latin typeface="Yu Gothic" pitchFamily="34" charset="0"/>
+                <a:ea typeface="Yu Gothic" pitchFamily="34" charset="-122"/>
+                <a:cs typeface="Yu Gothic" pitchFamily="34" charset="-120"/>
+              </a:rPr>
+              <a:t>指示文の先頭に貼る「前提ブロック」で代替します。有料化を勧めるのは第11回。ここで勧めると売り込みに見えます</a:t>
+            </a:r>
+            <a:endParaRPr lang="en-US" sz="1250" dirty="0"/>
+          </a:p>
+        </p:txBody>
+      </p:sp>
+      <p:sp>
+        <p:nvSpPr>
+          <p:cNvPr id="16" name="Shape 14"/>
+          <p:cNvSpPr/>
+          <p:nvPr/>
+        </p:nvSpPr>
+        <p:spPr>
+          <a:xfrm>
+            <a:off x="777240" y="4151376"/>
+            <a:ext cx="10607040" cy="1078992"/>
+          </a:xfrm>
+          <a:prstGeom prst="rect">
+            <a:avLst/>
+          </a:prstGeom>
+          <a:solidFill>
+            <a:srgbClr val="FFFFFF"/>
+          </a:solidFill>
+          <a:ln w="12700">
+            <a:solidFill>
+              <a:srgbClr val="EDE7DB"/>
+            </a:solidFill>
+            <a:prstDash val="solid"/>
+          </a:ln>
+        </p:spPr>
+      </p:sp>
+      <p:sp>
+        <p:nvSpPr>
+          <p:cNvPr id="17" name="Text 15"/>
+          <p:cNvSpPr txBox="1"/>
+          <p:nvPr/>
+        </p:nvSpPr>
+        <p:spPr>
+          <a:xfrm>
+            <a:off x="1051560" y="4270248"/>
+            <a:ext cx="1463040" cy="256032"/>
+          </a:xfrm>
+          <a:prstGeom prst="rect">
+            <a:avLst/>
+          </a:prstGeom>
+          <a:noFill/>
+          <a:ln/>
+        </p:spPr>
+        <p:txBody>
+          <a:bodyPr wrap="square" lIns="0" tIns="0" rIns="0" bIns="0" rtlCol="0" anchor="ctr"/>
+          <a:lstStyle/>
+          <a:p>
+            <a:pPr indent="0" marL="0">
+              <a:buNone/>
+            </a:pPr>
+            <a:r>
+              <a:rPr lang="en-US" sz="900" b="1" spc="150" kern="0" dirty="0">
+                <a:solidFill>
+                  <a:srgbClr val="8A8177"/>
+                </a:solidFill>
+                <a:latin typeface="Yu Gothic" pitchFamily="34" charset="0"/>
+                <a:ea typeface="Yu Gothic" pitchFamily="34" charset="-122"/>
+                <a:cs typeface="Yu Gothic" pitchFamily="34" charset="-120"/>
+              </a:rPr>
+              <a:t>こうなったら</a:t>
+            </a:r>
+            <a:endParaRPr lang="en-US" sz="900" dirty="0"/>
+          </a:p>
+        </p:txBody>
+      </p:sp>
+      <p:sp>
+        <p:nvSpPr>
+          <p:cNvPr id="18" name="Text 16"/>
+          <p:cNvSpPr txBox="1"/>
+          <p:nvPr/>
+        </p:nvSpPr>
+        <p:spPr>
+          <a:xfrm>
+            <a:off x="1051560" y="4535424"/>
+            <a:ext cx="4454957" cy="566928"/>
+          </a:xfrm>
+          <a:prstGeom prst="rect">
+            <a:avLst/>
+          </a:prstGeom>
+          <a:noFill/>
+          <a:ln/>
+        </p:spPr>
+        <p:txBody>
+          <a:bodyPr wrap="square" lIns="0" tIns="0" rIns="0" bIns="0" rtlCol="0" anchor="ctr"/>
+          <a:lstStyle/>
+          <a:p>
+            <a:pPr indent="0" marL="0">
+              <a:lnSpc>
+                <a:spcPct val="120000"/>
+              </a:lnSpc>
+              <a:buNone/>
+            </a:pPr>
+            <a:r>
+              <a:rPr lang="en-US" sz="1350" b="1" dirty="0">
+                <a:solidFill>
+                  <a:srgbClr val="23201D"/>
+                </a:solidFill>
+                <a:latin typeface="Yu Gothic" pitchFamily="34" charset="0"/>
+                <a:ea typeface="Yu Gothic" pitchFamily="34" charset="-122"/>
+                <a:cs typeface="Yu Gothic" pitchFamily="34" charset="-120"/>
+              </a:rPr>
+              <a:t>5要素が面倒だと言われる</a:t>
+            </a:r>
+            <a:endParaRPr lang="en-US" sz="1350" dirty="0"/>
+          </a:p>
+        </p:txBody>
+      </p:sp>
+      <p:sp>
+        <p:nvSpPr>
+          <p:cNvPr id="19" name="Shape 17"/>
+          <p:cNvSpPr/>
+          <p:nvPr/>
+        </p:nvSpPr>
+        <p:spPr>
+          <a:xfrm>
+            <a:off x="5762549" y="4261104"/>
+            <a:ext cx="18288" cy="859536"/>
+          </a:xfrm>
+          <a:prstGeom prst="rect">
+            <a:avLst/>
+          </a:prstGeom>
+          <a:solidFill>
+            <a:srgbClr val="EDE7DB"/>
+          </a:solidFill>
+          <a:ln w="12700">
+            <a:solidFill>
+              <a:srgbClr val="333333"/>
+            </a:solidFill>
+            <a:prstDash val="solid"/>
+          </a:ln>
+        </p:spPr>
+      </p:sp>
+      <p:sp>
+        <p:nvSpPr>
+          <p:cNvPr id="20" name="Text 18"/>
+          <p:cNvSpPr txBox="1"/>
+          <p:nvPr/>
+        </p:nvSpPr>
+        <p:spPr>
+          <a:xfrm>
+            <a:off x="6080760" y="4270248"/>
+            <a:ext cx="1463040" cy="256032"/>
+          </a:xfrm>
+          <a:prstGeom prst="rect">
+            <a:avLst/>
+          </a:prstGeom>
+          <a:noFill/>
+          <a:ln/>
+        </p:spPr>
+        <p:txBody>
+          <a:bodyPr wrap="square" lIns="0" tIns="0" rIns="0" bIns="0" rtlCol="0" anchor="ctr"/>
+          <a:lstStyle/>
+          <a:p>
+            <a:pPr indent="0" marL="0">
+              <a:buNone/>
+            </a:pPr>
+            <a:r>
+              <a:rPr lang="en-US" sz="900" b="1" spc="150" kern="0" dirty="0">
+                <a:solidFill>
+                  <a:srgbClr val="B04A2F"/>
+                </a:solidFill>
+                <a:latin typeface="Yu Gothic" pitchFamily="34" charset="0"/>
+                <a:ea typeface="Yu Gothic" pitchFamily="34" charset="-122"/>
+                <a:cs typeface="Yu Gothic" pitchFamily="34" charset="-120"/>
+              </a:rPr>
+              <a:t>こうする</a:t>
+            </a:r>
+            <a:endParaRPr lang="en-US" sz="900" dirty="0"/>
+          </a:p>
+        </p:txBody>
+      </p:sp>
+      <p:sp>
+        <p:nvSpPr>
+          <p:cNvPr id="21" name="Text 19"/>
+          <p:cNvSpPr txBox="1"/>
+          <p:nvPr/>
+        </p:nvSpPr>
+        <p:spPr>
+          <a:xfrm>
+            <a:off x="6080760" y="4535424"/>
+            <a:ext cx="5091379" cy="566928"/>
+          </a:xfrm>
+          <a:prstGeom prst="rect">
+            <a:avLst/>
+          </a:prstGeom>
+          <a:noFill/>
+          <a:ln/>
+        </p:spPr>
+        <p:txBody>
+          <a:bodyPr wrap="square" lIns="0" tIns="0" rIns="0" bIns="0" rtlCol="0" anchor="ctr"/>
+          <a:lstStyle/>
+          <a:p>
+            <a:pPr indent="0" marL="0">
+              <a:lnSpc>
+                <a:spcPct val="125000"/>
+              </a:lnSpc>
+              <a:buNone/>
+            </a:pPr>
+            <a:r>
+              <a:rPr lang="en-US" sz="1250" dirty="0">
+                <a:solidFill>
+                  <a:srgbClr val="3F3933"/>
+                </a:solidFill>
+                <a:latin typeface="Yu Gothic" pitchFamily="34" charset="0"/>
+                <a:ea typeface="Yu Gothic" pitchFamily="34" charset="-122"/>
+                <a:cs typeface="Yu Gothic" pitchFamily="34" charset="-120"/>
+              </a:rPr>
+              <a:t>面倒で構いません。5本だけ作れば終わりです。毎回書くものではないことを、その場で実演して見せます</a:t>
+            </a:r>
+            <a:endParaRPr lang="en-US" sz="1250" dirty="0"/>
+          </a:p>
+        </p:txBody>
+      </p:sp>
+      <p:sp>
+        <p:nvSpPr>
+          <p:cNvPr id="22" name="Text 20"/>
+          <p:cNvSpPr txBox="1"/>
+          <p:nvPr/>
+        </p:nvSpPr>
+        <p:spPr>
+          <a:xfrm>
+            <a:off x="777240" y="6382512"/>
+            <a:ext cx="7424928" cy="256032"/>
+          </a:xfrm>
+          <a:prstGeom prst="rect">
+            <a:avLst/>
+          </a:prstGeom>
+          <a:noFill/>
+          <a:ln/>
+        </p:spPr>
+        <p:txBody>
+          <a:bodyPr wrap="square" lIns="0" tIns="0" rIns="0" bIns="0" rtlCol="0" anchor="ctr"/>
+          <a:lstStyle/>
+          <a:p>
+            <a:pPr indent="0" marL="0">
+              <a:buNone/>
+            </a:pPr>
+            <a:r>
+              <a:rPr lang="en-US" sz="900" dirty="0">
+                <a:solidFill>
+                  <a:srgbClr val="8A8177"/>
+                </a:solidFill>
+                <a:latin typeface="Yu Gothic" pitchFamily="34" charset="0"/>
+                <a:ea typeface="Yu Gothic" pitchFamily="34" charset="-122"/>
+                <a:cs typeface="Yu Gothic" pitchFamily="34" charset="-120"/>
+              </a:rPr>
+              <a:t>第2回　今のChatGPTの使い方を作り直す</a:t>
+            </a:r>
+            <a:endParaRPr lang="en-US" sz="900" dirty="0"/>
+          </a:p>
+        </p:txBody>
+      </p:sp>
+      <p:sp>
+        <p:nvSpPr>
+          <p:cNvPr id="23" name="Text 21"/>
+          <p:cNvSpPr txBox="1"/>
+          <p:nvPr/>
+        </p:nvSpPr>
+        <p:spPr>
+          <a:xfrm>
+            <a:off x="8202168" y="6382512"/>
+            <a:ext cx="3182112" cy="256032"/>
+          </a:xfrm>
+          <a:prstGeom prst="rect">
+            <a:avLst/>
+          </a:prstGeom>
+          <a:noFill/>
+          <a:ln/>
+        </p:spPr>
+        <p:txBody>
+          <a:bodyPr wrap="square" lIns="0" tIns="0" rIns="0" bIns="0" rtlCol="0" anchor="ctr"/>
+          <a:lstStyle/>
+          <a:p>
+            <a:pPr algn="r" indent="0" marL="0">
+              <a:buNone/>
+            </a:pPr>
+            <a:r>
+              <a:rPr lang="en-US" sz="900" dirty="0">
+                <a:solidFill>
+                  <a:srgbClr val="8A8177"/>
+                </a:solidFill>
+                <a:latin typeface="Yu Gothic" pitchFamily="34" charset="0"/>
+                <a:ea typeface="Yu Gothic" pitchFamily="34" charset="-122"/>
+                <a:cs typeface="Yu Gothic" pitchFamily="34" charset="-120"/>
+              </a:rPr>
+              <a:t>つまずき</a:t>
+            </a:r>
+            <a:endParaRPr lang="en-US" sz="900" dirty="0"/>
+          </a:p>
+        </p:txBody>
+      </p:sp>
+    </p:spTree>
+  </p:cSld>
+  <p:clrMapOvr>
+    <a:masterClrMapping/>
+  </p:clrMapOvr>
+</p:sld>
+</file>
+
+<file path=ppt/slides/slide9.xml><?xml version="1.0" encoding="utf-8"?>
+<p:sld xmlns:a="http://schemas.openxmlformats.org/drawingml/2006/main" xmlns:r="http://schemas.openxmlformats.org/officeDocument/2006/relationships" xmlns:p="http://schemas.openxmlformats.org/presentationml/2006/main">
+  <p:cSld name="Slide 9">
+    <p:bg>
+      <p:bgPr>
+        <a:solidFill>
+          <a:srgbClr val="F6F2EA"/>
+        </a:solidFill>
+      </p:bgPr>
+    </p:bg>
+    <p:spTree>
+      <p:nvGrpSpPr>
+        <p:cNvPr id="1" name=""/>
+        <p:cNvGrpSpPr/>
+        <p:nvPr/>
+      </p:nvGrpSpPr>
+      <p:grpSpPr>
+        <a:xfrm>
+          <a:off x="0" y="0"/>
+          <a:ext cx="0" cy="0"/>
+          <a:chOff x="0" y="0"/>
+          <a:chExt cx="0" cy="0"/>
+        </a:xfrm>
+      </p:grpSpPr>
+      <p:sp>
+        <p:nvSpPr>
+          <p:cNvPr id="2" name="Text 0"/>
+          <p:cNvSpPr txBox="1"/>
+          <p:nvPr/>
+        </p:nvSpPr>
+        <p:spPr>
+          <a:xfrm>
+            <a:off x="777240" y="566928"/>
+            <a:ext cx="10607040" cy="274320"/>
+          </a:xfrm>
+          <a:prstGeom prst="rect">
+            <a:avLst/>
+          </a:prstGeom>
+          <a:noFill/>
+          <a:ln/>
+        </p:spPr>
+        <p:txBody>
+          <a:bodyPr wrap="square" lIns="0" tIns="0" rIns="0" bIns="0" rtlCol="0" anchor="ctr"/>
+          <a:lstStyle/>
+          <a:p>
+            <a:pPr indent="0" marL="0">
+              <a:buNone/>
+            </a:pPr>
+            <a:r>
+              <a:rPr lang="en-US" sz="1100" b="1" spc="250" kern="0" dirty="0">
+                <a:solidFill>
+                  <a:srgbClr val="2F4F6B"/>
+                </a:solidFill>
+                <a:latin typeface="Yu Gothic" pitchFamily="34" charset="0"/>
+                <a:ea typeface="Yu Gothic" pitchFamily="34" charset="-122"/>
+                <a:cs typeface="Yu Gothic" pitchFamily="34" charset="-120"/>
+              </a:rPr>
+              <a:t>演習</a:t>
+            </a:r>
+            <a:endParaRPr lang="en-US" sz="1100" dirty="0"/>
+          </a:p>
+        </p:txBody>
+      </p:sp>
+      <p:sp>
+        <p:nvSpPr>
+          <p:cNvPr id="3" name="Text 1"/>
+          <p:cNvSpPr txBox="1"/>
+          <p:nvPr/>
+        </p:nvSpPr>
+        <p:spPr>
+          <a:xfrm>
+            <a:off x="777240" y="896112"/>
+            <a:ext cx="10607040" cy="640080"/>
+          </a:xfrm>
+          <a:prstGeom prst="rect">
+            <a:avLst/>
+          </a:prstGeom>
+          <a:noFill/>
+          <a:ln/>
+        </p:spPr>
+        <p:txBody>
+          <a:bodyPr wrap="square" lIns="0" tIns="0" rIns="0" bIns="0" rtlCol="0" anchor="ctr"/>
+          <a:lstStyle/>
+          <a:p>
+            <a:pPr indent="0" marL="0">
+              <a:buNone/>
+            </a:pPr>
+            <a:r>
+              <a:rPr lang="en-US" sz="2600" b="1" dirty="0">
+                <a:solidFill>
+                  <a:srgbClr val="23201D"/>
+                </a:solidFill>
+                <a:latin typeface="Yu Gothic" pitchFamily="34" charset="0"/>
+                <a:ea typeface="Yu Gothic" pitchFamily="34" charset="-122"/>
+                <a:cs typeface="Yu Gothic" pitchFamily="34" charset="-120"/>
+              </a:rPr>
+              <a:t>今日、一緒にやること</a:t>
+            </a:r>
+            <a:endParaRPr lang="en-US" sz="2600" dirty="0"/>
+          </a:p>
+        </p:txBody>
+      </p:sp>
+      <p:sp>
+        <p:nvSpPr>
+          <p:cNvPr id="4" name="Text 2"/>
+          <p:cNvSpPr txBox="1"/>
+          <p:nvPr/>
+        </p:nvSpPr>
+        <p:spPr>
+          <a:xfrm>
+            <a:off x="777240" y="1572768"/>
+            <a:ext cx="10607040" cy="320040"/>
+          </a:xfrm>
+          <a:prstGeom prst="rect">
+            <a:avLst/>
+          </a:prstGeom>
+          <a:noFill/>
+          <a:ln/>
+        </p:spPr>
+        <p:txBody>
+          <a:bodyPr wrap="square" lIns="0" tIns="0" rIns="0" bIns="0" rtlCol="0" anchor="ctr"/>
+          <a:lstStyle/>
+          <a:p>
+            <a:pPr indent="0" marL="0">
+              <a:buNone/>
+            </a:pPr>
+            <a:r>
+              <a:rPr lang="en-US" sz="1250" b="1" dirty="0">
+                <a:solidFill>
+                  <a:srgbClr val="2F4F6B"/>
+                </a:solidFill>
+                <a:latin typeface="Yu Gothic" pitchFamily="34" charset="0"/>
+                <a:ea typeface="Yu Gothic" pitchFamily="34" charset="-122"/>
+                <a:cs typeface="Yu Gothic" pitchFamily="34" charset="-120"/>
+              </a:rPr>
+              <a:t>55分。操作するのはご自身です。</a:t>
+            </a:r>
+            <a:endParaRPr lang="en-US" sz="1250" dirty="0"/>
+          </a:p>
+        </p:txBody>
+      </p:sp>
+      <p:sp>
+        <p:nvSpPr>
+          <p:cNvPr id="5" name="Shape 3"/>
+          <p:cNvSpPr/>
+          <p:nvPr/>
+        </p:nvSpPr>
+        <p:spPr>
+          <a:xfrm>
+            <a:off x="777240" y="2148840"/>
+            <a:ext cx="3383280" cy="2880360"/>
+          </a:xfrm>
+          <a:prstGeom prst="rect">
+            <a:avLst/>
+          </a:prstGeom>
+          <a:solidFill>
+            <a:srgbClr val="FFFFFF"/>
+          </a:solidFill>
+          <a:ln w="12700">
+            <a:solidFill>
+              <a:srgbClr val="EDE7DB"/>
+            </a:solidFill>
+            <a:prstDash val="solid"/>
+          </a:ln>
+        </p:spPr>
+      </p:sp>
+      <p:sp>
+        <p:nvSpPr>
+          <p:cNvPr id="6" name="Shape 4"/>
+          <p:cNvSpPr/>
+          <p:nvPr/>
+        </p:nvSpPr>
+        <p:spPr>
+          <a:xfrm>
+            <a:off x="1051560" y="2395728"/>
+            <a:ext cx="438912" cy="438912"/>
+          </a:xfrm>
+          <a:prstGeom prst="ellipse">
+            <a:avLst/>
+          </a:prstGeom>
+          <a:solidFill>
+            <a:srgbClr val="2F4F6B"/>
+          </a:solidFill>
+          <a:ln w="12700">
+            <a:solidFill>
+              <a:srgbClr val="333333"/>
+            </a:solidFill>
+            <a:prstDash val="solid"/>
+          </a:ln>
+        </p:spPr>
+      </p:sp>
+      <p:sp>
+        <p:nvSpPr>
+          <p:cNvPr id="7" name="Text 5"/>
+          <p:cNvSpPr txBox="1"/>
+          <p:nvPr/>
+        </p:nvSpPr>
+        <p:spPr>
+          <a:xfrm>
+            <a:off x="1051560" y="2395728"/>
+            <a:ext cx="438912" cy="438912"/>
+          </a:xfrm>
+          <a:prstGeom prst="rect">
+            <a:avLst/>
+          </a:prstGeom>
+          <a:noFill/>
+          <a:ln/>
+        </p:spPr>
+        <p:txBody>
+          <a:bodyPr wrap="square" lIns="0" tIns="0" rIns="0" bIns="0" rtlCol="0" anchor="ctr"/>
+          <a:lstStyle/>
+          <a:p>
+            <a:pPr algn="ctr" indent="0" marL="0">
+              <a:buNone/>
+            </a:pPr>
+            <a:r>
+              <a:rPr lang="en-US" sz="1300" b="1" dirty="0">
                 <a:solidFill>
                   <a:srgbClr val="FFFFFF"/>
                 </a:solidFill>
@@ -5360,22 +8817,22 @@
                 <a:ea typeface="Yu Gothic" pitchFamily="34" charset="-122"/>
                 <a:cs typeface="Yu Gothic" pitchFamily="34" charset="-120"/>
               </a:rPr>
-              <a:t>明日から1週間、その業務は必ずこの箱の中でやる。新しい会話を開かない。</a:t>
-            </a:r>
-            <a:endParaRPr lang="en-US" sz="1900" dirty="0"/>
-          </a:p>
-        </p:txBody>
-      </p:sp>
-      <p:sp>
-        <p:nvSpPr>
-          <p:cNvPr id="6" name="Text 4"/>
-          <p:cNvSpPr txBox="1"/>
-          <p:nvPr/>
-        </p:nvSpPr>
-        <p:spPr>
-          <a:xfrm>
-            <a:off x="777240" y="4572000"/>
-            <a:ext cx="10607040" cy="822960"/>
+              <a:t>1</a:t>
+            </a:r>
+            <a:endParaRPr lang="en-US" sz="1300" dirty="0"/>
+          </a:p>
+        </p:txBody>
+      </p:sp>
+      <p:sp>
+        <p:nvSpPr>
+          <p:cNvPr id="8" name="Text 6"/>
+          <p:cNvSpPr txBox="1"/>
+          <p:nvPr/>
+        </p:nvSpPr>
+        <p:spPr>
+          <a:xfrm>
+            <a:off x="1051560" y="2944368"/>
+            <a:ext cx="2834640" cy="731520"/>
           </a:xfrm>
           <a:prstGeom prst="rect">
             <a:avLst/>
@@ -5389,40 +8846,324 @@
           <a:p>
             <a:pPr indent="0" marL="0">
               <a:lnSpc>
-                <a:spcPct val="145000"/>
+                <a:spcPct val="125000"/>
               </a:lnSpc>
               <a:buNone/>
             </a:pPr>
             <a:r>
-              <a:rPr lang="en-US" sz="1300" dirty="0">
-                <a:solidFill>
-                  <a:srgbClr val="B9B0A4"/>
-                </a:solidFill>
-                <a:latin typeface="Yu Gothic" pitchFamily="34" charset="0"/>
-                <a:ea typeface="Yu Gothic" pitchFamily="34" charset="-122"/>
-                <a:cs typeface="Yu Gothic" pitchFamily="34" charset="-120"/>
-              </a:rPr>
-              <a:t>15分で終わる大きさにしてあります。できなかった回があっても構いません。</a:t>
+              <a:rPr lang="en-US" sz="1450" b="1" dirty="0">
+                <a:solidFill>
+                  <a:srgbClr val="23201D"/>
+                </a:solidFill>
+                <a:latin typeface="Yu Gothic" pitchFamily="34" charset="0"/>
+                <a:ea typeface="Yu Gothic" pitchFamily="34" charset="-122"/>
+                <a:cs typeface="Yu Gothic" pitchFamily="34" charset="-120"/>
+              </a:rPr>
+              <a:t>5要素で1本書く</a:t>
+            </a:r>
+            <a:endParaRPr lang="en-US" sz="1450" dirty="0"/>
+          </a:p>
+        </p:txBody>
+      </p:sp>
+      <p:sp>
+        <p:nvSpPr>
+          <p:cNvPr id="9" name="Text 7"/>
+          <p:cNvSpPr txBox="1"/>
+          <p:nvPr/>
+        </p:nvSpPr>
+        <p:spPr>
+          <a:xfrm>
+            <a:off x="1051560" y="3703320"/>
+            <a:ext cx="2834640" cy="1188720"/>
+          </a:xfrm>
+          <a:prstGeom prst="rect">
+            <a:avLst/>
+          </a:prstGeom>
+          <a:noFill/>
+          <a:ln/>
+        </p:spPr>
+        <p:txBody>
+          <a:bodyPr wrap="square" lIns="0" tIns="0" rIns="0" bIns="0" rtlCol="0" anchor="ctr"/>
+          <a:lstStyle/>
+          <a:p>
+            <a:pPr indent="0" marL="0">
+              <a:lnSpc>
+                <a:spcPct val="130000"/>
+              </a:lnSpc>
+              <a:buNone/>
+            </a:pPr>
+            <a:r>
+              <a:rPr lang="en-US" sz="1150" dirty="0">
+                <a:solidFill>
+                  <a:srgbClr val="5A534A"/>
+                </a:solidFill>
+                <a:latin typeface="Yu Gothic" pitchFamily="34" charset="0"/>
+                <a:ea typeface="Yu Gothic" pitchFamily="34" charset="-122"/>
+                <a:cs typeface="Yu Gothic" pitchFamily="34" charset="-120"/>
+              </a:rPr>
+              <a:t>ご自身の実案件を題材に。講師は口頭で誘導し、入力はしません</a:t>
+            </a:r>
+            <a:endParaRPr lang="en-US" sz="1150" dirty="0"/>
+          </a:p>
+        </p:txBody>
+      </p:sp>
+      <p:sp>
+        <p:nvSpPr>
+          <p:cNvPr id="10" name="Shape 8"/>
+          <p:cNvSpPr/>
+          <p:nvPr/>
+        </p:nvSpPr>
+        <p:spPr>
+          <a:xfrm>
+            <a:off x="4389120" y="2148840"/>
+            <a:ext cx="3383280" cy="2880360"/>
+          </a:xfrm>
+          <a:prstGeom prst="rect">
+            <a:avLst/>
+          </a:prstGeom>
+          <a:solidFill>
+            <a:srgbClr val="FFFFFF"/>
+          </a:solidFill>
+          <a:ln w="12700">
+            <a:solidFill>
+              <a:srgbClr val="EDE7DB"/>
+            </a:solidFill>
+            <a:prstDash val="solid"/>
+          </a:ln>
+        </p:spPr>
+      </p:sp>
+      <p:sp>
+        <p:nvSpPr>
+          <p:cNvPr id="11" name="Shape 9"/>
+          <p:cNvSpPr/>
+          <p:nvPr/>
+        </p:nvSpPr>
+        <p:spPr>
+          <a:xfrm>
+            <a:off x="4663440" y="2395728"/>
+            <a:ext cx="438912" cy="438912"/>
+          </a:xfrm>
+          <a:prstGeom prst="ellipse">
+            <a:avLst/>
+          </a:prstGeom>
+          <a:solidFill>
+            <a:srgbClr val="2F4F6B"/>
+          </a:solidFill>
+          <a:ln w="12700">
+            <a:solidFill>
+              <a:srgbClr val="333333"/>
+            </a:solidFill>
+            <a:prstDash val="solid"/>
+          </a:ln>
+        </p:spPr>
+      </p:sp>
+      <p:sp>
+        <p:nvSpPr>
+          <p:cNvPr id="12" name="Text 10"/>
+          <p:cNvSpPr txBox="1"/>
+          <p:nvPr/>
+        </p:nvSpPr>
+        <p:spPr>
+          <a:xfrm>
+            <a:off x="4663440" y="2395728"/>
+            <a:ext cx="438912" cy="438912"/>
+          </a:xfrm>
+          <a:prstGeom prst="rect">
+            <a:avLst/>
+          </a:prstGeom>
+          <a:noFill/>
+          <a:ln/>
+        </p:spPr>
+        <p:txBody>
+          <a:bodyPr wrap="square" lIns="0" tIns="0" rIns="0" bIns="0" rtlCol="0" anchor="ctr"/>
+          <a:lstStyle/>
+          <a:p>
+            <a:pPr algn="ctr" indent="0" marL="0">
+              <a:buNone/>
+            </a:pPr>
+            <a:r>
+              <a:rPr lang="en-US" sz="1300" b="1" dirty="0">
+                <a:solidFill>
+                  <a:srgbClr val="FFFFFF"/>
+                </a:solidFill>
+                <a:latin typeface="Yu Gothic" pitchFamily="34" charset="0"/>
+                <a:ea typeface="Yu Gothic" pitchFamily="34" charset="-122"/>
+                <a:cs typeface="Yu Gothic" pitchFamily="34" charset="-120"/>
+              </a:rPr>
+              <a:t>2</a:t>
             </a:r>
             <a:endParaRPr lang="en-US" sz="1300" dirty="0"/>
           </a:p>
+        </p:txBody>
+      </p:sp>
+      <p:sp>
+        <p:nvSpPr>
+          <p:cNvPr id="13" name="Text 11"/>
+          <p:cNvSpPr txBox="1"/>
+          <p:nvPr/>
+        </p:nvSpPr>
+        <p:spPr>
+          <a:xfrm>
+            <a:off x="4663440" y="2944368"/>
+            <a:ext cx="2834640" cy="731520"/>
+          </a:xfrm>
+          <a:prstGeom prst="rect">
+            <a:avLst/>
+          </a:prstGeom>
+          <a:noFill/>
+          <a:ln/>
+        </p:spPr>
+        <p:txBody>
+          <a:bodyPr wrap="square" lIns="0" tIns="0" rIns="0" bIns="0" rtlCol="0" anchor="ctr"/>
+          <a:lstStyle/>
           <a:p>
             <a:pPr indent="0" marL="0">
               <a:lnSpc>
-                <a:spcPct val="145000"/>
+                <a:spcPct val="125000"/>
               </a:lnSpc>
               <a:buNone/>
             </a:pPr>
             <a:r>
-              <a:rPr lang="en-US" sz="1300" dirty="0">
-                <a:solidFill>
-                  <a:srgbClr val="B9B0A4"/>
-                </a:solidFill>
-                <a:latin typeface="Yu Gothic" pitchFamily="34" charset="0"/>
-                <a:ea typeface="Yu Gothic" pitchFamily="34" charset="-122"/>
-                <a:cs typeface="Yu Gothic" pitchFamily="34" charset="-120"/>
-              </a:rPr>
-              <a:t>2回続いたら、宿題の出し方を見直します。</a:t>
+              <a:rPr lang="en-US" sz="1450" b="1" dirty="0">
+                <a:solidFill>
+                  <a:srgbClr val="23201D"/>
+                </a:solidFill>
+                <a:latin typeface="Yu Gothic" pitchFamily="34" charset="0"/>
+                <a:ea typeface="Yu Gothic" pitchFamily="34" charset="-122"/>
+                <a:cs typeface="Yu Gothic" pitchFamily="34" charset="-120"/>
+              </a:rPr>
+              <a:t>前提を、設定に移す</a:t>
+            </a:r>
+            <a:endParaRPr lang="en-US" sz="1450" dirty="0"/>
+          </a:p>
+        </p:txBody>
+      </p:sp>
+      <p:sp>
+        <p:nvSpPr>
+          <p:cNvPr id="14" name="Text 12"/>
+          <p:cNvSpPr txBox="1"/>
+          <p:nvPr/>
+        </p:nvSpPr>
+        <p:spPr>
+          <a:xfrm>
+            <a:off x="4663440" y="3703320"/>
+            <a:ext cx="2834640" cy="1188720"/>
+          </a:xfrm>
+          <a:prstGeom prst="rect">
+            <a:avLst/>
+          </a:prstGeom>
+          <a:noFill/>
+          <a:ln/>
+        </p:spPr>
+        <p:txBody>
+          <a:bodyPr wrap="square" lIns="0" tIns="0" rIns="0" bIns="0" rtlCol="0" anchor="ctr"/>
+          <a:lstStyle/>
+          <a:p>
+            <a:pPr indent="0" marL="0">
+              <a:lnSpc>
+                <a:spcPct val="130000"/>
+              </a:lnSpc>
+              <a:buNone/>
+            </a:pPr>
+            <a:r>
+              <a:rPr lang="en-US" sz="1150" dirty="0">
+                <a:solidFill>
+                  <a:srgbClr val="5A534A"/>
+                </a:solidFill>
+                <a:latin typeface="Yu Gothic" pitchFamily="34" charset="0"/>
+                <a:ea typeface="Yu Gothic" pitchFamily="34" charset="-122"/>
+                <a:cs typeface="Yu Gothic" pitchFamily="34" charset="-120"/>
+              </a:rPr>
+              <a:t>毎回書いている会社の説明を、全部の会話に自動で効く場所に入れます</a:t>
+            </a:r>
+            <a:endParaRPr lang="en-US" sz="1150" dirty="0"/>
+          </a:p>
+        </p:txBody>
+      </p:sp>
+      <p:sp>
+        <p:nvSpPr>
+          <p:cNvPr id="15" name="Shape 13"/>
+          <p:cNvSpPr/>
+          <p:nvPr/>
+        </p:nvSpPr>
+        <p:spPr>
+          <a:xfrm>
+            <a:off x="8001000" y="2148840"/>
+            <a:ext cx="3383280" cy="2880360"/>
+          </a:xfrm>
+          <a:prstGeom prst="rect">
+            <a:avLst/>
+          </a:prstGeom>
+          <a:solidFill>
+            <a:srgbClr val="FFFFFF"/>
+          </a:solidFill>
+          <a:ln w="12700">
+            <a:solidFill>
+              <a:srgbClr val="EDE7DB"/>
+            </a:solidFill>
+            <a:prstDash val="solid"/>
+          </a:ln>
+        </p:spPr>
+      </p:sp>
+      <p:sp>
+        <p:nvSpPr>
+          <p:cNvPr id="16" name="Shape 14"/>
+          <p:cNvSpPr/>
+          <p:nvPr/>
+        </p:nvSpPr>
+        <p:spPr>
+          <a:xfrm>
+            <a:off x="8275320" y="2395728"/>
+            <a:ext cx="438912" cy="438912"/>
+          </a:xfrm>
+          <a:prstGeom prst="ellipse">
+            <a:avLst/>
+          </a:prstGeom>
+          <a:solidFill>
+            <a:srgbClr val="2F4F6B"/>
+          </a:solidFill>
+          <a:ln w="12700">
+            <a:solidFill>
+              <a:srgbClr val="333333"/>
+            </a:solidFill>
+            <a:prstDash val="solid"/>
+          </a:ln>
+        </p:spPr>
+      </p:sp>
+      <p:sp>
+        <p:nvSpPr>
+          <p:cNvPr id="17" name="Text 15"/>
+          <p:cNvSpPr txBox="1"/>
+          <p:nvPr/>
+        </p:nvSpPr>
+        <p:spPr>
+          <a:xfrm>
+            <a:off x="8275320" y="2395728"/>
+            <a:ext cx="438912" cy="438912"/>
+          </a:xfrm>
+          <a:prstGeom prst="rect">
+            <a:avLst/>
+          </a:prstGeom>
+          <a:noFill/>
+          <a:ln/>
+        </p:spPr>
+        <p:txBody>
+          <a:bodyPr wrap="square" lIns="0" tIns="0" rIns="0" bIns="0" rtlCol="0" anchor="ctr"/>
+          <a:lstStyle/>
+          <a:p>
+            <a:pPr algn="ctr" indent="0" marL="0">
+              <a:buNone/>
+            </a:pPr>
+            <a:r>
+              <a:rPr lang="en-US" sz="1300" b="1" dirty="0">
+                <a:solidFill>
+                  <a:srgbClr val="FFFFFF"/>
+                </a:solidFill>
+                <a:latin typeface="Yu Gothic" pitchFamily="34" charset="0"/>
+                <a:ea typeface="Yu Gothic" pitchFamily="34" charset="-122"/>
+                <a:cs typeface="Yu Gothic" pitchFamily="34" charset="-120"/>
+              </a:rPr>
+              <a:t>3</a:t>
             </a:r>
             <a:endParaRPr lang="en-US" sz="1300" dirty="0"/>
           </a:p>
@@ -5430,14 +9171,98 @@
       </p:sp>
       <p:sp>
         <p:nvSpPr>
-          <p:cNvPr id="7" name="Text 5"/>
-          <p:cNvSpPr txBox="1"/>
-          <p:nvPr/>
-        </p:nvSpPr>
-        <p:spPr>
-          <a:xfrm>
-            <a:off x="777240" y="6355080"/>
-            <a:ext cx="10607040" cy="274320"/>
+          <p:cNvPr id="18" name="Text 16"/>
+          <p:cNvSpPr txBox="1"/>
+          <p:nvPr/>
+        </p:nvSpPr>
+        <p:spPr>
+          <a:xfrm>
+            <a:off x="8275320" y="2944368"/>
+            <a:ext cx="2834640" cy="731520"/>
+          </a:xfrm>
+          <a:prstGeom prst="rect">
+            <a:avLst/>
+          </a:prstGeom>
+          <a:noFill/>
+          <a:ln/>
+        </p:spPr>
+        <p:txBody>
+          <a:bodyPr wrap="square" lIns="0" tIns="0" rIns="0" bIns="0" rtlCol="0" anchor="ctr"/>
+          <a:lstStyle/>
+          <a:p>
+            <a:pPr indent="0" marL="0">
+              <a:lnSpc>
+                <a:spcPct val="125000"/>
+              </a:lnSpc>
+              <a:buNone/>
+            </a:pPr>
+            <a:r>
+              <a:rPr lang="en-US" sz="1450" b="1" dirty="0">
+                <a:solidFill>
+                  <a:srgbClr val="23201D"/>
+                </a:solidFill>
+                <a:latin typeface="Yu Gothic" pitchFamily="34" charset="0"/>
+                <a:ea typeface="Yu Gothic" pitchFamily="34" charset="-122"/>
+                <a:cs typeface="Yu Gothic" pitchFamily="34" charset="-120"/>
+              </a:rPr>
+              <a:t>箱をつくって、5本ためる</a:t>
+            </a:r>
+            <a:endParaRPr lang="en-US" sz="1450" dirty="0"/>
+          </a:p>
+        </p:txBody>
+      </p:sp>
+      <p:sp>
+        <p:nvSpPr>
+          <p:cNvPr id="19" name="Text 17"/>
+          <p:cNvSpPr txBox="1"/>
+          <p:nvPr/>
+        </p:nvSpPr>
+        <p:spPr>
+          <a:xfrm>
+            <a:off x="8275320" y="3703320"/>
+            <a:ext cx="2834640" cy="1188720"/>
+          </a:xfrm>
+          <a:prstGeom prst="rect">
+            <a:avLst/>
+          </a:prstGeom>
+          <a:noFill/>
+          <a:ln/>
+        </p:spPr>
+        <p:txBody>
+          <a:bodyPr wrap="square" lIns="0" tIns="0" rIns="0" bIns="0" rtlCol="0" anchor="ctr"/>
+          <a:lstStyle/>
+          <a:p>
+            <a:pPr indent="0" marL="0">
+              <a:lnSpc>
+                <a:spcPct val="130000"/>
+              </a:lnSpc>
+              <a:buNone/>
+            </a:pPr>
+            <a:r>
+              <a:rPr lang="en-US" sz="1150" dirty="0">
+                <a:solidFill>
+                  <a:srgbClr val="5A534A"/>
+                </a:solidFill>
+                <a:latin typeface="Yu Gothic" pitchFamily="34" charset="0"/>
+                <a:ea typeface="Yu Gothic" pitchFamily="34" charset="-122"/>
+                <a:cs typeface="Yu Gothic" pitchFamily="34" charset="-120"/>
+              </a:rPr>
+              <a:t>業務ごとの箱に資料と会話をまとめ、保存場所を決めます</a:t>
+            </a:r>
+            <a:endParaRPr lang="en-US" sz="1150" dirty="0"/>
+          </a:p>
+        </p:txBody>
+      </p:sp>
+      <p:sp>
+        <p:nvSpPr>
+          <p:cNvPr id="20" name="Text 18"/>
+          <p:cNvSpPr txBox="1"/>
+          <p:nvPr/>
+        </p:nvSpPr>
+        <p:spPr>
+          <a:xfrm>
+            <a:off x="777240" y="6382512"/>
+            <a:ext cx="7424928" cy="256032"/>
           </a:xfrm>
           <a:prstGeom prst="rect">
             <a:avLst/>
@@ -5455,13 +9280,52 @@
             <a:r>
               <a:rPr lang="en-US" sz="900" dirty="0">
                 <a:solidFill>
-                  <a:srgbClr val="6E6558"/>
+                  <a:srgbClr val="8A8177"/>
                 </a:solidFill>
                 <a:latin typeface="Yu Gothic" pitchFamily="34" charset="0"/>
                 <a:ea typeface="Yu Gothic" pitchFamily="34" charset="-122"/>
                 <a:cs typeface="Yu Gothic" pitchFamily="34" charset="-120"/>
               </a:rPr>
               <a:t>第2回　今のChatGPTの使い方を作り直す</a:t>
+            </a:r>
+            <a:endParaRPr lang="en-US" sz="900" dirty="0"/>
+          </a:p>
+        </p:txBody>
+      </p:sp>
+      <p:sp>
+        <p:nvSpPr>
+          <p:cNvPr id="21" name="Text 19"/>
+          <p:cNvSpPr txBox="1"/>
+          <p:nvPr/>
+        </p:nvSpPr>
+        <p:spPr>
+          <a:xfrm>
+            <a:off x="8202168" y="6382512"/>
+            <a:ext cx="3182112" cy="256032"/>
+          </a:xfrm>
+          <a:prstGeom prst="rect">
+            <a:avLst/>
+          </a:prstGeom>
+          <a:noFill/>
+          <a:ln/>
+        </p:spPr>
+        <p:txBody>
+          <a:bodyPr wrap="square" lIns="0" tIns="0" rIns="0" bIns="0" rtlCol="0" anchor="ctr"/>
+          <a:lstStyle/>
+          <a:p>
+            <a:pPr algn="r" indent="0" marL="0">
+              <a:buNone/>
+            </a:pPr>
+            <a:r>
+              <a:rPr lang="en-US" sz="900" dirty="0">
+                <a:solidFill>
+                  <a:srgbClr val="8A8177"/>
+                </a:solidFill>
+                <a:latin typeface="Yu Gothic" pitchFamily="34" charset="0"/>
+                <a:ea typeface="Yu Gothic" pitchFamily="34" charset="-122"/>
+                <a:cs typeface="Yu Gothic" pitchFamily="34" charset="-120"/>
+              </a:rPr>
+              <a:t>演習</a:t>
             </a:r>
             <a:endParaRPr lang="en-US" sz="900" dirty="0"/>
           </a:p>

--- a/slides/pptx/第02回_今のChatGPTの使い方を作り直す.pptx
+++ b/slides/pptx/第02回_今のChatGPTの使い方を作り直す.pptx
@@ -17,9 +17,12 @@
     <p:sldId id="265" r:id="rId11"/>
     <p:sldId id="266" r:id="rId12"/>
     <p:sldId id="267" r:id="rId13"/>
+    <p:sldId id="268" r:id="rId14"/>
+    <p:sldId id="269" r:id="rId15"/>
+    <p:sldId id="270" r:id="rId16"/>
   </p:sldIdLst>
   <p:notesMasterIdLst>
-    <p:notesMasterId r:id="rId14"/>
+    <p:notesMasterId r:id="rId17"/>
   </p:notesMasterIdLst>
   <p:sldSz cx="12192000" cy="6858000"/>
   <p:notesSz cx="6858000" cy="12192000"/>
@@ -601,7 +604,7 @@
           <a:p>
             <a:r>
               <a:rPr lang="en-US" dirty="0"/>
-              <a:t>保存場所は必ず開いて見せてもらう。「デスクトップのどこか」では次回見つからない。フォルダ名まで決める。</a:t>
+              <a:t>プロジェクトが無料プランで使えない場合は、ここで代替（前提ブロック）の名前を付けておくと以後の会話が楽になる。</a:t>
             </a:r>
             <a:endParaRPr lang="en-US" dirty="0"/>
           </a:p>
@@ -689,7 +692,7 @@
           <a:p>
             <a:r>
               <a:rPr lang="en-US" dirty="0"/>
-              <a:t>事例の3行は、実際に紙に書いて渡すくらいでよい。受講者のカスタム指示がそれに近い形になっていれば、この回は成功。</a:t>
+              <a:t>3ステップのうち、時間が足りなければ3つ目を削る。カスタム指示までは必ず終わらせる。ここが今日の分かれ目で、これがあるだけで次回以降の演習速度が変わる。</a:t>
             </a:r>
             <a:endParaRPr lang="en-US" dirty="0"/>
           </a:p>
@@ -777,7 +780,7 @@
           <a:p>
             <a:r>
               <a:rPr lang="en-US" dirty="0"/>
-              <a:t>「新しい会話を開かない」は制約に聞こえるが、実際にやると楽になることを伝える。1週間後に効果を聞くと、ほぼ全員が「探す時間が減った」と答える。</a:t>
+              <a:t>保存場所は必ず開いて見せてもらう。「デスクトップのどこか」では次回見つからない。フォルダ名まで決める。</a:t>
             </a:r>
             <a:endParaRPr lang="en-US" dirty="0"/>
           </a:p>
@@ -801,6 +804,270 @@
             <a:fld id="{F7021451-1387-4CA6-816F-3879F97B5CBC}" type="slidenum">
               <a:rPr lang="en-US"/>
               <a:t>12</a:t>
+            </a:fld>
+            <a:endParaRPr lang="en-US"/>
+          </a:p>
+        </p:txBody>
+      </p:sp>
+    </p:spTree>
+    <p:extLst>
+      <p:ext uri="{BB962C8B-B14F-4D97-AF65-F5344CB8AC3E}">
+        <p14:creationId xmlns:p14="http://schemas.microsoft.com/office/powerpoint/2010/main" val="1024086991"/>
+      </p:ext>
+    </p:extLst>
+  </p:cSld>
+  <p:clrMapOvr>
+    <a:masterClrMapping/>
+  </p:clrMapOvr>
+</p:notes>
+</file>
+
+<file path=ppt/notesSlides/notesSlide13.xml><?xml version="1.0" encoding="utf-8"?>
+<p:notes xmlns:a="http://schemas.openxmlformats.org/drawingml/2006/main" xmlns:r="http://schemas.openxmlformats.org/officeDocument/2006/relationships" xmlns:p="http://schemas.openxmlformats.org/presentationml/2006/main">
+  <p:cSld>
+    <p:spTree>
+      <p:nvGrpSpPr>
+        <p:cNvPr id="1" name=""/>
+        <p:cNvGrpSpPr/>
+        <p:nvPr/>
+      </p:nvGrpSpPr>
+      <p:grpSpPr>
+        <a:xfrm>
+          <a:off x="0" y="0"/>
+          <a:ext cx="0" cy="0"/>
+          <a:chOff x="0" y="0"/>
+          <a:chExt cx="0" cy="0"/>
+        </a:xfrm>
+      </p:grpSpPr>
+      <p:sp>
+        <p:nvSpPr>
+          <p:cNvPr id="2" name="Slide Image Placeholder 1"/>
+          <p:cNvSpPr>
+            <a:spLocks noGrp="1" noRot="1" noChangeAspect="1"/>
+          </p:cNvSpPr>
+          <p:nvPr>
+            <p:ph type="sldImg"/>
+          </p:nvPr>
+        </p:nvSpPr>
+        <p:spPr/>
+      </p:sp>
+      <p:sp>
+        <p:nvSpPr>
+          <p:cNvPr id="3" name="Notes Placeholder 2"/>
+          <p:cNvSpPr>
+            <a:spLocks noGrp="1"/>
+          </p:cNvSpPr>
+          <p:nvPr>
+            <p:ph type="body" idx="1"/>
+          </p:nvPr>
+        </p:nvSpPr>
+        <p:spPr/>
+        <p:txBody>
+          <a:bodyPr/>
+          <a:lstStyle/>
+          <a:p>
+            <a:r>
+              <a:rPr lang="en-US" dirty="0"/>
+              <a:t>事例の3行は、実際に紙に書いて渡すくらいでよい。受講者のカスタム指示がそれに近い形になっていれば、この回は成功。</a:t>
+            </a:r>
+            <a:endParaRPr lang="en-US" dirty="0"/>
+          </a:p>
+        </p:txBody>
+      </p:sp>
+      <p:sp>
+        <p:nvSpPr>
+          <p:cNvPr id="4" name="Slide Number Placeholder 3"/>
+          <p:cNvSpPr>
+            <a:spLocks noGrp="1"/>
+          </p:cNvSpPr>
+          <p:nvPr>
+            <p:ph type="sldNum" sz="quarter" idx="10"/>
+          </p:nvPr>
+        </p:nvSpPr>
+        <p:spPr/>
+        <p:txBody>
+          <a:bodyPr/>
+          <a:lstStyle/>
+          <a:p>
+            <a:fld id="{F7021451-1387-4CA6-816F-3879F97B5CBC}" type="slidenum">
+              <a:rPr lang="en-US"/>
+              <a:t>13</a:t>
+            </a:fld>
+            <a:endParaRPr lang="en-US"/>
+          </a:p>
+        </p:txBody>
+      </p:sp>
+    </p:spTree>
+    <p:extLst>
+      <p:ext uri="{BB962C8B-B14F-4D97-AF65-F5344CB8AC3E}">
+        <p14:creationId xmlns:p14="http://schemas.microsoft.com/office/powerpoint/2010/main" val="1024086991"/>
+      </p:ext>
+    </p:extLst>
+  </p:cSld>
+  <p:clrMapOvr>
+    <a:masterClrMapping/>
+  </p:clrMapOvr>
+</p:notes>
+</file>
+
+<file path=ppt/notesSlides/notesSlide14.xml><?xml version="1.0" encoding="utf-8"?>
+<p:notes xmlns:a="http://schemas.openxmlformats.org/drawingml/2006/main" xmlns:r="http://schemas.openxmlformats.org/officeDocument/2006/relationships" xmlns:p="http://schemas.openxmlformats.org/presentationml/2006/main">
+  <p:cSld>
+    <p:spTree>
+      <p:nvGrpSpPr>
+        <p:cNvPr id="1" name=""/>
+        <p:cNvGrpSpPr/>
+        <p:nvPr/>
+      </p:nvGrpSpPr>
+      <p:grpSpPr>
+        <a:xfrm>
+          <a:off x="0" y="0"/>
+          <a:ext cx="0" cy="0"/>
+          <a:chOff x="0" y="0"/>
+          <a:chExt cx="0" cy="0"/>
+        </a:xfrm>
+      </p:grpSpPr>
+      <p:sp>
+        <p:nvSpPr>
+          <p:cNvPr id="2" name="Slide Image Placeholder 1"/>
+          <p:cNvSpPr>
+            <a:spLocks noGrp="1" noRot="1" noChangeAspect="1"/>
+          </p:cNvSpPr>
+          <p:nvPr>
+            <p:ph type="sldImg"/>
+          </p:nvPr>
+        </p:nvSpPr>
+        <p:spPr/>
+      </p:sp>
+      <p:sp>
+        <p:nvSpPr>
+          <p:cNvPr id="3" name="Notes Placeholder 2"/>
+          <p:cNvSpPr>
+            <a:spLocks noGrp="1"/>
+          </p:cNvSpPr>
+          <p:nvPr>
+            <p:ph type="body" idx="1"/>
+          </p:nvPr>
+        </p:nvSpPr>
+        <p:spPr/>
+        <p:txBody>
+          <a:bodyPr/>
+          <a:lstStyle/>
+          <a:p>
+            <a:r>
+              <a:rPr lang="en-US" dirty="0"/>
+              <a:t>『宛先が変わる』は次回の核心。ここで予告しておくと、次回の冒頭で腹落ちが早い。渡す社員1名を、今日のうちに決めてもらう。</a:t>
+            </a:r>
+            <a:endParaRPr lang="en-US" dirty="0"/>
+          </a:p>
+        </p:txBody>
+      </p:sp>
+      <p:sp>
+        <p:nvSpPr>
+          <p:cNvPr id="4" name="Slide Number Placeholder 3"/>
+          <p:cNvSpPr>
+            <a:spLocks noGrp="1"/>
+          </p:cNvSpPr>
+          <p:nvPr>
+            <p:ph type="sldNum" sz="quarter" idx="10"/>
+          </p:nvPr>
+        </p:nvSpPr>
+        <p:spPr/>
+        <p:txBody>
+          <a:bodyPr/>
+          <a:lstStyle/>
+          <a:p>
+            <a:fld id="{F7021451-1387-4CA6-816F-3879F97B5CBC}" type="slidenum">
+              <a:rPr lang="en-US"/>
+              <a:t>14</a:t>
+            </a:fld>
+            <a:endParaRPr lang="en-US"/>
+          </a:p>
+        </p:txBody>
+      </p:sp>
+    </p:spTree>
+    <p:extLst>
+      <p:ext uri="{BB962C8B-B14F-4D97-AF65-F5344CB8AC3E}">
+        <p14:creationId xmlns:p14="http://schemas.microsoft.com/office/powerpoint/2010/main" val="1024086991"/>
+      </p:ext>
+    </p:extLst>
+  </p:cSld>
+  <p:clrMapOvr>
+    <a:masterClrMapping/>
+  </p:clrMapOvr>
+</p:notes>
+</file>
+
+<file path=ppt/notesSlides/notesSlide15.xml><?xml version="1.0" encoding="utf-8"?>
+<p:notes xmlns:a="http://schemas.openxmlformats.org/drawingml/2006/main" xmlns:r="http://schemas.openxmlformats.org/officeDocument/2006/relationships" xmlns:p="http://schemas.openxmlformats.org/presentationml/2006/main">
+  <p:cSld>
+    <p:spTree>
+      <p:nvGrpSpPr>
+        <p:cNvPr id="1" name=""/>
+        <p:cNvGrpSpPr/>
+        <p:nvPr/>
+      </p:nvGrpSpPr>
+      <p:grpSpPr>
+        <a:xfrm>
+          <a:off x="0" y="0"/>
+          <a:ext cx="0" cy="0"/>
+          <a:chOff x="0" y="0"/>
+          <a:chExt cx="0" cy="0"/>
+        </a:xfrm>
+      </p:grpSpPr>
+      <p:sp>
+        <p:nvSpPr>
+          <p:cNvPr id="2" name="Slide Image Placeholder 1"/>
+          <p:cNvSpPr>
+            <a:spLocks noGrp="1" noRot="1" noChangeAspect="1"/>
+          </p:cNvSpPr>
+          <p:nvPr>
+            <p:ph type="sldImg"/>
+          </p:nvPr>
+        </p:nvSpPr>
+        <p:spPr/>
+      </p:sp>
+      <p:sp>
+        <p:nvSpPr>
+          <p:cNvPr id="3" name="Notes Placeholder 2"/>
+          <p:cNvSpPr>
+            <a:spLocks noGrp="1"/>
+          </p:cNvSpPr>
+          <p:nvPr>
+            <p:ph type="body" idx="1"/>
+          </p:nvPr>
+        </p:nvSpPr>
+        <p:spPr/>
+        <p:txBody>
+          <a:bodyPr/>
+          <a:lstStyle/>
+          <a:p>
+            <a:r>
+              <a:rPr lang="en-US" dirty="0"/>
+              <a:t>「新しい会話を開かない」は制約に聞こえるが、実際にやると楽になることを伝える。1週間後に効果を聞くと、ほぼ全員が「探す時間が減った」と答える。</a:t>
+            </a:r>
+            <a:endParaRPr lang="en-US" dirty="0"/>
+          </a:p>
+        </p:txBody>
+      </p:sp>
+      <p:sp>
+        <p:nvSpPr>
+          <p:cNvPr id="4" name="Slide Number Placeholder 3"/>
+          <p:cNvSpPr>
+            <a:spLocks noGrp="1"/>
+          </p:cNvSpPr>
+          <p:nvPr>
+            <p:ph type="sldNum" sz="quarter" idx="10"/>
+          </p:nvPr>
+        </p:nvSpPr>
+        <p:spPr/>
+        <p:txBody>
+          <a:bodyPr/>
+          <a:lstStyle/>
+          <a:p>
+            <a:fld id="{F7021451-1387-4CA6-816F-3879F97B5CBC}" type="slidenum">
+              <a:rPr lang="en-US"/>
+              <a:t>15</a:t>
             </a:fld>
             <a:endParaRPr lang="en-US"/>
           </a:p>
@@ -1481,7 +1748,7 @@
           <a:p>
             <a:r>
               <a:rPr lang="en-US" dirty="0"/>
-              <a:t>3ステップのうち、時間が足りなければ3つ目を削る。カスタム指示までは必ず終わらせる。ここが今日の分かれ目で、これがあるだけで次回以降の演習速度が変わる。</a:t>
+              <a:t>1つ目は必ず出る。面倒であることを否定せず、『面倒なのは最初の1本だけ』と数で答える。2つ目は、長文プロンプトを自慢げに見せてくる受講者にも効く。</a:t>
             </a:r>
             <a:endParaRPr lang="en-US" dirty="0"/>
           </a:p>
@@ -2175,13 +2442,13 @@
             <a:r>
               <a:rPr lang="en-US" sz="1100" b="1" spc="250" kern="0" dirty="0">
                 <a:solidFill>
-                  <a:srgbClr val="3B6B4A"/>
-                </a:solidFill>
-                <a:latin typeface="Yu Gothic" pitchFamily="34" charset="0"/>
-                <a:ea typeface="Yu Gothic" pitchFamily="34" charset="-122"/>
-                <a:cs typeface="Yu Gothic" pitchFamily="34" charset="-120"/>
-              </a:rPr>
-              <a:t>業務への組み込み</a:t>
+                  <a:srgbClr val="8A8177"/>
+                </a:solidFill>
+                <a:latin typeface="Yu Gothic" pitchFamily="34" charset="0"/>
+                <a:ea typeface="Yu Gothic" pitchFamily="34" charset="-122"/>
+                <a:cs typeface="Yu Gothic" pitchFamily="34" charset="-120"/>
+              </a:rPr>
+              <a:t>用語</a:t>
             </a:r>
             <a:endParaRPr lang="en-US" sz="1100" dirty="0"/>
           </a:p>
@@ -2220,7 +2487,7 @@
                 <a:ea typeface="Yu Gothic" pitchFamily="34" charset="-122"/>
                 <a:cs typeface="Yu Gothic" pitchFamily="34" charset="-120"/>
               </a:rPr>
-              <a:t>帰る前に決めること</a:t>
+              <a:t>今日出てきた言葉</a:t>
             </a:r>
             <a:endParaRPr lang="en-US" sz="2600" dirty="0"/>
           </a:p>
@@ -2228,53 +2495,14 @@
       </p:sp>
       <p:sp>
         <p:nvSpPr>
-          <p:cNvPr id="4" name="Text 2"/>
-          <p:cNvSpPr txBox="1"/>
-          <p:nvPr/>
-        </p:nvSpPr>
-        <p:spPr>
-          <a:xfrm>
-            <a:off x="777240" y="1572768"/>
-            <a:ext cx="10607040" cy="320040"/>
-          </a:xfrm>
-          <a:prstGeom prst="rect">
-            <a:avLst/>
-          </a:prstGeom>
-          <a:noFill/>
-          <a:ln/>
-        </p:spPr>
-        <p:txBody>
-          <a:bodyPr wrap="square" lIns="0" tIns="0" rIns="0" bIns="0" rtlCol="0" anchor="ctr"/>
-          <a:lstStyle/>
-          <a:p>
-            <a:pPr indent="0" marL="0">
-              <a:buNone/>
-            </a:pPr>
-            <a:r>
-              <a:rPr lang="en-US" sz="1250" b="1" dirty="0">
-                <a:solidFill>
-                  <a:srgbClr val="3B6B4A"/>
-                </a:solidFill>
-                <a:latin typeface="Yu Gothic" pitchFamily="34" charset="0"/>
-                <a:ea typeface="Yu Gothic" pitchFamily="34" charset="-122"/>
-                <a:cs typeface="Yu Gothic" pitchFamily="34" charset="-120"/>
-              </a:rPr>
-              <a:t>ここを決めないと、持ち帰っても使われません。紙に書きます。</a:t>
-            </a:r>
-            <a:endParaRPr lang="en-US" sz="1250" dirty="0"/>
-          </a:p>
-        </p:txBody>
-      </p:sp>
-      <p:sp>
-        <p:nvSpPr>
-          <p:cNvPr id="5" name="Shape 3"/>
+          <p:cNvPr id="4" name="Shape 2"/>
           <p:cNvSpPr/>
           <p:nvPr/>
         </p:nvSpPr>
         <p:spPr>
           <a:xfrm>
-            <a:off x="777240" y="2103120"/>
-            <a:ext cx="10607040" cy="914400"/>
+            <a:off x="777240" y="1828800"/>
+            <a:ext cx="10607040" cy="1078992"/>
           </a:xfrm>
           <a:prstGeom prst="rect">
             <a:avLst/>
@@ -2292,20 +2520,59 @@
       </p:sp>
       <p:sp>
         <p:nvSpPr>
+          <p:cNvPr id="5" name="Text 3"/>
+          <p:cNvSpPr txBox="1"/>
+          <p:nvPr/>
+        </p:nvSpPr>
+        <p:spPr>
+          <a:xfrm>
+            <a:off x="1097280" y="1920240"/>
+            <a:ext cx="2969971" cy="896112"/>
+          </a:xfrm>
+          <a:prstGeom prst="rect">
+            <a:avLst/>
+          </a:prstGeom>
+          <a:noFill/>
+          <a:ln/>
+        </p:spPr>
+        <p:txBody>
+          <a:bodyPr wrap="square" lIns="0" tIns="0" rIns="0" bIns="0" rtlCol="0" anchor="ctr"/>
+          <a:lstStyle/>
+          <a:p>
+            <a:pPr indent="0" marL="0">
+              <a:buNone/>
+            </a:pPr>
+            <a:r>
+              <a:rPr lang="en-US" sz="1500" b="1" dirty="0">
+                <a:solidFill>
+                  <a:srgbClr val="23201D"/>
+                </a:solidFill>
+                <a:latin typeface="Yu Gothic" pitchFamily="34" charset="0"/>
+                <a:ea typeface="Yu Gothic" pitchFamily="34" charset="-122"/>
+                <a:cs typeface="Yu Gothic" pitchFamily="34" charset="-120"/>
+              </a:rPr>
+              <a:t>カスタム指示</a:t>
+            </a:r>
+            <a:endParaRPr lang="en-US" sz="1500" dirty="0"/>
+          </a:p>
+        </p:txBody>
+      </p:sp>
+      <p:sp>
+        <p:nvSpPr>
           <p:cNvPr id="6" name="Shape 4"/>
           <p:cNvSpPr/>
           <p:nvPr/>
         </p:nvSpPr>
         <p:spPr>
           <a:xfrm>
-            <a:off x="777240" y="2103120"/>
-            <a:ext cx="54864" cy="914400"/>
+            <a:off x="4065422" y="1956816"/>
+            <a:ext cx="18288" cy="822960"/>
           </a:xfrm>
           <a:prstGeom prst="rect">
             <a:avLst/>
           </a:prstGeom>
           <a:solidFill>
-            <a:srgbClr val="3B6B4A"/>
+            <a:srgbClr val="EDE7DB"/>
           </a:solidFill>
           <a:ln w="12700">
             <a:solidFill>
@@ -2323,47 +2590,8 @@
         </p:nvSpPr>
         <p:spPr>
           <a:xfrm>
-            <a:off x="1143000" y="2176272"/>
-            <a:ext cx="2757830" cy="768096"/>
-          </a:xfrm>
-          <a:prstGeom prst="rect">
-            <a:avLst/>
-          </a:prstGeom>
-          <a:noFill/>
-          <a:ln/>
-        </p:spPr>
-        <p:txBody>
-          <a:bodyPr wrap="square" lIns="0" tIns="0" rIns="0" bIns="0" rtlCol="0" anchor="ctr"/>
-          <a:lstStyle/>
-          <a:p>
-            <a:pPr indent="0" marL="0">
-              <a:buNone/>
-            </a:pPr>
-            <a:r>
-              <a:rPr lang="en-US" sz="1400" b="1" dirty="0">
-                <a:solidFill>
-                  <a:srgbClr val="3B6B4A"/>
-                </a:solidFill>
-                <a:latin typeface="Yu Gothic" pitchFamily="34" charset="0"/>
-                <a:ea typeface="Yu Gothic" pitchFamily="34" charset="-122"/>
-                <a:cs typeface="Yu Gothic" pitchFamily="34" charset="-120"/>
-              </a:rPr>
-              <a:t>どこに保存するか</a:t>
-            </a:r>
-            <a:endParaRPr lang="en-US" sz="1400" dirty="0"/>
-          </a:p>
-        </p:txBody>
-      </p:sp>
-      <p:sp>
-        <p:nvSpPr>
-          <p:cNvPr id="8" name="Text 6"/>
-          <p:cNvSpPr txBox="1"/>
-          <p:nvPr/>
-        </p:nvSpPr>
-        <p:spPr>
-          <a:xfrm>
-            <a:off x="4006901" y="2176272"/>
-            <a:ext cx="7011619" cy="768096"/>
+            <a:off x="4383634" y="1920240"/>
+            <a:ext cx="6682435" cy="896112"/>
           </a:xfrm>
           <a:prstGeom prst="rect">
             <a:avLst/>
@@ -2384,13 +2612,13 @@
             <a:r>
               <a:rPr lang="en-US" sz="1250" dirty="0">
                 <a:solidFill>
-                  <a:srgbClr val="3F3933"/>
-                </a:solidFill>
-                <a:latin typeface="Yu Gothic" pitchFamily="34" charset="0"/>
-                <a:ea typeface="Yu Gothic" pitchFamily="34" charset="-122"/>
-                <a:cs typeface="Yu Gothic" pitchFamily="34" charset="-120"/>
-              </a:rPr>
-              <a:t>デスクトップかクラウドか。次に開く場所が決まっていないと使われません</a:t>
+                  <a:srgbClr val="5A534A"/>
+                </a:solidFill>
+                <a:latin typeface="Yu Gothic" pitchFamily="34" charset="0"/>
+                <a:ea typeface="Yu Gothic" pitchFamily="34" charset="-122"/>
+                <a:cs typeface="Yu Gothic" pitchFamily="34" charset="-120"/>
+              </a:rPr>
+              <a:t>全部の会話に自動で効く前提設定。会社の自己紹介を毎回書かずに済みます</a:t>
             </a:r>
             <a:endParaRPr lang="en-US" sz="1250" dirty="0"/>
           </a:p>
@@ -2398,14 +2626,14 @@
       </p:sp>
       <p:sp>
         <p:nvSpPr>
-          <p:cNvPr id="9" name="Shape 7"/>
+          <p:cNvPr id="8" name="Shape 6"/>
           <p:cNvSpPr/>
           <p:nvPr/>
         </p:nvSpPr>
         <p:spPr>
           <a:xfrm>
-            <a:off x="777240" y="3154680"/>
-            <a:ext cx="10607040" cy="914400"/>
+            <a:off x="777240" y="3063240"/>
+            <a:ext cx="10607040" cy="1078992"/>
           </a:xfrm>
           <a:prstGeom prst="rect">
             <a:avLst/>
@@ -2423,20 +2651,59 @@
       </p:sp>
       <p:sp>
         <p:nvSpPr>
+          <p:cNvPr id="9" name="Text 7"/>
+          <p:cNvSpPr txBox="1"/>
+          <p:nvPr/>
+        </p:nvSpPr>
+        <p:spPr>
+          <a:xfrm>
+            <a:off x="1097280" y="3154680"/>
+            <a:ext cx="2969971" cy="896112"/>
+          </a:xfrm>
+          <a:prstGeom prst="rect">
+            <a:avLst/>
+          </a:prstGeom>
+          <a:noFill/>
+          <a:ln/>
+        </p:spPr>
+        <p:txBody>
+          <a:bodyPr wrap="square" lIns="0" tIns="0" rIns="0" bIns="0" rtlCol="0" anchor="ctr"/>
+          <a:lstStyle/>
+          <a:p>
+            <a:pPr indent="0" marL="0">
+              <a:buNone/>
+            </a:pPr>
+            <a:r>
+              <a:rPr lang="en-US" sz="1500" b="1" dirty="0">
+                <a:solidFill>
+                  <a:srgbClr val="23201D"/>
+                </a:solidFill>
+                <a:latin typeface="Yu Gothic" pitchFamily="34" charset="0"/>
+                <a:ea typeface="Yu Gothic" pitchFamily="34" charset="-122"/>
+                <a:cs typeface="Yu Gothic" pitchFamily="34" charset="-120"/>
+              </a:rPr>
+              <a:t>プロジェクト</a:t>
+            </a:r>
+            <a:endParaRPr lang="en-US" sz="1500" dirty="0"/>
+          </a:p>
+        </p:txBody>
+      </p:sp>
+      <p:sp>
+        <p:nvSpPr>
           <p:cNvPr id="10" name="Shape 8"/>
           <p:cNvSpPr/>
           <p:nvPr/>
         </p:nvSpPr>
         <p:spPr>
           <a:xfrm>
-            <a:off x="777240" y="3154680"/>
-            <a:ext cx="54864" cy="914400"/>
+            <a:off x="4065422" y="3191256"/>
+            <a:ext cx="18288" cy="822960"/>
           </a:xfrm>
           <a:prstGeom prst="rect">
             <a:avLst/>
           </a:prstGeom>
           <a:solidFill>
-            <a:srgbClr val="3B6B4A"/>
+            <a:srgbClr val="EDE7DB"/>
           </a:solidFill>
           <a:ln w="12700">
             <a:solidFill>
@@ -2454,47 +2721,8 @@
         </p:nvSpPr>
         <p:spPr>
           <a:xfrm>
-            <a:off x="1143000" y="3227832"/>
-            <a:ext cx="2757830" cy="768096"/>
-          </a:xfrm>
-          <a:prstGeom prst="rect">
-            <a:avLst/>
-          </a:prstGeom>
-          <a:noFill/>
-          <a:ln/>
-        </p:spPr>
-        <p:txBody>
-          <a:bodyPr wrap="square" lIns="0" tIns="0" rIns="0" bIns="0" rtlCol="0" anchor="ctr"/>
-          <a:lstStyle/>
-          <a:p>
-            <a:pPr indent="0" marL="0">
-              <a:buNone/>
-            </a:pPr>
-            <a:r>
-              <a:rPr lang="en-US" sz="1400" b="1" dirty="0">
-                <a:solidFill>
-                  <a:srgbClr val="3B6B4A"/>
-                </a:solidFill>
-                <a:latin typeface="Yu Gothic" pitchFamily="34" charset="0"/>
-                <a:ea typeface="Yu Gothic" pitchFamily="34" charset="-122"/>
-                <a:cs typeface="Yu Gothic" pitchFamily="34" charset="-120"/>
-              </a:rPr>
-              <a:t>いつ増やすか</a:t>
-            </a:r>
-            <a:endParaRPr lang="en-US" sz="1400" dirty="0"/>
-          </a:p>
-        </p:txBody>
-      </p:sp>
-      <p:sp>
-        <p:nvSpPr>
-          <p:cNvPr id="12" name="Text 10"/>
-          <p:cNvSpPr txBox="1"/>
-          <p:nvPr/>
-        </p:nvSpPr>
-        <p:spPr>
-          <a:xfrm>
-            <a:off x="4006901" y="3227832"/>
-            <a:ext cx="7011619" cy="768096"/>
+            <a:off x="4383634" y="3154680"/>
+            <a:ext cx="6682435" cy="896112"/>
           </a:xfrm>
           <a:prstGeom prst="rect">
             <a:avLst/>
@@ -2515,13 +2743,13 @@
             <a:r>
               <a:rPr lang="en-US" sz="1250" dirty="0">
                 <a:solidFill>
-                  <a:srgbClr val="3F3933"/>
-                </a:solidFill>
-                <a:latin typeface="Yu Gothic" pitchFamily="34" charset="0"/>
-                <a:ea typeface="Yu Gothic" pitchFamily="34" charset="-122"/>
-                <a:cs typeface="Yu Gothic" pitchFamily="34" charset="-120"/>
-              </a:rPr>
-              <a:t>うまくいった指示が出たら、その場で追加する。週末にまとめて、は続きません</a:t>
+                  <a:srgbClr val="5A534A"/>
+                </a:solidFill>
+                <a:latin typeface="Yu Gothic" pitchFamily="34" charset="0"/>
+                <a:ea typeface="Yu Gothic" pitchFamily="34" charset="-122"/>
+                <a:cs typeface="Yu Gothic" pitchFamily="34" charset="-120"/>
+              </a:rPr>
+              <a:t>会話と資料をまとめておく箱。業務ごとに分けて使います</a:t>
             </a:r>
             <a:endParaRPr lang="en-US" sz="1250" dirty="0"/>
           </a:p>
@@ -2529,14 +2757,14 @@
       </p:sp>
       <p:sp>
         <p:nvSpPr>
-          <p:cNvPr id="13" name="Shape 11"/>
+          <p:cNvPr id="12" name="Shape 10"/>
           <p:cNvSpPr/>
           <p:nvPr/>
         </p:nvSpPr>
         <p:spPr>
           <a:xfrm>
-            <a:off x="777240" y="4206240"/>
-            <a:ext cx="10607040" cy="914400"/>
+            <a:off x="777240" y="4297680"/>
+            <a:ext cx="10607040" cy="1078992"/>
           </a:xfrm>
           <a:prstGeom prst="rect">
             <a:avLst/>
@@ -2554,20 +2782,59 @@
       </p:sp>
       <p:sp>
         <p:nvSpPr>
+          <p:cNvPr id="13" name="Text 11"/>
+          <p:cNvSpPr txBox="1"/>
+          <p:nvPr/>
+        </p:nvSpPr>
+        <p:spPr>
+          <a:xfrm>
+            <a:off x="1097280" y="4389120"/>
+            <a:ext cx="2969971" cy="896112"/>
+          </a:xfrm>
+          <a:prstGeom prst="rect">
+            <a:avLst/>
+          </a:prstGeom>
+          <a:noFill/>
+          <a:ln/>
+        </p:spPr>
+        <p:txBody>
+          <a:bodyPr wrap="square" lIns="0" tIns="0" rIns="0" bIns="0" rtlCol="0" anchor="ctr"/>
+          <a:lstStyle/>
+          <a:p>
+            <a:pPr indent="0" marL="0">
+              <a:buNone/>
+            </a:pPr>
+            <a:r>
+              <a:rPr lang="en-US" sz="1500" b="1" dirty="0">
+                <a:solidFill>
+                  <a:srgbClr val="23201D"/>
+                </a:solidFill>
+                <a:latin typeface="Yu Gothic" pitchFamily="34" charset="0"/>
+                <a:ea typeface="Yu Gothic" pitchFamily="34" charset="-122"/>
+                <a:cs typeface="Yu Gothic" pitchFamily="34" charset="-120"/>
+              </a:rPr>
+              <a:t>コンテキスト</a:t>
+            </a:r>
+            <a:endParaRPr lang="en-US" sz="1500" dirty="0"/>
+          </a:p>
+        </p:txBody>
+      </p:sp>
+      <p:sp>
+        <p:nvSpPr>
           <p:cNvPr id="14" name="Shape 12"/>
           <p:cNvSpPr/>
           <p:nvPr/>
         </p:nvSpPr>
         <p:spPr>
           <a:xfrm>
-            <a:off x="777240" y="4206240"/>
-            <a:ext cx="54864" cy="914400"/>
+            <a:off x="4065422" y="4425696"/>
+            <a:ext cx="18288" cy="822960"/>
           </a:xfrm>
           <a:prstGeom prst="rect">
             <a:avLst/>
           </a:prstGeom>
           <a:solidFill>
-            <a:srgbClr val="3B6B4A"/>
+            <a:srgbClr val="EDE7DB"/>
           </a:solidFill>
           <a:ln w="12700">
             <a:solidFill>
@@ -2585,47 +2852,8 @@
         </p:nvSpPr>
         <p:spPr>
           <a:xfrm>
-            <a:off x="1143000" y="4279392"/>
-            <a:ext cx="2757830" cy="768096"/>
-          </a:xfrm>
-          <a:prstGeom prst="rect">
-            <a:avLst/>
-          </a:prstGeom>
-          <a:noFill/>
-          <a:ln/>
-        </p:spPr>
-        <p:txBody>
-          <a:bodyPr wrap="square" lIns="0" tIns="0" rIns="0" bIns="0" rtlCol="0" anchor="ctr"/>
-          <a:lstStyle/>
-          <a:p>
-            <a:pPr indent="0" marL="0">
-              <a:buNone/>
-            </a:pPr>
-            <a:r>
-              <a:rPr lang="en-US" sz="1400" b="1" dirty="0">
-                <a:solidFill>
-                  <a:srgbClr val="3B6B4A"/>
-                </a:solidFill>
-                <a:latin typeface="Yu Gothic" pitchFamily="34" charset="0"/>
-                <a:ea typeface="Yu Gothic" pitchFamily="34" charset="-122"/>
-                <a:cs typeface="Yu Gothic" pitchFamily="34" charset="-120"/>
-              </a:rPr>
-              <a:t>誰に見せるか</a:t>
-            </a:r>
-            <a:endParaRPr lang="en-US" sz="1400" dirty="0"/>
-          </a:p>
-        </p:txBody>
-      </p:sp>
-      <p:sp>
-        <p:nvSpPr>
-          <p:cNvPr id="16" name="Text 14"/>
-          <p:cNvSpPr txBox="1"/>
-          <p:nvPr/>
-        </p:nvSpPr>
-        <p:spPr>
-          <a:xfrm>
-            <a:off x="4006901" y="4279392"/>
-            <a:ext cx="7011619" cy="768096"/>
+            <a:off x="4383634" y="4389120"/>
+            <a:ext cx="6682435" cy="896112"/>
           </a:xfrm>
           <a:prstGeom prst="rect">
             <a:avLst/>
@@ -2646,15 +2874,54 @@
             <a:r>
               <a:rPr lang="en-US" sz="1250" dirty="0">
                 <a:solidFill>
-                  <a:srgbClr val="3F3933"/>
-                </a:solidFill>
-                <a:latin typeface="Yu Gothic" pitchFamily="34" charset="0"/>
-                <a:ea typeface="Yu Gothic" pitchFamily="34" charset="-122"/>
-                <a:cs typeface="Yu Gothic" pitchFamily="34" charset="-120"/>
-              </a:rPr>
-              <a:t>第3回で社員1名に渡します。今日その1名を決めておきます</a:t>
+                  <a:srgbClr val="5A534A"/>
+                </a:solidFill>
+                <a:latin typeface="Yu Gothic" pitchFamily="34" charset="0"/>
+                <a:ea typeface="Yu Gothic" pitchFamily="34" charset="-122"/>
+                <a:cs typeface="Yu Gothic" pitchFamily="34" charset="-120"/>
+              </a:rPr>
+              <a:t>AIが一度に読める情報量。長くなるほど前の話を取りこぼします</a:t>
             </a:r>
             <a:endParaRPr lang="en-US" sz="1250" dirty="0"/>
+          </a:p>
+        </p:txBody>
+      </p:sp>
+      <p:sp>
+        <p:nvSpPr>
+          <p:cNvPr id="16" name="Text 14"/>
+          <p:cNvSpPr txBox="1"/>
+          <p:nvPr/>
+        </p:nvSpPr>
+        <p:spPr>
+          <a:xfrm>
+            <a:off x="777240" y="5623560"/>
+            <a:ext cx="10607040" cy="411480"/>
+          </a:xfrm>
+          <a:prstGeom prst="rect">
+            <a:avLst/>
+          </a:prstGeom>
+          <a:noFill/>
+          <a:ln/>
+        </p:spPr>
+        <p:txBody>
+          <a:bodyPr wrap="square" lIns="0" tIns="0" rIns="0" bIns="0" rtlCol="0" anchor="ctr"/>
+          <a:lstStyle/>
+          <a:p>
+            <a:pPr indent="0" marL="0">
+              <a:buNone/>
+            </a:pPr>
+            <a:r>
+              <a:rPr lang="en-US" sz="1150" dirty="0">
+                <a:solidFill>
+                  <a:srgbClr val="8A8177"/>
+                </a:solidFill>
+                <a:latin typeface="Yu Gothic" pitchFamily="34" charset="0"/>
+                <a:ea typeface="Yu Gothic" pitchFamily="34" charset="-122"/>
+                <a:cs typeface="Yu Gothic" pitchFamily="34" charset="-120"/>
+              </a:rPr>
+              <a:t>配布した用語辞典にも同じものが載っています。覚える必要はありません。</a:t>
+            </a:r>
+            <a:endParaRPr lang="en-US" sz="1150" dirty="0"/>
           </a:p>
         </p:txBody>
       </p:sp>
@@ -2730,7 +2997,7 @@
                 <a:ea typeface="Yu Gothic" pitchFamily="34" charset="-122"/>
                 <a:cs typeface="Yu Gothic" pitchFamily="34" charset="-120"/>
               </a:rPr>
-              <a:t>組み込み</a:t>
+              <a:t>用語</a:t>
             </a:r>
             <a:endParaRPr lang="en-US" sz="900" dirty="0"/>
           </a:p>
@@ -2795,13 +3062,13 @@
             <a:r>
               <a:rPr lang="en-US" sz="1100" b="1" spc="250" kern="0" dirty="0">
                 <a:solidFill>
-                  <a:srgbClr val="B04A2F"/>
-                </a:solidFill>
-                <a:latin typeface="Yu Gothic" pitchFamily="34" charset="0"/>
-                <a:ea typeface="Yu Gothic" pitchFamily="34" charset="-122"/>
-                <a:cs typeface="Yu Gothic" pitchFamily="34" charset="-120"/>
-              </a:rPr>
-              <a:t>ここだけは</a:t>
+                  <a:srgbClr val="2F4F6B"/>
+                </a:solidFill>
+                <a:latin typeface="Yu Gothic" pitchFamily="34" charset="0"/>
+                <a:ea typeface="Yu Gothic" pitchFamily="34" charset="-122"/>
+                <a:cs typeface="Yu Gothic" pitchFamily="34" charset="-120"/>
+              </a:rPr>
+              <a:t>演習</a:t>
             </a:r>
             <a:endParaRPr lang="en-US" sz="1100" dirty="0"/>
           </a:p>
@@ -2815,7 +3082,7 @@
         </p:nvSpPr>
         <p:spPr>
           <a:xfrm>
-            <a:off x="777240" y="1097280"/>
+            <a:off x="777240" y="896112"/>
             <a:ext cx="10607040" cy="640080"/>
           </a:xfrm>
           <a:prstGeom prst="rect">
@@ -2840,7 +3107,7 @@
                 <a:ea typeface="Yu Gothic" pitchFamily="34" charset="-122"/>
                 <a:cs typeface="Yu Gothic" pitchFamily="34" charset="-120"/>
               </a:rPr>
-              <a:t>講師が代わりに入力しないこと</a:t>
+              <a:t>今日、一緒にやること</a:t>
             </a:r>
             <a:endParaRPr lang="en-US" sz="2600" dirty="0"/>
           </a:p>
@@ -2848,20 +3115,84 @@
       </p:sp>
       <p:sp>
         <p:nvSpPr>
-          <p:cNvPr id="4" name="Shape 2"/>
+          <p:cNvPr id="4" name="Text 2"/>
+          <p:cNvSpPr txBox="1"/>
+          <p:nvPr/>
+        </p:nvSpPr>
+        <p:spPr>
+          <a:xfrm>
+            <a:off x="777240" y="1572768"/>
+            <a:ext cx="10607040" cy="320040"/>
+          </a:xfrm>
+          <a:prstGeom prst="rect">
+            <a:avLst/>
+          </a:prstGeom>
+          <a:noFill/>
+          <a:ln/>
+        </p:spPr>
+        <p:txBody>
+          <a:bodyPr wrap="square" lIns="0" tIns="0" rIns="0" bIns="0" rtlCol="0" anchor="ctr"/>
+          <a:lstStyle/>
+          <a:p>
+            <a:pPr indent="0" marL="0">
+              <a:buNone/>
+            </a:pPr>
+            <a:r>
+              <a:rPr lang="en-US" sz="1250" b="1" dirty="0">
+                <a:solidFill>
+                  <a:srgbClr val="2F4F6B"/>
+                </a:solidFill>
+                <a:latin typeface="Yu Gothic" pitchFamily="34" charset="0"/>
+                <a:ea typeface="Yu Gothic" pitchFamily="34" charset="-122"/>
+                <a:cs typeface="Yu Gothic" pitchFamily="34" charset="-120"/>
+              </a:rPr>
+              <a:t>55分。操作するのはご自身です。</a:t>
+            </a:r>
+            <a:endParaRPr lang="en-US" sz="1250" dirty="0"/>
+          </a:p>
+        </p:txBody>
+      </p:sp>
+      <p:sp>
+        <p:nvSpPr>
+          <p:cNvPr id="5" name="Shape 3"/>
           <p:cNvSpPr/>
           <p:nvPr/>
         </p:nvSpPr>
         <p:spPr>
           <a:xfrm>
             <a:off x="777240" y="2148840"/>
-            <a:ext cx="64008" cy="2194560"/>
+            <a:ext cx="3383280" cy="2880360"/>
           </a:xfrm>
           <a:prstGeom prst="rect">
             <a:avLst/>
           </a:prstGeom>
           <a:solidFill>
-            <a:srgbClr val="B04A2F"/>
+            <a:srgbClr val="FFFFFF"/>
+          </a:solidFill>
+          <a:ln w="12700">
+            <a:solidFill>
+              <a:srgbClr val="EDE7DB"/>
+            </a:solidFill>
+            <a:prstDash val="solid"/>
+          </a:ln>
+        </p:spPr>
+      </p:sp>
+      <p:sp>
+        <p:nvSpPr>
+          <p:cNvPr id="6" name="Shape 4"/>
+          <p:cNvSpPr/>
+          <p:nvPr/>
+        </p:nvSpPr>
+        <p:spPr>
+          <a:xfrm>
+            <a:off x="1051560" y="2395728"/>
+            <a:ext cx="438912" cy="438912"/>
+          </a:xfrm>
+          <a:prstGeom prst="ellipse">
+            <a:avLst/>
+          </a:prstGeom>
+          <a:solidFill>
+            <a:srgbClr val="2F4F6B"/>
           </a:solidFill>
           <a:ln w="12700">
             <a:solidFill>
@@ -2873,14 +3204,53 @@
       </p:sp>
       <p:sp>
         <p:nvSpPr>
-          <p:cNvPr id="5" name="Text 3"/>
-          <p:cNvSpPr txBox="1"/>
-          <p:nvPr/>
-        </p:nvSpPr>
-        <p:spPr>
-          <a:xfrm>
-            <a:off x="1188720" y="2148840"/>
-            <a:ext cx="9966960" cy="2194560"/>
+          <p:cNvPr id="7" name="Text 5"/>
+          <p:cNvSpPr txBox="1"/>
+          <p:nvPr/>
+        </p:nvSpPr>
+        <p:spPr>
+          <a:xfrm>
+            <a:off x="1051560" y="2395728"/>
+            <a:ext cx="438912" cy="438912"/>
+          </a:xfrm>
+          <a:prstGeom prst="rect">
+            <a:avLst/>
+          </a:prstGeom>
+          <a:noFill/>
+          <a:ln/>
+        </p:spPr>
+        <p:txBody>
+          <a:bodyPr wrap="square" lIns="0" tIns="0" rIns="0" bIns="0" rtlCol="0" anchor="ctr"/>
+          <a:lstStyle/>
+          <a:p>
+            <a:pPr algn="ctr" indent="0" marL="0">
+              <a:buNone/>
+            </a:pPr>
+            <a:r>
+              <a:rPr lang="en-US" sz="1300" b="1" dirty="0">
+                <a:solidFill>
+                  <a:srgbClr val="FFFFFF"/>
+                </a:solidFill>
+                <a:latin typeface="Yu Gothic" pitchFamily="34" charset="0"/>
+                <a:ea typeface="Yu Gothic" pitchFamily="34" charset="-122"/>
+                <a:cs typeface="Yu Gothic" pitchFamily="34" charset="-120"/>
+              </a:rPr>
+              <a:t>1</a:t>
+            </a:r>
+            <a:endParaRPr lang="en-US" sz="1300" dirty="0"/>
+          </a:p>
+        </p:txBody>
+      </p:sp>
+      <p:sp>
+        <p:nvSpPr>
+          <p:cNvPr id="8" name="Text 6"/>
+          <p:cNvSpPr txBox="1"/>
+          <p:nvPr/>
+        </p:nvSpPr>
+        <p:spPr>
+          <a:xfrm>
+            <a:off x="1051560" y="2944368"/>
+            <a:ext cx="2834640" cy="731520"/>
           </a:xfrm>
           <a:prstGeom prst="rect">
             <a:avLst/>
@@ -2894,41 +3264,108 @@
           <a:p>
             <a:pPr indent="0" marL="0">
               <a:lnSpc>
-                <a:spcPct val="160000"/>
+                <a:spcPct val="125000"/>
               </a:lnSpc>
               <a:buNone/>
             </a:pPr>
             <a:r>
-              <a:rPr lang="en-US" sz="1650" dirty="0">
-                <a:solidFill>
-                  <a:srgbClr val="3F3933"/>
-                </a:solidFill>
-                <a:latin typeface="Yu Gothic" pitchFamily="34" charset="0"/>
-                <a:ea typeface="Yu Gothic" pitchFamily="34" charset="-122"/>
-                <a:cs typeface="Yu Gothic" pitchFamily="34" charset="-120"/>
-              </a:rPr>
-              <a:t>1対1では「見ていて歯がゆい」場面が必ず来ます。そこで手を出すと、受講者は自分で書けるようになりません。待つのが仕事だと割り切ってください。操作を代わった瞬間、その技能は受講者に残りません。</a:t>
-            </a:r>
-            <a:endParaRPr lang="en-US" sz="1650" dirty="0"/>
-          </a:p>
-        </p:txBody>
-      </p:sp>
-      <p:sp>
-        <p:nvSpPr>
-          <p:cNvPr id="6" name="Shape 4"/>
+              <a:rPr lang="en-US" sz="1450" b="1" dirty="0">
+                <a:solidFill>
+                  <a:srgbClr val="23201D"/>
+                </a:solidFill>
+                <a:latin typeface="Yu Gothic" pitchFamily="34" charset="0"/>
+                <a:ea typeface="Yu Gothic" pitchFamily="34" charset="-122"/>
+                <a:cs typeface="Yu Gothic" pitchFamily="34" charset="-120"/>
+              </a:rPr>
+              <a:t>5要素で1本書く</a:t>
+            </a:r>
+            <a:endParaRPr lang="en-US" sz="1450" dirty="0"/>
+          </a:p>
+        </p:txBody>
+      </p:sp>
+      <p:sp>
+        <p:nvSpPr>
+          <p:cNvPr id="9" name="Text 7"/>
+          <p:cNvSpPr txBox="1"/>
+          <p:nvPr/>
+        </p:nvSpPr>
+        <p:spPr>
+          <a:xfrm>
+            <a:off x="1051560" y="3703320"/>
+            <a:ext cx="2834640" cy="1188720"/>
+          </a:xfrm>
+          <a:prstGeom prst="rect">
+            <a:avLst/>
+          </a:prstGeom>
+          <a:noFill/>
+          <a:ln/>
+        </p:spPr>
+        <p:txBody>
+          <a:bodyPr wrap="square" lIns="0" tIns="0" rIns="0" bIns="0" rtlCol="0" anchor="ctr"/>
+          <a:lstStyle/>
+          <a:p>
+            <a:pPr indent="0" marL="0">
+              <a:lnSpc>
+                <a:spcPct val="130000"/>
+              </a:lnSpc>
+              <a:buNone/>
+            </a:pPr>
+            <a:r>
+              <a:rPr lang="en-US" sz="1150" dirty="0">
+                <a:solidFill>
+                  <a:srgbClr val="5A534A"/>
+                </a:solidFill>
+                <a:latin typeface="Yu Gothic" pitchFamily="34" charset="0"/>
+                <a:ea typeface="Yu Gothic" pitchFamily="34" charset="-122"/>
+                <a:cs typeface="Yu Gothic" pitchFamily="34" charset="-120"/>
+              </a:rPr>
+              <a:t>ご自身の実案件を題材に。講師は口頭で誘導し、入力はしません</a:t>
+            </a:r>
+            <a:endParaRPr lang="en-US" sz="1150" dirty="0"/>
+          </a:p>
+        </p:txBody>
+      </p:sp>
+      <p:sp>
+        <p:nvSpPr>
+          <p:cNvPr id="10" name="Shape 8"/>
           <p:cNvSpPr/>
           <p:nvPr/>
         </p:nvSpPr>
         <p:spPr>
           <a:xfrm>
-            <a:off x="777240" y="4709160"/>
-            <a:ext cx="10607040" cy="960120"/>
+            <a:off x="4389120" y="2148840"/>
+            <a:ext cx="3383280" cy="2880360"/>
           </a:xfrm>
           <a:prstGeom prst="rect">
             <a:avLst/>
           </a:prstGeom>
           <a:solidFill>
-            <a:srgbClr val="EDE7DB"/>
+            <a:srgbClr val="FFFFFF"/>
+          </a:solidFill>
+          <a:ln w="12700">
+            <a:solidFill>
+              <a:srgbClr val="EDE7DB"/>
+            </a:solidFill>
+            <a:prstDash val="solid"/>
+          </a:ln>
+        </p:spPr>
+      </p:sp>
+      <p:sp>
+        <p:nvSpPr>
+          <p:cNvPr id="11" name="Shape 9"/>
+          <p:cNvSpPr/>
+          <p:nvPr/>
+        </p:nvSpPr>
+        <p:spPr>
+          <a:xfrm>
+            <a:off x="4663440" y="2395728"/>
+            <a:ext cx="438912" cy="438912"/>
+          </a:xfrm>
+          <a:prstGeom prst="ellipse">
+            <a:avLst/>
+          </a:prstGeom>
+          <a:solidFill>
+            <a:srgbClr val="2F4F6B"/>
           </a:solidFill>
           <a:ln w="12700">
             <a:solidFill>
@@ -2940,53 +3377,95 @@
       </p:sp>
       <p:sp>
         <p:nvSpPr>
-          <p:cNvPr id="7" name="Text 5"/>
-          <p:cNvSpPr txBox="1"/>
-          <p:nvPr/>
-        </p:nvSpPr>
-        <p:spPr>
-          <a:xfrm>
-            <a:off x="1051560" y="4800600"/>
-            <a:ext cx="1463040" cy="256032"/>
-          </a:xfrm>
-          <a:prstGeom prst="rect">
-            <a:avLst/>
-          </a:prstGeom>
-          <a:noFill/>
-          <a:ln/>
-        </p:spPr>
-        <p:txBody>
-          <a:bodyPr wrap="square" lIns="0" tIns="0" rIns="0" bIns="0" rtlCol="0" anchor="ctr"/>
-          <a:lstStyle/>
-          <a:p>
-            <a:pPr indent="0" marL="0">
-              <a:buNone/>
-            </a:pPr>
-            <a:r>
-              <a:rPr lang="en-US" sz="900" b="1" spc="150" kern="0" dirty="0">
-                <a:solidFill>
-                  <a:srgbClr val="B04A2F"/>
-                </a:solidFill>
-                <a:latin typeface="Yu Gothic" pitchFamily="34" charset="0"/>
-                <a:ea typeface="Yu Gothic" pitchFamily="34" charset="-122"/>
-                <a:cs typeface="Yu Gothic" pitchFamily="34" charset="-120"/>
-              </a:rPr>
-              <a:t>他社では</a:t>
-            </a:r>
-            <a:endParaRPr lang="en-US" sz="900" dirty="0"/>
-          </a:p>
-        </p:txBody>
-      </p:sp>
-      <p:sp>
-        <p:nvSpPr>
-          <p:cNvPr id="8" name="Text 6"/>
-          <p:cNvSpPr txBox="1"/>
-          <p:nvPr/>
-        </p:nvSpPr>
-        <p:spPr>
-          <a:xfrm>
-            <a:off x="1051560" y="5029200"/>
-            <a:ext cx="10058400" cy="566928"/>
+          <p:cNvPr id="12" name="Text 10"/>
+          <p:cNvSpPr txBox="1"/>
+          <p:nvPr/>
+        </p:nvSpPr>
+        <p:spPr>
+          <a:xfrm>
+            <a:off x="4663440" y="2395728"/>
+            <a:ext cx="438912" cy="438912"/>
+          </a:xfrm>
+          <a:prstGeom prst="rect">
+            <a:avLst/>
+          </a:prstGeom>
+          <a:noFill/>
+          <a:ln/>
+        </p:spPr>
+        <p:txBody>
+          <a:bodyPr wrap="square" lIns="0" tIns="0" rIns="0" bIns="0" rtlCol="0" anchor="ctr"/>
+          <a:lstStyle/>
+          <a:p>
+            <a:pPr algn="ctr" indent="0" marL="0">
+              <a:buNone/>
+            </a:pPr>
+            <a:r>
+              <a:rPr lang="en-US" sz="1300" b="1" dirty="0">
+                <a:solidFill>
+                  <a:srgbClr val="FFFFFF"/>
+                </a:solidFill>
+                <a:latin typeface="Yu Gothic" pitchFamily="34" charset="0"/>
+                <a:ea typeface="Yu Gothic" pitchFamily="34" charset="-122"/>
+                <a:cs typeface="Yu Gothic" pitchFamily="34" charset="-120"/>
+              </a:rPr>
+              <a:t>2</a:t>
+            </a:r>
+            <a:endParaRPr lang="en-US" sz="1300" dirty="0"/>
+          </a:p>
+        </p:txBody>
+      </p:sp>
+      <p:sp>
+        <p:nvSpPr>
+          <p:cNvPr id="13" name="Text 11"/>
+          <p:cNvSpPr txBox="1"/>
+          <p:nvPr/>
+        </p:nvSpPr>
+        <p:spPr>
+          <a:xfrm>
+            <a:off x="4663440" y="2944368"/>
+            <a:ext cx="2834640" cy="731520"/>
+          </a:xfrm>
+          <a:prstGeom prst="rect">
+            <a:avLst/>
+          </a:prstGeom>
+          <a:noFill/>
+          <a:ln/>
+        </p:spPr>
+        <p:txBody>
+          <a:bodyPr wrap="square" lIns="0" tIns="0" rIns="0" bIns="0" rtlCol="0" anchor="ctr"/>
+          <a:lstStyle/>
+          <a:p>
+            <a:pPr indent="0" marL="0">
+              <a:lnSpc>
+                <a:spcPct val="125000"/>
+              </a:lnSpc>
+              <a:buNone/>
+            </a:pPr>
+            <a:r>
+              <a:rPr lang="en-US" sz="1450" b="1" dirty="0">
+                <a:solidFill>
+                  <a:srgbClr val="23201D"/>
+                </a:solidFill>
+                <a:latin typeface="Yu Gothic" pitchFamily="34" charset="0"/>
+                <a:ea typeface="Yu Gothic" pitchFamily="34" charset="-122"/>
+                <a:cs typeface="Yu Gothic" pitchFamily="34" charset="-120"/>
+              </a:rPr>
+              <a:t>前提を、設定に移す</a:t>
+            </a:r>
+            <a:endParaRPr lang="en-US" sz="1450" dirty="0"/>
+          </a:p>
+        </p:txBody>
+      </p:sp>
+      <p:sp>
+        <p:nvSpPr>
+          <p:cNvPr id="14" name="Text 12"/>
+          <p:cNvSpPr txBox="1"/>
+          <p:nvPr/>
+        </p:nvSpPr>
+        <p:spPr>
+          <a:xfrm>
+            <a:off x="4663440" y="3703320"/>
+            <a:ext cx="2834640" cy="1188720"/>
           </a:xfrm>
           <a:prstGeom prst="rect">
             <a:avLst/>
@@ -3005,23 +3484,196 @@
               <a:buNone/>
             </a:pPr>
             <a:r>
-              <a:rPr lang="en-US" sz="1250" dirty="0">
-                <a:solidFill>
-                  <a:srgbClr val="3F3933"/>
-                </a:solidFill>
-                <a:latin typeface="Yu Gothic" pitchFamily="34" charset="0"/>
-                <a:ea typeface="Yu Gothic" pitchFamily="34" charset="-122"/>
-                <a:cs typeface="Yu Gothic" pitchFamily="34" charset="-120"/>
-              </a:rPr>
-              <a:t>ある会社では、社長のカスタム指示に「当社は◯◯を売っている／顧客は△△／敬語は硬めに」の3行を入れただけで、以後の全会話の手直しが半分になりました。</a:t>
-            </a:r>
-            <a:endParaRPr lang="en-US" sz="1250" dirty="0"/>
-          </a:p>
-        </p:txBody>
-      </p:sp>
-      <p:sp>
-        <p:nvSpPr>
-          <p:cNvPr id="9" name="Text 7"/>
+              <a:rPr lang="en-US" sz="1150" dirty="0">
+                <a:solidFill>
+                  <a:srgbClr val="5A534A"/>
+                </a:solidFill>
+                <a:latin typeface="Yu Gothic" pitchFamily="34" charset="0"/>
+                <a:ea typeface="Yu Gothic" pitchFamily="34" charset="-122"/>
+                <a:cs typeface="Yu Gothic" pitchFamily="34" charset="-120"/>
+              </a:rPr>
+              <a:t>毎回書いている会社の説明を、全部の会話に自動で効く場所に入れます</a:t>
+            </a:r>
+            <a:endParaRPr lang="en-US" sz="1150" dirty="0"/>
+          </a:p>
+        </p:txBody>
+      </p:sp>
+      <p:sp>
+        <p:nvSpPr>
+          <p:cNvPr id="15" name="Shape 13"/>
+          <p:cNvSpPr/>
+          <p:nvPr/>
+        </p:nvSpPr>
+        <p:spPr>
+          <a:xfrm>
+            <a:off x="8001000" y="2148840"/>
+            <a:ext cx="3383280" cy="2880360"/>
+          </a:xfrm>
+          <a:prstGeom prst="rect">
+            <a:avLst/>
+          </a:prstGeom>
+          <a:solidFill>
+            <a:srgbClr val="FFFFFF"/>
+          </a:solidFill>
+          <a:ln w="12700">
+            <a:solidFill>
+              <a:srgbClr val="EDE7DB"/>
+            </a:solidFill>
+            <a:prstDash val="solid"/>
+          </a:ln>
+        </p:spPr>
+      </p:sp>
+      <p:sp>
+        <p:nvSpPr>
+          <p:cNvPr id="16" name="Shape 14"/>
+          <p:cNvSpPr/>
+          <p:nvPr/>
+        </p:nvSpPr>
+        <p:spPr>
+          <a:xfrm>
+            <a:off x="8275320" y="2395728"/>
+            <a:ext cx="438912" cy="438912"/>
+          </a:xfrm>
+          <a:prstGeom prst="ellipse">
+            <a:avLst/>
+          </a:prstGeom>
+          <a:solidFill>
+            <a:srgbClr val="2F4F6B"/>
+          </a:solidFill>
+          <a:ln w="12700">
+            <a:solidFill>
+              <a:srgbClr val="333333"/>
+            </a:solidFill>
+            <a:prstDash val="solid"/>
+          </a:ln>
+        </p:spPr>
+      </p:sp>
+      <p:sp>
+        <p:nvSpPr>
+          <p:cNvPr id="17" name="Text 15"/>
+          <p:cNvSpPr txBox="1"/>
+          <p:nvPr/>
+        </p:nvSpPr>
+        <p:spPr>
+          <a:xfrm>
+            <a:off x="8275320" y="2395728"/>
+            <a:ext cx="438912" cy="438912"/>
+          </a:xfrm>
+          <a:prstGeom prst="rect">
+            <a:avLst/>
+          </a:prstGeom>
+          <a:noFill/>
+          <a:ln/>
+        </p:spPr>
+        <p:txBody>
+          <a:bodyPr wrap="square" lIns="0" tIns="0" rIns="0" bIns="0" rtlCol="0" anchor="ctr"/>
+          <a:lstStyle/>
+          <a:p>
+            <a:pPr algn="ctr" indent="0" marL="0">
+              <a:buNone/>
+            </a:pPr>
+            <a:r>
+              <a:rPr lang="en-US" sz="1300" b="1" dirty="0">
+                <a:solidFill>
+                  <a:srgbClr val="FFFFFF"/>
+                </a:solidFill>
+                <a:latin typeface="Yu Gothic" pitchFamily="34" charset="0"/>
+                <a:ea typeface="Yu Gothic" pitchFamily="34" charset="-122"/>
+                <a:cs typeface="Yu Gothic" pitchFamily="34" charset="-120"/>
+              </a:rPr>
+              <a:t>3</a:t>
+            </a:r>
+            <a:endParaRPr lang="en-US" sz="1300" dirty="0"/>
+          </a:p>
+        </p:txBody>
+      </p:sp>
+      <p:sp>
+        <p:nvSpPr>
+          <p:cNvPr id="18" name="Text 16"/>
+          <p:cNvSpPr txBox="1"/>
+          <p:nvPr/>
+        </p:nvSpPr>
+        <p:spPr>
+          <a:xfrm>
+            <a:off x="8275320" y="2944368"/>
+            <a:ext cx="2834640" cy="731520"/>
+          </a:xfrm>
+          <a:prstGeom prst="rect">
+            <a:avLst/>
+          </a:prstGeom>
+          <a:noFill/>
+          <a:ln/>
+        </p:spPr>
+        <p:txBody>
+          <a:bodyPr wrap="square" lIns="0" tIns="0" rIns="0" bIns="0" rtlCol="0" anchor="ctr"/>
+          <a:lstStyle/>
+          <a:p>
+            <a:pPr indent="0" marL="0">
+              <a:lnSpc>
+                <a:spcPct val="125000"/>
+              </a:lnSpc>
+              <a:buNone/>
+            </a:pPr>
+            <a:r>
+              <a:rPr lang="en-US" sz="1450" b="1" dirty="0">
+                <a:solidFill>
+                  <a:srgbClr val="23201D"/>
+                </a:solidFill>
+                <a:latin typeface="Yu Gothic" pitchFamily="34" charset="0"/>
+                <a:ea typeface="Yu Gothic" pitchFamily="34" charset="-122"/>
+                <a:cs typeface="Yu Gothic" pitchFamily="34" charset="-120"/>
+              </a:rPr>
+              <a:t>箱をつくって、5本ためる</a:t>
+            </a:r>
+            <a:endParaRPr lang="en-US" sz="1450" dirty="0"/>
+          </a:p>
+        </p:txBody>
+      </p:sp>
+      <p:sp>
+        <p:nvSpPr>
+          <p:cNvPr id="19" name="Text 17"/>
+          <p:cNvSpPr txBox="1"/>
+          <p:nvPr/>
+        </p:nvSpPr>
+        <p:spPr>
+          <a:xfrm>
+            <a:off x="8275320" y="3703320"/>
+            <a:ext cx="2834640" cy="1188720"/>
+          </a:xfrm>
+          <a:prstGeom prst="rect">
+            <a:avLst/>
+          </a:prstGeom>
+          <a:noFill/>
+          <a:ln/>
+        </p:spPr>
+        <p:txBody>
+          <a:bodyPr wrap="square" lIns="0" tIns="0" rIns="0" bIns="0" rtlCol="0" anchor="ctr"/>
+          <a:lstStyle/>
+          <a:p>
+            <a:pPr indent="0" marL="0">
+              <a:lnSpc>
+                <a:spcPct val="130000"/>
+              </a:lnSpc>
+              <a:buNone/>
+            </a:pPr>
+            <a:r>
+              <a:rPr lang="en-US" sz="1150" dirty="0">
+                <a:solidFill>
+                  <a:srgbClr val="5A534A"/>
+                </a:solidFill>
+                <a:latin typeface="Yu Gothic" pitchFamily="34" charset="0"/>
+                <a:ea typeface="Yu Gothic" pitchFamily="34" charset="-122"/>
+                <a:cs typeface="Yu Gothic" pitchFamily="34" charset="-120"/>
+              </a:rPr>
+              <a:t>業務ごとの箱に資料と会話をまとめ、保存場所を決めます</a:t>
+            </a:r>
+            <a:endParaRPr lang="en-US" sz="1150" dirty="0"/>
+          </a:p>
+        </p:txBody>
+      </p:sp>
+      <p:sp>
+        <p:nvSpPr>
+          <p:cNvPr id="20" name="Text 18"/>
           <p:cNvSpPr txBox="1"/>
           <p:nvPr/>
         </p:nvSpPr>
@@ -3060,7 +3712,7 @@
       </p:sp>
       <p:sp>
         <p:nvSpPr>
-          <p:cNvPr id="10" name="Text 8"/>
+          <p:cNvPr id="21" name="Text 19"/>
           <p:cNvSpPr txBox="1"/>
           <p:nvPr/>
         </p:nvSpPr>
@@ -3091,7 +3743,7 @@
                 <a:ea typeface="Yu Gothic" pitchFamily="34" charset="-122"/>
                 <a:cs typeface="Yu Gothic" pitchFamily="34" charset="-120"/>
               </a:rPr>
-              <a:t>ここだけは</a:t>
+              <a:t>演習</a:t>
             </a:r>
             <a:endParaRPr lang="en-US" sz="900" dirty="0"/>
           </a:p>
@@ -3108,6 +3760,1532 @@
 <file path=ppt/slides/slide12.xml><?xml version="1.0" encoding="utf-8"?>
 <p:sld xmlns:a="http://schemas.openxmlformats.org/drawingml/2006/main" xmlns:r="http://schemas.openxmlformats.org/officeDocument/2006/relationships" xmlns:p="http://schemas.openxmlformats.org/presentationml/2006/main">
   <p:cSld name="Slide 12">
+    <p:bg>
+      <p:bgPr>
+        <a:solidFill>
+          <a:srgbClr val="F6F2EA"/>
+        </a:solidFill>
+      </p:bgPr>
+    </p:bg>
+    <p:spTree>
+      <p:nvGrpSpPr>
+        <p:cNvPr id="1" name=""/>
+        <p:cNvGrpSpPr/>
+        <p:nvPr/>
+      </p:nvGrpSpPr>
+      <p:grpSpPr>
+        <a:xfrm>
+          <a:off x="0" y="0"/>
+          <a:ext cx="0" cy="0"/>
+          <a:chOff x="0" y="0"/>
+          <a:chExt cx="0" cy="0"/>
+        </a:xfrm>
+      </p:grpSpPr>
+      <p:sp>
+        <p:nvSpPr>
+          <p:cNvPr id="2" name="Text 0"/>
+          <p:cNvSpPr txBox="1"/>
+          <p:nvPr/>
+        </p:nvSpPr>
+        <p:spPr>
+          <a:xfrm>
+            <a:off x="777240" y="566928"/>
+            <a:ext cx="10607040" cy="274320"/>
+          </a:xfrm>
+          <a:prstGeom prst="rect">
+            <a:avLst/>
+          </a:prstGeom>
+          <a:noFill/>
+          <a:ln/>
+        </p:spPr>
+        <p:txBody>
+          <a:bodyPr wrap="square" lIns="0" tIns="0" rIns="0" bIns="0" rtlCol="0" anchor="ctr"/>
+          <a:lstStyle/>
+          <a:p>
+            <a:pPr indent="0" marL="0">
+              <a:buNone/>
+            </a:pPr>
+            <a:r>
+              <a:rPr lang="en-US" sz="1100" b="1" spc="250" kern="0" dirty="0">
+                <a:solidFill>
+                  <a:srgbClr val="3B6B4A"/>
+                </a:solidFill>
+                <a:latin typeface="Yu Gothic" pitchFamily="34" charset="0"/>
+                <a:ea typeface="Yu Gothic" pitchFamily="34" charset="-122"/>
+                <a:cs typeface="Yu Gothic" pitchFamily="34" charset="-120"/>
+              </a:rPr>
+              <a:t>業務への組み込み</a:t>
+            </a:r>
+            <a:endParaRPr lang="en-US" sz="1100" dirty="0"/>
+          </a:p>
+        </p:txBody>
+      </p:sp>
+      <p:sp>
+        <p:nvSpPr>
+          <p:cNvPr id="3" name="Text 1"/>
+          <p:cNvSpPr txBox="1"/>
+          <p:nvPr/>
+        </p:nvSpPr>
+        <p:spPr>
+          <a:xfrm>
+            <a:off x="777240" y="896112"/>
+            <a:ext cx="10607040" cy="640080"/>
+          </a:xfrm>
+          <a:prstGeom prst="rect">
+            <a:avLst/>
+          </a:prstGeom>
+          <a:noFill/>
+          <a:ln/>
+        </p:spPr>
+        <p:txBody>
+          <a:bodyPr wrap="square" lIns="0" tIns="0" rIns="0" bIns="0" rtlCol="0" anchor="ctr"/>
+          <a:lstStyle/>
+          <a:p>
+            <a:pPr indent="0" marL="0">
+              <a:buNone/>
+            </a:pPr>
+            <a:r>
+              <a:rPr lang="en-US" sz="2600" b="1" dirty="0">
+                <a:solidFill>
+                  <a:srgbClr val="23201D"/>
+                </a:solidFill>
+                <a:latin typeface="Yu Gothic" pitchFamily="34" charset="0"/>
+                <a:ea typeface="Yu Gothic" pitchFamily="34" charset="-122"/>
+                <a:cs typeface="Yu Gothic" pitchFamily="34" charset="-120"/>
+              </a:rPr>
+              <a:t>帰る前に決めること</a:t>
+            </a:r>
+            <a:endParaRPr lang="en-US" sz="2600" dirty="0"/>
+          </a:p>
+        </p:txBody>
+      </p:sp>
+      <p:sp>
+        <p:nvSpPr>
+          <p:cNvPr id="4" name="Text 2"/>
+          <p:cNvSpPr txBox="1"/>
+          <p:nvPr/>
+        </p:nvSpPr>
+        <p:spPr>
+          <a:xfrm>
+            <a:off x="777240" y="1572768"/>
+            <a:ext cx="10607040" cy="320040"/>
+          </a:xfrm>
+          <a:prstGeom prst="rect">
+            <a:avLst/>
+          </a:prstGeom>
+          <a:noFill/>
+          <a:ln/>
+        </p:spPr>
+        <p:txBody>
+          <a:bodyPr wrap="square" lIns="0" tIns="0" rIns="0" bIns="0" rtlCol="0" anchor="ctr"/>
+          <a:lstStyle/>
+          <a:p>
+            <a:pPr indent="0" marL="0">
+              <a:buNone/>
+            </a:pPr>
+            <a:r>
+              <a:rPr lang="en-US" sz="1250" b="1" dirty="0">
+                <a:solidFill>
+                  <a:srgbClr val="3B6B4A"/>
+                </a:solidFill>
+                <a:latin typeface="Yu Gothic" pitchFamily="34" charset="0"/>
+                <a:ea typeface="Yu Gothic" pitchFamily="34" charset="-122"/>
+                <a:cs typeface="Yu Gothic" pitchFamily="34" charset="-120"/>
+              </a:rPr>
+              <a:t>ここを決めないと、持ち帰っても使われません。紙に書きます。</a:t>
+            </a:r>
+            <a:endParaRPr lang="en-US" sz="1250" dirty="0"/>
+          </a:p>
+        </p:txBody>
+      </p:sp>
+      <p:sp>
+        <p:nvSpPr>
+          <p:cNvPr id="5" name="Shape 3"/>
+          <p:cNvSpPr/>
+          <p:nvPr/>
+        </p:nvSpPr>
+        <p:spPr>
+          <a:xfrm>
+            <a:off x="777240" y="2103120"/>
+            <a:ext cx="10607040" cy="914400"/>
+          </a:xfrm>
+          <a:prstGeom prst="rect">
+            <a:avLst/>
+          </a:prstGeom>
+          <a:solidFill>
+            <a:srgbClr val="FFFFFF"/>
+          </a:solidFill>
+          <a:ln w="12700">
+            <a:solidFill>
+              <a:srgbClr val="EDE7DB"/>
+            </a:solidFill>
+            <a:prstDash val="solid"/>
+          </a:ln>
+        </p:spPr>
+      </p:sp>
+      <p:sp>
+        <p:nvSpPr>
+          <p:cNvPr id="6" name="Shape 4"/>
+          <p:cNvSpPr/>
+          <p:nvPr/>
+        </p:nvSpPr>
+        <p:spPr>
+          <a:xfrm>
+            <a:off x="777240" y="2103120"/>
+            <a:ext cx="54864" cy="914400"/>
+          </a:xfrm>
+          <a:prstGeom prst="rect">
+            <a:avLst/>
+          </a:prstGeom>
+          <a:solidFill>
+            <a:srgbClr val="3B6B4A"/>
+          </a:solidFill>
+          <a:ln w="12700">
+            <a:solidFill>
+              <a:srgbClr val="333333"/>
+            </a:solidFill>
+            <a:prstDash val="solid"/>
+          </a:ln>
+        </p:spPr>
+      </p:sp>
+      <p:sp>
+        <p:nvSpPr>
+          <p:cNvPr id="7" name="Text 5"/>
+          <p:cNvSpPr txBox="1"/>
+          <p:nvPr/>
+        </p:nvSpPr>
+        <p:spPr>
+          <a:xfrm>
+            <a:off x="1143000" y="2176272"/>
+            <a:ext cx="2757830" cy="768096"/>
+          </a:xfrm>
+          <a:prstGeom prst="rect">
+            <a:avLst/>
+          </a:prstGeom>
+          <a:noFill/>
+          <a:ln/>
+        </p:spPr>
+        <p:txBody>
+          <a:bodyPr wrap="square" lIns="0" tIns="0" rIns="0" bIns="0" rtlCol="0" anchor="ctr"/>
+          <a:lstStyle/>
+          <a:p>
+            <a:pPr indent="0" marL="0">
+              <a:buNone/>
+            </a:pPr>
+            <a:r>
+              <a:rPr lang="en-US" sz="1400" b="1" dirty="0">
+                <a:solidFill>
+                  <a:srgbClr val="3B6B4A"/>
+                </a:solidFill>
+                <a:latin typeface="Yu Gothic" pitchFamily="34" charset="0"/>
+                <a:ea typeface="Yu Gothic" pitchFamily="34" charset="-122"/>
+                <a:cs typeface="Yu Gothic" pitchFamily="34" charset="-120"/>
+              </a:rPr>
+              <a:t>どこに保存するか</a:t>
+            </a:r>
+            <a:endParaRPr lang="en-US" sz="1400" dirty="0"/>
+          </a:p>
+        </p:txBody>
+      </p:sp>
+      <p:sp>
+        <p:nvSpPr>
+          <p:cNvPr id="8" name="Text 6"/>
+          <p:cNvSpPr txBox="1"/>
+          <p:nvPr/>
+        </p:nvSpPr>
+        <p:spPr>
+          <a:xfrm>
+            <a:off x="4006901" y="2176272"/>
+            <a:ext cx="7011619" cy="768096"/>
+          </a:xfrm>
+          <a:prstGeom prst="rect">
+            <a:avLst/>
+          </a:prstGeom>
+          <a:noFill/>
+          <a:ln/>
+        </p:spPr>
+        <p:txBody>
+          <a:bodyPr wrap="square" lIns="0" tIns="0" rIns="0" bIns="0" rtlCol="0" anchor="ctr"/>
+          <a:lstStyle/>
+          <a:p>
+            <a:pPr indent="0" marL="0">
+              <a:lnSpc>
+                <a:spcPct val="130000"/>
+              </a:lnSpc>
+              <a:buNone/>
+            </a:pPr>
+            <a:r>
+              <a:rPr lang="en-US" sz="1250" dirty="0">
+                <a:solidFill>
+                  <a:srgbClr val="3F3933"/>
+                </a:solidFill>
+                <a:latin typeface="Yu Gothic" pitchFamily="34" charset="0"/>
+                <a:ea typeface="Yu Gothic" pitchFamily="34" charset="-122"/>
+                <a:cs typeface="Yu Gothic" pitchFamily="34" charset="-120"/>
+              </a:rPr>
+              <a:t>デスクトップかクラウドか。次に開く場所が決まっていないと使われません</a:t>
+            </a:r>
+            <a:endParaRPr lang="en-US" sz="1250" dirty="0"/>
+          </a:p>
+        </p:txBody>
+      </p:sp>
+      <p:sp>
+        <p:nvSpPr>
+          <p:cNvPr id="9" name="Shape 7"/>
+          <p:cNvSpPr/>
+          <p:nvPr/>
+        </p:nvSpPr>
+        <p:spPr>
+          <a:xfrm>
+            <a:off x="777240" y="3154680"/>
+            <a:ext cx="10607040" cy="914400"/>
+          </a:xfrm>
+          <a:prstGeom prst="rect">
+            <a:avLst/>
+          </a:prstGeom>
+          <a:solidFill>
+            <a:srgbClr val="FFFFFF"/>
+          </a:solidFill>
+          <a:ln w="12700">
+            <a:solidFill>
+              <a:srgbClr val="EDE7DB"/>
+            </a:solidFill>
+            <a:prstDash val="solid"/>
+          </a:ln>
+        </p:spPr>
+      </p:sp>
+      <p:sp>
+        <p:nvSpPr>
+          <p:cNvPr id="10" name="Shape 8"/>
+          <p:cNvSpPr/>
+          <p:nvPr/>
+        </p:nvSpPr>
+        <p:spPr>
+          <a:xfrm>
+            <a:off x="777240" y="3154680"/>
+            <a:ext cx="54864" cy="914400"/>
+          </a:xfrm>
+          <a:prstGeom prst="rect">
+            <a:avLst/>
+          </a:prstGeom>
+          <a:solidFill>
+            <a:srgbClr val="3B6B4A"/>
+          </a:solidFill>
+          <a:ln w="12700">
+            <a:solidFill>
+              <a:srgbClr val="333333"/>
+            </a:solidFill>
+            <a:prstDash val="solid"/>
+          </a:ln>
+        </p:spPr>
+      </p:sp>
+      <p:sp>
+        <p:nvSpPr>
+          <p:cNvPr id="11" name="Text 9"/>
+          <p:cNvSpPr txBox="1"/>
+          <p:nvPr/>
+        </p:nvSpPr>
+        <p:spPr>
+          <a:xfrm>
+            <a:off x="1143000" y="3227832"/>
+            <a:ext cx="2757830" cy="768096"/>
+          </a:xfrm>
+          <a:prstGeom prst="rect">
+            <a:avLst/>
+          </a:prstGeom>
+          <a:noFill/>
+          <a:ln/>
+        </p:spPr>
+        <p:txBody>
+          <a:bodyPr wrap="square" lIns="0" tIns="0" rIns="0" bIns="0" rtlCol="0" anchor="ctr"/>
+          <a:lstStyle/>
+          <a:p>
+            <a:pPr indent="0" marL="0">
+              <a:buNone/>
+            </a:pPr>
+            <a:r>
+              <a:rPr lang="en-US" sz="1400" b="1" dirty="0">
+                <a:solidFill>
+                  <a:srgbClr val="3B6B4A"/>
+                </a:solidFill>
+                <a:latin typeface="Yu Gothic" pitchFamily="34" charset="0"/>
+                <a:ea typeface="Yu Gothic" pitchFamily="34" charset="-122"/>
+                <a:cs typeface="Yu Gothic" pitchFamily="34" charset="-120"/>
+              </a:rPr>
+              <a:t>いつ増やすか</a:t>
+            </a:r>
+            <a:endParaRPr lang="en-US" sz="1400" dirty="0"/>
+          </a:p>
+        </p:txBody>
+      </p:sp>
+      <p:sp>
+        <p:nvSpPr>
+          <p:cNvPr id="12" name="Text 10"/>
+          <p:cNvSpPr txBox="1"/>
+          <p:nvPr/>
+        </p:nvSpPr>
+        <p:spPr>
+          <a:xfrm>
+            <a:off x="4006901" y="3227832"/>
+            <a:ext cx="7011619" cy="768096"/>
+          </a:xfrm>
+          <a:prstGeom prst="rect">
+            <a:avLst/>
+          </a:prstGeom>
+          <a:noFill/>
+          <a:ln/>
+        </p:spPr>
+        <p:txBody>
+          <a:bodyPr wrap="square" lIns="0" tIns="0" rIns="0" bIns="0" rtlCol="0" anchor="ctr"/>
+          <a:lstStyle/>
+          <a:p>
+            <a:pPr indent="0" marL="0">
+              <a:lnSpc>
+                <a:spcPct val="130000"/>
+              </a:lnSpc>
+              <a:buNone/>
+            </a:pPr>
+            <a:r>
+              <a:rPr lang="en-US" sz="1250" dirty="0">
+                <a:solidFill>
+                  <a:srgbClr val="3F3933"/>
+                </a:solidFill>
+                <a:latin typeface="Yu Gothic" pitchFamily="34" charset="0"/>
+                <a:ea typeface="Yu Gothic" pitchFamily="34" charset="-122"/>
+                <a:cs typeface="Yu Gothic" pitchFamily="34" charset="-120"/>
+              </a:rPr>
+              <a:t>うまくいった指示が出たら、その場で追加する。週末にまとめて、は続きません</a:t>
+            </a:r>
+            <a:endParaRPr lang="en-US" sz="1250" dirty="0"/>
+          </a:p>
+        </p:txBody>
+      </p:sp>
+      <p:sp>
+        <p:nvSpPr>
+          <p:cNvPr id="13" name="Shape 11"/>
+          <p:cNvSpPr/>
+          <p:nvPr/>
+        </p:nvSpPr>
+        <p:spPr>
+          <a:xfrm>
+            <a:off x="777240" y="4206240"/>
+            <a:ext cx="10607040" cy="914400"/>
+          </a:xfrm>
+          <a:prstGeom prst="rect">
+            <a:avLst/>
+          </a:prstGeom>
+          <a:solidFill>
+            <a:srgbClr val="FFFFFF"/>
+          </a:solidFill>
+          <a:ln w="12700">
+            <a:solidFill>
+              <a:srgbClr val="EDE7DB"/>
+            </a:solidFill>
+            <a:prstDash val="solid"/>
+          </a:ln>
+        </p:spPr>
+      </p:sp>
+      <p:sp>
+        <p:nvSpPr>
+          <p:cNvPr id="14" name="Shape 12"/>
+          <p:cNvSpPr/>
+          <p:nvPr/>
+        </p:nvSpPr>
+        <p:spPr>
+          <a:xfrm>
+            <a:off x="777240" y="4206240"/>
+            <a:ext cx="54864" cy="914400"/>
+          </a:xfrm>
+          <a:prstGeom prst="rect">
+            <a:avLst/>
+          </a:prstGeom>
+          <a:solidFill>
+            <a:srgbClr val="3B6B4A"/>
+          </a:solidFill>
+          <a:ln w="12700">
+            <a:solidFill>
+              <a:srgbClr val="333333"/>
+            </a:solidFill>
+            <a:prstDash val="solid"/>
+          </a:ln>
+        </p:spPr>
+      </p:sp>
+      <p:sp>
+        <p:nvSpPr>
+          <p:cNvPr id="15" name="Text 13"/>
+          <p:cNvSpPr txBox="1"/>
+          <p:nvPr/>
+        </p:nvSpPr>
+        <p:spPr>
+          <a:xfrm>
+            <a:off x="1143000" y="4279392"/>
+            <a:ext cx="2757830" cy="768096"/>
+          </a:xfrm>
+          <a:prstGeom prst="rect">
+            <a:avLst/>
+          </a:prstGeom>
+          <a:noFill/>
+          <a:ln/>
+        </p:spPr>
+        <p:txBody>
+          <a:bodyPr wrap="square" lIns="0" tIns="0" rIns="0" bIns="0" rtlCol="0" anchor="ctr"/>
+          <a:lstStyle/>
+          <a:p>
+            <a:pPr indent="0" marL="0">
+              <a:buNone/>
+            </a:pPr>
+            <a:r>
+              <a:rPr lang="en-US" sz="1400" b="1" dirty="0">
+                <a:solidFill>
+                  <a:srgbClr val="3B6B4A"/>
+                </a:solidFill>
+                <a:latin typeface="Yu Gothic" pitchFamily="34" charset="0"/>
+                <a:ea typeface="Yu Gothic" pitchFamily="34" charset="-122"/>
+                <a:cs typeface="Yu Gothic" pitchFamily="34" charset="-120"/>
+              </a:rPr>
+              <a:t>誰に見せるか</a:t>
+            </a:r>
+            <a:endParaRPr lang="en-US" sz="1400" dirty="0"/>
+          </a:p>
+        </p:txBody>
+      </p:sp>
+      <p:sp>
+        <p:nvSpPr>
+          <p:cNvPr id="16" name="Text 14"/>
+          <p:cNvSpPr txBox="1"/>
+          <p:nvPr/>
+        </p:nvSpPr>
+        <p:spPr>
+          <a:xfrm>
+            <a:off x="4006901" y="4279392"/>
+            <a:ext cx="7011619" cy="768096"/>
+          </a:xfrm>
+          <a:prstGeom prst="rect">
+            <a:avLst/>
+          </a:prstGeom>
+          <a:noFill/>
+          <a:ln/>
+        </p:spPr>
+        <p:txBody>
+          <a:bodyPr wrap="square" lIns="0" tIns="0" rIns="0" bIns="0" rtlCol="0" anchor="ctr"/>
+          <a:lstStyle/>
+          <a:p>
+            <a:pPr indent="0" marL="0">
+              <a:lnSpc>
+                <a:spcPct val="130000"/>
+              </a:lnSpc>
+              <a:buNone/>
+            </a:pPr>
+            <a:r>
+              <a:rPr lang="en-US" sz="1250" dirty="0">
+                <a:solidFill>
+                  <a:srgbClr val="3F3933"/>
+                </a:solidFill>
+                <a:latin typeface="Yu Gothic" pitchFamily="34" charset="0"/>
+                <a:ea typeface="Yu Gothic" pitchFamily="34" charset="-122"/>
+                <a:cs typeface="Yu Gothic" pitchFamily="34" charset="-120"/>
+              </a:rPr>
+              <a:t>第3回で社員1名に渡します。今日その1名を決めておきます</a:t>
+            </a:r>
+            <a:endParaRPr lang="en-US" sz="1250" dirty="0"/>
+          </a:p>
+        </p:txBody>
+      </p:sp>
+      <p:sp>
+        <p:nvSpPr>
+          <p:cNvPr id="17" name="Text 15"/>
+          <p:cNvSpPr txBox="1"/>
+          <p:nvPr/>
+        </p:nvSpPr>
+        <p:spPr>
+          <a:xfrm>
+            <a:off x="777240" y="6382512"/>
+            <a:ext cx="7424928" cy="256032"/>
+          </a:xfrm>
+          <a:prstGeom prst="rect">
+            <a:avLst/>
+          </a:prstGeom>
+          <a:noFill/>
+          <a:ln/>
+        </p:spPr>
+        <p:txBody>
+          <a:bodyPr wrap="square" lIns="0" tIns="0" rIns="0" bIns="0" rtlCol="0" anchor="ctr"/>
+          <a:lstStyle/>
+          <a:p>
+            <a:pPr indent="0" marL="0">
+              <a:buNone/>
+            </a:pPr>
+            <a:r>
+              <a:rPr lang="en-US" sz="900" dirty="0">
+                <a:solidFill>
+                  <a:srgbClr val="8A8177"/>
+                </a:solidFill>
+                <a:latin typeface="Yu Gothic" pitchFamily="34" charset="0"/>
+                <a:ea typeface="Yu Gothic" pitchFamily="34" charset="-122"/>
+                <a:cs typeface="Yu Gothic" pitchFamily="34" charset="-120"/>
+              </a:rPr>
+              <a:t>第2回　今のChatGPTの使い方を作り直す</a:t>
+            </a:r>
+            <a:endParaRPr lang="en-US" sz="900" dirty="0"/>
+          </a:p>
+        </p:txBody>
+      </p:sp>
+      <p:sp>
+        <p:nvSpPr>
+          <p:cNvPr id="18" name="Text 16"/>
+          <p:cNvSpPr txBox="1"/>
+          <p:nvPr/>
+        </p:nvSpPr>
+        <p:spPr>
+          <a:xfrm>
+            <a:off x="8202168" y="6382512"/>
+            <a:ext cx="3182112" cy="256032"/>
+          </a:xfrm>
+          <a:prstGeom prst="rect">
+            <a:avLst/>
+          </a:prstGeom>
+          <a:noFill/>
+          <a:ln/>
+        </p:spPr>
+        <p:txBody>
+          <a:bodyPr wrap="square" lIns="0" tIns="0" rIns="0" bIns="0" rtlCol="0" anchor="ctr"/>
+          <a:lstStyle/>
+          <a:p>
+            <a:pPr algn="r" indent="0" marL="0">
+              <a:buNone/>
+            </a:pPr>
+            <a:r>
+              <a:rPr lang="en-US" sz="900" dirty="0">
+                <a:solidFill>
+                  <a:srgbClr val="8A8177"/>
+                </a:solidFill>
+                <a:latin typeface="Yu Gothic" pitchFamily="34" charset="0"/>
+                <a:ea typeface="Yu Gothic" pitchFamily="34" charset="-122"/>
+                <a:cs typeface="Yu Gothic" pitchFamily="34" charset="-120"/>
+              </a:rPr>
+              <a:t>組み込み</a:t>
+            </a:r>
+            <a:endParaRPr lang="en-US" sz="900" dirty="0"/>
+          </a:p>
+        </p:txBody>
+      </p:sp>
+    </p:spTree>
+  </p:cSld>
+  <p:clrMapOvr>
+    <a:masterClrMapping/>
+  </p:clrMapOvr>
+</p:sld>
+</file>
+
+<file path=ppt/slides/slide13.xml><?xml version="1.0" encoding="utf-8"?>
+<p:sld xmlns:a="http://schemas.openxmlformats.org/drawingml/2006/main" xmlns:r="http://schemas.openxmlformats.org/officeDocument/2006/relationships" xmlns:p="http://schemas.openxmlformats.org/presentationml/2006/main">
+  <p:cSld name="Slide 13">
+    <p:bg>
+      <p:bgPr>
+        <a:solidFill>
+          <a:srgbClr val="F6F2EA"/>
+        </a:solidFill>
+      </p:bgPr>
+    </p:bg>
+    <p:spTree>
+      <p:nvGrpSpPr>
+        <p:cNvPr id="1" name=""/>
+        <p:cNvGrpSpPr/>
+        <p:nvPr/>
+      </p:nvGrpSpPr>
+      <p:grpSpPr>
+        <a:xfrm>
+          <a:off x="0" y="0"/>
+          <a:ext cx="0" cy="0"/>
+          <a:chOff x="0" y="0"/>
+          <a:chExt cx="0" cy="0"/>
+        </a:xfrm>
+      </p:grpSpPr>
+      <p:sp>
+        <p:nvSpPr>
+          <p:cNvPr id="2" name="Text 0"/>
+          <p:cNvSpPr txBox="1"/>
+          <p:nvPr/>
+        </p:nvSpPr>
+        <p:spPr>
+          <a:xfrm>
+            <a:off x="777240" y="566928"/>
+            <a:ext cx="10607040" cy="274320"/>
+          </a:xfrm>
+          <a:prstGeom prst="rect">
+            <a:avLst/>
+          </a:prstGeom>
+          <a:noFill/>
+          <a:ln/>
+        </p:spPr>
+        <p:txBody>
+          <a:bodyPr wrap="square" lIns="0" tIns="0" rIns="0" bIns="0" rtlCol="0" anchor="ctr"/>
+          <a:lstStyle/>
+          <a:p>
+            <a:pPr indent="0" marL="0">
+              <a:buNone/>
+            </a:pPr>
+            <a:r>
+              <a:rPr lang="en-US" sz="1100" b="1" spc="250" kern="0" dirty="0">
+                <a:solidFill>
+                  <a:srgbClr val="B04A2F"/>
+                </a:solidFill>
+                <a:latin typeface="Yu Gothic" pitchFamily="34" charset="0"/>
+                <a:ea typeface="Yu Gothic" pitchFamily="34" charset="-122"/>
+                <a:cs typeface="Yu Gothic" pitchFamily="34" charset="-120"/>
+              </a:rPr>
+              <a:t>ここだけは</a:t>
+            </a:r>
+            <a:endParaRPr lang="en-US" sz="1100" dirty="0"/>
+          </a:p>
+        </p:txBody>
+      </p:sp>
+      <p:sp>
+        <p:nvSpPr>
+          <p:cNvPr id="3" name="Text 1"/>
+          <p:cNvSpPr txBox="1"/>
+          <p:nvPr/>
+        </p:nvSpPr>
+        <p:spPr>
+          <a:xfrm>
+            <a:off x="777240" y="1097280"/>
+            <a:ext cx="10607040" cy="640080"/>
+          </a:xfrm>
+          <a:prstGeom prst="rect">
+            <a:avLst/>
+          </a:prstGeom>
+          <a:noFill/>
+          <a:ln/>
+        </p:spPr>
+        <p:txBody>
+          <a:bodyPr wrap="square" lIns="0" tIns="0" rIns="0" bIns="0" rtlCol="0" anchor="ctr"/>
+          <a:lstStyle/>
+          <a:p>
+            <a:pPr indent="0" marL="0">
+              <a:buNone/>
+            </a:pPr>
+            <a:r>
+              <a:rPr lang="en-US" sz="2600" b="1" dirty="0">
+                <a:solidFill>
+                  <a:srgbClr val="23201D"/>
+                </a:solidFill>
+                <a:latin typeface="Yu Gothic" pitchFamily="34" charset="0"/>
+                <a:ea typeface="Yu Gothic" pitchFamily="34" charset="-122"/>
+                <a:cs typeface="Yu Gothic" pitchFamily="34" charset="-120"/>
+              </a:rPr>
+              <a:t>講師が代わりに入力しないこと</a:t>
+            </a:r>
+            <a:endParaRPr lang="en-US" sz="2600" dirty="0"/>
+          </a:p>
+        </p:txBody>
+      </p:sp>
+      <p:sp>
+        <p:nvSpPr>
+          <p:cNvPr id="4" name="Shape 2"/>
+          <p:cNvSpPr/>
+          <p:nvPr/>
+        </p:nvSpPr>
+        <p:spPr>
+          <a:xfrm>
+            <a:off x="777240" y="2148840"/>
+            <a:ext cx="64008" cy="2194560"/>
+          </a:xfrm>
+          <a:prstGeom prst="rect">
+            <a:avLst/>
+          </a:prstGeom>
+          <a:solidFill>
+            <a:srgbClr val="B04A2F"/>
+          </a:solidFill>
+          <a:ln w="12700">
+            <a:solidFill>
+              <a:srgbClr val="333333"/>
+            </a:solidFill>
+            <a:prstDash val="solid"/>
+          </a:ln>
+        </p:spPr>
+      </p:sp>
+      <p:sp>
+        <p:nvSpPr>
+          <p:cNvPr id="5" name="Text 3"/>
+          <p:cNvSpPr txBox="1"/>
+          <p:nvPr/>
+        </p:nvSpPr>
+        <p:spPr>
+          <a:xfrm>
+            <a:off x="1188720" y="2148840"/>
+            <a:ext cx="9966960" cy="2194560"/>
+          </a:xfrm>
+          <a:prstGeom prst="rect">
+            <a:avLst/>
+          </a:prstGeom>
+          <a:noFill/>
+          <a:ln/>
+        </p:spPr>
+        <p:txBody>
+          <a:bodyPr wrap="square" lIns="0" tIns="0" rIns="0" bIns="0" rtlCol="0" anchor="ctr"/>
+          <a:lstStyle/>
+          <a:p>
+            <a:pPr indent="0" marL="0">
+              <a:lnSpc>
+                <a:spcPct val="160000"/>
+              </a:lnSpc>
+              <a:buNone/>
+            </a:pPr>
+            <a:r>
+              <a:rPr lang="en-US" sz="1650" dirty="0">
+                <a:solidFill>
+                  <a:srgbClr val="3F3933"/>
+                </a:solidFill>
+                <a:latin typeface="Yu Gothic" pitchFamily="34" charset="0"/>
+                <a:ea typeface="Yu Gothic" pitchFamily="34" charset="-122"/>
+                <a:cs typeface="Yu Gothic" pitchFamily="34" charset="-120"/>
+              </a:rPr>
+              <a:t>1対1では「見ていて歯がゆい」場面が必ず来ます。そこで手を出すと、受講者は自分で書けるようになりません。待つのが仕事だと割り切ってください。操作を代わった瞬間、その技能は受講者に残りません。</a:t>
+            </a:r>
+            <a:endParaRPr lang="en-US" sz="1650" dirty="0"/>
+          </a:p>
+        </p:txBody>
+      </p:sp>
+      <p:sp>
+        <p:nvSpPr>
+          <p:cNvPr id="6" name="Shape 4"/>
+          <p:cNvSpPr/>
+          <p:nvPr/>
+        </p:nvSpPr>
+        <p:spPr>
+          <a:xfrm>
+            <a:off x="777240" y="4709160"/>
+            <a:ext cx="10607040" cy="960120"/>
+          </a:xfrm>
+          <a:prstGeom prst="rect">
+            <a:avLst/>
+          </a:prstGeom>
+          <a:solidFill>
+            <a:srgbClr val="EDE7DB"/>
+          </a:solidFill>
+          <a:ln w="12700">
+            <a:solidFill>
+              <a:srgbClr val="333333"/>
+            </a:solidFill>
+            <a:prstDash val="solid"/>
+          </a:ln>
+        </p:spPr>
+      </p:sp>
+      <p:sp>
+        <p:nvSpPr>
+          <p:cNvPr id="7" name="Text 5"/>
+          <p:cNvSpPr txBox="1"/>
+          <p:nvPr/>
+        </p:nvSpPr>
+        <p:spPr>
+          <a:xfrm>
+            <a:off x="1051560" y="4800600"/>
+            <a:ext cx="1463040" cy="256032"/>
+          </a:xfrm>
+          <a:prstGeom prst="rect">
+            <a:avLst/>
+          </a:prstGeom>
+          <a:noFill/>
+          <a:ln/>
+        </p:spPr>
+        <p:txBody>
+          <a:bodyPr wrap="square" lIns="0" tIns="0" rIns="0" bIns="0" rtlCol="0" anchor="ctr"/>
+          <a:lstStyle/>
+          <a:p>
+            <a:pPr indent="0" marL="0">
+              <a:buNone/>
+            </a:pPr>
+            <a:r>
+              <a:rPr lang="en-US" sz="900" b="1" spc="150" kern="0" dirty="0">
+                <a:solidFill>
+                  <a:srgbClr val="B04A2F"/>
+                </a:solidFill>
+                <a:latin typeface="Yu Gothic" pitchFamily="34" charset="0"/>
+                <a:ea typeface="Yu Gothic" pitchFamily="34" charset="-122"/>
+                <a:cs typeface="Yu Gothic" pitchFamily="34" charset="-120"/>
+              </a:rPr>
+              <a:t>他社では</a:t>
+            </a:r>
+            <a:endParaRPr lang="en-US" sz="900" dirty="0"/>
+          </a:p>
+        </p:txBody>
+      </p:sp>
+      <p:sp>
+        <p:nvSpPr>
+          <p:cNvPr id="8" name="Text 6"/>
+          <p:cNvSpPr txBox="1"/>
+          <p:nvPr/>
+        </p:nvSpPr>
+        <p:spPr>
+          <a:xfrm>
+            <a:off x="1051560" y="5029200"/>
+            <a:ext cx="10058400" cy="566928"/>
+          </a:xfrm>
+          <a:prstGeom prst="rect">
+            <a:avLst/>
+          </a:prstGeom>
+          <a:noFill/>
+          <a:ln/>
+        </p:spPr>
+        <p:txBody>
+          <a:bodyPr wrap="square" lIns="0" tIns="0" rIns="0" bIns="0" rtlCol="0" anchor="ctr"/>
+          <a:lstStyle/>
+          <a:p>
+            <a:pPr indent="0" marL="0">
+              <a:lnSpc>
+                <a:spcPct val="130000"/>
+              </a:lnSpc>
+              <a:buNone/>
+            </a:pPr>
+            <a:r>
+              <a:rPr lang="en-US" sz="1250" dirty="0">
+                <a:solidFill>
+                  <a:srgbClr val="3F3933"/>
+                </a:solidFill>
+                <a:latin typeface="Yu Gothic" pitchFamily="34" charset="0"/>
+                <a:ea typeface="Yu Gothic" pitchFamily="34" charset="-122"/>
+                <a:cs typeface="Yu Gothic" pitchFamily="34" charset="-120"/>
+              </a:rPr>
+              <a:t>ある会社では、社長のカスタム指示に「当社は◯◯を売っている／顧客は△△／敬語は硬めに」の3行を入れただけで、以後の全会話の手直しが半分になりました。</a:t>
+            </a:r>
+            <a:endParaRPr lang="en-US" sz="1250" dirty="0"/>
+          </a:p>
+        </p:txBody>
+      </p:sp>
+      <p:sp>
+        <p:nvSpPr>
+          <p:cNvPr id="9" name="Text 7"/>
+          <p:cNvSpPr txBox="1"/>
+          <p:nvPr/>
+        </p:nvSpPr>
+        <p:spPr>
+          <a:xfrm>
+            <a:off x="777240" y="6382512"/>
+            <a:ext cx="7424928" cy="256032"/>
+          </a:xfrm>
+          <a:prstGeom prst="rect">
+            <a:avLst/>
+          </a:prstGeom>
+          <a:noFill/>
+          <a:ln/>
+        </p:spPr>
+        <p:txBody>
+          <a:bodyPr wrap="square" lIns="0" tIns="0" rIns="0" bIns="0" rtlCol="0" anchor="ctr"/>
+          <a:lstStyle/>
+          <a:p>
+            <a:pPr indent="0" marL="0">
+              <a:buNone/>
+            </a:pPr>
+            <a:r>
+              <a:rPr lang="en-US" sz="900" dirty="0">
+                <a:solidFill>
+                  <a:srgbClr val="8A8177"/>
+                </a:solidFill>
+                <a:latin typeface="Yu Gothic" pitchFamily="34" charset="0"/>
+                <a:ea typeface="Yu Gothic" pitchFamily="34" charset="-122"/>
+                <a:cs typeface="Yu Gothic" pitchFamily="34" charset="-120"/>
+              </a:rPr>
+              <a:t>第2回　今のChatGPTの使い方を作り直す</a:t>
+            </a:r>
+            <a:endParaRPr lang="en-US" sz="900" dirty="0"/>
+          </a:p>
+        </p:txBody>
+      </p:sp>
+      <p:sp>
+        <p:nvSpPr>
+          <p:cNvPr id="10" name="Text 8"/>
+          <p:cNvSpPr txBox="1"/>
+          <p:nvPr/>
+        </p:nvSpPr>
+        <p:spPr>
+          <a:xfrm>
+            <a:off x="8202168" y="6382512"/>
+            <a:ext cx="3182112" cy="256032"/>
+          </a:xfrm>
+          <a:prstGeom prst="rect">
+            <a:avLst/>
+          </a:prstGeom>
+          <a:noFill/>
+          <a:ln/>
+        </p:spPr>
+        <p:txBody>
+          <a:bodyPr wrap="square" lIns="0" tIns="0" rIns="0" bIns="0" rtlCol="0" anchor="ctr"/>
+          <a:lstStyle/>
+          <a:p>
+            <a:pPr algn="r" indent="0" marL="0">
+              <a:buNone/>
+            </a:pPr>
+            <a:r>
+              <a:rPr lang="en-US" sz="900" dirty="0">
+                <a:solidFill>
+                  <a:srgbClr val="8A8177"/>
+                </a:solidFill>
+                <a:latin typeface="Yu Gothic" pitchFamily="34" charset="0"/>
+                <a:ea typeface="Yu Gothic" pitchFamily="34" charset="-122"/>
+                <a:cs typeface="Yu Gothic" pitchFamily="34" charset="-120"/>
+              </a:rPr>
+              <a:t>ここだけは</a:t>
+            </a:r>
+            <a:endParaRPr lang="en-US" sz="900" dirty="0"/>
+          </a:p>
+        </p:txBody>
+      </p:sp>
+    </p:spTree>
+  </p:cSld>
+  <p:clrMapOvr>
+    <a:masterClrMapping/>
+  </p:clrMapOvr>
+</p:sld>
+</file>
+
+<file path=ppt/slides/slide14.xml><?xml version="1.0" encoding="utf-8"?>
+<p:sld xmlns:a="http://schemas.openxmlformats.org/drawingml/2006/main" xmlns:r="http://schemas.openxmlformats.org/officeDocument/2006/relationships" xmlns:p="http://schemas.openxmlformats.org/presentationml/2006/main">
+  <p:cSld name="Slide 14">
+    <p:bg>
+      <p:bgPr>
+        <a:solidFill>
+          <a:srgbClr val="F6F2EA"/>
+        </a:solidFill>
+      </p:bgPr>
+    </p:bg>
+    <p:spTree>
+      <p:nvGrpSpPr>
+        <p:cNvPr id="1" name=""/>
+        <p:cNvGrpSpPr/>
+        <p:nvPr/>
+      </p:nvGrpSpPr>
+      <p:grpSpPr>
+        <a:xfrm>
+          <a:off x="0" y="0"/>
+          <a:ext cx="0" cy="0"/>
+          <a:chOff x="0" y="0"/>
+          <a:chExt cx="0" cy="0"/>
+        </a:xfrm>
+      </p:grpSpPr>
+      <p:sp>
+        <p:nvSpPr>
+          <p:cNvPr id="2" name="Text 0"/>
+          <p:cNvSpPr txBox="1"/>
+          <p:nvPr/>
+        </p:nvSpPr>
+        <p:spPr>
+          <a:xfrm>
+            <a:off x="777240" y="566928"/>
+            <a:ext cx="10607040" cy="274320"/>
+          </a:xfrm>
+          <a:prstGeom prst="rect">
+            <a:avLst/>
+          </a:prstGeom>
+          <a:noFill/>
+          <a:ln/>
+        </p:spPr>
+        <p:txBody>
+          <a:bodyPr wrap="square" lIns="0" tIns="0" rIns="0" bIns="0" rtlCol="0" anchor="ctr"/>
+          <a:lstStyle/>
+          <a:p>
+            <a:pPr indent="0" marL="0">
+              <a:buNone/>
+            </a:pPr>
+            <a:r>
+              <a:rPr lang="en-US" sz="1100" b="1" spc="250" kern="0" dirty="0">
+                <a:solidFill>
+                  <a:srgbClr val="3B6B4A"/>
+                </a:solidFill>
+                <a:latin typeface="Yu Gothic" pitchFamily="34" charset="0"/>
+                <a:ea typeface="Yu Gothic" pitchFamily="34" charset="-122"/>
+                <a:cs typeface="Yu Gothic" pitchFamily="34" charset="-120"/>
+              </a:rPr>
+              <a:t>次回まで</a:t>
+            </a:r>
+            <a:endParaRPr lang="en-US" sz="1100" dirty="0"/>
+          </a:p>
+        </p:txBody>
+      </p:sp>
+      <p:sp>
+        <p:nvSpPr>
+          <p:cNvPr id="3" name="Text 1"/>
+          <p:cNvSpPr txBox="1"/>
+          <p:nvPr/>
+        </p:nvSpPr>
+        <p:spPr>
+          <a:xfrm>
+            <a:off x="777240" y="896112"/>
+            <a:ext cx="10607040" cy="640080"/>
+          </a:xfrm>
+          <a:prstGeom prst="rect">
+            <a:avLst/>
+          </a:prstGeom>
+          <a:noFill/>
+          <a:ln/>
+        </p:spPr>
+        <p:txBody>
+          <a:bodyPr wrap="square" lIns="0" tIns="0" rIns="0" bIns="0" rtlCol="0" anchor="ctr"/>
+          <a:lstStyle/>
+          <a:p>
+            <a:pPr indent="0" marL="0">
+              <a:buNone/>
+            </a:pPr>
+            <a:r>
+              <a:rPr lang="en-US" sz="2600" b="1" dirty="0">
+                <a:solidFill>
+                  <a:srgbClr val="23201D"/>
+                </a:solidFill>
+                <a:latin typeface="Yu Gothic" pitchFamily="34" charset="0"/>
+                <a:ea typeface="Yu Gothic" pitchFamily="34" charset="-122"/>
+                <a:cs typeface="Yu Gothic" pitchFamily="34" charset="-120"/>
+              </a:rPr>
+              <a:t>次回は「文書とコミュニケーションのAI化」</a:t>
+            </a:r>
+            <a:endParaRPr lang="en-US" sz="2600" dirty="0"/>
+          </a:p>
+        </p:txBody>
+      </p:sp>
+      <p:sp>
+        <p:nvSpPr>
+          <p:cNvPr id="4" name="Text 2"/>
+          <p:cNvSpPr txBox="1"/>
+          <p:nvPr/>
+        </p:nvSpPr>
+        <p:spPr>
+          <a:xfrm>
+            <a:off x="777240" y="1572768"/>
+            <a:ext cx="9546336" cy="457200"/>
+          </a:xfrm>
+          <a:prstGeom prst="rect">
+            <a:avLst/>
+          </a:prstGeom>
+          <a:noFill/>
+          <a:ln/>
+        </p:spPr>
+        <p:txBody>
+          <a:bodyPr wrap="square" lIns="0" tIns="0" rIns="0" bIns="0" rtlCol="0" anchor="ctr"/>
+          <a:lstStyle/>
+          <a:p>
+            <a:pPr indent="0" marL="0">
+              <a:buNone/>
+            </a:pPr>
+            <a:r>
+              <a:rPr lang="en-US" sz="1400" b="1" dirty="0">
+                <a:solidFill>
+                  <a:srgbClr val="3B6B4A"/>
+                </a:solidFill>
+                <a:latin typeface="Yu Gothic" pitchFamily="34" charset="0"/>
+                <a:ea typeface="Yu Gothic" pitchFamily="34" charset="-122"/>
+                <a:cs typeface="Yu Gothic" pitchFamily="34" charset="-120"/>
+              </a:rPr>
+              <a:t>次回から、成果物の宛先が変わります。社長ご自身ではなく、社員の方が使うものを作ります。</a:t>
+            </a:r>
+            <a:endParaRPr lang="en-US" sz="1400" dirty="0"/>
+          </a:p>
+        </p:txBody>
+      </p:sp>
+      <p:sp>
+        <p:nvSpPr>
+          <p:cNvPr id="5" name="Shape 3"/>
+          <p:cNvSpPr/>
+          <p:nvPr/>
+        </p:nvSpPr>
+        <p:spPr>
+          <a:xfrm>
+            <a:off x="777240" y="2240280"/>
+            <a:ext cx="4985309" cy="2286000"/>
+          </a:xfrm>
+          <a:prstGeom prst="rect">
+            <a:avLst/>
+          </a:prstGeom>
+          <a:solidFill>
+            <a:srgbClr val="FFFFFF"/>
+          </a:solidFill>
+          <a:ln w="12700">
+            <a:solidFill>
+              <a:srgbClr val="EDE7DB"/>
+            </a:solidFill>
+            <a:prstDash val="solid"/>
+          </a:ln>
+        </p:spPr>
+      </p:sp>
+      <p:sp>
+        <p:nvSpPr>
+          <p:cNvPr id="6" name="Text 4"/>
+          <p:cNvSpPr txBox="1"/>
+          <p:nvPr/>
+        </p:nvSpPr>
+        <p:spPr>
+          <a:xfrm>
+            <a:off x="1051560" y="2377440"/>
+            <a:ext cx="4242816" cy="274320"/>
+          </a:xfrm>
+          <a:prstGeom prst="rect">
+            <a:avLst/>
+          </a:prstGeom>
+          <a:noFill/>
+          <a:ln/>
+        </p:spPr>
+        <p:txBody>
+          <a:bodyPr wrap="square" lIns="0" tIns="0" rIns="0" bIns="0" rtlCol="0" anchor="ctr"/>
+          <a:lstStyle/>
+          <a:p>
+            <a:pPr indent="0" marL="0">
+              <a:buNone/>
+            </a:pPr>
+            <a:r>
+              <a:rPr lang="en-US" sz="1000" b="1" spc="150" kern="0" dirty="0">
+                <a:solidFill>
+                  <a:srgbClr val="B04A2F"/>
+                </a:solidFill>
+                <a:latin typeface="Yu Gothic" pitchFamily="34" charset="0"/>
+                <a:ea typeface="Yu Gothic" pitchFamily="34" charset="-122"/>
+                <a:cs typeface="Yu Gothic" pitchFamily="34" charset="-120"/>
+              </a:rPr>
+              <a:t>次回までにやること</a:t>
+            </a:r>
+            <a:endParaRPr lang="en-US" sz="1000" dirty="0"/>
+          </a:p>
+        </p:txBody>
+      </p:sp>
+      <p:sp>
+        <p:nvSpPr>
+          <p:cNvPr id="7" name="Text 5"/>
+          <p:cNvSpPr txBox="1"/>
+          <p:nvPr/>
+        </p:nvSpPr>
+        <p:spPr>
+          <a:xfrm>
+            <a:off x="1051560" y="2743200"/>
+            <a:ext cx="4436669" cy="1554480"/>
+          </a:xfrm>
+          <a:prstGeom prst="rect">
+            <a:avLst/>
+          </a:prstGeom>
+          <a:noFill/>
+          <a:ln/>
+        </p:spPr>
+        <p:txBody>
+          <a:bodyPr wrap="square" lIns="0" tIns="0" rIns="0" bIns="0" rtlCol="0" anchor="ctr"/>
+          <a:lstStyle/>
+          <a:p>
+            <a:pPr indent="0" marL="0">
+              <a:lnSpc>
+                <a:spcPct val="140000"/>
+              </a:lnSpc>
+              <a:buNone/>
+            </a:pPr>
+            <a:r>
+              <a:rPr lang="en-US" sz="1400" dirty="0">
+                <a:solidFill>
+                  <a:srgbClr val="23201D"/>
+                </a:solidFill>
+                <a:latin typeface="Yu Gothic" pitchFamily="34" charset="0"/>
+                <a:ea typeface="Yu Gothic" pitchFamily="34" charset="-122"/>
+                <a:cs typeface="Yu Gothic" pitchFamily="34" charset="-120"/>
+              </a:rPr>
+              <a:t>1週間、その業務は必ず箱の中でやる。新しい会話を開かない</a:t>
+            </a:r>
+            <a:endParaRPr lang="en-US" sz="1400" dirty="0"/>
+          </a:p>
+        </p:txBody>
+      </p:sp>
+      <p:sp>
+        <p:nvSpPr>
+          <p:cNvPr id="8" name="Shape 6"/>
+          <p:cNvSpPr/>
+          <p:nvPr/>
+        </p:nvSpPr>
+        <p:spPr>
+          <a:xfrm>
+            <a:off x="6398971" y="2240280"/>
+            <a:ext cx="4985309" cy="2286000"/>
+          </a:xfrm>
+          <a:prstGeom prst="rect">
+            <a:avLst/>
+          </a:prstGeom>
+          <a:solidFill>
+            <a:srgbClr val="FFFFFF"/>
+          </a:solidFill>
+          <a:ln w="12700">
+            <a:solidFill>
+              <a:srgbClr val="EDE7DB"/>
+            </a:solidFill>
+            <a:prstDash val="solid"/>
+          </a:ln>
+        </p:spPr>
+      </p:sp>
+      <p:sp>
+        <p:nvSpPr>
+          <p:cNvPr id="9" name="Text 7"/>
+          <p:cNvSpPr txBox="1"/>
+          <p:nvPr/>
+        </p:nvSpPr>
+        <p:spPr>
+          <a:xfrm>
+            <a:off x="6673291" y="2377440"/>
+            <a:ext cx="4242816" cy="274320"/>
+          </a:xfrm>
+          <a:prstGeom prst="rect">
+            <a:avLst/>
+          </a:prstGeom>
+          <a:noFill/>
+          <a:ln/>
+        </p:spPr>
+        <p:txBody>
+          <a:bodyPr wrap="square" lIns="0" tIns="0" rIns="0" bIns="0" rtlCol="0" anchor="ctr"/>
+          <a:lstStyle/>
+          <a:p>
+            <a:pPr indent="0" marL="0">
+              <a:buNone/>
+            </a:pPr>
+            <a:r>
+              <a:rPr lang="en-US" sz="1000" b="1" spc="150" kern="0" dirty="0">
+                <a:solidFill>
+                  <a:srgbClr val="3B6B4A"/>
+                </a:solidFill>
+                <a:latin typeface="Yu Gothic" pitchFamily="34" charset="0"/>
+                <a:ea typeface="Yu Gothic" pitchFamily="34" charset="-122"/>
+                <a:cs typeface="Yu Gothic" pitchFamily="34" charset="-120"/>
+              </a:rPr>
+              <a:t>次回の持ち物</a:t>
+            </a:r>
+            <a:endParaRPr lang="en-US" sz="1000" dirty="0"/>
+          </a:p>
+        </p:txBody>
+      </p:sp>
+      <p:sp>
+        <p:nvSpPr>
+          <p:cNvPr id="10" name="Text 8"/>
+          <p:cNvSpPr txBox="1"/>
+          <p:nvPr/>
+        </p:nvSpPr>
+        <p:spPr>
+          <a:xfrm>
+            <a:off x="6673291" y="2743200"/>
+            <a:ext cx="4436669" cy="694944"/>
+          </a:xfrm>
+          <a:prstGeom prst="rect">
+            <a:avLst/>
+          </a:prstGeom>
+          <a:noFill/>
+          <a:ln/>
+        </p:spPr>
+        <p:txBody>
+          <a:bodyPr wrap="square" lIns="0" tIns="0" rIns="0" bIns="0" rtlCol="0" anchor="ctr"/>
+          <a:lstStyle/>
+          <a:p>
+            <a:pPr indent="0" marL="0">
+              <a:lnSpc>
+                <a:spcPct val="130000"/>
+              </a:lnSpc>
+              <a:buNone/>
+            </a:pPr>
+            <a:r>
+              <a:rPr lang="en-US" sz="1250" dirty="0">
+                <a:solidFill>
+                  <a:srgbClr val="23201D"/>
+                </a:solidFill>
+                <a:latin typeface="Yu Gothic" pitchFamily="34" charset="0"/>
+                <a:ea typeface="Yu Gothic" pitchFamily="34" charset="-122"/>
+                <a:cs typeface="Yu Gothic" pitchFamily="34" charset="-120"/>
+              </a:rPr>
+              <a:t>・社内で量の多い文書3種の実物</a:t>
+            </a:r>
+            <a:endParaRPr lang="en-US" sz="1250" dirty="0"/>
+          </a:p>
+        </p:txBody>
+      </p:sp>
+      <p:sp>
+        <p:nvSpPr>
+          <p:cNvPr id="11" name="Text 9"/>
+          <p:cNvSpPr txBox="1"/>
+          <p:nvPr/>
+        </p:nvSpPr>
+        <p:spPr>
+          <a:xfrm>
+            <a:off x="6673291" y="3474720"/>
+            <a:ext cx="4436669" cy="694944"/>
+          </a:xfrm>
+          <a:prstGeom prst="rect">
+            <a:avLst/>
+          </a:prstGeom>
+          <a:noFill/>
+          <a:ln/>
+        </p:spPr>
+        <p:txBody>
+          <a:bodyPr wrap="square" lIns="0" tIns="0" rIns="0" bIns="0" rtlCol="0" anchor="ctr"/>
+          <a:lstStyle/>
+          <a:p>
+            <a:pPr indent="0" marL="0">
+              <a:lnSpc>
+                <a:spcPct val="130000"/>
+              </a:lnSpc>
+              <a:buNone/>
+            </a:pPr>
+            <a:r>
+              <a:rPr lang="en-US" sz="1250" dirty="0">
+                <a:solidFill>
+                  <a:srgbClr val="23201D"/>
+                </a:solidFill>
+                <a:latin typeface="Yu Gothic" pitchFamily="34" charset="0"/>
+                <a:ea typeface="Yu Gothic" pitchFamily="34" charset="-122"/>
+                <a:cs typeface="Yu Gothic" pitchFamily="34" charset="-120"/>
+              </a:rPr>
+              <a:t>・最初に渡す社員の方を1名決めておく</a:t>
+            </a:r>
+            <a:endParaRPr lang="en-US" sz="1250" dirty="0"/>
+          </a:p>
+        </p:txBody>
+      </p:sp>
+      <p:sp>
+        <p:nvSpPr>
+          <p:cNvPr id="12" name="Shape 10"/>
+          <p:cNvSpPr/>
+          <p:nvPr/>
+        </p:nvSpPr>
+        <p:spPr>
+          <a:xfrm>
+            <a:off x="777240" y="4800600"/>
+            <a:ext cx="10607040" cy="777240"/>
+          </a:xfrm>
+          <a:prstGeom prst="rect">
+            <a:avLst/>
+          </a:prstGeom>
+          <a:solidFill>
+            <a:srgbClr val="EDE7DB"/>
+          </a:solidFill>
+          <a:ln w="12700">
+            <a:solidFill>
+              <a:srgbClr val="333333"/>
+            </a:solidFill>
+            <a:prstDash val="solid"/>
+          </a:ln>
+        </p:spPr>
+      </p:sp>
+      <p:sp>
+        <p:nvSpPr>
+          <p:cNvPr id="13" name="Text 11"/>
+          <p:cNvSpPr txBox="1"/>
+          <p:nvPr/>
+        </p:nvSpPr>
+        <p:spPr>
+          <a:xfrm>
+            <a:off x="1097280" y="4800600"/>
+            <a:ext cx="9966960" cy="777240"/>
+          </a:xfrm>
+          <a:prstGeom prst="rect">
+            <a:avLst/>
+          </a:prstGeom>
+          <a:noFill/>
+          <a:ln/>
+        </p:spPr>
+        <p:txBody>
+          <a:bodyPr wrap="square" lIns="0" tIns="0" rIns="0" bIns="0" rtlCol="0" anchor="ctr"/>
+          <a:lstStyle/>
+          <a:p>
+            <a:pPr indent="0" marL="0">
+              <a:buNone/>
+            </a:pPr>
+            <a:r>
+              <a:rPr lang="en-US" sz="1250" dirty="0">
+                <a:solidFill>
+                  <a:srgbClr val="5A534A"/>
+                </a:solidFill>
+                <a:latin typeface="Yu Gothic" pitchFamily="34" charset="0"/>
+                <a:ea typeface="Yu Gothic" pitchFamily="34" charset="-122"/>
+                <a:cs typeface="Yu Gothic" pitchFamily="34" charset="-120"/>
+              </a:rPr>
+              <a:t>この内容は、次回の3日前にあらためてお送りします。</a:t>
+            </a:r>
+            <a:endParaRPr lang="en-US" sz="1250" dirty="0"/>
+          </a:p>
+        </p:txBody>
+      </p:sp>
+      <p:sp>
+        <p:nvSpPr>
+          <p:cNvPr id="14" name="Text 12"/>
+          <p:cNvSpPr txBox="1"/>
+          <p:nvPr/>
+        </p:nvSpPr>
+        <p:spPr>
+          <a:xfrm>
+            <a:off x="777240" y="6382512"/>
+            <a:ext cx="7424928" cy="256032"/>
+          </a:xfrm>
+          <a:prstGeom prst="rect">
+            <a:avLst/>
+          </a:prstGeom>
+          <a:noFill/>
+          <a:ln/>
+        </p:spPr>
+        <p:txBody>
+          <a:bodyPr wrap="square" lIns="0" tIns="0" rIns="0" bIns="0" rtlCol="0" anchor="ctr"/>
+          <a:lstStyle/>
+          <a:p>
+            <a:pPr indent="0" marL="0">
+              <a:buNone/>
+            </a:pPr>
+            <a:r>
+              <a:rPr lang="en-US" sz="900" dirty="0">
+                <a:solidFill>
+                  <a:srgbClr val="8A8177"/>
+                </a:solidFill>
+                <a:latin typeface="Yu Gothic" pitchFamily="34" charset="0"/>
+                <a:ea typeface="Yu Gothic" pitchFamily="34" charset="-122"/>
+                <a:cs typeface="Yu Gothic" pitchFamily="34" charset="-120"/>
+              </a:rPr>
+              <a:t>第2回　今のChatGPTの使い方を作り直す</a:t>
+            </a:r>
+            <a:endParaRPr lang="en-US" sz="900" dirty="0"/>
+          </a:p>
+        </p:txBody>
+      </p:sp>
+      <p:sp>
+        <p:nvSpPr>
+          <p:cNvPr id="15" name="Text 13"/>
+          <p:cNvSpPr txBox="1"/>
+          <p:nvPr/>
+        </p:nvSpPr>
+        <p:spPr>
+          <a:xfrm>
+            <a:off x="8202168" y="6382512"/>
+            <a:ext cx="3182112" cy="256032"/>
+          </a:xfrm>
+          <a:prstGeom prst="rect">
+            <a:avLst/>
+          </a:prstGeom>
+          <a:noFill/>
+          <a:ln/>
+        </p:spPr>
+        <p:txBody>
+          <a:bodyPr wrap="square" lIns="0" tIns="0" rIns="0" bIns="0" rtlCol="0" anchor="ctr"/>
+          <a:lstStyle/>
+          <a:p>
+            <a:pPr algn="r" indent="0" marL="0">
+              <a:buNone/>
+            </a:pPr>
+            <a:r>
+              <a:rPr lang="en-US" sz="900" dirty="0">
+                <a:solidFill>
+                  <a:srgbClr val="8A8177"/>
+                </a:solidFill>
+                <a:latin typeface="Yu Gothic" pitchFamily="34" charset="0"/>
+                <a:ea typeface="Yu Gothic" pitchFamily="34" charset="-122"/>
+                <a:cs typeface="Yu Gothic" pitchFamily="34" charset="-120"/>
+              </a:rPr>
+              <a:t>次回まで</a:t>
+            </a:r>
+            <a:endParaRPr lang="en-US" sz="900" dirty="0"/>
+          </a:p>
+        </p:txBody>
+      </p:sp>
+    </p:spTree>
+  </p:cSld>
+  <p:clrMapOvr>
+    <a:masterClrMapping/>
+  </p:clrMapOvr>
+</p:sld>
+</file>
+
+<file path=ppt/slides/slide15.xml><?xml version="1.0" encoding="utf-8"?>
+<p:sld xmlns:a="http://schemas.openxmlformats.org/drawingml/2006/main" xmlns:r="http://schemas.openxmlformats.org/officeDocument/2006/relationships" xmlns:p="http://schemas.openxmlformats.org/presentationml/2006/main">
+  <p:cSld name="Slide 15">
     <p:bg>
       <p:bgPr>
         <a:solidFill>
@@ -8644,13 +10822,13 @@
             <a:r>
               <a:rPr lang="en-US" sz="1100" b="1" spc="250" kern="0" dirty="0">
                 <a:solidFill>
-                  <a:srgbClr val="2F4F6B"/>
-                </a:solidFill>
-                <a:latin typeface="Yu Gothic" pitchFamily="34" charset="0"/>
-                <a:ea typeface="Yu Gothic" pitchFamily="34" charset="-122"/>
-                <a:cs typeface="Yu Gothic" pitchFamily="34" charset="-120"/>
-              </a:rPr>
-              <a:t>演習</a:t>
+                  <a:srgbClr val="B04A2F"/>
+                </a:solidFill>
+                <a:latin typeface="Yu Gothic" pitchFamily="34" charset="0"/>
+                <a:ea typeface="Yu Gothic" pitchFamily="34" charset="-122"/>
+                <a:cs typeface="Yu Gothic" pitchFamily="34" charset="-120"/>
+              </a:rPr>
+              <a:t>想定問答</a:t>
             </a:r>
             <a:endParaRPr lang="en-US" sz="1100" dirty="0"/>
           </a:p>
@@ -8689,7 +10867,7 @@
                 <a:ea typeface="Yu Gothic" pitchFamily="34" charset="-122"/>
                 <a:cs typeface="Yu Gothic" pitchFamily="34" charset="-120"/>
               </a:rPr>
-              <a:t>今日、一緒にやること</a:t>
+              <a:t>この回で、よく聞かれること</a:t>
             </a:r>
             <a:endParaRPr lang="en-US" sz="2600" dirty="0"/>
           </a:p>
@@ -8697,53 +10875,14 @@
       </p:sp>
       <p:sp>
         <p:nvSpPr>
-          <p:cNvPr id="4" name="Text 2"/>
-          <p:cNvSpPr txBox="1"/>
-          <p:nvPr/>
-        </p:nvSpPr>
-        <p:spPr>
-          <a:xfrm>
-            <a:off x="777240" y="1572768"/>
-            <a:ext cx="10607040" cy="320040"/>
-          </a:xfrm>
-          <a:prstGeom prst="rect">
-            <a:avLst/>
-          </a:prstGeom>
-          <a:noFill/>
-          <a:ln/>
-        </p:spPr>
-        <p:txBody>
-          <a:bodyPr wrap="square" lIns="0" tIns="0" rIns="0" bIns="0" rtlCol="0" anchor="ctr"/>
-          <a:lstStyle/>
-          <a:p>
-            <a:pPr indent="0" marL="0">
-              <a:buNone/>
-            </a:pPr>
-            <a:r>
-              <a:rPr lang="en-US" sz="1250" b="1" dirty="0">
-                <a:solidFill>
-                  <a:srgbClr val="2F4F6B"/>
-                </a:solidFill>
-                <a:latin typeface="Yu Gothic" pitchFamily="34" charset="0"/>
-                <a:ea typeface="Yu Gothic" pitchFamily="34" charset="-122"/>
-                <a:cs typeface="Yu Gothic" pitchFamily="34" charset="-120"/>
-              </a:rPr>
-              <a:t>55分。操作するのはご自身です。</a:t>
-            </a:r>
-            <a:endParaRPr lang="en-US" sz="1250" dirty="0"/>
-          </a:p>
-        </p:txBody>
-      </p:sp>
-      <p:sp>
-        <p:nvSpPr>
-          <p:cNvPr id="5" name="Shape 3"/>
+          <p:cNvPr id="4" name="Shape 2"/>
           <p:cNvSpPr/>
           <p:nvPr/>
         </p:nvSpPr>
         <p:spPr>
           <a:xfrm>
-            <a:off x="777240" y="2148840"/>
-            <a:ext cx="3383280" cy="2880360"/>
+            <a:off x="777240" y="1737360"/>
+            <a:ext cx="10607040" cy="1170432"/>
           </a:xfrm>
           <a:prstGeom prst="rect">
             <a:avLst/>
@@ -8761,16 +10900,16 @@
       </p:sp>
       <p:sp>
         <p:nvSpPr>
-          <p:cNvPr id="6" name="Shape 4"/>
+          <p:cNvPr id="5" name="Shape 3"/>
           <p:cNvSpPr/>
           <p:nvPr/>
         </p:nvSpPr>
         <p:spPr>
           <a:xfrm>
-            <a:off x="1051560" y="2395728"/>
-            <a:ext cx="438912" cy="438912"/>
-          </a:xfrm>
-          <a:prstGeom prst="ellipse">
+            <a:off x="777240" y="1737360"/>
+            <a:ext cx="54864" cy="1170432"/>
+          </a:xfrm>
+          <a:prstGeom prst="rect">
             <a:avLst/>
           </a:prstGeom>
           <a:solidFill>
@@ -8786,95 +10925,53 @@
       </p:sp>
       <p:sp>
         <p:nvSpPr>
+          <p:cNvPr id="6" name="Text 4"/>
+          <p:cNvSpPr txBox="1"/>
+          <p:nvPr/>
+        </p:nvSpPr>
+        <p:spPr>
+          <a:xfrm>
+            <a:off x="1097280" y="1828800"/>
+            <a:ext cx="9966960" cy="384048"/>
+          </a:xfrm>
+          <a:prstGeom prst="rect">
+            <a:avLst/>
+          </a:prstGeom>
+          <a:noFill/>
+          <a:ln/>
+        </p:spPr>
+        <p:txBody>
+          <a:bodyPr wrap="square" lIns="0" tIns="0" rIns="0" bIns="0" rtlCol="0" anchor="ctr"/>
+          <a:lstStyle/>
+          <a:p>
+            <a:pPr indent="0" marL="0">
+              <a:buNone/>
+            </a:pPr>
+            <a:r>
+              <a:rPr lang="en-US" sz="1400" b="1" dirty="0">
+                <a:solidFill>
+                  <a:srgbClr val="2F4F6B"/>
+                </a:solidFill>
+                <a:latin typeface="Yu Gothic" pitchFamily="34" charset="0"/>
+                <a:ea typeface="Yu Gothic" pitchFamily="34" charset="-122"/>
+                <a:cs typeface="Yu Gothic" pitchFamily="34" charset="-120"/>
+              </a:rPr>
+              <a:t>「毎回5要素を書くのは面倒では」</a:t>
+            </a:r>
+            <a:endParaRPr lang="en-US" sz="1400" dirty="0"/>
+          </a:p>
+        </p:txBody>
+      </p:sp>
+      <p:sp>
+        <p:nvSpPr>
           <p:cNvPr id="7" name="Text 5"/>
           <p:cNvSpPr txBox="1"/>
           <p:nvPr/>
         </p:nvSpPr>
         <p:spPr>
           <a:xfrm>
-            <a:off x="1051560" y="2395728"/>
-            <a:ext cx="438912" cy="438912"/>
-          </a:xfrm>
-          <a:prstGeom prst="rect">
-            <a:avLst/>
-          </a:prstGeom>
-          <a:noFill/>
-          <a:ln/>
-        </p:spPr>
-        <p:txBody>
-          <a:bodyPr wrap="square" lIns="0" tIns="0" rIns="0" bIns="0" rtlCol="0" anchor="ctr"/>
-          <a:lstStyle/>
-          <a:p>
-            <a:pPr algn="ctr" indent="0" marL="0">
-              <a:buNone/>
-            </a:pPr>
-            <a:r>
-              <a:rPr lang="en-US" sz="1300" b="1" dirty="0">
-                <a:solidFill>
-                  <a:srgbClr val="FFFFFF"/>
-                </a:solidFill>
-                <a:latin typeface="Yu Gothic" pitchFamily="34" charset="0"/>
-                <a:ea typeface="Yu Gothic" pitchFamily="34" charset="-122"/>
-                <a:cs typeface="Yu Gothic" pitchFamily="34" charset="-120"/>
-              </a:rPr>
-              <a:t>1</a:t>
-            </a:r>
-            <a:endParaRPr lang="en-US" sz="1300" dirty="0"/>
-          </a:p>
-        </p:txBody>
-      </p:sp>
-      <p:sp>
-        <p:nvSpPr>
-          <p:cNvPr id="8" name="Text 6"/>
-          <p:cNvSpPr txBox="1"/>
-          <p:nvPr/>
-        </p:nvSpPr>
-        <p:spPr>
-          <a:xfrm>
-            <a:off x="1051560" y="2944368"/>
-            <a:ext cx="2834640" cy="731520"/>
-          </a:xfrm>
-          <a:prstGeom prst="rect">
-            <a:avLst/>
-          </a:prstGeom>
-          <a:noFill/>
-          <a:ln/>
-        </p:spPr>
-        <p:txBody>
-          <a:bodyPr wrap="square" lIns="0" tIns="0" rIns="0" bIns="0" rtlCol="0" anchor="ctr"/>
-          <a:lstStyle/>
-          <a:p>
-            <a:pPr indent="0" marL="0">
-              <a:lnSpc>
-                <a:spcPct val="125000"/>
-              </a:lnSpc>
-              <a:buNone/>
-            </a:pPr>
-            <a:r>
-              <a:rPr lang="en-US" sz="1450" b="1" dirty="0">
-                <a:solidFill>
-                  <a:srgbClr val="23201D"/>
-                </a:solidFill>
-                <a:latin typeface="Yu Gothic" pitchFamily="34" charset="0"/>
-                <a:ea typeface="Yu Gothic" pitchFamily="34" charset="-122"/>
-                <a:cs typeface="Yu Gothic" pitchFamily="34" charset="-120"/>
-              </a:rPr>
-              <a:t>5要素で1本書く</a:t>
-            </a:r>
-            <a:endParaRPr lang="en-US" sz="1450" dirty="0"/>
-          </a:p>
-        </p:txBody>
-      </p:sp>
-      <p:sp>
-        <p:nvSpPr>
-          <p:cNvPr id="9" name="Text 7"/>
-          <p:cNvSpPr txBox="1"/>
-          <p:nvPr/>
-        </p:nvSpPr>
-        <p:spPr>
-          <a:xfrm>
-            <a:off x="1051560" y="3703320"/>
-            <a:ext cx="2834640" cy="1188720"/>
+            <a:off x="1097280" y="2231136"/>
+            <a:ext cx="9966960" cy="603504"/>
           </a:xfrm>
           <a:prstGeom prst="rect">
             <a:avLst/>
@@ -8893,30 +10990,30 @@
               <a:buNone/>
             </a:pPr>
             <a:r>
-              <a:rPr lang="en-US" sz="1150" dirty="0">
-                <a:solidFill>
-                  <a:srgbClr val="5A534A"/>
-                </a:solidFill>
-                <a:latin typeface="Yu Gothic" pitchFamily="34" charset="0"/>
-                <a:ea typeface="Yu Gothic" pitchFamily="34" charset="-122"/>
-                <a:cs typeface="Yu Gothic" pitchFamily="34" charset="-120"/>
-              </a:rPr>
-              <a:t>ご自身の実案件を題材に。講師は口頭で誘導し、入力はしません</a:t>
-            </a:r>
-            <a:endParaRPr lang="en-US" sz="1150" dirty="0"/>
-          </a:p>
-        </p:txBody>
-      </p:sp>
-      <p:sp>
-        <p:nvSpPr>
-          <p:cNvPr id="10" name="Shape 8"/>
+              <a:rPr lang="en-US" sz="1250" dirty="0">
+                <a:solidFill>
+                  <a:srgbClr val="3F3933"/>
+                </a:solidFill>
+                <a:latin typeface="Yu Gothic" pitchFamily="34" charset="0"/>
+                <a:ea typeface="Yu Gothic" pitchFamily="34" charset="-122"/>
+                <a:cs typeface="Yu Gothic" pitchFamily="34" charset="-120"/>
+              </a:rPr>
+              <a:t>毎回は書きません。5本作れば、あとは前提の数字を差し替えるだけです。今日その5本を作ります。</a:t>
+            </a:r>
+            <a:endParaRPr lang="en-US" sz="1250" dirty="0"/>
+          </a:p>
+        </p:txBody>
+      </p:sp>
+      <p:sp>
+        <p:nvSpPr>
+          <p:cNvPr id="8" name="Shape 6"/>
           <p:cNvSpPr/>
           <p:nvPr/>
         </p:nvSpPr>
         <p:spPr>
           <a:xfrm>
-            <a:off x="4389120" y="2148840"/>
-            <a:ext cx="3383280" cy="2880360"/>
+            <a:off x="777240" y="3035808"/>
+            <a:ext cx="10607040" cy="1170432"/>
           </a:xfrm>
           <a:prstGeom prst="rect">
             <a:avLst/>
@@ -8934,16 +11031,16 @@
       </p:sp>
       <p:sp>
         <p:nvSpPr>
-          <p:cNvPr id="11" name="Shape 9"/>
+          <p:cNvPr id="9" name="Shape 7"/>
           <p:cNvSpPr/>
           <p:nvPr/>
         </p:nvSpPr>
         <p:spPr>
           <a:xfrm>
-            <a:off x="4663440" y="2395728"/>
-            <a:ext cx="438912" cy="438912"/>
-          </a:xfrm>
-          <a:prstGeom prst="ellipse">
+            <a:off x="777240" y="3035808"/>
+            <a:ext cx="54864" cy="1170432"/>
+          </a:xfrm>
+          <a:prstGeom prst="rect">
             <a:avLst/>
           </a:prstGeom>
           <a:solidFill>
@@ -8959,95 +11056,53 @@
       </p:sp>
       <p:sp>
         <p:nvSpPr>
-          <p:cNvPr id="12" name="Text 10"/>
-          <p:cNvSpPr txBox="1"/>
-          <p:nvPr/>
-        </p:nvSpPr>
-        <p:spPr>
-          <a:xfrm>
-            <a:off x="4663440" y="2395728"/>
-            <a:ext cx="438912" cy="438912"/>
-          </a:xfrm>
-          <a:prstGeom prst="rect">
-            <a:avLst/>
-          </a:prstGeom>
-          <a:noFill/>
-          <a:ln/>
-        </p:spPr>
-        <p:txBody>
-          <a:bodyPr wrap="square" lIns="0" tIns="0" rIns="0" bIns="0" rtlCol="0" anchor="ctr"/>
-          <a:lstStyle/>
-          <a:p>
-            <a:pPr algn="ctr" indent="0" marL="0">
-              <a:buNone/>
-            </a:pPr>
-            <a:r>
-              <a:rPr lang="en-US" sz="1300" b="1" dirty="0">
-                <a:solidFill>
-                  <a:srgbClr val="FFFFFF"/>
-                </a:solidFill>
-                <a:latin typeface="Yu Gothic" pitchFamily="34" charset="0"/>
-                <a:ea typeface="Yu Gothic" pitchFamily="34" charset="-122"/>
-                <a:cs typeface="Yu Gothic" pitchFamily="34" charset="-120"/>
-              </a:rPr>
-              <a:t>2</a:t>
-            </a:r>
-            <a:endParaRPr lang="en-US" sz="1300" dirty="0"/>
-          </a:p>
-        </p:txBody>
-      </p:sp>
-      <p:sp>
-        <p:nvSpPr>
-          <p:cNvPr id="13" name="Text 11"/>
-          <p:cNvSpPr txBox="1"/>
-          <p:nvPr/>
-        </p:nvSpPr>
-        <p:spPr>
-          <a:xfrm>
-            <a:off x="4663440" y="2944368"/>
-            <a:ext cx="2834640" cy="731520"/>
-          </a:xfrm>
-          <a:prstGeom prst="rect">
-            <a:avLst/>
-          </a:prstGeom>
-          <a:noFill/>
-          <a:ln/>
-        </p:spPr>
-        <p:txBody>
-          <a:bodyPr wrap="square" lIns="0" tIns="0" rIns="0" bIns="0" rtlCol="0" anchor="ctr"/>
-          <a:lstStyle/>
-          <a:p>
-            <a:pPr indent="0" marL="0">
-              <a:lnSpc>
-                <a:spcPct val="125000"/>
-              </a:lnSpc>
-              <a:buNone/>
-            </a:pPr>
-            <a:r>
-              <a:rPr lang="en-US" sz="1450" b="1" dirty="0">
-                <a:solidFill>
-                  <a:srgbClr val="23201D"/>
-                </a:solidFill>
-                <a:latin typeface="Yu Gothic" pitchFamily="34" charset="0"/>
-                <a:ea typeface="Yu Gothic" pitchFamily="34" charset="-122"/>
-                <a:cs typeface="Yu Gothic" pitchFamily="34" charset="-120"/>
-              </a:rPr>
-              <a:t>前提を、設定に移す</a:t>
-            </a:r>
-            <a:endParaRPr lang="en-US" sz="1450" dirty="0"/>
-          </a:p>
-        </p:txBody>
-      </p:sp>
-      <p:sp>
-        <p:nvSpPr>
-          <p:cNvPr id="14" name="Text 12"/>
-          <p:cNvSpPr txBox="1"/>
-          <p:nvPr/>
-        </p:nvSpPr>
-        <p:spPr>
-          <a:xfrm>
-            <a:off x="4663440" y="3703320"/>
-            <a:ext cx="2834640" cy="1188720"/>
+          <p:cNvPr id="10" name="Text 8"/>
+          <p:cNvSpPr txBox="1"/>
+          <p:nvPr/>
+        </p:nvSpPr>
+        <p:spPr>
+          <a:xfrm>
+            <a:off x="1097280" y="3127248"/>
+            <a:ext cx="9966960" cy="384048"/>
+          </a:xfrm>
+          <a:prstGeom prst="rect">
+            <a:avLst/>
+          </a:prstGeom>
+          <a:noFill/>
+          <a:ln/>
+        </p:spPr>
+        <p:txBody>
+          <a:bodyPr wrap="square" lIns="0" tIns="0" rIns="0" bIns="0" rtlCol="0" anchor="ctr"/>
+          <a:lstStyle/>
+          <a:p>
+            <a:pPr indent="0" marL="0">
+              <a:buNone/>
+            </a:pPr>
+            <a:r>
+              <a:rPr lang="en-US" sz="1400" b="1" dirty="0">
+                <a:solidFill>
+                  <a:srgbClr val="2F4F6B"/>
+                </a:solidFill>
+                <a:latin typeface="Yu Gothic" pitchFamily="34" charset="0"/>
+                <a:ea typeface="Yu Gothic" pitchFamily="34" charset="-122"/>
+                <a:cs typeface="Yu Gothic" pitchFamily="34" charset="-120"/>
+              </a:rPr>
+              <a:t>「長く書けば書くほどいいのですか」</a:t>
+            </a:r>
+            <a:endParaRPr lang="en-US" sz="1400" dirty="0"/>
+          </a:p>
+        </p:txBody>
+      </p:sp>
+      <p:sp>
+        <p:nvSpPr>
+          <p:cNvPr id="11" name="Text 9"/>
+          <p:cNvSpPr txBox="1"/>
+          <p:nvPr/>
+        </p:nvSpPr>
+        <p:spPr>
+          <a:xfrm>
+            <a:off x="1097280" y="3529584"/>
+            <a:ext cx="9966960" cy="603504"/>
           </a:xfrm>
           <a:prstGeom prst="rect">
             <a:avLst/>
@@ -9066,30 +11121,30 @@
               <a:buNone/>
             </a:pPr>
             <a:r>
-              <a:rPr lang="en-US" sz="1150" dirty="0">
-                <a:solidFill>
-                  <a:srgbClr val="5A534A"/>
-                </a:solidFill>
-                <a:latin typeface="Yu Gothic" pitchFamily="34" charset="0"/>
-                <a:ea typeface="Yu Gothic" pitchFamily="34" charset="-122"/>
-                <a:cs typeface="Yu Gothic" pitchFamily="34" charset="-120"/>
-              </a:rPr>
-              <a:t>毎回書いている会社の説明を、全部の会話に自動で効く場所に入れます</a:t>
-            </a:r>
-            <a:endParaRPr lang="en-US" sz="1150" dirty="0"/>
-          </a:p>
-        </p:txBody>
-      </p:sp>
-      <p:sp>
-        <p:nvSpPr>
-          <p:cNvPr id="15" name="Shape 13"/>
+              <a:rPr lang="en-US" sz="1250" dirty="0">
+                <a:solidFill>
+                  <a:srgbClr val="3F3933"/>
+                </a:solidFill>
+                <a:latin typeface="Yu Gothic" pitchFamily="34" charset="0"/>
+                <a:ea typeface="Yu Gothic" pitchFamily="34" charset="-122"/>
+                <a:cs typeface="Yu Gothic" pitchFamily="34" charset="-120"/>
+              </a:rPr>
+              <a:t>違います。抜けている要素を足すのが効きます。長さではなく、判断材料が揃っているかどうかです。</a:t>
+            </a:r>
+            <a:endParaRPr lang="en-US" sz="1250" dirty="0"/>
+          </a:p>
+        </p:txBody>
+      </p:sp>
+      <p:sp>
+        <p:nvSpPr>
+          <p:cNvPr id="12" name="Shape 10"/>
           <p:cNvSpPr/>
           <p:nvPr/>
         </p:nvSpPr>
         <p:spPr>
           <a:xfrm>
-            <a:off x="8001000" y="2148840"/>
-            <a:ext cx="3383280" cy="2880360"/>
+            <a:off x="777240" y="4334256"/>
+            <a:ext cx="10607040" cy="1170432"/>
           </a:xfrm>
           <a:prstGeom prst="rect">
             <a:avLst/>
@@ -9107,16 +11162,16 @@
       </p:sp>
       <p:sp>
         <p:nvSpPr>
-          <p:cNvPr id="16" name="Shape 14"/>
+          <p:cNvPr id="13" name="Shape 11"/>
           <p:cNvSpPr/>
           <p:nvPr/>
         </p:nvSpPr>
         <p:spPr>
           <a:xfrm>
-            <a:off x="8275320" y="2395728"/>
-            <a:ext cx="438912" cy="438912"/>
-          </a:xfrm>
-          <a:prstGeom prst="ellipse">
+            <a:off x="777240" y="4334256"/>
+            <a:ext cx="54864" cy="1170432"/>
+          </a:xfrm>
+          <a:prstGeom prst="rect">
             <a:avLst/>
           </a:prstGeom>
           <a:solidFill>
@@ -9132,95 +11187,53 @@
       </p:sp>
       <p:sp>
         <p:nvSpPr>
-          <p:cNvPr id="17" name="Text 15"/>
-          <p:cNvSpPr txBox="1"/>
-          <p:nvPr/>
-        </p:nvSpPr>
-        <p:spPr>
-          <a:xfrm>
-            <a:off x="8275320" y="2395728"/>
-            <a:ext cx="438912" cy="438912"/>
-          </a:xfrm>
-          <a:prstGeom prst="rect">
-            <a:avLst/>
-          </a:prstGeom>
-          <a:noFill/>
-          <a:ln/>
-        </p:spPr>
-        <p:txBody>
-          <a:bodyPr wrap="square" lIns="0" tIns="0" rIns="0" bIns="0" rtlCol="0" anchor="ctr"/>
-          <a:lstStyle/>
-          <a:p>
-            <a:pPr algn="ctr" indent="0" marL="0">
-              <a:buNone/>
-            </a:pPr>
-            <a:r>
-              <a:rPr lang="en-US" sz="1300" b="1" dirty="0">
-                <a:solidFill>
-                  <a:srgbClr val="FFFFFF"/>
-                </a:solidFill>
-                <a:latin typeface="Yu Gothic" pitchFamily="34" charset="0"/>
-                <a:ea typeface="Yu Gothic" pitchFamily="34" charset="-122"/>
-                <a:cs typeface="Yu Gothic" pitchFamily="34" charset="-120"/>
-              </a:rPr>
-              <a:t>3</a:t>
-            </a:r>
-            <a:endParaRPr lang="en-US" sz="1300" dirty="0"/>
-          </a:p>
-        </p:txBody>
-      </p:sp>
-      <p:sp>
-        <p:nvSpPr>
-          <p:cNvPr id="18" name="Text 16"/>
-          <p:cNvSpPr txBox="1"/>
-          <p:nvPr/>
-        </p:nvSpPr>
-        <p:spPr>
-          <a:xfrm>
-            <a:off x="8275320" y="2944368"/>
-            <a:ext cx="2834640" cy="731520"/>
-          </a:xfrm>
-          <a:prstGeom prst="rect">
-            <a:avLst/>
-          </a:prstGeom>
-          <a:noFill/>
-          <a:ln/>
-        </p:spPr>
-        <p:txBody>
-          <a:bodyPr wrap="square" lIns="0" tIns="0" rIns="0" bIns="0" rtlCol="0" anchor="ctr"/>
-          <a:lstStyle/>
-          <a:p>
-            <a:pPr indent="0" marL="0">
-              <a:lnSpc>
-                <a:spcPct val="125000"/>
-              </a:lnSpc>
-              <a:buNone/>
-            </a:pPr>
-            <a:r>
-              <a:rPr lang="en-US" sz="1450" b="1" dirty="0">
-                <a:solidFill>
-                  <a:srgbClr val="23201D"/>
-                </a:solidFill>
-                <a:latin typeface="Yu Gothic" pitchFamily="34" charset="0"/>
-                <a:ea typeface="Yu Gothic" pitchFamily="34" charset="-122"/>
-                <a:cs typeface="Yu Gothic" pitchFamily="34" charset="-120"/>
-              </a:rPr>
-              <a:t>箱をつくって、5本ためる</a:t>
-            </a:r>
-            <a:endParaRPr lang="en-US" sz="1450" dirty="0"/>
-          </a:p>
-        </p:txBody>
-      </p:sp>
-      <p:sp>
-        <p:nvSpPr>
-          <p:cNvPr id="19" name="Text 17"/>
-          <p:cNvSpPr txBox="1"/>
-          <p:nvPr/>
-        </p:nvSpPr>
-        <p:spPr>
-          <a:xfrm>
-            <a:off x="8275320" y="3703320"/>
-            <a:ext cx="2834640" cy="1188720"/>
+          <p:cNvPr id="14" name="Text 12"/>
+          <p:cNvSpPr txBox="1"/>
+          <p:nvPr/>
+        </p:nvSpPr>
+        <p:spPr>
+          <a:xfrm>
+            <a:off x="1097280" y="4425696"/>
+            <a:ext cx="9966960" cy="384048"/>
+          </a:xfrm>
+          <a:prstGeom prst="rect">
+            <a:avLst/>
+          </a:prstGeom>
+          <a:noFill/>
+          <a:ln/>
+        </p:spPr>
+        <p:txBody>
+          <a:bodyPr wrap="square" lIns="0" tIns="0" rIns="0" bIns="0" rtlCol="0" anchor="ctr"/>
+          <a:lstStyle/>
+          <a:p>
+            <a:pPr indent="0" marL="0">
+              <a:buNone/>
+            </a:pPr>
+            <a:r>
+              <a:rPr lang="en-US" sz="1400" b="1" dirty="0">
+                <a:solidFill>
+                  <a:srgbClr val="2F4F6B"/>
+                </a:solidFill>
+                <a:latin typeface="Yu Gothic" pitchFamily="34" charset="0"/>
+                <a:ea typeface="Yu Gothic" pitchFamily="34" charset="-122"/>
+                <a:cs typeface="Yu Gothic" pitchFamily="34" charset="-120"/>
+              </a:rPr>
+              <a:t>「他の人が作った指示文を使ってもいいですか」</a:t>
+            </a:r>
+            <a:endParaRPr lang="en-US" sz="1400" dirty="0"/>
+          </a:p>
+        </p:txBody>
+      </p:sp>
+      <p:sp>
+        <p:nvSpPr>
+          <p:cNvPr id="15" name="Text 13"/>
+          <p:cNvSpPr txBox="1"/>
+          <p:nvPr/>
+        </p:nvSpPr>
+        <p:spPr>
+          <a:xfrm>
+            <a:off x="1097280" y="4828032"/>
+            <a:ext cx="9966960" cy="603504"/>
           </a:xfrm>
           <a:prstGeom prst="rect">
             <a:avLst/>
@@ -9239,23 +11252,23 @@
               <a:buNone/>
             </a:pPr>
             <a:r>
-              <a:rPr lang="en-US" sz="1150" dirty="0">
-                <a:solidFill>
-                  <a:srgbClr val="5A534A"/>
-                </a:solidFill>
-                <a:latin typeface="Yu Gothic" pitchFamily="34" charset="0"/>
-                <a:ea typeface="Yu Gothic" pitchFamily="34" charset="-122"/>
-                <a:cs typeface="Yu Gothic" pitchFamily="34" charset="-120"/>
-              </a:rPr>
-              <a:t>業務ごとの箱に資料と会話をまとめ、保存場所を決めます</a:t>
-            </a:r>
-            <a:endParaRPr lang="en-US" sz="1150" dirty="0"/>
-          </a:p>
-        </p:txBody>
-      </p:sp>
-      <p:sp>
-        <p:nvSpPr>
-          <p:cNvPr id="20" name="Text 18"/>
+              <a:rPr lang="en-US" sz="1250" dirty="0">
+                <a:solidFill>
+                  <a:srgbClr val="3F3933"/>
+                </a:solidFill>
+                <a:latin typeface="Yu Gothic" pitchFamily="34" charset="0"/>
+                <a:ea typeface="Yu Gothic" pitchFamily="34" charset="-122"/>
+                <a:cs typeface="Yu Gothic" pitchFamily="34" charset="-120"/>
+              </a:rPr>
+              <a:t>使えますが、前提が自社のものではないので、結局書き直すことになります。自社の前提を足すところが仕事です。</a:t>
+            </a:r>
+            <a:endParaRPr lang="en-US" sz="1250" dirty="0"/>
+          </a:p>
+        </p:txBody>
+      </p:sp>
+      <p:sp>
+        <p:nvSpPr>
+          <p:cNvPr id="16" name="Text 14"/>
           <p:cNvSpPr txBox="1"/>
           <p:nvPr/>
         </p:nvSpPr>
@@ -9294,7 +11307,7 @@
       </p:sp>
       <p:sp>
         <p:nvSpPr>
-          <p:cNvPr id="21" name="Text 19"/>
+          <p:cNvPr id="17" name="Text 15"/>
           <p:cNvSpPr txBox="1"/>
           <p:nvPr/>
         </p:nvSpPr>
@@ -9325,7 +11338,7 @@
                 <a:ea typeface="Yu Gothic" pitchFamily="34" charset="-122"/>
                 <a:cs typeface="Yu Gothic" pitchFamily="34" charset="-120"/>
               </a:rPr>
-              <a:t>演習</a:t>
+              <a:t>想定問答</a:t>
             </a:r>
             <a:endParaRPr lang="en-US" sz="900" dirty="0"/>
           </a:p>

--- a/slides/pptx/第02回_今のChatGPTの使い方を作り直す.pptx
+++ b/slides/pptx/第02回_今のChatGPTの使い方を作り直す.pptx
@@ -4604,7 +4604,7 @@
                 <a:ea typeface="Yu Gothic" pitchFamily="34" charset="-122"/>
                 <a:cs typeface="Yu Gothic" pitchFamily="34" charset="-120"/>
               </a:rPr>
-              <a:t>他社では</a:t>
+              <a:t>よくある型</a:t>
             </a:r>
             <a:endParaRPr lang="en-US" sz="900" dirty="0"/>
           </a:p>
@@ -4646,7 +4646,7 @@
                 <a:ea typeface="Yu Gothic" pitchFamily="34" charset="-122"/>
                 <a:cs typeface="Yu Gothic" pitchFamily="34" charset="-120"/>
               </a:rPr>
-              <a:t>ある会社では、社長のカスタム指示に「当社は◯◯を売っている／顧客は△△／敬語は硬めに」の3行を入れただけで、以後の全会話の手直しが半分になりました。</a:t>
+              <a:t>カスタム指示に「当社は何を売っているか／顧客は誰か／敬語の硬さ」の3行を入れるだけで、以後の手直しが目に見えて減る。効くのは長さではなく、毎回書いていた前提を1度で済ませること。</a:t>
             </a:r>
             <a:endParaRPr lang="en-US" sz="1250" dirty="0"/>
           </a:p>

--- a/slides/pptx/第02回_今のChatGPTの使い方を作り直す.pptx
+++ b/slides/pptx/第02回_今のChatGPTの使い方を作り直す.pptx
@@ -516,7 +516,7 @@
           <a:p>
             <a:r>
               <a:rPr lang="en-US" dirty="0"/>
-              <a:t>前回の宿題（指示文をもう一度使ったか）を確認してから表紙に入る。使っていなければ責めず、この場で一緒にやる。使っていた場合は、そのときの手応えを必ず聞く。ここが今日の導入になる。</a:t>
+              <a:t>前回の宿題（指示文をもう一度使ったか）を確認してから表紙に入る。使っていなければ責めず、この場で画面でお見せする。使っていた場合は、そのときの手応えを必ず聞く。ここが今日の導入になる。</a:t>
             </a:r>
             <a:endParaRPr lang="en-US" dirty="0"/>
           </a:p>
@@ -604,7 +604,7 @@
           <a:p>
             <a:r>
               <a:rPr lang="en-US" dirty="0"/>
-              <a:t>プロジェクトが無料プランで使えない場合は、ここで代替（前提ブロック）の名前を付けておくと以後の会話が楽になる。</a:t>
+              <a:t>プロジェクトは全プランで使える。全部の会話の前提はカスタム指示、業務ごとの前提はプロジェクトの指示、と置き場所の違いをここで一言添える。</a:t>
             </a:r>
             <a:endParaRPr lang="en-US" dirty="0"/>
           </a:p>
@@ -692,7 +692,7 @@
           <a:p>
             <a:r>
               <a:rPr lang="en-US" dirty="0"/>
-              <a:t>3ステップのうち、時間が足りなければ3つ目を削る。カスタム指示までは必ず終わらせる。ここが今日の分かれ目で、これがあるだけで次回以降の演習速度が変わる。</a:t>
+              <a:t>時間が足りなければ朝のまとめの予約を次回に回す。カスタム指示と頼み方1本の保存までは必ず見せる。朝のまとめはプロジェクトの外で作る（中で作ると資料を読めない）。</a:t>
             </a:r>
             <a:endParaRPr lang="en-US" dirty="0"/>
           </a:p>
@@ -780,7 +780,7 @@
           <a:p>
             <a:r>
               <a:rPr lang="en-US" dirty="0"/>
-              <a:t>保存場所は必ず開いて見せてもらう。「デスクトップのどこか」では次回見つからない。フォルダ名まで決める。</a:t>
+              <a:t>保存したプロジェクトを講師の画面で開き直して見せる。名前は業務名にして、次回すぐ見つかるようにする。</a:t>
             </a:r>
             <a:endParaRPr lang="en-US" dirty="0"/>
           </a:p>
@@ -1044,7 +1044,7 @@
           <a:p>
             <a:r>
               <a:rPr lang="en-US" dirty="0"/>
-              <a:t>「新しい会話を開かない」は制約に聞こえるが、実際にやると楽になることを伝える。1週間後に効果を聞くと、ほぼ全員が「探す時間が減った」と答える。</a:t>
+              <a:t>宿題は1回だけでよいと伝える。使う場面を今日のうちに1つ決めてもらう。次回の冒頭で、使ったときの手応えを必ず聞く。</a:t>
             </a:r>
             <a:endParaRPr lang="en-US" dirty="0"/>
           </a:p>
@@ -1572,7 +1572,7 @@
           <a:p>
             <a:r>
               <a:rPr lang="en-US" dirty="0"/>
-              <a:t>改善版を見せたあと、必ず受講者自身の手で再現させる。見ただけの人は翌週やらない。ここで1本できたら、それがプロンプト集の1本目になる。</a:t>
+              <a:t>改善版を見せたあと、受講者の実案件を題材に講師がもう1本書いて見せる。自分の案件だと翌週使われやすい。この1本を保存し、今日の宿題で使う頼み方にする。</a:t>
             </a:r>
             <a:endParaRPr lang="en-US" dirty="0"/>
           </a:p>
@@ -2304,6 +2304,10 @@
             <a:prstDash val="solid"/>
           </a:ln>
         </p:spPr>
+        <p:txBody>
+          <a:bodyPr/>
+          <a:p/>
+        </p:txBody>
       </p:sp>
       <p:sp>
         <p:nvSpPr>
@@ -2377,7 +2381,7 @@
                 <a:ea typeface="Yu Gothic" pitchFamily="34" charset="-122"/>
                 <a:cs typeface="Yu Gothic" pitchFamily="34" charset="-120"/>
               </a:rPr>
-              <a:t>自社の指示文 5本／カスタム指示／プロジェクト1つ</a:t>
+              <a:t>自社の頼み方1本／カスタム指示／毎朝のまとめ</a:t>
             </a:r>
             <a:endParaRPr lang="en-US" sz="1600" dirty="0"/>
           </a:p>
@@ -3068,7 +3072,7 @@
                 <a:ea typeface="Yu Gothic" pitchFamily="34" charset="-122"/>
                 <a:cs typeface="Yu Gothic" pitchFamily="34" charset="-120"/>
               </a:rPr>
-              <a:t>演習</a:t>
+              <a:t>実演</a:t>
             </a:r>
             <a:endParaRPr lang="en-US" sz="1100" dirty="0"/>
           </a:p>
@@ -3107,7 +3111,7 @@
                 <a:ea typeface="Yu Gothic" pitchFamily="34" charset="-122"/>
                 <a:cs typeface="Yu Gothic" pitchFamily="34" charset="-120"/>
               </a:rPr>
-              <a:t>今日、一緒にやること</a:t>
+              <a:t>今日、画面でお見せすること</a:t>
             </a:r>
             <a:endParaRPr lang="en-US" sz="2600" dirty="0"/>
           </a:p>
@@ -3146,7 +3150,7 @@
                 <a:ea typeface="Yu Gothic" pitchFamily="34" charset="-122"/>
                 <a:cs typeface="Yu Gothic" pitchFamily="34" charset="-120"/>
               </a:rPr>
-              <a:t>55分。操作するのはご自身です。</a:t>
+              <a:t>55分。講師の画面でお見せします。</a:t>
             </a:r>
             <a:endParaRPr lang="en-US" sz="1250" dirty="0"/>
           </a:p>
@@ -3176,6 +3180,10 @@
             <a:prstDash val="solid"/>
           </a:ln>
         </p:spPr>
+        <p:txBody>
+          <a:bodyPr/>
+          <a:p/>
+        </p:txBody>
       </p:sp>
       <p:sp>
         <p:nvSpPr>
@@ -3201,6 +3209,10 @@
             <a:prstDash val="solid"/>
           </a:ln>
         </p:spPr>
+        <p:txBody>
+          <a:bodyPr/>
+          <a:p/>
+        </p:txBody>
       </p:sp>
       <p:sp>
         <p:nvSpPr>
@@ -3319,7 +3331,7 @@
                 <a:ea typeface="Yu Gothic" pitchFamily="34" charset="-122"/>
                 <a:cs typeface="Yu Gothic" pitchFamily="34" charset="-120"/>
               </a:rPr>
-              <a:t>ご自身の実案件を題材に。講師は口頭で誘導し、入力はしません</a:t>
+              <a:t>ご自身の実案件を題材に、講師が画面で書いてお見せします</a:t>
             </a:r>
             <a:endParaRPr lang="en-US" sz="1150" dirty="0"/>
           </a:p>
@@ -3349,6 +3361,10 @@
             <a:prstDash val="solid"/>
           </a:ln>
         </p:spPr>
+        <p:txBody>
+          <a:bodyPr/>
+          <a:p/>
+        </p:txBody>
       </p:sp>
       <p:sp>
         <p:nvSpPr>
@@ -3374,6 +3390,10 @@
             <a:prstDash val="solid"/>
           </a:ln>
         </p:spPr>
+        <p:txBody>
+          <a:bodyPr/>
+          <a:p/>
+        </p:txBody>
       </p:sp>
       <p:sp>
         <p:nvSpPr>
@@ -3522,6 +3542,10 @@
             <a:prstDash val="solid"/>
           </a:ln>
         </p:spPr>
+        <p:txBody>
+          <a:bodyPr/>
+          <a:p/>
+        </p:txBody>
       </p:sp>
       <p:sp>
         <p:nvSpPr>
@@ -3547,6 +3571,10 @@
             <a:prstDash val="solid"/>
           </a:ln>
         </p:spPr>
+        <p:txBody>
+          <a:bodyPr/>
+          <a:p/>
+        </p:txBody>
       </p:sp>
       <p:sp>
         <p:nvSpPr>
@@ -3623,7 +3651,7 @@
                 <a:ea typeface="Yu Gothic" pitchFamily="34" charset="-122"/>
                 <a:cs typeface="Yu Gothic" pitchFamily="34" charset="-120"/>
               </a:rPr>
-              <a:t>箱をつくって、5本ためる</a:t>
+              <a:t>1本保存し、朝のまとめを予約</a:t>
             </a:r>
             <a:endParaRPr lang="en-US" sz="1450" dirty="0"/>
           </a:p>
@@ -3665,7 +3693,7 @@
                 <a:ea typeface="Yu Gothic" pitchFamily="34" charset="-122"/>
                 <a:cs typeface="Yu Gothic" pitchFamily="34" charset="-120"/>
               </a:rPr>
-              <a:t>業務ごとの箱に資料と会話をまとめ、保存場所を決めます</a:t>
+              <a:t>できた頼み方をプロジェクトに保存し、毎朝のまとめを予約します</a:t>
             </a:r>
             <a:endParaRPr lang="en-US" sz="1150" dirty="0"/>
           </a:p>
@@ -3743,7 +3771,7 @@
                 <a:ea typeface="Yu Gothic" pitchFamily="34" charset="-122"/>
                 <a:cs typeface="Yu Gothic" pitchFamily="34" charset="-120"/>
               </a:rPr>
-              <a:t>演習</a:t>
+              <a:t>実演</a:t>
             </a:r>
             <a:endParaRPr lang="en-US" sz="900" dirty="0"/>
           </a:p>
@@ -3922,6 +3950,10 @@
             <a:prstDash val="solid"/>
           </a:ln>
         </p:spPr>
+        <p:txBody>
+          <a:bodyPr/>
+          <a:p/>
+        </p:txBody>
       </p:sp>
       <p:sp>
         <p:nvSpPr>
@@ -3947,6 +3979,10 @@
             <a:prstDash val="solid"/>
           </a:ln>
         </p:spPr>
+        <p:txBody>
+          <a:bodyPr/>
+          <a:p/>
+        </p:txBody>
       </p:sp>
       <p:sp>
         <p:nvSpPr>
@@ -4023,7 +4059,7 @@
                 <a:ea typeface="Yu Gothic" pitchFamily="34" charset="-122"/>
                 <a:cs typeface="Yu Gothic" pitchFamily="34" charset="-120"/>
               </a:rPr>
-              <a:t>デスクトップかクラウドか。次に開く場所が決まっていないと使われません</a:t>
+              <a:t>ChatGPTのプロジェクトの中。次に開く場所が決まっていないと使われません</a:t>
             </a:r>
             <a:endParaRPr lang="en-US" sz="1250" dirty="0"/>
           </a:p>
@@ -4053,6 +4089,10 @@
             <a:prstDash val="solid"/>
           </a:ln>
         </p:spPr>
+        <p:txBody>
+          <a:bodyPr/>
+          <a:p/>
+        </p:txBody>
       </p:sp>
       <p:sp>
         <p:nvSpPr>
@@ -4078,6 +4118,10 @@
             <a:prstDash val="solid"/>
           </a:ln>
         </p:spPr>
+        <p:txBody>
+          <a:bodyPr/>
+          <a:p/>
+        </p:txBody>
       </p:sp>
       <p:sp>
         <p:nvSpPr>
@@ -4184,6 +4228,10 @@
             <a:prstDash val="solid"/>
           </a:ln>
         </p:spPr>
+        <p:txBody>
+          <a:bodyPr/>
+          <a:p/>
+        </p:txBody>
       </p:sp>
       <p:sp>
         <p:nvSpPr>
@@ -4209,6 +4257,10 @@
             <a:prstDash val="solid"/>
           </a:ln>
         </p:spPr>
+        <p:txBody>
+          <a:bodyPr/>
+          <a:p/>
+        </p:txBody>
       </p:sp>
       <p:sp>
         <p:nvSpPr>
@@ -4473,7 +4525,7 @@
                 <a:ea typeface="Yu Gothic" pitchFamily="34" charset="-122"/>
                 <a:cs typeface="Yu Gothic" pitchFamily="34" charset="-120"/>
               </a:rPr>
-              <a:t>講師が代わりに入力しないこと</a:t>
+              <a:t>画面は講師が動かし、一手ずつ見せること</a:t>
             </a:r>
             <a:endParaRPr lang="en-US" sz="2600" dirty="0"/>
           </a:p>
@@ -4503,6 +4555,10 @@
             <a:prstDash val="solid"/>
           </a:ln>
         </p:spPr>
+        <p:txBody>
+          <a:bodyPr/>
+          <a:p/>
+        </p:txBody>
       </p:sp>
       <p:sp>
         <p:nvSpPr>
@@ -4540,7 +4596,7 @@
                 <a:ea typeface="Yu Gothic" pitchFamily="34" charset="-122"/>
                 <a:cs typeface="Yu Gothic" pitchFamily="34" charset="-120"/>
               </a:rPr>
-              <a:t>1対1では「見ていて歯がゆい」場面が必ず来ます。そこで手を出すと、受講者は自分で書けるようになりません。待つのが仕事だと割り切ってください。操作を代わった瞬間、その技能は受講者に残りません。</a:t>
+              <a:t>基本は講師が画面を動かし、今どこを押しているかを一手ずつ声に出して見せます。受講者の方が「自分でも触りたい」と言ったときだけ、同じ画面を開いてもらいます。1操作ごとに画面の変化を確かめてから次へ進みます。</a:t>
             </a:r>
             <a:endParaRPr lang="en-US" sz="1650" dirty="0"/>
           </a:p>
@@ -4570,6 +4626,10 @@
             <a:prstDash val="solid"/>
           </a:ln>
         </p:spPr>
+        <p:txBody>
+          <a:bodyPr/>
+          <a:p/>
+        </p:txBody>
       </p:sp>
       <p:sp>
         <p:nvSpPr>
@@ -4903,6 +4963,10 @@
             <a:prstDash val="solid"/>
           </a:ln>
         </p:spPr>
+        <p:txBody>
+          <a:bodyPr/>
+          <a:p/>
+        </p:txBody>
       </p:sp>
       <p:sp>
         <p:nvSpPr>
@@ -4979,7 +5043,7 @@
                 <a:ea typeface="Yu Gothic" pitchFamily="34" charset="-122"/>
                 <a:cs typeface="Yu Gothic" pitchFamily="34" charset="-120"/>
               </a:rPr>
-              <a:t>1週間、その業務は必ず箱の中でやる。新しい会話を開かない</a:t>
+              <a:t>今日作った頼み方を、今週1回、実際の仕事で使ってみる</a:t>
             </a:r>
             <a:endParaRPr lang="en-US" sz="1400" dirty="0"/>
           </a:p>
@@ -5009,6 +5073,10 @@
             <a:prstDash val="solid"/>
           </a:ln>
         </p:spPr>
+        <p:txBody>
+          <a:bodyPr/>
+          <a:p/>
+        </p:txBody>
       </p:sp>
       <p:sp>
         <p:nvSpPr>
@@ -5157,6 +5225,10 @@
             <a:prstDash val="solid"/>
           </a:ln>
         </p:spPr>
+        <p:txBody>
+          <a:bodyPr/>
+          <a:p/>
+        </p:txBody>
       </p:sp>
       <p:sp>
         <p:nvSpPr>
@@ -5409,6 +5481,10 @@
             <a:prstDash val="solid"/>
           </a:ln>
         </p:spPr>
+        <p:txBody>
+          <a:bodyPr/>
+          <a:p/>
+        </p:txBody>
       </p:sp>
       <p:sp>
         <p:nvSpPr>
@@ -5446,7 +5522,7 @@
                 <a:ea typeface="Yu Gothic" pitchFamily="34" charset="-122"/>
                 <a:cs typeface="Yu Gothic" pitchFamily="34" charset="-120"/>
               </a:rPr>
-              <a:t>明日から1週間、その業務は必ずこの箱の中でやる。新しい会話を開かない。</a:t>
+              <a:t>今日作った頼み方を、今週どこかで1回、実際の仕事に使う。</a:t>
             </a:r>
             <a:endParaRPr lang="en-US" sz="1900" dirty="0"/>
           </a:p>
@@ -5527,7 +5603,7 @@
                 <a:ea typeface="Yu Gothic" pitchFamily="34" charset="-122"/>
                 <a:cs typeface="Yu Gothic" pitchFamily="34" charset="-120"/>
               </a:rPr>
-              <a:t>箱の中で作業する習慣がつくと、資料も履歴も自動でたまります。逆にここで新しい会話を開く癖が残ると、第5回で作る専用AIも使われずに終わります。1週間だけ、意識してみてください。</a:t>
+              <a:t>一度使うと、保存した頼み方が「手元にある道具」に変わります。使わないまま1週間たつと、どこに保存したかも忘れ、第5回で作る専用AIも使われずに終わります。1回だけ、試してみてください。</a:t>
             </a:r>
             <a:endParaRPr lang="en-US" sz="1350" dirty="0"/>
           </a:p>
@@ -6273,6 +6349,10 @@
             <a:prstDash val="solid"/>
           </a:ln>
         </p:spPr>
+        <p:txBody>
+          <a:bodyPr/>
+          <a:p/>
+        </p:txBody>
       </p:sp>
       <p:sp>
         <p:nvSpPr>
@@ -6340,6 +6420,10 @@
             <a:prstDash val="solid"/>
           </a:ln>
         </p:spPr>
+        <p:txBody>
+          <a:bodyPr/>
+          <a:p/>
+        </p:txBody>
       </p:sp>
       <p:sp>
         <p:nvSpPr>
@@ -6569,7 +6653,7 @@
                 <a:ea typeface="Yu Gothic" pitchFamily="34" charset="-122"/>
                 <a:cs typeface="Yu Gothic" pitchFamily="34" charset="-120"/>
               </a:rPr>
-              <a:t>一緒に手を動かす</a:t>
+              <a:t>画面で順にお見せする</a:t>
             </a:r>
             <a:endParaRPr lang="en-US" sz="1100" dirty="0"/>
           </a:p>
@@ -8020,6 +8104,10 @@
             <a:prstDash val="solid"/>
           </a:ln>
         </p:spPr>
+        <p:txBody>
+          <a:bodyPr/>
+          <a:p/>
+        </p:txBody>
       </p:sp>
       <p:sp>
         <p:nvSpPr>
@@ -8045,6 +8133,10 @@
             <a:prstDash val="solid"/>
           </a:ln>
         </p:spPr>
+        <p:txBody>
+          <a:bodyPr/>
+          <a:p/>
+        </p:txBody>
       </p:sp>
       <p:sp>
         <p:nvSpPr>
@@ -8541,7 +8633,7 @@
                 <a:ea typeface="Yu Gothic" pitchFamily="34" charset="-122"/>
                 <a:cs typeface="Yu Gothic" pitchFamily="34" charset="-120"/>
               </a:rPr>
-              <a:t>この5行を一度書けば、次からは前提の数字だけ差し替えて使えます。今日つくるのは、こういうものを5本です。</a:t>
+              <a:t>この5行を一度書けば、次からは前提の数字だけ差し替えて使えます。今日は、こういうものを1本つくって保存します。</a:t>
             </a:r>
             <a:endParaRPr lang="en-US" sz="1250" dirty="0"/>
           </a:p>
@@ -10073,6 +10165,10 @@
             <a:prstDash val="solid"/>
           </a:ln>
         </p:spPr>
+        <p:txBody>
+          <a:bodyPr/>
+          <a:p/>
+        </p:txBody>
       </p:sp>
       <p:sp>
         <p:nvSpPr>
@@ -10179,6 +10275,10 @@
             <a:prstDash val="solid"/>
           </a:ln>
         </p:spPr>
+        <p:txBody>
+          <a:bodyPr/>
+          <a:p/>
+        </p:txBody>
       </p:sp>
       <p:sp>
         <p:nvSpPr>
@@ -10285,6 +10385,10 @@
             <a:prstDash val="solid"/>
           </a:ln>
         </p:spPr>
+        <p:txBody>
+          <a:bodyPr/>
+          <a:p/>
+        </p:txBody>
       </p:sp>
       <p:sp>
         <p:nvSpPr>
@@ -10361,7 +10465,7 @@
                 <a:ea typeface="Yu Gothic" pitchFamily="34" charset="-122"/>
                 <a:cs typeface="Yu Gothic" pitchFamily="34" charset="-120"/>
               </a:rPr>
-              <a:t>無料プランでプロジェクト機能が使えない</a:t>
+              <a:t>無料プランで朝のまとめの時刻を指定できない</a:t>
             </a:r>
             <a:endParaRPr lang="en-US" sz="1350" dirty="0"/>
           </a:p>
@@ -10391,6 +10495,10 @@
             <a:prstDash val="solid"/>
           </a:ln>
         </p:spPr>
+        <p:txBody>
+          <a:bodyPr/>
+          <a:p/>
+        </p:txBody>
       </p:sp>
       <p:sp>
         <p:nvSpPr>
@@ -10467,7 +10575,7 @@
                 <a:ea typeface="Yu Gothic" pitchFamily="34" charset="-122"/>
                 <a:cs typeface="Yu Gothic" pitchFamily="34" charset="-120"/>
               </a:rPr>
-              <a:t>指示文の先頭に貼る「前提ブロック」で代替します。有料化を勧めるのは第11回。ここで勧めると売り込みに見えます</a:t>
+              <a:t>Free・Goは「朝」など大まかな時間帯で予約できます。有料化を勧めるのは第11回。ここで勧めると売り込みに見えます</a:t>
             </a:r>
             <a:endParaRPr lang="en-US" sz="1250" dirty="0"/>
           </a:p>
@@ -10497,6 +10605,10 @@
             <a:prstDash val="solid"/>
           </a:ln>
         </p:spPr>
+        <p:txBody>
+          <a:bodyPr/>
+          <a:p/>
+        </p:txBody>
       </p:sp>
       <p:sp>
         <p:nvSpPr>
@@ -10603,6 +10715,10 @@
             <a:prstDash val="solid"/>
           </a:ln>
         </p:spPr>
+        <p:txBody>
+          <a:bodyPr/>
+          <a:p/>
+        </p:txBody>
       </p:sp>
       <p:sp>
         <p:nvSpPr>
@@ -10679,7 +10795,7 @@
                 <a:ea typeface="Yu Gothic" pitchFamily="34" charset="-122"/>
                 <a:cs typeface="Yu Gothic" pitchFamily="34" charset="-120"/>
               </a:rPr>
-              <a:t>面倒で構いません。5本だけ作れば終わりです。毎回書くものではないことを、その場で実演して見せます</a:t>
+              <a:t>面倒で構いません。一度書いて保存すれば終わりです。毎回書くものではないことを、その場で実演して見せます</a:t>
             </a:r>
             <a:endParaRPr lang="en-US" sz="1250" dirty="0"/>
           </a:p>
@@ -10897,6 +11013,10 @@
             <a:prstDash val="solid"/>
           </a:ln>
         </p:spPr>
+        <p:txBody>
+          <a:bodyPr/>
+          <a:p/>
+        </p:txBody>
       </p:sp>
       <p:sp>
         <p:nvSpPr>
@@ -10922,6 +11042,10 @@
             <a:prstDash val="solid"/>
           </a:ln>
         </p:spPr>
+        <p:txBody>
+          <a:bodyPr/>
+          <a:p/>
+        </p:txBody>
       </p:sp>
       <p:sp>
         <p:nvSpPr>
@@ -10998,7 +11122,7 @@
                 <a:ea typeface="Yu Gothic" pitchFamily="34" charset="-122"/>
                 <a:cs typeface="Yu Gothic" pitchFamily="34" charset="-120"/>
               </a:rPr>
-              <a:t>毎回は書きません。5本作れば、あとは前提の数字を差し替えるだけです。今日その5本を作ります。</a:t>
+              <a:t>毎回は書きません。一度保存すれば、あとは前提の数字を差し替えるだけです。今日その1本目を作ります。</a:t>
             </a:r>
             <a:endParaRPr lang="en-US" sz="1250" dirty="0"/>
           </a:p>
@@ -11028,6 +11152,10 @@
             <a:prstDash val="solid"/>
           </a:ln>
         </p:spPr>
+        <p:txBody>
+          <a:bodyPr/>
+          <a:p/>
+        </p:txBody>
       </p:sp>
       <p:sp>
         <p:nvSpPr>
@@ -11053,6 +11181,10 @@
             <a:prstDash val="solid"/>
           </a:ln>
         </p:spPr>
+        <p:txBody>
+          <a:bodyPr/>
+          <a:p/>
+        </p:txBody>
       </p:sp>
       <p:sp>
         <p:nvSpPr>
@@ -11159,6 +11291,10 @@
             <a:prstDash val="solid"/>
           </a:ln>
         </p:spPr>
+        <p:txBody>
+          <a:bodyPr/>
+          <a:p/>
+        </p:txBody>
       </p:sp>
       <p:sp>
         <p:nvSpPr>
@@ -11184,6 +11320,10 @@
             <a:prstDash val="solid"/>
           </a:ln>
         </p:spPr>
+        <p:txBody>
+          <a:bodyPr/>
+          <a:p/>
+        </p:txBody>
       </p:sp>
       <p:sp>
         <p:nvSpPr>

--- a/slides/pptx/第02回_今のChatGPTの使い方を作り直す.pptx
+++ b/slides/pptx/第02回_今のChatGPTの使い方を作り直す.pptx
@@ -692,7 +692,7 @@
           <a:p>
             <a:r>
               <a:rPr lang="en-US" dirty="0"/>
-              <a:t>時間が足りなければ朝のまとめの予約を次回に回す。カスタム指示と頼み方1本の保存までは必ず見せる。朝のまとめはプロジェクトの外で作る（中で作ると資料を読めない）。</a:t>
+              <a:t>Webページの③〜⑤をこの順で講師が操作して見せる。議事録の頼み方1本の保存までは必ず見せる。朝のまとめは設定できればでよく、時間が足りなければ次回に回す。朝のまとめはプロジェクトの外で作る（中で作ると資料を読めない）。Gmailは プラグインディレクトリ →「接続」でつなぐ。会社のGoogleアカウントで止まったら、その場は個人のGmailで見せる。「スケジュール済み」が出なければWeb版で操作する。カスタム指示は今日の6項目に入っていないので、時間が余ったときだけ見せる。</a:t>
             </a:r>
             <a:endParaRPr lang="en-US" dirty="0"/>
           </a:p>
@@ -1044,7 +1044,7 @@
           <a:p>
             <a:r>
               <a:rPr lang="en-US" dirty="0"/>
-              <a:t>宿題は1回だけでよいと伝える。使う場面を今日のうちに1つ決めてもらう。次回の冒頭で、使ったときの手応えを必ず聞く。</a:t>
+              <a:t>宿題は1回だけでよいと伝える。使う場面を今日のうちに1つ決めてもらう。毎朝のまとめを設定できた場合は、届いた内容に目を通し、足りない・多すぎると感じた点を次回教えてほしいと添える。次回の冒頭で、使ったときの手応えを必ず聞く。</a:t>
             </a:r>
             <a:endParaRPr lang="en-US" dirty="0"/>
           </a:p>
@@ -1220,7 +1220,7 @@
           <a:p>
             <a:r>
               <a:rPr lang="en-US" dirty="0"/>
-              <a:t>「新しいことを覚える回ではない」と最初に言う。すでに使えている人ほど、入門扱いされると身構える。作り直す、という言い方を通す。</a:t>
+              <a:t>「新しいことを覚える回ではない」と最初に言う。すでに使えている人ほど、入門扱いされると身構える。作り直す、という言い方を通す。最初の15分でWebページの①②を行う。①棚卸し：「これが無くなったら楽になる」を3つ聞き、月に取られている時間を講師が書き込む。②プラン確認：講師の操作で、プロフィールメニュー → 設定 → アカウントでプラン名を見せる。Free・Goなら、朝のまとめは1日1回・大まかな時間帯になり、Gmailの新着をきっかけに動かすのはPlus以上、とここで一言添える。</a:t>
             </a:r>
             <a:endParaRPr lang="en-US" dirty="0"/>
           </a:p>
@@ -1308,7 +1308,7 @@
           <a:p>
             <a:r>
               <a:rPr lang="en-US" dirty="0"/>
-              <a:t>5要素を上から説明しない。受講者が普段打っている雑な指示を1つ出してもらい、目の前で5要素に分解して見せる。「役割が抜けていますね」と指摘するだけで、この表の意味が一瞬で伝わる。</a:t>
+              <a:t>5要素を上から説明しない。議事録を頼むときにいつもどう書いているかを口頭で聞き、講師がそのまま打って、目の前で5要素に分解して見せる。「役割が抜けていますね」と指摘するだけで、この表の意味が一瞬で伝わる。</a:t>
             </a:r>
             <a:endParaRPr lang="en-US" dirty="0"/>
           </a:p>
@@ -1572,7 +1572,7 @@
           <a:p>
             <a:r>
               <a:rPr lang="en-US" dirty="0"/>
-              <a:t>改善版を見せたあと、受講者の実案件を題材に講師がもう1本書いて見せる。自分の案件だと翌週使われやすい。この1本を保存し、今日の宿題で使う頼み方にする。</a:t>
+              <a:t>議事録の頼み方を、いつもの一行と5要素入りで講師が画面で並べて比べる。決まったこと・宿題・期限の分け方は、ご本人の会議に合わせて聞き取り、講師が打ち込む。この1本を保存し、今日の宿題で使う頼み方にする。</a:t>
             </a:r>
             <a:endParaRPr lang="en-US" dirty="0"/>
           </a:p>
@@ -2381,7 +2381,7 @@
                 <a:ea typeface="Yu Gothic" pitchFamily="34" charset="-122"/>
                 <a:cs typeface="Yu Gothic" pitchFamily="34" charset="-120"/>
               </a:rPr>
-              <a:t>自社の頼み方1本／カスタム指示／毎朝のまとめ</a:t>
+              <a:t>棚卸し表／保存した頼み方1本／毎朝のまとめ</a:t>
             </a:r>
             <a:endParaRPr lang="en-US" sz="1600" dirty="0"/>
           </a:p>
@@ -3331,7 +3331,7 @@
                 <a:ea typeface="Yu Gothic" pitchFamily="34" charset="-122"/>
                 <a:cs typeface="Yu Gothic" pitchFamily="34" charset="-120"/>
               </a:rPr>
-              <a:t>ご自身の実案件を題材に、講師が画面で書いてお見せします</a:t>
+              <a:t>議事録を題材に、いつもの頼み方と並べて講師が画面で比べます</a:t>
             </a:r>
             <a:endParaRPr lang="en-US" sz="1150" dirty="0"/>
           </a:p>
@@ -3470,7 +3470,7 @@
                 <a:ea typeface="Yu Gothic" pitchFamily="34" charset="-122"/>
                 <a:cs typeface="Yu Gothic" pitchFamily="34" charset="-120"/>
               </a:rPr>
-              <a:t>前提を、設定に移す</a:t>
+              <a:t>できた1本を保存する</a:t>
             </a:r>
             <a:endParaRPr lang="en-US" sz="1450" dirty="0"/>
           </a:p>
@@ -3512,7 +3512,7 @@
                 <a:ea typeface="Yu Gothic" pitchFamily="34" charset="-122"/>
                 <a:cs typeface="Yu Gothic" pitchFamily="34" charset="-120"/>
               </a:rPr>
-              <a:t>毎回書いている会社の説明を、全部の会話に自動で効く場所に入れます</a:t>
+              <a:t>プロジェクトの「頼み方集」に貼り、次からはコピーして直すだけにします</a:t>
             </a:r>
             <a:endParaRPr lang="en-US" sz="1150" dirty="0"/>
           </a:p>
@@ -3651,7 +3651,7 @@
                 <a:ea typeface="Yu Gothic" pitchFamily="34" charset="-122"/>
                 <a:cs typeface="Yu Gothic" pitchFamily="34" charset="-120"/>
               </a:rPr>
-              <a:t>1本保存し、朝のまとめを予約</a:t>
+              <a:t>毎朝のまとめを1つ予約</a:t>
             </a:r>
             <a:endParaRPr lang="en-US" sz="1450" dirty="0"/>
           </a:p>
@@ -3693,7 +3693,7 @@
                 <a:ea typeface="Yu Gothic" pitchFamily="34" charset="-122"/>
                 <a:cs typeface="Yu Gothic" pitchFamily="34" charset="-120"/>
               </a:rPr>
-              <a:t>できた頼み方をプロジェクトに保存し、毎朝のまとめを予約します</a:t>
+              <a:t>設定できれば、Gmail・カレンダーをつなぎ、毎朝のまとめを予約します</a:t>
             </a:r>
             <a:endParaRPr lang="en-US" sz="1150" dirty="0"/>
           </a:p>
@@ -3920,7 +3920,7 @@
                 <a:ea typeface="Yu Gothic" pitchFamily="34" charset="-122"/>
                 <a:cs typeface="Yu Gothic" pitchFamily="34" charset="-120"/>
               </a:rPr>
-              <a:t>ここを決めないと、持ち帰っても使われません。紙に書きます。</a:t>
+              <a:t>ここを決めないと、持ち帰っても使われません。講師が書き留めます。</a:t>
             </a:r>
             <a:endParaRPr lang="en-US" sz="1250" dirty="0"/>
           </a:p>
@@ -4059,7 +4059,7 @@
                 <a:ea typeface="Yu Gothic" pitchFamily="34" charset="-122"/>
                 <a:cs typeface="Yu Gothic" pitchFamily="34" charset="-120"/>
               </a:rPr>
-              <a:t>ChatGPTのプロジェクトの中。次に開く場所が決まっていないと使われません</a:t>
+              <a:t>プロジェクト内の「頼み方集」。次に開く場所が決まっていないと使われません</a:t>
             </a:r>
             <a:endParaRPr lang="en-US" sz="1250" dirty="0"/>
           </a:p>
@@ -5153,7 +5153,7 @@
                 <a:ea typeface="Yu Gothic" pitchFamily="34" charset="-122"/>
                 <a:cs typeface="Yu Gothic" pitchFamily="34" charset="-120"/>
               </a:rPr>
-              <a:t>・社内で量の多い文書3種の実物</a:t>
+              <a:t>・社内で量の多い文書2種の実物</a:t>
             </a:r>
             <a:endParaRPr lang="en-US" sz="1250" dirty="0"/>
           </a:p>
@@ -5195,7 +5195,7 @@
                 <a:ea typeface="Yu Gothic" pitchFamily="34" charset="-122"/>
                 <a:cs typeface="Yu Gothic" pitchFamily="34" charset="-120"/>
               </a:rPr>
-              <a:t>・最初に渡す社員の方を1名決めておく</a:t>
+              <a:t>・今日決めた、最初に渡す社員の方1名</a:t>
             </a:r>
             <a:endParaRPr lang="en-US" sz="1250" dirty="0"/>
           </a:p>
@@ -6497,7 +6497,7 @@
                 <a:ea typeface="Yu Gothic" pitchFamily="34" charset="-122"/>
                 <a:cs typeface="Yu Gothic" pitchFamily="34" charset="-120"/>
               </a:rPr>
-              <a:t>前回の宿題を実物で</a:t>
+              <a:t>棚卸し・プラン確認</a:t>
             </a:r>
             <a:endParaRPr lang="en-US" sz="1100" dirty="0"/>
           </a:p>
@@ -8851,6 +8851,10 @@
             <a:prstDash val="solid"/>
           </a:ln>
         </p:spPr>
+        <p:txBody>
+          <a:bodyPr/>
+          <a:p/>
+        </p:txBody>
       </p:sp>
       <p:sp>
         <p:nvSpPr>
@@ -8927,7 +8931,7 @@
                 <a:ea typeface="Consolas" pitchFamily="34" charset="-122"/>
                 <a:cs typeface="Consolas" pitchFamily="34" charset="-120"/>
               </a:rPr>
-              <a:t>「見積書の送付メールを書いて」</a:t>
+              <a:t>「この会議メモを議事録にして」</a:t>
             </a:r>
             <a:endParaRPr lang="en-US" sz="1200" dirty="0"/>
           </a:p>
@@ -8957,6 +8961,10 @@
             <a:prstDash val="solid"/>
           </a:ln>
         </p:spPr>
+        <p:txBody>
+          <a:bodyPr/>
+          <a:p/>
+        </p:txBody>
       </p:sp>
       <p:sp>
         <p:nvSpPr>
@@ -9075,7 +9083,7 @@
                 <a:ea typeface="Yu Gothic" pitchFamily="34" charset="-122"/>
                 <a:cs typeface="Yu Gothic" pitchFamily="34" charset="-120"/>
               </a:rPr>
-              <a:t>・会社名も取引経緯も入っていない</a:t>
+              <a:t>・決まったこと・宿題・期限が分かれていない</a:t>
             </a:r>
             <a:endParaRPr lang="en-US" sz="1250" dirty="0"/>
           </a:p>
@@ -9189,6 +9197,10 @@
             <a:prstDash val="solid"/>
           </a:ln>
         </p:spPr>
+        <p:txBody>
+          <a:bodyPr/>
+          <a:p/>
+        </p:txBody>
       </p:sp>
       <p:sp>
         <p:nvSpPr>
@@ -9256,6 +9268,10 @@
             <a:prstDash val="solid"/>
           </a:ln>
         </p:spPr>
+        <p:txBody>
+          <a:bodyPr/>
+          <a:p/>
+        </p:txBody>
       </p:sp>
       <p:sp>
         <p:nvSpPr>
@@ -9508,6 +9524,10 @@
             <a:prstDash val="solid"/>
           </a:ln>
         </p:spPr>
+        <p:txBody>
+          <a:bodyPr/>
+          <a:p/>
+        </p:txBody>
       </p:sp>
       <p:sp>
         <p:nvSpPr>
@@ -9614,6 +9634,10 @@
             <a:prstDash val="solid"/>
           </a:ln>
         </p:spPr>
+        <p:txBody>
+          <a:bodyPr/>
+          <a:p/>
+        </p:txBody>
       </p:sp>
       <p:sp>
         <p:nvSpPr>
@@ -9690,7 +9714,7 @@
                 <a:ea typeface="Yu Gothic" pitchFamily="34" charset="-122"/>
                 <a:cs typeface="Yu Gothic" pitchFamily="34" charset="-120"/>
               </a:rPr>
-              <a:t>・そのまま送れる文面が出る</a:t>
+              <a:t>・そのまま配れる議事録が出る</a:t>
             </a:r>
             <a:endParaRPr lang="en-US" sz="1250" dirty="0"/>
           </a:p>
@@ -9732,7 +9756,7 @@
                 <a:ea typeface="Yu Gothic" pitchFamily="34" charset="-122"/>
                 <a:cs typeface="Yu Gothic" pitchFamily="34" charset="-120"/>
               </a:rPr>
-              <a:t>・直すのは固有名詞と金額だけ</a:t>
+              <a:t>・直すのは名前と日付だけ</a:t>
             </a:r>
             <a:endParaRPr lang="en-US" sz="1250" dirty="0"/>
           </a:p>
@@ -9846,6 +9870,10 @@
             <a:prstDash val="solid"/>
           </a:ln>
         </p:spPr>
+        <p:txBody>
+          <a:bodyPr/>
+          <a:p/>
+        </p:txBody>
       </p:sp>
       <p:sp>
         <p:nvSpPr>
@@ -9913,6 +9941,10 @@
             <a:prstDash val="solid"/>
           </a:ln>
         </p:spPr>
+        <p:txBody>
+          <a:bodyPr/>
+          <a:p/>
+        </p:txBody>
       </p:sp>
       <p:sp>
         <p:nvSpPr>

--- a/slides/pptx/第02回_今のChatGPTの使い方を作り直す.pptx
+++ b/slides/pptx/第02回_今のChatGPTの使い方を作り直す.pptx
@@ -692,7 +692,7 @@
           <a:p>
             <a:r>
               <a:rPr lang="en-US" dirty="0"/>
-              <a:t>Webページの③〜⑤をこの順で講師が操作して見せる。議事録の頼み方1本の保存までは必ず見せる。朝のまとめは設定できればでよく、時間が足りなければ次回に回す。朝のまとめはプロジェクトの外で作る（中で作ると資料を読めない）。Gmailは プラグインディレクトリ →「接続」でつなぐ。会社のGoogleアカウントで止まったら、その場は個人のGmailで見せる。「スケジュール済み」が出なければWeb版で操作する。カスタム指示は今日の6項目に入っていないので、時間が余ったときだけ見せる。</a:t>
+              <a:t>③の議事録比較はスライド6・7で済んでいるので、ここではその1本の保存（④）から入り、⑤へ進む。議事録の頼み方1本の保存までは必ず見せる。朝のまとめは設定できればでよく、時間が足りなければ次回に回す。朝のまとめはプロジェクトの外で作る（中で作ると資料を読めない）。Gmailは プラグインディレクトリ →「接続」でつなぐ。会社のGoogleアカウントで止まったら、その場は個人のGmailで見せる。「スケジュール済み」が出なければWeb版で操作する。カスタム指示は今日の6項目に入っていないので、時間が余ったときだけ見せる。</a:t>
             </a:r>
             <a:endParaRPr lang="en-US" dirty="0"/>
           </a:p>
@@ -868,7 +868,7 @@
           <a:p>
             <a:r>
               <a:rPr lang="en-US" dirty="0"/>
-              <a:t>事例の3行は、実際に紙に書いて渡すくらいでよい。受講者のカスタム指示がそれに近い形になっていれば、この回は成功。</a:t>
+              <a:t>事例の3行は、実際に紙に書いて渡すくらいでよい。カスタム指示は時間が余ったときだけ。この回の成功は、議事録の頼み方1本が保存され、今週使う場面が決まっていること。</a:t>
             </a:r>
             <a:endParaRPr lang="en-US" dirty="0"/>
           </a:p>
@@ -1396,7 +1396,7 @@
           <a:p>
             <a:r>
               <a:rPr lang="en-US" dirty="0"/>
-              <a:t>実物を見せる時間。読み上げず、制約の行だけ指差して「ここが効きます」と言う。600字以内、という数字が入っているかどうかで結果が変わることを、次のデモで実証する。</a:t>
+              <a:t>実物を見せる時間。読み上げず、制約の行だけ指差して「ここが効きます」と言う。数字の制約があるかないかで結果が変わることを、次の議事録のデモで見せる。</a:t>
             </a:r>
             <a:endParaRPr lang="en-US" dirty="0"/>
           </a:p>
@@ -2381,7 +2381,7 @@
                 <a:ea typeface="Yu Gothic" pitchFamily="34" charset="-122"/>
                 <a:cs typeface="Yu Gothic" pitchFamily="34" charset="-120"/>
               </a:rPr>
-              <a:t>棚卸し表／保存した頼み方1本／毎朝のまとめ</a:t>
+              <a:t>棚卸し表／保存した頼み方1本（設定できれば、毎朝のまとめも）</a:t>
             </a:r>
             <a:endParaRPr lang="en-US" sz="1600" dirty="0"/>
           </a:p>
@@ -4664,7 +4664,7 @@
                 <a:ea typeface="Yu Gothic" pitchFamily="34" charset="-122"/>
                 <a:cs typeface="Yu Gothic" pitchFamily="34" charset="-120"/>
               </a:rPr>
-              <a:t>よくある型</a:t>
+              <a:t>よくある型（時間が余ったら）</a:t>
             </a:r>
             <a:endParaRPr lang="en-US" sz="900" dirty="0"/>
           </a:p>
@@ -9756,7 +9756,7 @@
                 <a:ea typeface="Yu Gothic" pitchFamily="34" charset="-122"/>
                 <a:cs typeface="Yu Gothic" pitchFamily="34" charset="-120"/>
               </a:rPr>
-              <a:t>・直すのは名前と日付だけ</a:t>
+              <a:t>・手直しが大きく減る</a:t>
             </a:r>
             <a:endParaRPr lang="en-US" sz="1250" dirty="0"/>
           </a:p>
@@ -9840,7 +9840,7 @@
                 <a:ea typeface="Yu Gothic" pitchFamily="34" charset="-122"/>
                 <a:cs typeface="Yu Gothic" pitchFamily="34" charset="-120"/>
               </a:rPr>
-              <a:t>・3回目には、書く時間が10分の1になる</a:t>
+              <a:t>・保存した1本が、そのまま今週の宿題になる</a:t>
             </a:r>
             <a:endParaRPr lang="en-US" sz="1250" dirty="0"/>
           </a:p>
@@ -9911,7 +9911,7 @@
                 <a:ea typeface="Yu Gothic" pitchFamily="34" charset="-122"/>
                 <a:cs typeface="Yu Gothic" pitchFamily="34" charset="-120"/>
               </a:rPr>
-              <a:t>1本目は書くのに5分かかります。2本目からは1分です。5本作れば、日常の文書業務のほとんどが埋まります。</a:t>
+              <a:t>1本目は書くのに少し時間がかかります。2回目からは、コピーして直すだけです。</a:t>
             </a:r>
             <a:endParaRPr lang="en-US" sz="1250" dirty="0"/>
           </a:p>

--- a/slides/pptx/第02回_今のChatGPTの使い方を作り直す.pptx
+++ b/slides/pptx/第02回_今のChatGPTの使い方を作り直す.pptx
@@ -516,7 +516,7 @@
           <a:p>
             <a:r>
               <a:rPr lang="en-US" dirty="0"/>
-              <a:t>前回の宿題（指示文をもう一度使ったか）を確認してから表紙に入る。使っていなければ責めず、この場で画面でお見せする。使っていた場合は、そのときの手応えを必ず聞く。ここが今日の導入になる。</a:t>
+              <a:t>前回の宿題（指示文をもう一度使ったか）を確認してから表紙に入る（0-15分の枠内、2〜3分で切る）。使っていなければ責めず、画面での再現はスライド4の実演でまとめて見せる。使っていた場合は、そのときの手応えを必ず聞く。ここが今日の導入になる。</a:t>
             </a:r>
             <a:endParaRPr lang="en-US" dirty="0"/>
           </a:p>
@@ -692,7 +692,7 @@
           <a:p>
             <a:r>
               <a:rPr lang="en-US" dirty="0"/>
-              <a:t>③の議事録比較はスライド6・7で済んでいるので、ここではその1本の保存（④）から入り、⑤へ進む。議事録の頼み方1本の保存までは必ず見せる。朝のまとめは設定できればでよく、時間が足りなければ次回に回す。朝のまとめはプロジェクトの外で作る（中で作ると資料を読めない）。Gmailは プラグインディレクトリ →「接続」でつなぐ。会社のGoogleアカウントで止まったら、その場は個人のGmailで見せる。「スケジュール済み」が出なければWeb版で操作する。カスタム指示は今日の6項目に入っていないので、時間が余ったときだけ見せる。</a:t>
+              <a:t>35分からここ（スライドの1〜3＝ページの③〜⑤）。③議事録の頼み方を、いつもの一行と5要素入りで講師が画面で並べて比べる。決まったこと・宿題・期限の分け方はご本人の会議に合わせて聞き取り、講師が打ち込む。④その1本をプロジェクトの「頼み方集」に保存する。ここまでは必ず見せる。⑤朝のまとめは設定できればでよく、時間が足りなければ次回に回す。朝のまとめはプロジェクトの外で作る（中で作ると資料を読めない）。Gmailとカレンダーは プラグインディレクトリ →「接続」でつなぐ。会社のGoogleアカウントで止まったら、その場は個人のアカウントで見せる。予約はチャットで「毎朝、今日の予定と届いたメールをまとめて届けて」と頼んで作る。「スケジュール済み」に出なければWeb版で操作する。カスタム指示は今日の6項目に入っていないので、時間が余ったときだけ見せる。</a:t>
             </a:r>
             <a:endParaRPr lang="en-US" dirty="0"/>
           </a:p>
@@ -1572,7 +1572,7 @@
           <a:p>
             <a:r>
               <a:rPr lang="en-US" dirty="0"/>
-              <a:t>議事録の頼み方を、いつもの一行と5要素入りで講師が画面で並べて比べる。決まったこと・宿題・期限の分け方は、ご本人の会議に合わせて聞き取り、講師が打ち込む。この1本を保存し、今日の宿題で使う頼み方にする。</a:t>
+              <a:t>ここは予告にとどめ、打ち込みはしない。「5要素を入れるとこう変わる」と一言で示し、実際に並べて比べるのはスライド11（35分以降）で行う、と伝えて次へ進む。</a:t>
             </a:r>
             <a:endParaRPr lang="en-US" dirty="0"/>
           </a:p>

--- a/slides/pptx/第02回_今のChatGPTの使い方を作り直す.pptx
+++ b/slides/pptx/第02回_今のChatGPTの使い方を作り直す.pptx
@@ -10607,7 +10607,7 @@
                 <a:ea typeface="Yu Gothic" pitchFamily="34" charset="-122"/>
                 <a:cs typeface="Yu Gothic" pitchFamily="34" charset="-120"/>
               </a:rPr>
-              <a:t>Free・Goは「朝」など大まかな時間帯で予約できます。有料化を勧めるのは第11回。ここで勧めると売り込みに見えます</a:t>
+              <a:t>Free・Goは「朝」など大まかな時間帯で予約できます。時刻まで指定したい場合は、費用の話と一緒に第11回でご相談します</a:t>
             </a:r>
             <a:endParaRPr lang="en-US" sz="1250" dirty="0"/>
           </a:p>

--- a/slides/pptx/第02回_今のChatGPTの使い方を作り直す.pptx
+++ b/slides/pptx/第02回_今のChatGPTの使い方を作り直す.pptx
@@ -4525,7 +4525,7 @@
                 <a:ea typeface="Yu Gothic" pitchFamily="34" charset="-122"/>
                 <a:cs typeface="Yu Gothic" pitchFamily="34" charset="-120"/>
               </a:rPr>
-              <a:t>画面は講師が動かし、一手ずつ見せること</a:t>
+              <a:t>画面は講師が動かし、一手ずつお見せします</a:t>
             </a:r>
             <a:endParaRPr lang="en-US" sz="2600" dirty="0"/>
           </a:p>
@@ -4596,7 +4596,7 @@
                 <a:ea typeface="Yu Gothic" pitchFamily="34" charset="-122"/>
                 <a:cs typeface="Yu Gothic" pitchFamily="34" charset="-120"/>
               </a:rPr>
-              <a:t>基本は講師が画面を動かし、今どこを押しているかを一手ずつ声に出して見せます。受講者の方が「自分でも触りたい」と言ったときだけ、同じ画面を開いてもらいます。1操作ごとに画面の変化を確かめてから次へ進みます。</a:t>
+              <a:t>基本は講師が画面を動かし、今どこを押しているかを一手ずつ声に出してお見せします。ご自身でも触りたいときは、いつでもおっしゃってください。同じ画面を開いて一緒に進めます。1操作ごとに画面の変化を確かめてから次へ進みます。</a:t>
             </a:r>
             <a:endParaRPr lang="en-US" sz="1650" dirty="0"/>
           </a:p>

--- a/slides/pptx/第02回_今のChatGPTの使い方を作り直す.pptx
+++ b/slides/pptx/第02回_今のChatGPTの使い方を作り直す.pptx
@@ -2521,6 +2521,10 @@
             <a:prstDash val="solid"/>
           </a:ln>
         </p:spPr>
+        <p:txBody>
+          <a:bodyPr/>
+          <a:p/>
+        </p:txBody>
       </p:sp>
       <p:sp>
         <p:nvSpPr>
@@ -2585,6 +2589,10 @@
             <a:prstDash val="solid"/>
           </a:ln>
         </p:spPr>
+        <p:txBody>
+          <a:bodyPr/>
+          <a:p/>
+        </p:txBody>
       </p:sp>
       <p:sp>
         <p:nvSpPr>
@@ -2652,6 +2660,10 @@
             <a:prstDash val="solid"/>
           </a:ln>
         </p:spPr>
+        <p:txBody>
+          <a:bodyPr/>
+          <a:p/>
+        </p:txBody>
       </p:sp>
       <p:sp>
         <p:nvSpPr>
@@ -2716,6 +2728,10 @@
             <a:prstDash val="solid"/>
           </a:ln>
         </p:spPr>
+        <p:txBody>
+          <a:bodyPr/>
+          <a:p/>
+        </p:txBody>
       </p:sp>
       <p:sp>
         <p:nvSpPr>
@@ -2783,6 +2799,10 @@
             <a:prstDash val="solid"/>
           </a:ln>
         </p:spPr>
+        <p:txBody>
+          <a:bodyPr/>
+          <a:p/>
+        </p:txBody>
       </p:sp>
       <p:sp>
         <p:nvSpPr>
@@ -2847,6 +2867,10 @@
             <a:prstDash val="solid"/>
           </a:ln>
         </p:spPr>
+        <p:txBody>
+          <a:bodyPr/>
+          <a:p/>
+        </p:txBody>
       </p:sp>
       <p:sp>
         <p:nvSpPr>
@@ -2923,7 +2947,7 @@
                 <a:ea typeface="Yu Gothic" pitchFamily="34" charset="-122"/>
                 <a:cs typeface="Yu Gothic" pitchFamily="34" charset="-120"/>
               </a:rPr>
-              <a:t>配布した用語辞典にも同じものが載っています。覚える必要はありません。</a:t>
+              <a:t>同じ言葉は「受講のご案内」のページにも載っています。覚える必要はありません。</a:t>
             </a:r>
             <a:endParaRPr lang="en-US" sz="1150" dirty="0"/>
           </a:p>
@@ -10387,7 +10411,7 @@
                 <a:ea typeface="Yu Gothic" pitchFamily="34" charset="-122"/>
                 <a:cs typeface="Yu Gothic" pitchFamily="34" charset="-120"/>
               </a:rPr>
-              <a:t>「会社案内を読んだ人が知っていること」を書けばよい、と言い換えます。会社概要をそのまま貼っても構いません</a:t>
+              <a:t>「会社案内を読んだ人が知っていること」を書けば十分です。会社概要をそのまま貼っても構いません</a:t>
             </a:r>
             <a:endParaRPr lang="en-US" sz="1250" dirty="0"/>
           </a:p>
@@ -10717,7 +10741,7 @@
                 <a:ea typeface="Yu Gothic" pitchFamily="34" charset="-122"/>
                 <a:cs typeface="Yu Gothic" pitchFamily="34" charset="-120"/>
               </a:rPr>
-              <a:t>5要素が面倒だと言われる</a:t>
+              <a:t>5要素が面倒に感じる</a:t>
             </a:r>
             <a:endParaRPr lang="en-US" sz="1350" dirty="0"/>
           </a:p>
@@ -10827,7 +10851,7 @@
                 <a:ea typeface="Yu Gothic" pitchFamily="34" charset="-122"/>
                 <a:cs typeface="Yu Gothic" pitchFamily="34" charset="-120"/>
               </a:rPr>
-              <a:t>面倒で構いません。一度書いて保存すれば終わりです。毎回書くものではないことを、その場で実演して見せます</a:t>
+              <a:t>面倒で構いません。一度書いて保存すれば終わりです。毎回書くものではないことを、その場で実演してお見せします</a:t>
             </a:r>
             <a:endParaRPr lang="en-US" sz="1250" dirty="0"/>
           </a:p>
